--- a/research-wiki/survey/presentations/flirds-seminar-intro/flirds-seminar-intro.pptx
+++ b/research-wiki/survey/presentations/flirds-seminar-intro/flirds-seminar-intro.pptx
@@ -13,7 +13,12 @@
     <p:sldId id="263" r:id="rId7"/>
     <p:sldId id="264" r:id="rId8"/>
     <p:sldId id="265" r:id="rId9"/>
+    <p:sldId id="272" r:id="rId18"/>
     <p:sldId id="266" r:id="rId10"/>
+    <p:sldId id="273" r:id="rId19"/>
+    <p:sldId id="274" r:id="rId20"/>
+    <p:sldId id="275" r:id="rId21"/>
+    <p:sldId id="276" r:id="rId22"/>
     <p:sldId id="267" r:id="rId11"/>
     <p:sldId id="268" r:id="rId12"/>
     <p:sldId id="271" r:id="rId13"/>
@@ -4139,7 +4144,7 @@
                 <a:latin typeface="NanumGothic"/>
                 <a:ea typeface="NanumGothic"/>
               </a:rPr>
-              <a:t>12</a:t>
+              <a:t>15</a:t>
             </a:r>
           </a:p>
         </p:txBody>
@@ -5266,7 +5271,7 @@
                 <a:latin typeface="NanumGothic"/>
                 <a:ea typeface="NanumGothic"/>
               </a:rPr>
-              <a:t>13</a:t>
+              <a:t>16</a:t>
             </a:r>
           </a:p>
         </p:txBody>
@@ -5452,7 +5457,5331 @@
                 <a:latin typeface="NanumGothic"/>
                 <a:ea typeface="NanumGothic"/>
               </a:rPr>
-              <a:t>16</a:t>
+              <a:t>17</a:t>
+            </a:r>
+          </a:p>
+        </p:txBody>
+      </p:sp>
+    </p:spTree>
+  </p:cSld>
+  <p:clrMapOvr>
+    <a:masterClrMapping/>
+  </p:clrMapOvr>
+</p:sld>
+</file>
+
+<file path=ppt/slides/slide13.xml><?xml version="1.0" encoding="utf-8"?>
+<p:sld xmlns:a="http://schemas.openxmlformats.org/drawingml/2006/main" xmlns:p="http://schemas.openxmlformats.org/presentationml/2006/main" xmlns:r="http://schemas.openxmlformats.org/officeDocument/2006/relationships">
+  <p:cSld>
+    <p:spTree>
+      <p:nvGrpSpPr>
+        <p:cNvPr id="1" name=""/>
+        <p:cNvGrpSpPr/>
+        <p:nvPr/>
+      </p:nvGrpSpPr>
+      <p:grpSpPr/>
+      <p:sp>
+        <p:nvSpPr>
+          <p:cNvPr id="2" name="TextBox 1"/>
+          <p:cNvSpPr txBox="1"/>
+          <p:nvPr/>
+        </p:nvSpPr>
+        <p:spPr>
+          <a:xfrm>
+            <a:off x="411480" y="292608"/>
+            <a:ext cx="11338560" cy="731520"/>
+          </a:xfrm>
+          <a:prstGeom prst="rect">
+            <a:avLst/>
+          </a:prstGeom>
+          <a:noFill/>
+        </p:spPr>
+        <p:txBody>
+          <a:bodyPr wrap="square" lIns="25400" rIns="25400" tIns="12700" bIns="12700" anchor="t">
+            <a:spAutoFit/>
+          </a:bodyPr>
+          <a:lstStyle/>
+          <a:p>
+            <a:pPr algn="l">
+              <a:lnSpc>
+                <a:spcPct val="100000"/>
+              </a:lnSpc>
+            </a:pPr>
+            <a:r>
+              <a:rPr sz="2600" b="1" i="0">
+                <a:solidFill>
+                  <a:srgbClr val="1F2A37"/>
+                </a:solidFill>
+                <a:latin typeface="NanumGothic"/>
+                <a:ea typeface="NanumGothic"/>
+              </a:rPr>
+              <a:t>Fidelity (CNN)</a:t>
+            </a:r>
+          </a:p>
+        </p:txBody>
+      </p:sp>
+      <p:sp>
+        <p:nvSpPr>
+          <p:cNvPr id="3" name="TextBox 2"/>
+          <p:cNvSpPr txBox="1"/>
+          <p:nvPr/>
+        </p:nvSpPr>
+        <p:spPr>
+          <a:xfrm>
+            <a:off x="411480" y="1078992"/>
+            <a:ext cx="11338560" cy="457200"/>
+          </a:xfrm>
+          <a:prstGeom prst="rect">
+            <a:avLst/>
+          </a:prstGeom>
+          <a:noFill/>
+        </p:spPr>
+        <p:txBody>
+          <a:bodyPr wrap="square" lIns="25400" rIns="25400" tIns="12700" bIns="12700" anchor="t">
+            <a:spAutoFit/>
+          </a:bodyPr>
+          <a:lstStyle/>
+          <a:p>
+            <a:pPr algn="l">
+              <a:lnSpc>
+                <a:spcPct val="105000"/>
+              </a:lnSpc>
+            </a:pPr>
+            <a:r>
+              <a:rPr sz="1200" b="0" i="0">
+                <a:solidFill>
+                  <a:srgbClr val="3C4654"/>
+                </a:solidFill>
+                <a:latin typeface="NanumGothic"/>
+                <a:ea typeface="NanumGothic"/>
+              </a:rPr>
+              <a:t>정답 = in-run 정확 오라클 (b) 대비만(재학습 오라클 제외) · cross-silo N=10 · 10 시나리오 × 3 seed pool · 값 클수록 충실(↑).</a:t>
+            </a:r>
+          </a:p>
+        </p:txBody>
+      </p:sp>
+      <p:graphicFrame>
+        <p:nvGraphicFramePr>
+          <p:cNvPr id="4" name="Table 3"/>
+          <p:cNvGraphicFramePr>
+            <a:graphicFrameLocks noGrp="1"/>
+          </p:cNvGraphicFramePr>
+          <p:nvPr/>
+        </p:nvGraphicFramePr>
+        <p:xfrm>
+          <a:off x="411480" y="1737360"/>
+          <a:ext cx="11384279" cy="3319272"/>
+        </p:xfrm>
+        <a:graphic>
+          <a:graphicData uri="http://schemas.openxmlformats.org/drawingml/2006/table">
+            <a:tbl>
+              <a:tblPr>
+                <a:tableStyleId>{5C22544A-7EE6-4342-B048-85BDC9FD1C3A}</a:tableStyleId>
+              </a:tblPr>
+              <a:tblGrid>
+                <a:gridCol w="2474843"/>
+                <a:gridCol w="2969812"/>
+                <a:gridCol w="2969812"/>
+                <a:gridCol w="2969812"/>
+              </a:tblGrid>
+              <a:tr h="301752">
+                <a:tc>
+                  <a:txBody>
+                    <a:bodyPr/>
+                    <a:lstStyle/>
+                    <a:p>
+                      <a:pPr algn="l"/>
+                      <a:r>
+                        <a:rPr sz="1100" b="1" i="0">
+                          <a:solidFill>
+                            <a:srgbClr val="FFFFFF"/>
+                          </a:solidFill>
+                          <a:latin typeface="NanumGothic"/>
+                          <a:ea typeface="NanumGothic"/>
+                        </a:rPr>
+                        <a:t>method</a:t>
+                      </a:r>
+                    </a:p>
+                  </a:txBody>
+                  <a:tcPr marL="38100" marR="38100" marT="12700" marB="12700" anchor="ctr">
+                    <a:solidFill>
+                      <a:srgbClr val="33475B"/>
+                    </a:solidFill>
+                  </a:tcPr>
+                </a:tc>
+                <a:tc>
+                  <a:txBody>
+                    <a:bodyPr/>
+                    <a:lstStyle/>
+                    <a:p>
+                      <a:pPr algn="ctr"/>
+                      <a:r>
+                        <a:rPr sz="1100" b="1" i="0">
+                          <a:solidFill>
+                            <a:srgbClr val="FFFFFF"/>
+                          </a:solidFill>
+                          <a:latin typeface="NanumGothic"/>
+                          <a:ea typeface="NanumGothic"/>
+                        </a:rPr>
+                        <a:t>유형</a:t>
+                      </a:r>
+                    </a:p>
+                  </a:txBody>
+                  <a:tcPr marL="38100" marR="38100" marT="12700" marB="12700" anchor="ctr">
+                    <a:solidFill>
+                      <a:srgbClr val="33475B"/>
+                    </a:solidFill>
+                  </a:tcPr>
+                </a:tc>
+                <a:tc>
+                  <a:txBody>
+                    <a:bodyPr/>
+                    <a:lstStyle/>
+                    <a:p>
+                      <a:pPr algn="ctr"/>
+                      <a:r>
+                        <a:rPr sz="1100" b="1" i="0">
+                          <a:solidFill>
+                            <a:srgbClr val="FFFFFF"/>
+                          </a:solidFill>
+                          <a:latin typeface="NanumGothic"/>
+                          <a:ea typeface="NanumGothic"/>
+                        </a:rPr>
+                        <a:t>vs (b) Spearman ↑</a:t>
+                      </a:r>
+                    </a:p>
+                  </a:txBody>
+                  <a:tcPr marL="38100" marR="38100" marT="12700" marB="12700" anchor="ctr">
+                    <a:solidFill>
+                      <a:srgbClr val="33475B"/>
+                    </a:solidFill>
+                  </a:tcPr>
+                </a:tc>
+                <a:tc>
+                  <a:txBody>
+                    <a:bodyPr/>
+                    <a:lstStyle/>
+                    <a:p>
+                      <a:pPr algn="ctr"/>
+                      <a:r>
+                        <a:rPr sz="1100" b="1" i="0">
+                          <a:solidFill>
+                            <a:srgbClr val="FFFFFF"/>
+                          </a:solidFill>
+                          <a:latin typeface="NanumGothic"/>
+                          <a:ea typeface="NanumGothic"/>
+                        </a:rPr>
+                        <a:t>vs (b) Pearson ↑</a:t>
+                      </a:r>
+                    </a:p>
+                  </a:txBody>
+                  <a:tcPr marL="38100" marR="38100" marT="12700" marB="12700" anchor="ctr">
+                    <a:solidFill>
+                      <a:srgbClr val="33475B"/>
+                    </a:solidFill>
+                  </a:tcPr>
+                </a:tc>
+              </a:tr>
+              <a:tr h="301752">
+                <a:tc>
+                  <a:txBody>
+                    <a:bodyPr/>
+                    <a:lstStyle/>
+                    <a:p>
+                      <a:pPr algn="l"/>
+                      <a:r>
+                        <a:rPr sz="1100" b="0" i="0">
+                          <a:solidFill>
+                            <a:srgbClr val="222222"/>
+                          </a:solidFill>
+                          <a:latin typeface="NanumGothic"/>
+                          <a:ea typeface="NanumGothic"/>
+                        </a:rPr>
+                        <a:t>Flirds</a:t>
+                      </a:r>
+                    </a:p>
+                  </a:txBody>
+                  <a:tcPr marL="38100" marR="38100" marT="0" marB="0" anchor="ctr">
+                    <a:solidFill>
+                      <a:srgbClr val="FFFFFF"/>
+                    </a:solidFill>
+                  </a:tcPr>
+                </a:tc>
+                <a:tc>
+                  <a:txBody>
+                    <a:bodyPr/>
+                    <a:lstStyle/>
+                    <a:p>
+                      <a:pPr algn="ctr"/>
+                      <a:r>
+                        <a:rPr sz="1100" b="0" i="0">
+                          <a:solidFill>
+                            <a:srgbClr val="222222"/>
+                          </a:solidFill>
+                          <a:latin typeface="NanumGothic"/>
+                          <a:ea typeface="NanumGothic"/>
+                        </a:rPr>
+                        <a:t>ours</a:t>
+                      </a:r>
+                    </a:p>
+                  </a:txBody>
+                  <a:tcPr marL="38100" marR="38100" marT="0" marB="0" anchor="ctr">
+                    <a:solidFill>
+                      <a:srgbClr val="FFFFFF"/>
+                    </a:solidFill>
+                  </a:tcPr>
+                </a:tc>
+                <a:tc>
+                  <a:txBody>
+                    <a:bodyPr/>
+                    <a:lstStyle/>
+                    <a:p>
+                      <a:pPr algn="ctr"/>
+                      <a:r>
+                        <a:rPr sz="1100" b="1" i="0">
+                          <a:solidFill>
+                            <a:srgbClr val="222222"/>
+                          </a:solidFill>
+                          <a:latin typeface="NanumGothic"/>
+                          <a:ea typeface="NanumGothic"/>
+                        </a:rPr>
+                        <a:t>0.919</a:t>
+                      </a:r>
+                    </a:p>
+                  </a:txBody>
+                  <a:tcPr marL="38100" marR="38100" marT="0" marB="0" anchor="ctr">
+                    <a:solidFill>
+                      <a:srgbClr val="FFFFFF"/>
+                    </a:solidFill>
+                  </a:tcPr>
+                </a:tc>
+                <a:tc>
+                  <a:txBody>
+                    <a:bodyPr/>
+                    <a:lstStyle/>
+                    <a:p>
+                      <a:pPr algn="ctr"/>
+                      <a:r>
+                        <a:rPr sz="1100" b="1" i="0">
+                          <a:solidFill>
+                            <a:srgbClr val="222222"/>
+                          </a:solidFill>
+                          <a:latin typeface="NanumGothic"/>
+                          <a:ea typeface="NanumGothic"/>
+                        </a:rPr>
+                        <a:t>0.934</a:t>
+                      </a:r>
+                    </a:p>
+                  </a:txBody>
+                  <a:tcPr marL="38100" marR="38100" marT="0" marB="0" anchor="ctr">
+                    <a:solidFill>
+                      <a:srgbClr val="FFFFFF"/>
+                    </a:solidFill>
+                  </a:tcPr>
+                </a:tc>
+              </a:tr>
+              <a:tr h="301752">
+                <a:tc>
+                  <a:txBody>
+                    <a:bodyPr/>
+                    <a:lstStyle/>
+                    <a:p>
+                      <a:pPr algn="l"/>
+                      <a:r>
+                        <a:rPr sz="1100" b="0" i="0">
+                          <a:solidFill>
+                            <a:srgbClr val="222222"/>
+                          </a:solidFill>
+                          <a:latin typeface="NanumGothic"/>
+                          <a:ea typeface="NanumGothic"/>
+                        </a:rPr>
+                        <a:t>Flirds-1st</a:t>
+                      </a:r>
+                    </a:p>
+                  </a:txBody>
+                  <a:tcPr marL="38100" marR="38100" marT="0" marB="0" anchor="ctr">
+                    <a:solidFill>
+                      <a:srgbClr val="F2F4F7"/>
+                    </a:solidFill>
+                  </a:tcPr>
+                </a:tc>
+                <a:tc>
+                  <a:txBody>
+                    <a:bodyPr/>
+                    <a:lstStyle/>
+                    <a:p>
+                      <a:pPr algn="ctr"/>
+                      <a:r>
+                        <a:rPr sz="1100" b="0" i="0">
+                          <a:solidFill>
+                            <a:srgbClr val="222222"/>
+                          </a:solidFill>
+                          <a:latin typeface="NanumGothic"/>
+                          <a:ea typeface="NanumGothic"/>
+                        </a:rPr>
+                        <a:t>ours · 1차</a:t>
+                      </a:r>
+                    </a:p>
+                  </a:txBody>
+                  <a:tcPr marL="38100" marR="38100" marT="0" marB="0" anchor="ctr">
+                    <a:solidFill>
+                      <a:srgbClr val="F2F4F7"/>
+                    </a:solidFill>
+                  </a:tcPr>
+                </a:tc>
+                <a:tc>
+                  <a:txBody>
+                    <a:bodyPr/>
+                    <a:lstStyle/>
+                    <a:p>
+                      <a:pPr algn="ctr"/>
+                      <a:r>
+                        <a:rPr sz="1100" b="0" i="0">
+                          <a:solidFill>
+                            <a:srgbClr val="222222"/>
+                          </a:solidFill>
+                          <a:latin typeface="NanumGothic"/>
+                          <a:ea typeface="NanumGothic"/>
+                        </a:rPr>
+                        <a:t>0.832</a:t>
+                      </a:r>
+                    </a:p>
+                  </a:txBody>
+                  <a:tcPr marL="38100" marR="38100" marT="0" marB="0" anchor="ctr">
+                    <a:solidFill>
+                      <a:srgbClr val="F2F4F7"/>
+                    </a:solidFill>
+                  </a:tcPr>
+                </a:tc>
+                <a:tc>
+                  <a:txBody>
+                    <a:bodyPr/>
+                    <a:lstStyle/>
+                    <a:p>
+                      <a:pPr algn="ctr"/>
+                      <a:r>
+                        <a:rPr sz="1100" b="0" i="0">
+                          <a:solidFill>
+                            <a:srgbClr val="222222"/>
+                          </a:solidFill>
+                          <a:latin typeface="NanumGothic"/>
+                          <a:ea typeface="NanumGothic"/>
+                        </a:rPr>
+                        <a:t>0.853</a:t>
+                      </a:r>
+                    </a:p>
+                  </a:txBody>
+                  <a:tcPr marL="38100" marR="38100" marT="0" marB="0" anchor="ctr">
+                    <a:solidFill>
+                      <a:srgbClr val="F2F4F7"/>
+                    </a:solidFill>
+                  </a:tcPr>
+                </a:tc>
+              </a:tr>
+              <a:tr h="301752">
+                <a:tc>
+                  <a:txBody>
+                    <a:bodyPr/>
+                    <a:lstStyle/>
+                    <a:p>
+                      <a:pPr algn="l"/>
+                      <a:r>
+                        <a:rPr sz="1100" b="0" i="0">
+                          <a:solidFill>
+                            <a:srgbClr val="222222"/>
+                          </a:solidFill>
+                          <a:latin typeface="NanumGothic"/>
+                          <a:ea typeface="NanumGothic"/>
+                        </a:rPr>
+                        <a:t>loss-heur</a:t>
+                      </a:r>
+                    </a:p>
+                  </a:txBody>
+                  <a:tcPr marL="38100" marR="38100" marT="0" marB="0" anchor="ctr">
+                    <a:solidFill>
+                      <a:srgbClr val="FFFFFF"/>
+                    </a:solidFill>
+                  </a:tcPr>
+                </a:tc>
+                <a:tc>
+                  <a:txBody>
+                    <a:bodyPr/>
+                    <a:lstStyle/>
+                    <a:p>
+                      <a:pPr algn="ctr"/>
+                      <a:r>
+                        <a:rPr sz="1100" b="0" i="0">
+                          <a:solidFill>
+                            <a:srgbClr val="222222"/>
+                          </a:solidFill>
+                          <a:latin typeface="NanumGothic"/>
+                          <a:ea typeface="NanumGothic"/>
+                        </a:rPr>
+                        <a:t>heuristic</a:t>
+                      </a:r>
+                    </a:p>
+                  </a:txBody>
+                  <a:tcPr marL="38100" marR="38100" marT="0" marB="0" anchor="ctr">
+                    <a:solidFill>
+                      <a:srgbClr val="FFFFFF"/>
+                    </a:solidFill>
+                  </a:tcPr>
+                </a:tc>
+                <a:tc>
+                  <a:txBody>
+                    <a:bodyPr/>
+                    <a:lstStyle/>
+                    <a:p>
+                      <a:pPr algn="ctr"/>
+                      <a:r>
+                        <a:rPr sz="1100" b="0" i="0">
+                          <a:solidFill>
+                            <a:srgbClr val="222222"/>
+                          </a:solidFill>
+                          <a:latin typeface="NanumGothic"/>
+                          <a:ea typeface="NanumGothic"/>
+                        </a:rPr>
+                        <a:t>0.860</a:t>
+                      </a:r>
+                    </a:p>
+                  </a:txBody>
+                  <a:tcPr marL="38100" marR="38100" marT="0" marB="0" anchor="ctr">
+                    <a:solidFill>
+                      <a:srgbClr val="FFFFFF"/>
+                    </a:solidFill>
+                  </a:tcPr>
+                </a:tc>
+                <a:tc>
+                  <a:txBody>
+                    <a:bodyPr/>
+                    <a:lstStyle/>
+                    <a:p>
+                      <a:pPr algn="ctr"/>
+                      <a:r>
+                        <a:rPr sz="1100" b="0" i="0">
+                          <a:solidFill>
+                            <a:srgbClr val="222222"/>
+                          </a:solidFill>
+                          <a:latin typeface="NanumGothic"/>
+                          <a:ea typeface="NanumGothic"/>
+                        </a:rPr>
+                        <a:t>0.885</a:t>
+                      </a:r>
+                    </a:p>
+                  </a:txBody>
+                  <a:tcPr marL="38100" marR="38100" marT="0" marB="0" anchor="ctr">
+                    <a:solidFill>
+                      <a:srgbClr val="FFFFFF"/>
+                    </a:solidFill>
+                  </a:tcPr>
+                </a:tc>
+              </a:tr>
+              <a:tr h="301752">
+                <a:tc>
+                  <a:txBody>
+                    <a:bodyPr/>
+                    <a:lstStyle/>
+                    <a:p>
+                      <a:pPr algn="l"/>
+                      <a:r>
+                        <a:rPr sz="1100" b="0" i="0">
+                          <a:solidFill>
+                            <a:srgbClr val="222222"/>
+                          </a:solidFill>
+                          <a:latin typeface="NanumGothic"/>
+                          <a:ea typeface="NanumGothic"/>
+                        </a:rPr>
+                        <a:t>Banzhaf</a:t>
+                      </a:r>
+                    </a:p>
+                  </a:txBody>
+                  <a:tcPr marL="38100" marR="38100" marT="0" marB="0" anchor="ctr">
+                    <a:solidFill>
+                      <a:srgbClr val="F2F4F7"/>
+                    </a:solidFill>
+                  </a:tcPr>
+                </a:tc>
+                <a:tc>
+                  <a:txBody>
+                    <a:bodyPr/>
+                    <a:lstStyle/>
+                    <a:p>
+                      <a:pPr algn="ctr"/>
+                      <a:r>
+                        <a:rPr sz="1100" b="0" i="0">
+                          <a:solidFill>
+                            <a:srgbClr val="222222"/>
+                          </a:solidFill>
+                          <a:latin typeface="NanumGothic"/>
+                          <a:ea typeface="NanumGothic"/>
+                        </a:rPr>
+                        <a:t>exact semivalue</a:t>
+                      </a:r>
+                    </a:p>
+                  </a:txBody>
+                  <a:tcPr marL="38100" marR="38100" marT="0" marB="0" anchor="ctr">
+                    <a:solidFill>
+                      <a:srgbClr val="F2F4F7"/>
+                    </a:solidFill>
+                  </a:tcPr>
+                </a:tc>
+                <a:tc>
+                  <a:txBody>
+                    <a:bodyPr/>
+                    <a:lstStyle/>
+                    <a:p>
+                      <a:pPr algn="ctr"/>
+                      <a:r>
+                        <a:rPr sz="1100" b="1" i="0">
+                          <a:solidFill>
+                            <a:srgbClr val="222222"/>
+                          </a:solidFill>
+                          <a:latin typeface="NanumGothic"/>
+                          <a:ea typeface="NanumGothic"/>
+                        </a:rPr>
+                        <a:t>0.989</a:t>
+                      </a:r>
+                    </a:p>
+                  </a:txBody>
+                  <a:tcPr marL="38100" marR="38100" marT="0" marB="0" anchor="ctr">
+                    <a:solidFill>
+                      <a:srgbClr val="F2F4F7"/>
+                    </a:solidFill>
+                  </a:tcPr>
+                </a:tc>
+                <a:tc>
+                  <a:txBody>
+                    <a:bodyPr/>
+                    <a:lstStyle/>
+                    <a:p>
+                      <a:pPr algn="ctr"/>
+                      <a:r>
+                        <a:rPr sz="1100" b="1" i="0">
+                          <a:solidFill>
+                            <a:srgbClr val="222222"/>
+                          </a:solidFill>
+                          <a:latin typeface="NanumGothic"/>
+                          <a:ea typeface="NanumGothic"/>
+                        </a:rPr>
+                        <a:t>0.998</a:t>
+                      </a:r>
+                    </a:p>
+                  </a:txBody>
+                  <a:tcPr marL="38100" marR="38100" marT="0" marB="0" anchor="ctr">
+                    <a:solidFill>
+                      <a:srgbClr val="F2F4F7"/>
+                    </a:solidFill>
+                  </a:tcPr>
+                </a:tc>
+              </a:tr>
+              <a:tr h="301752">
+                <a:tc>
+                  <a:txBody>
+                    <a:bodyPr/>
+                    <a:lstStyle/>
+                    <a:p>
+                      <a:pPr algn="l"/>
+                      <a:r>
+                        <a:rPr sz="1100" b="0" i="0">
+                          <a:solidFill>
+                            <a:srgbClr val="222222"/>
+                          </a:solidFill>
+                          <a:latin typeface="NanumGothic"/>
+                          <a:ea typeface="NanumGothic"/>
+                        </a:rPr>
+                        <a:t>GTG</a:t>
+                      </a:r>
+                    </a:p>
+                  </a:txBody>
+                  <a:tcPr marL="38100" marR="38100" marT="0" marB="0" anchor="ctr">
+                    <a:solidFill>
+                      <a:srgbClr val="FFFFFF"/>
+                    </a:solidFill>
+                  </a:tcPr>
+                </a:tc>
+                <a:tc>
+                  <a:txBody>
+                    <a:bodyPr/>
+                    <a:lstStyle/>
+                    <a:p>
+                      <a:pPr algn="ctr"/>
+                      <a:r>
+                        <a:rPr sz="1100" b="0" i="0">
+                          <a:solidFill>
+                            <a:srgbClr val="222222"/>
+                          </a:solidFill>
+                          <a:latin typeface="NanumGothic"/>
+                          <a:ea typeface="NanumGothic"/>
+                        </a:rPr>
+                        <a:t>guided MC</a:t>
+                      </a:r>
+                    </a:p>
+                  </a:txBody>
+                  <a:tcPr marL="38100" marR="38100" marT="0" marB="0" anchor="ctr">
+                    <a:solidFill>
+                      <a:srgbClr val="FFFFFF"/>
+                    </a:solidFill>
+                  </a:tcPr>
+                </a:tc>
+                <a:tc>
+                  <a:txBody>
+                    <a:bodyPr/>
+                    <a:lstStyle/>
+                    <a:p>
+                      <a:pPr algn="ctr"/>
+                      <a:r>
+                        <a:rPr sz="1100" b="0" i="0">
+                          <a:solidFill>
+                            <a:srgbClr val="222222"/>
+                          </a:solidFill>
+                          <a:latin typeface="NanumGothic"/>
+                          <a:ea typeface="NanumGothic"/>
+                        </a:rPr>
+                        <a:t>0.569</a:t>
+                      </a:r>
+                    </a:p>
+                  </a:txBody>
+                  <a:tcPr marL="38100" marR="38100" marT="0" marB="0" anchor="ctr">
+                    <a:solidFill>
+                      <a:srgbClr val="FFFFFF"/>
+                    </a:solidFill>
+                  </a:tcPr>
+                </a:tc>
+                <a:tc>
+                  <a:txBody>
+                    <a:bodyPr/>
+                    <a:lstStyle/>
+                    <a:p>
+                      <a:pPr algn="ctr"/>
+                      <a:r>
+                        <a:rPr sz="1100" b="0" i="0">
+                          <a:solidFill>
+                            <a:srgbClr val="222222"/>
+                          </a:solidFill>
+                          <a:latin typeface="NanumGothic"/>
+                          <a:ea typeface="NanumGothic"/>
+                        </a:rPr>
+                        <a:t>0.612</a:t>
+                      </a:r>
+                    </a:p>
+                  </a:txBody>
+                  <a:tcPr marL="38100" marR="38100" marT="0" marB="0" anchor="ctr">
+                    <a:solidFill>
+                      <a:srgbClr val="FFFFFF"/>
+                    </a:solidFill>
+                  </a:tcPr>
+                </a:tc>
+              </a:tr>
+              <a:tr h="301752">
+                <a:tc>
+                  <a:txBody>
+                    <a:bodyPr/>
+                    <a:lstStyle/>
+                    <a:p>
+                      <a:pPr algn="l"/>
+                      <a:r>
+                        <a:rPr sz="1100" b="0" i="0">
+                          <a:solidFill>
+                            <a:srgbClr val="222222"/>
+                          </a:solidFill>
+                          <a:latin typeface="NanumGothic"/>
+                          <a:ea typeface="NanumGothic"/>
+                        </a:rPr>
+                        <a:t>FedSV</a:t>
+                      </a:r>
+                    </a:p>
+                  </a:txBody>
+                  <a:tcPr marL="38100" marR="38100" marT="0" marB="0" anchor="ctr">
+                    <a:solidFill>
+                      <a:srgbClr val="F2F4F7"/>
+                    </a:solidFill>
+                  </a:tcPr>
+                </a:tc>
+                <a:tc>
+                  <a:txBody>
+                    <a:bodyPr/>
+                    <a:lstStyle/>
+                    <a:p>
+                      <a:pPr algn="ctr"/>
+                      <a:r>
+                        <a:rPr sz="1100" b="0" i="0">
+                          <a:solidFill>
+                            <a:srgbClr val="222222"/>
+                          </a:solidFill>
+                          <a:latin typeface="NanumGothic"/>
+                          <a:ea typeface="NanumGothic"/>
+                        </a:rPr>
+                        <a:t>perm MC</a:t>
+                      </a:r>
+                    </a:p>
+                  </a:txBody>
+                  <a:tcPr marL="38100" marR="38100" marT="0" marB="0" anchor="ctr">
+                    <a:solidFill>
+                      <a:srgbClr val="F2F4F7"/>
+                    </a:solidFill>
+                  </a:tcPr>
+                </a:tc>
+                <a:tc>
+                  <a:txBody>
+                    <a:bodyPr/>
+                    <a:lstStyle/>
+                    <a:p>
+                      <a:pPr algn="ctr"/>
+                      <a:r>
+                        <a:rPr sz="1100" b="0" i="0">
+                          <a:solidFill>
+                            <a:srgbClr val="222222"/>
+                          </a:solidFill>
+                          <a:latin typeface="NanumGothic"/>
+                          <a:ea typeface="NanumGothic"/>
+                        </a:rPr>
+                        <a:t>0.401</a:t>
+                      </a:r>
+                    </a:p>
+                  </a:txBody>
+                  <a:tcPr marL="38100" marR="38100" marT="0" marB="0" anchor="ctr">
+                    <a:solidFill>
+                      <a:srgbClr val="F2F4F7"/>
+                    </a:solidFill>
+                  </a:tcPr>
+                </a:tc>
+                <a:tc>
+                  <a:txBody>
+                    <a:bodyPr/>
+                    <a:lstStyle/>
+                    <a:p>
+                      <a:pPr algn="ctr"/>
+                      <a:r>
+                        <a:rPr sz="1100" b="0" i="0">
+                          <a:solidFill>
+                            <a:srgbClr val="222222"/>
+                          </a:solidFill>
+                          <a:latin typeface="NanumGothic"/>
+                          <a:ea typeface="NanumGothic"/>
+                        </a:rPr>
+                        <a:t>0.410</a:t>
+                      </a:r>
+                    </a:p>
+                  </a:txBody>
+                  <a:tcPr marL="38100" marR="38100" marT="0" marB="0" anchor="ctr">
+                    <a:solidFill>
+                      <a:srgbClr val="F2F4F7"/>
+                    </a:solidFill>
+                  </a:tcPr>
+                </a:tc>
+              </a:tr>
+              <a:tr h="301752">
+                <a:tc>
+                  <a:txBody>
+                    <a:bodyPr/>
+                    <a:lstStyle/>
+                    <a:p>
+                      <a:pPr algn="l"/>
+                      <a:r>
+                        <a:rPr sz="1100" b="0" i="0">
+                          <a:solidFill>
+                            <a:srgbClr val="222222"/>
+                          </a:solidFill>
+                          <a:latin typeface="NanumGothic"/>
+                          <a:ea typeface="NanumGothic"/>
+                        </a:rPr>
+                        <a:t>ComFedSV</a:t>
+                      </a:r>
+                    </a:p>
+                  </a:txBody>
+                  <a:tcPr marL="38100" marR="38100" marT="0" marB="0" anchor="ctr">
+                    <a:solidFill>
+                      <a:srgbClr val="FFFFFF"/>
+                    </a:solidFill>
+                  </a:tcPr>
+                </a:tc>
+                <a:tc>
+                  <a:txBody>
+                    <a:bodyPr/>
+                    <a:lstStyle/>
+                    <a:p>
+                      <a:pPr algn="ctr"/>
+                      <a:r>
+                        <a:rPr sz="1100" b="0" i="0">
+                          <a:solidFill>
+                            <a:srgbClr val="222222"/>
+                          </a:solidFill>
+                          <a:latin typeface="NanumGothic"/>
+                          <a:ea typeface="NanumGothic"/>
+                        </a:rPr>
+                        <a:t>cross-device</a:t>
+                      </a:r>
+                    </a:p>
+                  </a:txBody>
+                  <a:tcPr marL="38100" marR="38100" marT="0" marB="0" anchor="ctr">
+                    <a:solidFill>
+                      <a:srgbClr val="FFFFFF"/>
+                    </a:solidFill>
+                  </a:tcPr>
+                </a:tc>
+                <a:tc>
+                  <a:txBody>
+                    <a:bodyPr/>
+                    <a:lstStyle/>
+                    <a:p>
+                      <a:pPr algn="ctr"/>
+                      <a:r>
+                        <a:rPr sz="1100" b="0" i="0">
+                          <a:solidFill>
+                            <a:srgbClr val="222222"/>
+                          </a:solidFill>
+                          <a:latin typeface="NanumGothic"/>
+                          <a:ea typeface="NanumGothic"/>
+                        </a:rPr>
+                        <a:t>0.348</a:t>
+                      </a:r>
+                    </a:p>
+                  </a:txBody>
+                  <a:tcPr marL="38100" marR="38100" marT="0" marB="0" anchor="ctr">
+                    <a:solidFill>
+                      <a:srgbClr val="FFFFFF"/>
+                    </a:solidFill>
+                  </a:tcPr>
+                </a:tc>
+                <a:tc>
+                  <a:txBody>
+                    <a:bodyPr/>
+                    <a:lstStyle/>
+                    <a:p>
+                      <a:pPr algn="ctr"/>
+                      <a:r>
+                        <a:rPr sz="1100" b="0" i="0">
+                          <a:solidFill>
+                            <a:srgbClr val="222222"/>
+                          </a:solidFill>
+                          <a:latin typeface="NanumGothic"/>
+                          <a:ea typeface="NanumGothic"/>
+                        </a:rPr>
+                        <a:t>0.328</a:t>
+                      </a:r>
+                    </a:p>
+                  </a:txBody>
+                  <a:tcPr marL="38100" marR="38100" marT="0" marB="0" anchor="ctr">
+                    <a:solidFill>
+                      <a:srgbClr val="FFFFFF"/>
+                    </a:solidFill>
+                  </a:tcPr>
+                </a:tc>
+              </a:tr>
+              <a:tr h="301752">
+                <a:tc>
+                  <a:txBody>
+                    <a:bodyPr/>
+                    <a:lstStyle/>
+                    <a:p>
+                      <a:pPr algn="l"/>
+                      <a:r>
+                        <a:rPr sz="1100" b="0" i="0">
+                          <a:solidFill>
+                            <a:srgbClr val="222222"/>
+                          </a:solidFill>
+                          <a:latin typeface="NanumGothic"/>
+                          <a:ea typeface="NanumGothic"/>
+                        </a:rPr>
+                        <a:t>ShapleyFL</a:t>
+                      </a:r>
+                    </a:p>
+                  </a:txBody>
+                  <a:tcPr marL="38100" marR="38100" marT="0" marB="0" anchor="ctr">
+                    <a:solidFill>
+                      <a:srgbClr val="F2F4F7"/>
+                    </a:solidFill>
+                  </a:tcPr>
+                </a:tc>
+                <a:tc>
+                  <a:txBody>
+                    <a:bodyPr/>
+                    <a:lstStyle/>
+                    <a:p>
+                      <a:pPr algn="ctr"/>
+                      <a:r>
+                        <a:rPr sz="1100" b="0" i="0">
+                          <a:solidFill>
+                            <a:srgbClr val="222222"/>
+                          </a:solidFill>
+                          <a:latin typeface="NanumGothic"/>
+                          <a:ea typeface="NanumGothic"/>
+                        </a:rPr>
+                        <a:t>surrogate</a:t>
+                      </a:r>
+                    </a:p>
+                  </a:txBody>
+                  <a:tcPr marL="38100" marR="38100" marT="0" marB="0" anchor="ctr">
+                    <a:solidFill>
+                      <a:srgbClr val="F2F4F7"/>
+                    </a:solidFill>
+                  </a:tcPr>
+                </a:tc>
+                <a:tc>
+                  <a:txBody>
+                    <a:bodyPr/>
+                    <a:lstStyle/>
+                    <a:p>
+                      <a:pPr algn="ctr"/>
+                      <a:r>
+                        <a:rPr sz="1100" b="0" i="0">
+                          <a:solidFill>
+                            <a:srgbClr val="222222"/>
+                          </a:solidFill>
+                          <a:latin typeface="NanumGothic"/>
+                          <a:ea typeface="NanumGothic"/>
+                        </a:rPr>
+                        <a:t>0.391</a:t>
+                      </a:r>
+                    </a:p>
+                  </a:txBody>
+                  <a:tcPr marL="38100" marR="38100" marT="0" marB="0" anchor="ctr">
+                    <a:solidFill>
+                      <a:srgbClr val="F2F4F7"/>
+                    </a:solidFill>
+                  </a:tcPr>
+                </a:tc>
+                <a:tc>
+                  <a:txBody>
+                    <a:bodyPr/>
+                    <a:lstStyle/>
+                    <a:p>
+                      <a:pPr algn="ctr"/>
+                      <a:r>
+                        <a:rPr sz="1100" b="0" i="0">
+                          <a:solidFill>
+                            <a:srgbClr val="222222"/>
+                          </a:solidFill>
+                          <a:latin typeface="NanumGothic"/>
+                          <a:ea typeface="NanumGothic"/>
+                        </a:rPr>
+                        <a:t>0.392</a:t>
+                      </a:r>
+                    </a:p>
+                  </a:txBody>
+                  <a:tcPr marL="38100" marR="38100" marT="0" marB="0" anchor="ctr">
+                    <a:solidFill>
+                      <a:srgbClr val="F2F4F7"/>
+                    </a:solidFill>
+                  </a:tcPr>
+                </a:tc>
+              </a:tr>
+              <a:tr h="301752">
+                <a:tc>
+                  <a:txBody>
+                    <a:bodyPr/>
+                    <a:lstStyle/>
+                    <a:p>
+                      <a:pPr algn="l"/>
+                      <a:r>
+                        <a:rPr sz="1100" b="0" i="0">
+                          <a:solidFill>
+                            <a:srgbClr val="222222"/>
+                          </a:solidFill>
+                          <a:latin typeface="NanumGothic"/>
+                          <a:ea typeface="NanumGothic"/>
+                        </a:rPr>
+                        <a:t>FedIF</a:t>
+                      </a:r>
+                    </a:p>
+                  </a:txBody>
+                  <a:tcPr marL="38100" marR="38100" marT="0" marB="0" anchor="ctr">
+                    <a:solidFill>
+                      <a:srgbClr val="FFFFFF"/>
+                    </a:solidFill>
+                  </a:tcPr>
+                </a:tc>
+                <a:tc>
+                  <a:txBody>
+                    <a:bodyPr/>
+                    <a:lstStyle/>
+                    <a:p>
+                      <a:pPr algn="ctr"/>
+                      <a:r>
+                        <a:rPr sz="1100" b="0" i="0">
+                          <a:solidFill>
+                            <a:srgbClr val="222222"/>
+                          </a:solidFill>
+                          <a:latin typeface="NanumGothic"/>
+                          <a:ea typeface="NanumGothic"/>
+                        </a:rPr>
+                        <a:t>influence</a:t>
+                      </a:r>
+                    </a:p>
+                  </a:txBody>
+                  <a:tcPr marL="38100" marR="38100" marT="0" marB="0" anchor="ctr">
+                    <a:solidFill>
+                      <a:srgbClr val="FFFFFF"/>
+                    </a:solidFill>
+                  </a:tcPr>
+                </a:tc>
+                <a:tc>
+                  <a:txBody>
+                    <a:bodyPr/>
+                    <a:lstStyle/>
+                    <a:p>
+                      <a:pPr algn="ctr"/>
+                      <a:r>
+                        <a:rPr sz="1100" b="0" i="0">
+                          <a:solidFill>
+                            <a:srgbClr val="222222"/>
+                          </a:solidFill>
+                          <a:latin typeface="NanumGothic"/>
+                          <a:ea typeface="NanumGothic"/>
+                        </a:rPr>
+                        <a:t>0.491</a:t>
+                      </a:r>
+                    </a:p>
+                  </a:txBody>
+                  <a:tcPr marL="38100" marR="38100" marT="0" marB="0" anchor="ctr">
+                    <a:solidFill>
+                      <a:srgbClr val="FFFFFF"/>
+                    </a:solidFill>
+                  </a:tcPr>
+                </a:tc>
+                <a:tc>
+                  <a:txBody>
+                    <a:bodyPr/>
+                    <a:lstStyle/>
+                    <a:p>
+                      <a:pPr algn="ctr"/>
+                      <a:r>
+                        <a:rPr sz="1100" b="0" i="0">
+                          <a:solidFill>
+                            <a:srgbClr val="222222"/>
+                          </a:solidFill>
+                          <a:latin typeface="NanumGothic"/>
+                          <a:ea typeface="NanumGothic"/>
+                        </a:rPr>
+                        <a:t>0.506</a:t>
+                      </a:r>
+                    </a:p>
+                  </a:txBody>
+                  <a:tcPr marL="38100" marR="38100" marT="0" marB="0" anchor="ctr">
+                    <a:solidFill>
+                      <a:srgbClr val="FFFFFF"/>
+                    </a:solidFill>
+                  </a:tcPr>
+                </a:tc>
+              </a:tr>
+              <a:tr h="301752">
+                <a:tc>
+                  <a:txBody>
+                    <a:bodyPr/>
+                    <a:lstStyle/>
+                    <a:p>
+                      <a:pPr algn="l"/>
+                      <a:r>
+                        <a:rPr sz="1100" b="0" i="0">
+                          <a:solidFill>
+                            <a:srgbClr val="222222"/>
+                          </a:solidFill>
+                          <a:latin typeface="NanumGothic"/>
+                          <a:ea typeface="NanumGothic"/>
+                        </a:rPr>
+                        <a:t>Ripple</a:t>
+                      </a:r>
+                    </a:p>
+                  </a:txBody>
+                  <a:tcPr marL="38100" marR="38100" marT="0" marB="0" anchor="ctr">
+                    <a:solidFill>
+                      <a:srgbClr val="F2F4F7"/>
+                    </a:solidFill>
+                  </a:tcPr>
+                </a:tc>
+                <a:tc>
+                  <a:txBody>
+                    <a:bodyPr/>
+                    <a:lstStyle/>
+                    <a:p>
+                      <a:pPr algn="ctr"/>
+                      <a:r>
+                        <a:rPr sz="1100" b="0" i="0">
+                          <a:solidFill>
+                            <a:srgbClr val="222222"/>
+                          </a:solidFill>
+                          <a:latin typeface="NanumGothic"/>
+                          <a:ea typeface="NanumGothic"/>
+                        </a:rPr>
+                        <a:t>sample-level</a:t>
+                      </a:r>
+                    </a:p>
+                  </a:txBody>
+                  <a:tcPr marL="38100" marR="38100" marT="0" marB="0" anchor="ctr">
+                    <a:solidFill>
+                      <a:srgbClr val="F2F4F7"/>
+                    </a:solidFill>
+                  </a:tcPr>
+                </a:tc>
+                <a:tc>
+                  <a:txBody>
+                    <a:bodyPr/>
+                    <a:lstStyle/>
+                    <a:p>
+                      <a:pPr algn="ctr"/>
+                      <a:r>
+                        <a:rPr sz="1100" b="0" i="0">
+                          <a:solidFill>
+                            <a:srgbClr val="222222"/>
+                          </a:solidFill>
+                          <a:latin typeface="NanumGothic"/>
+                          <a:ea typeface="NanumGothic"/>
+                        </a:rPr>
+                        <a:t>0.373</a:t>
+                      </a:r>
+                    </a:p>
+                  </a:txBody>
+                  <a:tcPr marL="38100" marR="38100" marT="0" marB="0" anchor="ctr">
+                    <a:solidFill>
+                      <a:srgbClr val="F2F4F7"/>
+                    </a:solidFill>
+                  </a:tcPr>
+                </a:tc>
+                <a:tc>
+                  <a:txBody>
+                    <a:bodyPr/>
+                    <a:lstStyle/>
+                    <a:p>
+                      <a:pPr algn="ctr"/>
+                      <a:r>
+                        <a:rPr sz="1100" b="0" i="0">
+                          <a:solidFill>
+                            <a:srgbClr val="222222"/>
+                          </a:solidFill>
+                          <a:latin typeface="NanumGothic"/>
+                          <a:ea typeface="NanumGothic"/>
+                        </a:rPr>
+                        <a:t>0.404</a:t>
+                      </a:r>
+                    </a:p>
+                  </a:txBody>
+                  <a:tcPr marL="38100" marR="38100" marT="0" marB="0" anchor="ctr">
+                    <a:solidFill>
+                      <a:srgbClr val="F2F4F7"/>
+                    </a:solidFill>
+                  </a:tcPr>
+                </a:tc>
+              </a:tr>
+            </a:tbl>
+          </a:graphicData>
+        </a:graphic>
+      </p:graphicFrame>
+      <p:sp>
+        <p:nvSpPr>
+          <p:cNvPr id="5" name="TextBox 4"/>
+          <p:cNvSpPr txBox="1"/>
+          <p:nvPr/>
+        </p:nvSpPr>
+        <p:spPr>
+          <a:xfrm>
+            <a:off x="502920" y="5440680"/>
+            <a:ext cx="11155680" cy="640080"/>
+          </a:xfrm>
+          <a:prstGeom prst="rect">
+            <a:avLst/>
+          </a:prstGeom>
+          <a:noFill/>
+        </p:spPr>
+        <p:txBody>
+          <a:bodyPr wrap="square" lIns="25400" rIns="25400" tIns="12700" bIns="12700" anchor="t">
+            <a:spAutoFit/>
+          </a:bodyPr>
+          <a:lstStyle/>
+          <a:p>
+            <a:pPr algn="l">
+              <a:lnSpc>
+                <a:spcPct val="120000"/>
+              </a:lnSpc>
+            </a:pPr>
+            <a:r>
+              <a:rPr sz="1350" b="1" i="0">
+                <a:solidFill>
+                  <a:srgbClr val="1F2A37"/>
+                </a:solidFill>
+                <a:latin typeface="NanumGothic"/>
+                <a:ea typeface="NanumGothic"/>
+              </a:rPr>
+              <a:t>Banzhaf(exact semivalue) 최고 · Flirds 근접 2위. LLM과 달리 CNN은 clean에서도 큰 spread.</a:t>
+            </a:r>
+          </a:p>
+          <a:p>
+            <a:pPr algn="l">
+              <a:lnSpc>
+                <a:spcPct val="120000"/>
+              </a:lnSpc>
+            </a:pPr>
+            <a:r>
+              <a:rPr sz="1200" b="0" i="0">
+                <a:solidFill>
+                  <a:srgbClr val="7A7A7A"/>
+                </a:solidFill>
+                <a:latin typeface="NanumGothic"/>
+                <a:ea typeface="NanumGothic"/>
+              </a:rPr>
+              <a:t>pool은 신호 없는 iid 칸 포함이라 보수적(iid 제외 시 Flirds 0.928).</a:t>
+            </a:r>
+          </a:p>
+        </p:txBody>
+      </p:sp>
+      <p:sp>
+        <p:nvSpPr>
+          <p:cNvPr id="6" name="TextBox 5"/>
+          <p:cNvSpPr txBox="1"/>
+          <p:nvPr/>
+        </p:nvSpPr>
+        <p:spPr>
+          <a:xfrm>
+            <a:off x="11551920" y="6510528"/>
+            <a:ext cx="457200" cy="274320"/>
+          </a:xfrm>
+          <a:prstGeom prst="rect">
+            <a:avLst/>
+          </a:prstGeom>
+          <a:noFill/>
+        </p:spPr>
+        <p:txBody>
+          <a:bodyPr wrap="none">
+            <a:spAutoFit/>
+          </a:bodyPr>
+          <a:lstStyle/>
+          <a:p>
+            <a:pPr algn="r"/>
+            <a:r>
+              <a:rPr sz="900" b="0" i="0">
+                <a:solidFill>
+                  <a:srgbClr val="7A7A7A"/>
+                </a:solidFill>
+                <a:latin typeface="NanumGothic"/>
+                <a:ea typeface="NanumGothic"/>
+              </a:rPr>
+              <a:t>9</a:t>
+            </a:r>
+          </a:p>
+        </p:txBody>
+      </p:sp>
+    </p:spTree>
+  </p:cSld>
+  <p:clrMapOvr>
+    <a:masterClrMapping/>
+  </p:clrMapOvr>
+</p:sld>
+</file>
+
+<file path=ppt/slides/slide14.xml><?xml version="1.0" encoding="utf-8"?>
+<p:sld xmlns:a="http://schemas.openxmlformats.org/drawingml/2006/main" xmlns:p="http://schemas.openxmlformats.org/presentationml/2006/main" xmlns:r="http://schemas.openxmlformats.org/officeDocument/2006/relationships">
+  <p:cSld>
+    <p:spTree>
+      <p:nvGrpSpPr>
+        <p:cNvPr id="1" name=""/>
+        <p:cNvGrpSpPr/>
+        <p:nvPr/>
+      </p:nvGrpSpPr>
+      <p:grpSpPr/>
+      <p:sp>
+        <p:nvSpPr>
+          <p:cNvPr id="2" name="TextBox 1"/>
+          <p:cNvSpPr txBox="1"/>
+          <p:nvPr/>
+        </p:nvSpPr>
+        <p:spPr>
+          <a:xfrm>
+            <a:off x="411480" y="292608"/>
+            <a:ext cx="11338560" cy="731520"/>
+          </a:xfrm>
+          <a:prstGeom prst="rect">
+            <a:avLst/>
+          </a:prstGeom>
+          <a:noFill/>
+        </p:spPr>
+        <p:txBody>
+          <a:bodyPr wrap="square" lIns="25400" rIns="25400" tIns="12700" bIns="12700" anchor="t">
+            <a:spAutoFit/>
+          </a:bodyPr>
+          <a:lstStyle/>
+          <a:p>
+            <a:pPr algn="l">
+              <a:lnSpc>
+                <a:spcPct val="100000"/>
+              </a:lnSpc>
+            </a:pPr>
+            <a:r>
+              <a:rPr sz="2600" b="1" i="0">
+                <a:solidFill>
+                  <a:srgbClr val="1F2A37"/>
+                </a:solidFill>
+                <a:latin typeface="NanumGothic"/>
+                <a:ea typeface="NanumGothic"/>
+              </a:rPr>
+              <a:t>Intervention: Contribution-weighted Training</a:t>
+            </a:r>
+          </a:p>
+        </p:txBody>
+      </p:sp>
+      <p:sp>
+        <p:nvSpPr>
+          <p:cNvPr id="3" name="TextBox 2"/>
+          <p:cNvSpPr txBox="1"/>
+          <p:nvPr/>
+        </p:nvSpPr>
+        <p:spPr>
+          <a:xfrm>
+            <a:off x="411480" y="1078992"/>
+            <a:ext cx="11338560" cy="457200"/>
+          </a:xfrm>
+          <a:prstGeom prst="rect">
+            <a:avLst/>
+          </a:prstGeom>
+          <a:noFill/>
+        </p:spPr>
+        <p:txBody>
+          <a:bodyPr wrap="square" lIns="25400" rIns="25400" tIns="12700" bIns="12700" anchor="t">
+            <a:spAutoFit/>
+          </a:bodyPr>
+          <a:lstStyle/>
+          <a:p>
+            <a:pPr algn="l">
+              <a:lnSpc>
+                <a:spcPct val="105000"/>
+              </a:lnSpc>
+            </a:pPr>
+            <a:r>
+              <a:rPr sz="1200" b="0" i="0">
+                <a:solidFill>
+                  <a:srgbClr val="3C4654"/>
+                </a:solidFill>
+                <a:latin typeface="NanumGothic"/>
+                <a:ea typeface="NanumGothic"/>
+              </a:rPr>
+              <a:t>온라인 점수기가 라운드별 기여도를 EMA 누적(s ← β·s + (1−β)·raw) → 다음 라운드 FedAvg 가중을 바꾼다.</a:t>
+            </a:r>
+          </a:p>
+        </p:txBody>
+      </p:sp>
+      <p:graphicFrame>
+        <p:nvGraphicFramePr>
+          <p:cNvPr id="4" name="Table 3"/>
+          <p:cNvGraphicFramePr>
+            <a:graphicFrameLocks noGrp="1"/>
+          </p:cNvGraphicFramePr>
+          <p:nvPr/>
+        </p:nvGraphicFramePr>
+        <p:xfrm>
+          <a:off x="411480" y="2011680"/>
+          <a:ext cx="11384280" cy="2743200"/>
+        </p:xfrm>
+        <a:graphic>
+          <a:graphicData uri="http://schemas.openxmlformats.org/drawingml/2006/table">
+            <a:tbl>
+              <a:tblPr>
+                <a:tableStyleId>{5C22544A-7EE6-4342-B048-85BDC9FD1C3A}</a:tableStyleId>
+              </a:tblPr>
+              <a:tblGrid>
+                <a:gridCol w="2011680"/>
+                <a:gridCol w="5120640"/>
+                <a:gridCol w="4251960"/>
+              </a:tblGrid>
+              <a:tr h="457200">
+                <a:tc>
+                  <a:txBody>
+                    <a:bodyPr/>
+                    <a:lstStyle/>
+                    <a:p>
+                      <a:pPr algn="l"/>
+                      <a:r>
+                        <a:rPr sz="1300" b="1" i="0">
+                          <a:solidFill>
+                            <a:srgbClr val="FFFFFF"/>
+                          </a:solidFill>
+                          <a:latin typeface="NanumGothic"/>
+                          <a:ea typeface="NanumGothic"/>
+                        </a:rPr>
+                        <a:t>arm</a:t>
+                      </a:r>
+                    </a:p>
+                  </a:txBody>
+                  <a:tcPr marL="38100" marR="38100" marT="12700" marB="12700" anchor="ctr">
+                    <a:solidFill>
+                      <a:srgbClr val="33475B"/>
+                    </a:solidFill>
+                  </a:tcPr>
+                </a:tc>
+                <a:tc>
+                  <a:txBody>
+                    <a:bodyPr/>
+                    <a:lstStyle/>
+                    <a:p>
+                      <a:pPr algn="ctr"/>
+                      <a:r>
+                        <a:rPr sz="1300" b="1" i="0">
+                          <a:solidFill>
+                            <a:srgbClr val="FFFFFF"/>
+                          </a:solidFill>
+                          <a:latin typeface="NanumGothic"/>
+                          <a:ea typeface="NanumGothic"/>
+                        </a:rPr>
+                        <a:t>가중 규칙</a:t>
+                      </a:r>
+                    </a:p>
+                  </a:txBody>
+                  <a:tcPr marL="38100" marR="38100" marT="12700" marB="12700" anchor="ctr">
+                    <a:solidFill>
+                      <a:srgbClr val="33475B"/>
+                    </a:solidFill>
+                  </a:tcPr>
+                </a:tc>
+                <a:tc>
+                  <a:txBody>
+                    <a:bodyPr/>
+                    <a:lstStyle/>
+                    <a:p>
+                      <a:pPr algn="ctr"/>
+                      <a:r>
+                        <a:rPr sz="1300" b="1" i="0">
+                          <a:solidFill>
+                            <a:srgbClr val="FFFFFF"/>
+                          </a:solidFill>
+                          <a:latin typeface="NanumGothic"/>
+                          <a:ea typeface="NanumGothic"/>
+                        </a:rPr>
+                        <a:t>점수원</a:t>
+                      </a:r>
+                    </a:p>
+                  </a:txBody>
+                  <a:tcPr marL="38100" marR="38100" marT="12700" marB="12700" anchor="ctr">
+                    <a:solidFill>
+                      <a:srgbClr val="33475B"/>
+                    </a:solidFill>
+                  </a:tcPr>
+                </a:tc>
+              </a:tr>
+              <a:tr h="457200">
+                <a:tc>
+                  <a:txBody>
+                    <a:bodyPr/>
+                    <a:lstStyle/>
+                    <a:p>
+                      <a:pPr algn="l"/>
+                      <a:r>
+                        <a:rPr sz="1300" b="0" i="0">
+                          <a:solidFill>
+                            <a:srgbClr val="222222"/>
+                          </a:solidFill>
+                          <a:latin typeface="NanumGothic"/>
+                          <a:ea typeface="NanumGothic"/>
+                        </a:rPr>
+                        <a:t>vanilla</a:t>
+                      </a:r>
+                    </a:p>
+                  </a:txBody>
+                  <a:tcPr marL="38100" marR="38100" marT="0" marB="0" anchor="ctr">
+                    <a:solidFill>
+                      <a:srgbClr val="FFFFFF"/>
+                    </a:solidFill>
+                  </a:tcPr>
+                </a:tc>
+                <a:tc>
+                  <a:txBody>
+                    <a:bodyPr/>
+                    <a:lstStyle/>
+                    <a:p>
+                      <a:pPr algn="ctr"/>
+                      <a:r>
+                        <a:rPr sz="1300" b="0" i="0">
+                          <a:solidFill>
+                            <a:srgbClr val="222222"/>
+                          </a:solidFill>
+                          <a:latin typeface="NanumGothic"/>
+                          <a:ea typeface="NanumGothic"/>
+                        </a:rPr>
+                        <a:t>데이터 크기 n 가중 (기준)</a:t>
+                      </a:r>
+                    </a:p>
+                  </a:txBody>
+                  <a:tcPr marL="38100" marR="38100" marT="0" marB="0" anchor="ctr">
+                    <a:solidFill>
+                      <a:srgbClr val="FFFFFF"/>
+                    </a:solidFill>
+                  </a:tcPr>
+                </a:tc>
+                <a:tc>
+                  <a:txBody>
+                    <a:bodyPr/>
+                    <a:lstStyle/>
+                    <a:p>
+                      <a:pPr algn="ctr"/>
+                      <a:r>
+                        <a:rPr sz="1300" b="0" i="0">
+                          <a:solidFill>
+                            <a:srgbClr val="222222"/>
+                          </a:solidFill>
+                          <a:latin typeface="NanumGothic"/>
+                          <a:ea typeface="NanumGothic"/>
+                        </a:rPr>
+                        <a:t>—</a:t>
+                      </a:r>
+                    </a:p>
+                  </a:txBody>
+                  <a:tcPr marL="38100" marR="38100" marT="0" marB="0" anchor="ctr">
+                    <a:solidFill>
+                      <a:srgbClr val="FFFFFF"/>
+                    </a:solidFill>
+                  </a:tcPr>
+                </a:tc>
+              </a:tr>
+              <a:tr h="457200">
+                <a:tc>
+                  <a:txBody>
+                    <a:bodyPr/>
+                    <a:lstStyle/>
+                    <a:p>
+                      <a:pPr algn="l"/>
+                      <a:r>
+                        <a:rPr sz="1300" b="0" i="0">
+                          <a:solidFill>
+                            <a:srgbClr val="222222"/>
+                          </a:solidFill>
+                          <a:latin typeface="NanumGothic"/>
+                          <a:ea typeface="NanumGothic"/>
+                        </a:rPr>
+                        <a:t>flirds_w</a:t>
+                      </a:r>
+                    </a:p>
+                  </a:txBody>
+                  <a:tcPr marL="38100" marR="38100" marT="0" marB="0" anchor="ctr">
+                    <a:solidFill>
+                      <a:srgbClr val="F2F4F7"/>
+                    </a:solidFill>
+                  </a:tcPr>
+                </a:tc>
+                <a:tc>
+                  <a:txBody>
+                    <a:bodyPr/>
+                    <a:lstStyle/>
+                    <a:p>
+                      <a:pPr algn="ctr"/>
+                      <a:r>
+                        <a:rPr sz="1300" b="0" i="0">
+                          <a:solidFill>
+                            <a:srgbClr val="222222"/>
+                          </a:solidFill>
+                          <a:latin typeface="NanumGothic"/>
+                          <a:ea typeface="NanumGothic"/>
+                        </a:rPr>
+                        <a:t>곱셈   w ∝ n · s   (β=0.5)</a:t>
+                      </a:r>
+                    </a:p>
+                  </a:txBody>
+                  <a:tcPr marL="38100" marR="38100" marT="0" marB="0" anchor="ctr">
+                    <a:solidFill>
+                      <a:srgbClr val="F2F4F7"/>
+                    </a:solidFill>
+                  </a:tcPr>
+                </a:tc>
+                <a:tc>
+                  <a:txBody>
+                    <a:bodyPr/>
+                    <a:lstStyle/>
+                    <a:p>
+                      <a:pPr algn="ctr"/>
+                      <a:r>
+                        <a:rPr sz="1300" b="0" i="0">
+                          <a:solidFill>
+                            <a:srgbClr val="222222"/>
+                          </a:solidFill>
+                          <a:latin typeface="NanumGothic"/>
+                          <a:ea typeface="NanumGothic"/>
+                        </a:rPr>
+                        <a:t>Flirds φ</a:t>
+                      </a:r>
+                    </a:p>
+                  </a:txBody>
+                  <a:tcPr marL="38100" marR="38100" marT="0" marB="0" anchor="ctr">
+                    <a:solidFill>
+                      <a:srgbClr val="F2F4F7"/>
+                    </a:solidFill>
+                  </a:tcPr>
+                </a:tc>
+              </a:tr>
+              <a:tr h="457200">
+                <a:tc>
+                  <a:txBody>
+                    <a:bodyPr/>
+                    <a:lstStyle/>
+                    <a:p>
+                      <a:pPr algn="l"/>
+                      <a:r>
+                        <a:rPr sz="1300" b="0" i="0">
+                          <a:solidFill>
+                            <a:srgbClr val="222222"/>
+                          </a:solidFill>
+                          <a:latin typeface="NanumGothic"/>
+                          <a:ea typeface="NanumGothic"/>
+                        </a:rPr>
+                        <a:t>flirds_sel</a:t>
+                      </a:r>
+                    </a:p>
+                  </a:txBody>
+                  <a:tcPr marL="38100" marR="38100" marT="0" marB="0" anchor="ctr">
+                    <a:solidFill>
+                      <a:srgbClr val="FFFFFF"/>
+                    </a:solidFill>
+                  </a:tcPr>
+                </a:tc>
+                <a:tc>
+                  <a:txBody>
+                    <a:bodyPr/>
+                    <a:lstStyle/>
+                    <a:p>
+                      <a:pPr algn="ctr"/>
+                      <a:r>
+                        <a:rPr sz="1300" b="0" i="0">
+                          <a:solidFill>
+                            <a:srgbClr val="222222"/>
+                          </a:solidFill>
+                          <a:latin typeface="NanumGothic"/>
+                          <a:ea typeface="NanumGothic"/>
+                        </a:rPr>
+                        <a:t>softmax(s/T)로 k명 선택</a:t>
+                      </a:r>
+                    </a:p>
+                  </a:txBody>
+                  <a:tcPr marL="38100" marR="38100" marT="0" marB="0" anchor="ctr">
+                    <a:solidFill>
+                      <a:srgbClr val="FFFFFF"/>
+                    </a:solidFill>
+                  </a:tcPr>
+                </a:tc>
+                <a:tc>
+                  <a:txBody>
+                    <a:bodyPr/>
+                    <a:lstStyle/>
+                    <a:p>
+                      <a:pPr algn="ctr"/>
+                      <a:r>
+                        <a:rPr sz="1300" b="0" i="0">
+                          <a:solidFill>
+                            <a:srgbClr val="222222"/>
+                          </a:solidFill>
+                          <a:latin typeface="NanumGothic"/>
+                          <a:ea typeface="NanumGothic"/>
+                        </a:rPr>
+                        <a:t>Flirds φ</a:t>
+                      </a:r>
+                    </a:p>
+                  </a:txBody>
+                  <a:tcPr marL="38100" marR="38100" marT="0" marB="0" anchor="ctr">
+                    <a:solidFill>
+                      <a:srgbClr val="FFFFFF"/>
+                    </a:solidFill>
+                  </a:tcPr>
+                </a:tc>
+              </a:tr>
+              <a:tr h="457200">
+                <a:tc>
+                  <a:txBody>
+                    <a:bodyPr/>
+                    <a:lstStyle/>
+                    <a:p>
+                      <a:pPr algn="l"/>
+                      <a:r>
+                        <a:rPr sz="1300" b="0" i="0">
+                          <a:solidFill>
+                            <a:srgbClr val="222222"/>
+                          </a:solidFill>
+                          <a:latin typeface="NanumGothic"/>
+                          <a:ea typeface="NanumGothic"/>
+                        </a:rPr>
+                        <a:t>shapleyfl_w</a:t>
+                      </a:r>
+                    </a:p>
+                  </a:txBody>
+                  <a:tcPr marL="38100" marR="38100" marT="0" marB="0" anchor="ctr">
+                    <a:solidFill>
+                      <a:srgbClr val="F2F4F7"/>
+                    </a:solidFill>
+                  </a:tcPr>
+                </a:tc>
+                <a:tc>
+                  <a:txBody>
+                    <a:bodyPr/>
+                    <a:lstStyle/>
+                    <a:p>
+                      <a:pPr algn="ctr"/>
+                      <a:r>
+                        <a:rPr sz="1300" b="0" i="0">
+                          <a:solidFill>
+                            <a:srgbClr val="222222"/>
+                          </a:solidFill>
+                          <a:latin typeface="NanumGothic"/>
+                          <a:ea typeface="NanumGothic"/>
+                        </a:rPr>
+                        <a:t>교체   w ∝ s   (β=0.3)</a:t>
+                      </a:r>
+                    </a:p>
+                  </a:txBody>
+                  <a:tcPr marL="38100" marR="38100" marT="0" marB="0" anchor="ctr">
+                    <a:solidFill>
+                      <a:srgbClr val="F2F4F7"/>
+                    </a:solidFill>
+                  </a:tcPr>
+                </a:tc>
+                <a:tc>
+                  <a:txBody>
+                    <a:bodyPr/>
+                    <a:lstStyle/>
+                    <a:p>
+                      <a:pPr algn="ctr"/>
+                      <a:r>
+                        <a:rPr sz="1300" b="0" i="0">
+                          <a:solidFill>
+                            <a:srgbClr val="222222"/>
+                          </a:solidFill>
+                          <a:latin typeface="NanumGothic"/>
+                          <a:ea typeface="NanumGothic"/>
+                        </a:rPr>
+                        <a:t>per-round Shapley</a:t>
+                      </a:r>
+                    </a:p>
+                  </a:txBody>
+                  <a:tcPr marL="38100" marR="38100" marT="0" marB="0" anchor="ctr">
+                    <a:solidFill>
+                      <a:srgbClr val="F2F4F7"/>
+                    </a:solidFill>
+                  </a:tcPr>
+                </a:tc>
+              </a:tr>
+              <a:tr h="457200">
+                <a:tc>
+                  <a:txBody>
+                    <a:bodyPr/>
+                    <a:lstStyle/>
+                    <a:p>
+                      <a:pPr algn="l"/>
+                      <a:r>
+                        <a:rPr sz="1300" b="0" i="0">
+                          <a:solidFill>
+                            <a:srgbClr val="222222"/>
+                          </a:solidFill>
+                          <a:latin typeface="NanumGothic"/>
+                          <a:ea typeface="NanumGothic"/>
+                        </a:rPr>
+                        <a:t>fedif_w</a:t>
+                      </a:r>
+                    </a:p>
+                  </a:txBody>
+                  <a:tcPr marL="38100" marR="38100" marT="0" marB="0" anchor="ctr">
+                    <a:solidFill>
+                      <a:srgbClr val="FFFFFF"/>
+                    </a:solidFill>
+                  </a:tcPr>
+                </a:tc>
+                <a:tc>
+                  <a:txBody>
+                    <a:bodyPr/>
+                    <a:lstStyle/>
+                    <a:p>
+                      <a:pPr algn="ctr"/>
+                      <a:r>
+                        <a:rPr sz="1300" b="0" i="0">
+                          <a:solidFill>
+                            <a:srgbClr val="222222"/>
+                          </a:solidFill>
+                          <a:latin typeface="NanumGothic"/>
+                          <a:ea typeface="NanumGothic"/>
+                        </a:rPr>
+                        <a:t>교체   w ∝ s   (β=0.7)</a:t>
+                      </a:r>
+                    </a:p>
+                  </a:txBody>
+                  <a:tcPr marL="38100" marR="38100" marT="0" marB="0" anchor="ctr">
+                    <a:solidFill>
+                      <a:srgbClr val="FFFFFF"/>
+                    </a:solidFill>
+                  </a:tcPr>
+                </a:tc>
+                <a:tc>
+                  <a:txBody>
+                    <a:bodyPr/>
+                    <a:lstStyle/>
+                    <a:p>
+                      <a:pPr algn="ctr"/>
+                      <a:r>
+                        <a:rPr sz="1300" b="0" i="0">
+                          <a:solidFill>
+                            <a:srgbClr val="222222"/>
+                          </a:solidFill>
+                          <a:latin typeface="NanumGothic"/>
+                          <a:ea typeface="NanumGothic"/>
+                        </a:rPr>
+                        <a:t>1차 influence</a:t>
+                      </a:r>
+                    </a:p>
+                  </a:txBody>
+                  <a:tcPr marL="38100" marR="38100" marT="0" marB="0" anchor="ctr">
+                    <a:solidFill>
+                      <a:srgbClr val="FFFFFF"/>
+                    </a:solidFill>
+                  </a:tcPr>
+                </a:tc>
+              </a:tr>
+            </a:tbl>
+          </a:graphicData>
+        </a:graphic>
+      </p:graphicFrame>
+      <p:sp>
+        <p:nvSpPr>
+          <p:cNvPr id="5" name="TextBox 4"/>
+          <p:cNvSpPr txBox="1"/>
+          <p:nvPr/>
+        </p:nvSpPr>
+        <p:spPr>
+          <a:xfrm>
+            <a:off x="502920" y="4983480"/>
+            <a:ext cx="11155680" cy="822960"/>
+          </a:xfrm>
+          <a:prstGeom prst="rect">
+            <a:avLst/>
+          </a:prstGeom>
+          <a:noFill/>
+        </p:spPr>
+        <p:txBody>
+          <a:bodyPr wrap="square" lIns="25400" rIns="25400" tIns="12700" bIns="12700" anchor="t">
+            <a:spAutoFit/>
+          </a:bodyPr>
+          <a:lstStyle/>
+          <a:p>
+            <a:pPr algn="l">
+              <a:lnSpc>
+                <a:spcPct val="130000"/>
+              </a:lnSpc>
+            </a:pPr>
+            <a:r>
+              <a:rPr sz="1400" b="1" i="0">
+                <a:solidFill>
+                  <a:srgbClr val="1F2A37"/>
+                </a:solidFill>
+                <a:latin typeface="NanumGothic"/>
+                <a:ea typeface="NanumGothic"/>
+              </a:rPr>
+              <a:t>기여도 점수 s를 학습 집계에 반영하는 방식. 각 baseline은 자기 논문 관행(가중식·점수원·β)을 그대로 사용 → 공정 비교.</a:t>
+            </a:r>
+          </a:p>
+          <a:p>
+            <a:pPr algn="l">
+              <a:lnSpc>
+                <a:spcPct val="130000"/>
+              </a:lnSpc>
+            </a:pPr>
+            <a:r>
+              <a:rPr sz="1300" b="0" i="0">
+                <a:solidFill>
+                  <a:srgbClr val="222222"/>
+                </a:solidFill>
+                <a:latin typeface="NanumGothic"/>
+                <a:ea typeface="NanumGothic"/>
+              </a:rPr>
+              <a:t>결합식 3종: 곱셈(n·s) · 교체(s) · 선택(softmax).</a:t>
+            </a:r>
+          </a:p>
+        </p:txBody>
+      </p:sp>
+      <p:sp>
+        <p:nvSpPr>
+          <p:cNvPr id="6" name="TextBox 5"/>
+          <p:cNvSpPr txBox="1"/>
+          <p:nvPr/>
+        </p:nvSpPr>
+        <p:spPr>
+          <a:xfrm>
+            <a:off x="11551920" y="6510528"/>
+            <a:ext cx="457200" cy="274320"/>
+          </a:xfrm>
+          <a:prstGeom prst="rect">
+            <a:avLst/>
+          </a:prstGeom>
+          <a:noFill/>
+        </p:spPr>
+        <p:txBody>
+          <a:bodyPr wrap="none">
+            <a:spAutoFit/>
+          </a:bodyPr>
+          <a:lstStyle/>
+          <a:p>
+            <a:pPr algn="r"/>
+            <a:r>
+              <a:rPr sz="900" b="0" i="0">
+                <a:solidFill>
+                  <a:srgbClr val="7A7A7A"/>
+                </a:solidFill>
+                <a:latin typeface="NanumGothic"/>
+                <a:ea typeface="NanumGothic"/>
+              </a:rPr>
+              <a:t>11</a:t>
+            </a:r>
+          </a:p>
+        </p:txBody>
+      </p:sp>
+    </p:spTree>
+  </p:cSld>
+  <p:clrMapOvr>
+    <a:masterClrMapping/>
+  </p:clrMapOvr>
+</p:sld>
+</file>
+
+<file path=ppt/slides/slide15.xml><?xml version="1.0" encoding="utf-8"?>
+<p:sld xmlns:a="http://schemas.openxmlformats.org/drawingml/2006/main" xmlns:p="http://schemas.openxmlformats.org/presentationml/2006/main" xmlns:r="http://schemas.openxmlformats.org/officeDocument/2006/relationships">
+  <p:cSld>
+    <p:spTree>
+      <p:nvGrpSpPr>
+        <p:cNvPr id="1" name=""/>
+        <p:cNvGrpSpPr/>
+        <p:nvPr/>
+      </p:nvGrpSpPr>
+      <p:grpSpPr/>
+      <p:sp>
+        <p:nvSpPr>
+          <p:cNvPr id="2" name="TextBox 1"/>
+          <p:cNvSpPr txBox="1"/>
+          <p:nvPr/>
+        </p:nvSpPr>
+        <p:spPr>
+          <a:xfrm>
+            <a:off x="411480" y="292608"/>
+            <a:ext cx="11338560" cy="731520"/>
+          </a:xfrm>
+          <a:prstGeom prst="rect">
+            <a:avLst/>
+          </a:prstGeom>
+          <a:noFill/>
+        </p:spPr>
+        <p:txBody>
+          <a:bodyPr wrap="square" lIns="25400" rIns="25400" tIns="12700" bIns="12700" anchor="t">
+            <a:spAutoFit/>
+          </a:bodyPr>
+          <a:lstStyle/>
+          <a:p>
+            <a:pPr algn="l">
+              <a:lnSpc>
+                <a:spcPct val="100000"/>
+              </a:lnSpc>
+            </a:pPr>
+            <a:r>
+              <a:rPr sz="2600" b="1" i="0">
+                <a:solidFill>
+                  <a:srgbClr val="1F2A37"/>
+                </a:solidFill>
+                <a:latin typeface="NanumGothic"/>
+                <a:ea typeface="NanumGothic"/>
+              </a:rPr>
+              <a:t>Performance — Aggregation (LLM)</a:t>
+            </a:r>
+          </a:p>
+        </p:txBody>
+      </p:sp>
+      <p:sp>
+        <p:nvSpPr>
+          <p:cNvPr id="3" name="TextBox 2"/>
+          <p:cNvSpPr txBox="1"/>
+          <p:nvPr/>
+        </p:nvSpPr>
+        <p:spPr>
+          <a:xfrm>
+            <a:off x="411480" y="1078992"/>
+            <a:ext cx="11338560" cy="457200"/>
+          </a:xfrm>
+          <a:prstGeom prst="rect">
+            <a:avLst/>
+          </a:prstGeom>
+          <a:noFill/>
+        </p:spPr>
+        <p:txBody>
+          <a:bodyPr wrap="square" lIns="25400" rIns="25400" tIns="12700" bIns="12700" anchor="t">
+            <a:spAutoFit/>
+          </a:bodyPr>
+          <a:lstStyle/>
+          <a:p>
+            <a:pPr algn="l">
+              <a:lnSpc>
+                <a:spcPct val="105000"/>
+              </a:lnSpc>
+            </a:pPr>
+            <a:r>
+              <a:rPr sz="1200" b="0" i="0">
+                <a:solidFill>
+                  <a:srgbClr val="3C4654"/>
+                </a:solidFill>
+                <a:latin typeface="NanumGothic"/>
+                <a:ea typeface="NanumGothic"/>
+              </a:rPr>
+              <a:t>기여도 가중으로 학습 후 MMLU(↑) · ROUGE-L(↑) · std 스테이지 · 3-seed 평균.</a:t>
+            </a:r>
+          </a:p>
+        </p:txBody>
+      </p:sp>
+      <p:graphicFrame>
+        <p:nvGraphicFramePr>
+          <p:cNvPr id="4" name="Table 3"/>
+          <p:cNvGraphicFramePr>
+            <a:graphicFrameLocks noGrp="1"/>
+          </p:cNvGraphicFramePr>
+          <p:nvPr/>
+        </p:nvGraphicFramePr>
+        <p:xfrm>
+          <a:off x="411480" y="2011680"/>
+          <a:ext cx="11384276" cy="2304288"/>
+        </p:xfrm>
+        <a:graphic>
+          <a:graphicData uri="http://schemas.openxmlformats.org/drawingml/2006/table">
+            <a:tbl>
+              <a:tblPr>
+                <a:tableStyleId>{5C22544A-7EE6-4342-B048-85BDC9FD1C3A}</a:tableStyleId>
+              </a:tblPr>
+              <a:tblGrid>
+                <a:gridCol w="2221322"/>
+                <a:gridCol w="1527159"/>
+                <a:gridCol w="1527159"/>
+                <a:gridCol w="1527159"/>
+                <a:gridCol w="1527159"/>
+                <a:gridCol w="1527159"/>
+                <a:gridCol w="1527159"/>
+              </a:tblGrid>
+              <a:tr h="329184">
+                <a:tc>
+                  <a:txBody>
+                    <a:bodyPr/>
+                    <a:lstStyle/>
+                    <a:p>
+                      <a:pPr algn="l"/>
+                      <a:r>
+                        <a:rPr sz="1100" b="1" i="0">
+                          <a:solidFill>
+                            <a:srgbClr val="FFFFFF"/>
+                          </a:solidFill>
+                          <a:latin typeface="NanumGothic"/>
+                          <a:ea typeface="NanumGothic"/>
+                        </a:rPr>
+                        <a:t>arm</a:t>
+                      </a:r>
+                    </a:p>
+                  </a:txBody>
+                  <a:tcPr marL="38100" marR="38100" marT="12700" marB="12700" anchor="ctr">
+                    <a:solidFill>
+                      <a:srgbClr val="33475B"/>
+                    </a:solidFill>
+                  </a:tcPr>
+                </a:tc>
+                <a:tc>
+                  <a:txBody>
+                    <a:bodyPr/>
+                    <a:lstStyle/>
+                    <a:p>
+                      <a:pPr algn="ctr"/>
+                      <a:r>
+                        <a:rPr sz="1100" b="1" i="0">
+                          <a:solidFill>
+                            <a:srgbClr val="FFFFFF"/>
+                          </a:solidFill>
+                          <a:latin typeface="NanumGothic"/>
+                          <a:ea typeface="NanumGothic"/>
+                        </a:rPr>
+                        <a:t>1B MMLU</a:t>
+                      </a:r>
+                    </a:p>
+                  </a:txBody>
+                  <a:tcPr marL="38100" marR="38100" marT="12700" marB="12700" anchor="ctr">
+                    <a:solidFill>
+                      <a:srgbClr val="33475B"/>
+                    </a:solidFill>
+                  </a:tcPr>
+                </a:tc>
+                <a:tc>
+                  <a:txBody>
+                    <a:bodyPr/>
+                    <a:lstStyle/>
+                    <a:p>
+                      <a:pPr algn="ctr"/>
+                      <a:r>
+                        <a:rPr sz="1100" b="1" i="0">
+                          <a:solidFill>
+                            <a:srgbClr val="FFFFFF"/>
+                          </a:solidFill>
+                          <a:latin typeface="NanumGothic"/>
+                          <a:ea typeface="NanumGothic"/>
+                        </a:rPr>
+                        <a:t>1B ROUGE</a:t>
+                      </a:r>
+                    </a:p>
+                  </a:txBody>
+                  <a:tcPr marL="38100" marR="38100" marT="12700" marB="12700" anchor="ctr">
+                    <a:solidFill>
+                      <a:srgbClr val="33475B"/>
+                    </a:solidFill>
+                  </a:tcPr>
+                </a:tc>
+                <a:tc>
+                  <a:txBody>
+                    <a:bodyPr/>
+                    <a:lstStyle/>
+                    <a:p>
+                      <a:pPr algn="ctr"/>
+                      <a:r>
+                        <a:rPr sz="1100" b="1" i="0">
+                          <a:solidFill>
+                            <a:srgbClr val="FFFFFF"/>
+                          </a:solidFill>
+                          <a:latin typeface="NanumGothic"/>
+                          <a:ea typeface="NanumGothic"/>
+                        </a:rPr>
+                        <a:t>3B MMLU</a:t>
+                      </a:r>
+                    </a:p>
+                  </a:txBody>
+                  <a:tcPr marL="38100" marR="38100" marT="12700" marB="12700" anchor="ctr">
+                    <a:solidFill>
+                      <a:srgbClr val="33475B"/>
+                    </a:solidFill>
+                  </a:tcPr>
+                </a:tc>
+                <a:tc>
+                  <a:txBody>
+                    <a:bodyPr/>
+                    <a:lstStyle/>
+                    <a:p>
+                      <a:pPr algn="ctr"/>
+                      <a:r>
+                        <a:rPr sz="1100" b="1" i="0">
+                          <a:solidFill>
+                            <a:srgbClr val="FFFFFF"/>
+                          </a:solidFill>
+                          <a:latin typeface="NanumGothic"/>
+                          <a:ea typeface="NanumGothic"/>
+                        </a:rPr>
+                        <a:t>3B ROUGE</a:t>
+                      </a:r>
+                    </a:p>
+                  </a:txBody>
+                  <a:tcPr marL="38100" marR="38100" marT="12700" marB="12700" anchor="ctr">
+                    <a:solidFill>
+                      <a:srgbClr val="33475B"/>
+                    </a:solidFill>
+                  </a:tcPr>
+                </a:tc>
+                <a:tc>
+                  <a:txBody>
+                    <a:bodyPr/>
+                    <a:lstStyle/>
+                    <a:p>
+                      <a:pPr algn="ctr"/>
+                      <a:r>
+                        <a:rPr sz="1100" b="1" i="0">
+                          <a:solidFill>
+                            <a:srgbClr val="FFFFFF"/>
+                          </a:solidFill>
+                          <a:latin typeface="NanumGothic"/>
+                          <a:ea typeface="NanumGothic"/>
+                        </a:rPr>
+                        <a:t>7B MMLU</a:t>
+                      </a:r>
+                    </a:p>
+                  </a:txBody>
+                  <a:tcPr marL="38100" marR="38100" marT="12700" marB="12700" anchor="ctr">
+                    <a:solidFill>
+                      <a:srgbClr val="33475B"/>
+                    </a:solidFill>
+                  </a:tcPr>
+                </a:tc>
+                <a:tc>
+                  <a:txBody>
+                    <a:bodyPr/>
+                    <a:lstStyle/>
+                    <a:p>
+                      <a:pPr algn="ctr"/>
+                      <a:r>
+                        <a:rPr sz="1100" b="1" i="0">
+                          <a:solidFill>
+                            <a:srgbClr val="FFFFFF"/>
+                          </a:solidFill>
+                          <a:latin typeface="NanumGothic"/>
+                          <a:ea typeface="NanumGothic"/>
+                        </a:rPr>
+                        <a:t>7B ROUGE</a:t>
+                      </a:r>
+                    </a:p>
+                  </a:txBody>
+                  <a:tcPr marL="38100" marR="38100" marT="12700" marB="12700" anchor="ctr">
+                    <a:solidFill>
+                      <a:srgbClr val="33475B"/>
+                    </a:solidFill>
+                  </a:tcPr>
+                </a:tc>
+              </a:tr>
+              <a:tr h="329184">
+                <a:tc>
+                  <a:txBody>
+                    <a:bodyPr/>
+                    <a:lstStyle/>
+                    <a:p>
+                      <a:pPr algn="l"/>
+                      <a:r>
+                        <a:rPr sz="1100" b="0" i="0">
+                          <a:solidFill>
+                            <a:srgbClr val="222222"/>
+                          </a:solidFill>
+                          <a:latin typeface="NanumGothic"/>
+                          <a:ea typeface="NanumGothic"/>
+                        </a:rPr>
+                        <a:t>base</a:t>
+                      </a:r>
+                    </a:p>
+                  </a:txBody>
+                  <a:tcPr marL="38100" marR="38100" marT="0" marB="0" anchor="ctr">
+                    <a:solidFill>
+                      <a:srgbClr val="FFFFFF"/>
+                    </a:solidFill>
+                  </a:tcPr>
+                </a:tc>
+                <a:tc>
+                  <a:txBody>
+                    <a:bodyPr/>
+                    <a:lstStyle/>
+                    <a:p>
+                      <a:pPr algn="ctr"/>
+                      <a:r>
+                        <a:rPr sz="1100" b="0" i="0">
+                          <a:solidFill>
+                            <a:srgbClr val="222222"/>
+                          </a:solidFill>
+                          <a:latin typeface="NanumGothic"/>
+                          <a:ea typeface="NanumGothic"/>
+                        </a:rPr>
+                        <a:t>0.482</a:t>
+                      </a:r>
+                    </a:p>
+                  </a:txBody>
+                  <a:tcPr marL="38100" marR="38100" marT="0" marB="0" anchor="ctr">
+                    <a:solidFill>
+                      <a:srgbClr val="FFFFFF"/>
+                    </a:solidFill>
+                  </a:tcPr>
+                </a:tc>
+                <a:tc>
+                  <a:txBody>
+                    <a:bodyPr/>
+                    <a:lstStyle/>
+                    <a:p>
+                      <a:pPr algn="ctr"/>
+                      <a:r>
+                        <a:rPr sz="1100" b="0" i="0">
+                          <a:solidFill>
+                            <a:srgbClr val="222222"/>
+                          </a:solidFill>
+                          <a:latin typeface="NanumGothic"/>
+                          <a:ea typeface="NanumGothic"/>
+                        </a:rPr>
+                        <a:t>0.217</a:t>
+                      </a:r>
+                    </a:p>
+                  </a:txBody>
+                  <a:tcPr marL="38100" marR="38100" marT="0" marB="0" anchor="ctr">
+                    <a:solidFill>
+                      <a:srgbClr val="FFFFFF"/>
+                    </a:solidFill>
+                  </a:tcPr>
+                </a:tc>
+                <a:tc>
+                  <a:txBody>
+                    <a:bodyPr/>
+                    <a:lstStyle/>
+                    <a:p>
+                      <a:pPr algn="ctr"/>
+                      <a:r>
+                        <a:rPr sz="1100" b="0" i="0">
+                          <a:solidFill>
+                            <a:srgbClr val="222222"/>
+                          </a:solidFill>
+                          <a:latin typeface="NanumGothic"/>
+                          <a:ea typeface="NanumGothic"/>
+                        </a:rPr>
+                        <a:t>0.623</a:t>
+                      </a:r>
+                    </a:p>
+                  </a:txBody>
+                  <a:tcPr marL="38100" marR="38100" marT="0" marB="0" anchor="ctr">
+                    <a:solidFill>
+                      <a:srgbClr val="FFFFFF"/>
+                    </a:solidFill>
+                  </a:tcPr>
+                </a:tc>
+                <a:tc>
+                  <a:txBody>
+                    <a:bodyPr/>
+                    <a:lstStyle/>
+                    <a:p>
+                      <a:pPr algn="ctr"/>
+                      <a:r>
+                        <a:rPr sz="1100" b="0" i="0">
+                          <a:solidFill>
+                            <a:srgbClr val="222222"/>
+                          </a:solidFill>
+                          <a:latin typeface="NanumGothic"/>
+                          <a:ea typeface="NanumGothic"/>
+                        </a:rPr>
+                        <a:t>0.222</a:t>
+                      </a:r>
+                    </a:p>
+                  </a:txBody>
+                  <a:tcPr marL="38100" marR="38100" marT="0" marB="0" anchor="ctr">
+                    <a:solidFill>
+                      <a:srgbClr val="FFFFFF"/>
+                    </a:solidFill>
+                  </a:tcPr>
+                </a:tc>
+                <a:tc>
+                  <a:txBody>
+                    <a:bodyPr/>
+                    <a:lstStyle/>
+                    <a:p>
+                      <a:pPr algn="ctr"/>
+                      <a:r>
+                        <a:rPr sz="1100" b="0" i="0">
+                          <a:solidFill>
+                            <a:srgbClr val="222222"/>
+                          </a:solidFill>
+                          <a:latin typeface="NanumGothic"/>
+                          <a:ea typeface="NanumGothic"/>
+                        </a:rPr>
+                        <a:t>0.418</a:t>
+                      </a:r>
+                    </a:p>
+                  </a:txBody>
+                  <a:tcPr marL="38100" marR="38100" marT="0" marB="0" anchor="ctr">
+                    <a:solidFill>
+                      <a:srgbClr val="FFFFFF"/>
+                    </a:solidFill>
+                  </a:tcPr>
+                </a:tc>
+                <a:tc>
+                  <a:txBody>
+                    <a:bodyPr/>
+                    <a:lstStyle/>
+                    <a:p>
+                      <a:pPr algn="ctr"/>
+                      <a:r>
+                        <a:rPr sz="1100" b="0" i="0">
+                          <a:solidFill>
+                            <a:srgbClr val="222222"/>
+                          </a:solidFill>
+                          <a:latin typeface="NanumGothic"/>
+                          <a:ea typeface="NanumGothic"/>
+                        </a:rPr>
+                        <a:t>0.150</a:t>
+                      </a:r>
+                    </a:p>
+                  </a:txBody>
+                  <a:tcPr marL="38100" marR="38100" marT="0" marB="0" anchor="ctr">
+                    <a:solidFill>
+                      <a:srgbClr val="FFFFFF"/>
+                    </a:solidFill>
+                  </a:tcPr>
+                </a:tc>
+              </a:tr>
+              <a:tr h="329184">
+                <a:tc>
+                  <a:txBody>
+                    <a:bodyPr/>
+                    <a:lstStyle/>
+                    <a:p>
+                      <a:pPr algn="l"/>
+                      <a:r>
+                        <a:rPr sz="1100" b="0" i="0">
+                          <a:solidFill>
+                            <a:srgbClr val="222222"/>
+                          </a:solidFill>
+                          <a:latin typeface="NanumGothic"/>
+                          <a:ea typeface="NanumGothic"/>
+                        </a:rPr>
+                        <a:t>vanilla</a:t>
+                      </a:r>
+                    </a:p>
+                  </a:txBody>
+                  <a:tcPr marL="38100" marR="38100" marT="0" marB="0" anchor="ctr">
+                    <a:solidFill>
+                      <a:srgbClr val="F2F4F7"/>
+                    </a:solidFill>
+                  </a:tcPr>
+                </a:tc>
+                <a:tc>
+                  <a:txBody>
+                    <a:bodyPr/>
+                    <a:lstStyle/>
+                    <a:p>
+                      <a:pPr algn="ctr"/>
+                      <a:r>
+                        <a:rPr sz="1100" b="0" i="0">
+                          <a:solidFill>
+                            <a:srgbClr val="222222"/>
+                          </a:solidFill>
+                          <a:latin typeface="NanumGothic"/>
+                          <a:ea typeface="NanumGothic"/>
+                        </a:rPr>
+                        <a:t>0.474</a:t>
+                      </a:r>
+                    </a:p>
+                  </a:txBody>
+                  <a:tcPr marL="38100" marR="38100" marT="0" marB="0" anchor="ctr">
+                    <a:solidFill>
+                      <a:srgbClr val="F2F4F7"/>
+                    </a:solidFill>
+                  </a:tcPr>
+                </a:tc>
+                <a:tc>
+                  <a:txBody>
+                    <a:bodyPr/>
+                    <a:lstStyle/>
+                    <a:p>
+                      <a:pPr algn="ctr"/>
+                      <a:r>
+                        <a:rPr sz="1100" b="0" i="0">
+                          <a:solidFill>
+                            <a:srgbClr val="222222"/>
+                          </a:solidFill>
+                          <a:latin typeface="NanumGothic"/>
+                          <a:ea typeface="NanumGothic"/>
+                        </a:rPr>
+                        <a:t>0.284</a:t>
+                      </a:r>
+                    </a:p>
+                  </a:txBody>
+                  <a:tcPr marL="38100" marR="38100" marT="0" marB="0" anchor="ctr">
+                    <a:solidFill>
+                      <a:srgbClr val="F2F4F7"/>
+                    </a:solidFill>
+                  </a:tcPr>
+                </a:tc>
+                <a:tc>
+                  <a:txBody>
+                    <a:bodyPr/>
+                    <a:lstStyle/>
+                    <a:p>
+                      <a:pPr algn="ctr"/>
+                      <a:r>
+                        <a:rPr sz="1100" b="0" i="0">
+                          <a:solidFill>
+                            <a:srgbClr val="222222"/>
+                          </a:solidFill>
+                          <a:latin typeface="NanumGothic"/>
+                          <a:ea typeface="NanumGothic"/>
+                        </a:rPr>
+                        <a:t>0.615</a:t>
+                      </a:r>
+                    </a:p>
+                  </a:txBody>
+                  <a:tcPr marL="38100" marR="38100" marT="0" marB="0" anchor="ctr">
+                    <a:solidFill>
+                      <a:srgbClr val="F2F4F7"/>
+                    </a:solidFill>
+                  </a:tcPr>
+                </a:tc>
+                <a:tc>
+                  <a:txBody>
+                    <a:bodyPr/>
+                    <a:lstStyle/>
+                    <a:p>
+                      <a:pPr algn="ctr"/>
+                      <a:r>
+                        <a:rPr sz="1100" b="0" i="0">
+                          <a:solidFill>
+                            <a:srgbClr val="222222"/>
+                          </a:solidFill>
+                          <a:latin typeface="NanumGothic"/>
+                          <a:ea typeface="NanumGothic"/>
+                        </a:rPr>
+                        <a:t>0.302</a:t>
+                      </a:r>
+                    </a:p>
+                  </a:txBody>
+                  <a:tcPr marL="38100" marR="38100" marT="0" marB="0" anchor="ctr">
+                    <a:solidFill>
+                      <a:srgbClr val="F2F4F7"/>
+                    </a:solidFill>
+                  </a:tcPr>
+                </a:tc>
+                <a:tc>
+                  <a:txBody>
+                    <a:bodyPr/>
+                    <a:lstStyle/>
+                    <a:p>
+                      <a:pPr algn="ctr"/>
+                      <a:r>
+                        <a:rPr sz="1100" b="0" i="0">
+                          <a:solidFill>
+                            <a:srgbClr val="222222"/>
+                          </a:solidFill>
+                          <a:latin typeface="NanumGothic"/>
+                          <a:ea typeface="NanumGothic"/>
+                        </a:rPr>
+                        <a:t>0.404</a:t>
+                      </a:r>
+                    </a:p>
+                  </a:txBody>
+                  <a:tcPr marL="38100" marR="38100" marT="0" marB="0" anchor="ctr">
+                    <a:solidFill>
+                      <a:srgbClr val="F2F4F7"/>
+                    </a:solidFill>
+                  </a:tcPr>
+                </a:tc>
+                <a:tc>
+                  <a:txBody>
+                    <a:bodyPr/>
+                    <a:lstStyle/>
+                    <a:p>
+                      <a:pPr algn="ctr"/>
+                      <a:r>
+                        <a:rPr sz="1100" b="0" i="0">
+                          <a:solidFill>
+                            <a:srgbClr val="222222"/>
+                          </a:solidFill>
+                          <a:latin typeface="NanumGothic"/>
+                          <a:ea typeface="NanumGothic"/>
+                        </a:rPr>
+                        <a:t>0.278</a:t>
+                      </a:r>
+                    </a:p>
+                  </a:txBody>
+                  <a:tcPr marL="38100" marR="38100" marT="0" marB="0" anchor="ctr">
+                    <a:solidFill>
+                      <a:srgbClr val="F2F4F7"/>
+                    </a:solidFill>
+                  </a:tcPr>
+                </a:tc>
+              </a:tr>
+              <a:tr h="329184">
+                <a:tc>
+                  <a:txBody>
+                    <a:bodyPr/>
+                    <a:lstStyle/>
+                    <a:p>
+                      <a:pPr algn="l"/>
+                      <a:r>
+                        <a:rPr sz="1100" b="0" i="0">
+                          <a:solidFill>
+                            <a:srgbClr val="222222"/>
+                          </a:solidFill>
+                          <a:latin typeface="NanumGothic"/>
+                          <a:ea typeface="NanumGothic"/>
+                        </a:rPr>
+                        <a:t>flirds_w</a:t>
+                      </a:r>
+                    </a:p>
+                  </a:txBody>
+                  <a:tcPr marL="38100" marR="38100" marT="0" marB="0" anchor="ctr">
+                    <a:solidFill>
+                      <a:srgbClr val="FFFFFF"/>
+                    </a:solidFill>
+                  </a:tcPr>
+                </a:tc>
+                <a:tc>
+                  <a:txBody>
+                    <a:bodyPr/>
+                    <a:lstStyle/>
+                    <a:p>
+                      <a:pPr algn="ctr"/>
+                      <a:r>
+                        <a:rPr sz="1100" b="0" i="0">
+                          <a:solidFill>
+                            <a:srgbClr val="222222"/>
+                          </a:solidFill>
+                          <a:latin typeface="NanumGothic"/>
+                          <a:ea typeface="NanumGothic"/>
+                        </a:rPr>
+                        <a:t>0.475</a:t>
+                      </a:r>
+                    </a:p>
+                  </a:txBody>
+                  <a:tcPr marL="38100" marR="38100" marT="0" marB="0" anchor="ctr">
+                    <a:solidFill>
+                      <a:srgbClr val="FFFFFF"/>
+                    </a:solidFill>
+                  </a:tcPr>
+                </a:tc>
+                <a:tc>
+                  <a:txBody>
+                    <a:bodyPr/>
+                    <a:lstStyle/>
+                    <a:p>
+                      <a:pPr algn="ctr"/>
+                      <a:r>
+                        <a:rPr sz="1100" b="0" i="0">
+                          <a:solidFill>
+                            <a:srgbClr val="222222"/>
+                          </a:solidFill>
+                          <a:latin typeface="NanumGothic"/>
+                          <a:ea typeface="NanumGothic"/>
+                        </a:rPr>
+                        <a:t>0.285</a:t>
+                      </a:r>
+                    </a:p>
+                  </a:txBody>
+                  <a:tcPr marL="38100" marR="38100" marT="0" marB="0" anchor="ctr">
+                    <a:solidFill>
+                      <a:srgbClr val="FFFFFF"/>
+                    </a:solidFill>
+                  </a:tcPr>
+                </a:tc>
+                <a:tc>
+                  <a:txBody>
+                    <a:bodyPr/>
+                    <a:lstStyle/>
+                    <a:p>
+                      <a:pPr algn="ctr"/>
+                      <a:r>
+                        <a:rPr sz="1100" b="0" i="0">
+                          <a:solidFill>
+                            <a:srgbClr val="222222"/>
+                          </a:solidFill>
+                          <a:latin typeface="NanumGothic"/>
+                          <a:ea typeface="NanumGothic"/>
+                        </a:rPr>
+                        <a:t>0.614</a:t>
+                      </a:r>
+                    </a:p>
+                  </a:txBody>
+                  <a:tcPr marL="38100" marR="38100" marT="0" marB="0" anchor="ctr">
+                    <a:solidFill>
+                      <a:srgbClr val="FFFFFF"/>
+                    </a:solidFill>
+                  </a:tcPr>
+                </a:tc>
+                <a:tc>
+                  <a:txBody>
+                    <a:bodyPr/>
+                    <a:lstStyle/>
+                    <a:p>
+                      <a:pPr algn="ctr"/>
+                      <a:r>
+                        <a:rPr sz="1100" b="0" i="0">
+                          <a:solidFill>
+                            <a:srgbClr val="222222"/>
+                          </a:solidFill>
+                          <a:latin typeface="NanumGothic"/>
+                          <a:ea typeface="NanumGothic"/>
+                        </a:rPr>
+                        <a:t>0.302</a:t>
+                      </a:r>
+                    </a:p>
+                  </a:txBody>
+                  <a:tcPr marL="38100" marR="38100" marT="0" marB="0" anchor="ctr">
+                    <a:solidFill>
+                      <a:srgbClr val="FFFFFF"/>
+                    </a:solidFill>
+                  </a:tcPr>
+                </a:tc>
+                <a:tc>
+                  <a:txBody>
+                    <a:bodyPr/>
+                    <a:lstStyle/>
+                    <a:p>
+                      <a:pPr algn="ctr"/>
+                      <a:r>
+                        <a:rPr sz="1100" b="0" i="0">
+                          <a:solidFill>
+                            <a:srgbClr val="222222"/>
+                          </a:solidFill>
+                          <a:latin typeface="NanumGothic"/>
+                          <a:ea typeface="NanumGothic"/>
+                        </a:rPr>
+                        <a:t>0.403</a:t>
+                      </a:r>
+                    </a:p>
+                  </a:txBody>
+                  <a:tcPr marL="38100" marR="38100" marT="0" marB="0" anchor="ctr">
+                    <a:solidFill>
+                      <a:srgbClr val="FFFFFF"/>
+                    </a:solidFill>
+                  </a:tcPr>
+                </a:tc>
+                <a:tc>
+                  <a:txBody>
+                    <a:bodyPr/>
+                    <a:lstStyle/>
+                    <a:p>
+                      <a:pPr algn="ctr"/>
+                      <a:r>
+                        <a:rPr sz="1100" b="0" i="0">
+                          <a:solidFill>
+                            <a:srgbClr val="222222"/>
+                          </a:solidFill>
+                          <a:latin typeface="NanumGothic"/>
+                          <a:ea typeface="NanumGothic"/>
+                        </a:rPr>
+                        <a:t>0.278</a:t>
+                      </a:r>
+                    </a:p>
+                  </a:txBody>
+                  <a:tcPr marL="38100" marR="38100" marT="0" marB="0" anchor="ctr">
+                    <a:solidFill>
+                      <a:srgbClr val="FFFFFF"/>
+                    </a:solidFill>
+                  </a:tcPr>
+                </a:tc>
+              </a:tr>
+              <a:tr h="329184">
+                <a:tc>
+                  <a:txBody>
+                    <a:bodyPr/>
+                    <a:lstStyle/>
+                    <a:p>
+                      <a:pPr algn="l"/>
+                      <a:r>
+                        <a:rPr sz="1100" b="0" i="0">
+                          <a:solidFill>
+                            <a:srgbClr val="222222"/>
+                          </a:solidFill>
+                          <a:latin typeface="NanumGothic"/>
+                          <a:ea typeface="NanumGothic"/>
+                        </a:rPr>
+                        <a:t>flirds_sel</a:t>
+                      </a:r>
+                    </a:p>
+                  </a:txBody>
+                  <a:tcPr marL="38100" marR="38100" marT="0" marB="0" anchor="ctr">
+                    <a:solidFill>
+                      <a:srgbClr val="F2F4F7"/>
+                    </a:solidFill>
+                  </a:tcPr>
+                </a:tc>
+                <a:tc>
+                  <a:txBody>
+                    <a:bodyPr/>
+                    <a:lstStyle/>
+                    <a:p>
+                      <a:pPr algn="ctr"/>
+                      <a:r>
+                        <a:rPr sz="1100" b="0" i="0">
+                          <a:solidFill>
+                            <a:srgbClr val="222222"/>
+                          </a:solidFill>
+                          <a:latin typeface="NanumGothic"/>
+                          <a:ea typeface="NanumGothic"/>
+                        </a:rPr>
+                        <a:t>0.474</a:t>
+                      </a:r>
+                    </a:p>
+                  </a:txBody>
+                  <a:tcPr marL="38100" marR="38100" marT="0" marB="0" anchor="ctr">
+                    <a:solidFill>
+                      <a:srgbClr val="F2F4F7"/>
+                    </a:solidFill>
+                  </a:tcPr>
+                </a:tc>
+                <a:tc>
+                  <a:txBody>
+                    <a:bodyPr/>
+                    <a:lstStyle/>
+                    <a:p>
+                      <a:pPr algn="ctr"/>
+                      <a:r>
+                        <a:rPr sz="1100" b="0" i="0">
+                          <a:solidFill>
+                            <a:srgbClr val="222222"/>
+                          </a:solidFill>
+                          <a:latin typeface="NanumGothic"/>
+                          <a:ea typeface="NanumGothic"/>
+                        </a:rPr>
+                        <a:t>0.284</a:t>
+                      </a:r>
+                    </a:p>
+                  </a:txBody>
+                  <a:tcPr marL="38100" marR="38100" marT="0" marB="0" anchor="ctr">
+                    <a:solidFill>
+                      <a:srgbClr val="F2F4F7"/>
+                    </a:solidFill>
+                  </a:tcPr>
+                </a:tc>
+                <a:tc>
+                  <a:txBody>
+                    <a:bodyPr/>
+                    <a:lstStyle/>
+                    <a:p>
+                      <a:pPr algn="ctr"/>
+                      <a:r>
+                        <a:rPr sz="1100" b="0" i="0">
+                          <a:solidFill>
+                            <a:srgbClr val="222222"/>
+                          </a:solidFill>
+                          <a:latin typeface="NanumGothic"/>
+                          <a:ea typeface="NanumGothic"/>
+                        </a:rPr>
+                        <a:t>0.614</a:t>
+                      </a:r>
+                    </a:p>
+                  </a:txBody>
+                  <a:tcPr marL="38100" marR="38100" marT="0" marB="0" anchor="ctr">
+                    <a:solidFill>
+                      <a:srgbClr val="F2F4F7"/>
+                    </a:solidFill>
+                  </a:tcPr>
+                </a:tc>
+                <a:tc>
+                  <a:txBody>
+                    <a:bodyPr/>
+                    <a:lstStyle/>
+                    <a:p>
+                      <a:pPr algn="ctr"/>
+                      <a:r>
+                        <a:rPr sz="1100" b="0" i="0">
+                          <a:solidFill>
+                            <a:srgbClr val="222222"/>
+                          </a:solidFill>
+                          <a:latin typeface="NanumGothic"/>
+                          <a:ea typeface="NanumGothic"/>
+                        </a:rPr>
+                        <a:t>0.303</a:t>
+                      </a:r>
+                    </a:p>
+                  </a:txBody>
+                  <a:tcPr marL="38100" marR="38100" marT="0" marB="0" anchor="ctr">
+                    <a:solidFill>
+                      <a:srgbClr val="F2F4F7"/>
+                    </a:solidFill>
+                  </a:tcPr>
+                </a:tc>
+                <a:tc>
+                  <a:txBody>
+                    <a:bodyPr/>
+                    <a:lstStyle/>
+                    <a:p>
+                      <a:pPr algn="ctr"/>
+                      <a:r>
+                        <a:rPr sz="1100" b="0" i="0">
+                          <a:solidFill>
+                            <a:srgbClr val="222222"/>
+                          </a:solidFill>
+                          <a:latin typeface="NanumGothic"/>
+                          <a:ea typeface="NanumGothic"/>
+                        </a:rPr>
+                        <a:t>0.403</a:t>
+                      </a:r>
+                    </a:p>
+                  </a:txBody>
+                  <a:tcPr marL="38100" marR="38100" marT="0" marB="0" anchor="ctr">
+                    <a:solidFill>
+                      <a:srgbClr val="F2F4F7"/>
+                    </a:solidFill>
+                  </a:tcPr>
+                </a:tc>
+                <a:tc>
+                  <a:txBody>
+                    <a:bodyPr/>
+                    <a:lstStyle/>
+                    <a:p>
+                      <a:pPr algn="ctr"/>
+                      <a:r>
+                        <a:rPr sz="1100" b="0" i="0">
+                          <a:solidFill>
+                            <a:srgbClr val="222222"/>
+                          </a:solidFill>
+                          <a:latin typeface="NanumGothic"/>
+                          <a:ea typeface="NanumGothic"/>
+                        </a:rPr>
+                        <a:t>0.279</a:t>
+                      </a:r>
+                    </a:p>
+                  </a:txBody>
+                  <a:tcPr marL="38100" marR="38100" marT="0" marB="0" anchor="ctr">
+                    <a:solidFill>
+                      <a:srgbClr val="F2F4F7"/>
+                    </a:solidFill>
+                  </a:tcPr>
+                </a:tc>
+              </a:tr>
+              <a:tr h="329184">
+                <a:tc>
+                  <a:txBody>
+                    <a:bodyPr/>
+                    <a:lstStyle/>
+                    <a:p>
+                      <a:pPr algn="l"/>
+                      <a:r>
+                        <a:rPr sz="1100" b="0" i="0">
+                          <a:solidFill>
+                            <a:srgbClr val="222222"/>
+                          </a:solidFill>
+                          <a:latin typeface="NanumGothic"/>
+                          <a:ea typeface="NanumGothic"/>
+                        </a:rPr>
+                        <a:t>shapleyfl_w</a:t>
+                      </a:r>
+                    </a:p>
+                  </a:txBody>
+                  <a:tcPr marL="38100" marR="38100" marT="0" marB="0" anchor="ctr">
+                    <a:solidFill>
+                      <a:srgbClr val="FFFFFF"/>
+                    </a:solidFill>
+                  </a:tcPr>
+                </a:tc>
+                <a:tc>
+                  <a:txBody>
+                    <a:bodyPr/>
+                    <a:lstStyle/>
+                    <a:p>
+                      <a:pPr algn="ctr"/>
+                      <a:r>
+                        <a:rPr sz="1100" b="0" i="0">
+                          <a:solidFill>
+                            <a:srgbClr val="222222"/>
+                          </a:solidFill>
+                          <a:latin typeface="NanumGothic"/>
+                          <a:ea typeface="NanumGothic"/>
+                        </a:rPr>
+                        <a:t>0.474</a:t>
+                      </a:r>
+                    </a:p>
+                  </a:txBody>
+                  <a:tcPr marL="38100" marR="38100" marT="0" marB="0" anchor="ctr">
+                    <a:solidFill>
+                      <a:srgbClr val="FFFFFF"/>
+                    </a:solidFill>
+                  </a:tcPr>
+                </a:tc>
+                <a:tc>
+                  <a:txBody>
+                    <a:bodyPr/>
+                    <a:lstStyle/>
+                    <a:p>
+                      <a:pPr algn="ctr"/>
+                      <a:r>
+                        <a:rPr sz="1100" b="0" i="0">
+                          <a:solidFill>
+                            <a:srgbClr val="222222"/>
+                          </a:solidFill>
+                          <a:latin typeface="NanumGothic"/>
+                          <a:ea typeface="NanumGothic"/>
+                        </a:rPr>
+                        <a:t>0.285</a:t>
+                      </a:r>
+                    </a:p>
+                  </a:txBody>
+                  <a:tcPr marL="38100" marR="38100" marT="0" marB="0" anchor="ctr">
+                    <a:solidFill>
+                      <a:srgbClr val="FFFFFF"/>
+                    </a:solidFill>
+                  </a:tcPr>
+                </a:tc>
+                <a:tc>
+                  <a:txBody>
+                    <a:bodyPr/>
+                    <a:lstStyle/>
+                    <a:p>
+                      <a:pPr algn="ctr"/>
+                      <a:r>
+                        <a:rPr sz="1100" b="0" i="0">
+                          <a:solidFill>
+                            <a:srgbClr val="222222"/>
+                          </a:solidFill>
+                          <a:latin typeface="NanumGothic"/>
+                          <a:ea typeface="NanumGothic"/>
+                        </a:rPr>
+                        <a:t>0.614</a:t>
+                      </a:r>
+                    </a:p>
+                  </a:txBody>
+                  <a:tcPr marL="38100" marR="38100" marT="0" marB="0" anchor="ctr">
+                    <a:solidFill>
+                      <a:srgbClr val="FFFFFF"/>
+                    </a:solidFill>
+                  </a:tcPr>
+                </a:tc>
+                <a:tc>
+                  <a:txBody>
+                    <a:bodyPr/>
+                    <a:lstStyle/>
+                    <a:p>
+                      <a:pPr algn="ctr"/>
+                      <a:r>
+                        <a:rPr sz="1100" b="0" i="0">
+                          <a:solidFill>
+                            <a:srgbClr val="222222"/>
+                          </a:solidFill>
+                          <a:latin typeface="NanumGothic"/>
+                          <a:ea typeface="NanumGothic"/>
+                        </a:rPr>
+                        <a:t>0.302</a:t>
+                      </a:r>
+                    </a:p>
+                  </a:txBody>
+                  <a:tcPr marL="38100" marR="38100" marT="0" marB="0" anchor="ctr">
+                    <a:solidFill>
+                      <a:srgbClr val="FFFFFF"/>
+                    </a:solidFill>
+                  </a:tcPr>
+                </a:tc>
+                <a:tc>
+                  <a:txBody>
+                    <a:bodyPr/>
+                    <a:lstStyle/>
+                    <a:p>
+                      <a:pPr algn="ctr"/>
+                      <a:r>
+                        <a:rPr sz="1100" b="0" i="0">
+                          <a:solidFill>
+                            <a:srgbClr val="222222"/>
+                          </a:solidFill>
+                          <a:latin typeface="NanumGothic"/>
+                          <a:ea typeface="NanumGothic"/>
+                        </a:rPr>
+                        <a:t>0.403</a:t>
+                      </a:r>
+                    </a:p>
+                  </a:txBody>
+                  <a:tcPr marL="38100" marR="38100" marT="0" marB="0" anchor="ctr">
+                    <a:solidFill>
+                      <a:srgbClr val="FFFFFF"/>
+                    </a:solidFill>
+                  </a:tcPr>
+                </a:tc>
+                <a:tc>
+                  <a:txBody>
+                    <a:bodyPr/>
+                    <a:lstStyle/>
+                    <a:p>
+                      <a:pPr algn="ctr"/>
+                      <a:r>
+                        <a:rPr sz="1100" b="0" i="0">
+                          <a:solidFill>
+                            <a:srgbClr val="222222"/>
+                          </a:solidFill>
+                          <a:latin typeface="NanumGothic"/>
+                          <a:ea typeface="NanumGothic"/>
+                        </a:rPr>
+                        <a:t>0.279</a:t>
+                      </a:r>
+                    </a:p>
+                  </a:txBody>
+                  <a:tcPr marL="38100" marR="38100" marT="0" marB="0" anchor="ctr">
+                    <a:solidFill>
+                      <a:srgbClr val="FFFFFF"/>
+                    </a:solidFill>
+                  </a:tcPr>
+                </a:tc>
+              </a:tr>
+              <a:tr h="329184">
+                <a:tc>
+                  <a:txBody>
+                    <a:bodyPr/>
+                    <a:lstStyle/>
+                    <a:p>
+                      <a:pPr algn="l"/>
+                      <a:r>
+                        <a:rPr sz="1100" b="0" i="0">
+                          <a:solidFill>
+                            <a:srgbClr val="222222"/>
+                          </a:solidFill>
+                          <a:latin typeface="NanumGothic"/>
+                          <a:ea typeface="NanumGothic"/>
+                        </a:rPr>
+                        <a:t>fedif_w</a:t>
+                      </a:r>
+                    </a:p>
+                  </a:txBody>
+                  <a:tcPr marL="38100" marR="38100" marT="0" marB="0" anchor="ctr">
+                    <a:solidFill>
+                      <a:srgbClr val="F2F4F7"/>
+                    </a:solidFill>
+                  </a:tcPr>
+                </a:tc>
+                <a:tc>
+                  <a:txBody>
+                    <a:bodyPr/>
+                    <a:lstStyle/>
+                    <a:p>
+                      <a:pPr algn="ctr"/>
+                      <a:r>
+                        <a:rPr sz="1100" b="0" i="0">
+                          <a:solidFill>
+                            <a:srgbClr val="222222"/>
+                          </a:solidFill>
+                          <a:latin typeface="NanumGothic"/>
+                          <a:ea typeface="NanumGothic"/>
+                        </a:rPr>
+                        <a:t>0.474</a:t>
+                      </a:r>
+                    </a:p>
+                  </a:txBody>
+                  <a:tcPr marL="38100" marR="38100" marT="0" marB="0" anchor="ctr">
+                    <a:solidFill>
+                      <a:srgbClr val="F2F4F7"/>
+                    </a:solidFill>
+                  </a:tcPr>
+                </a:tc>
+                <a:tc>
+                  <a:txBody>
+                    <a:bodyPr/>
+                    <a:lstStyle/>
+                    <a:p>
+                      <a:pPr algn="ctr"/>
+                      <a:r>
+                        <a:rPr sz="1100" b="0" i="0">
+                          <a:solidFill>
+                            <a:srgbClr val="222222"/>
+                          </a:solidFill>
+                          <a:latin typeface="NanumGothic"/>
+                          <a:ea typeface="NanumGothic"/>
+                        </a:rPr>
+                        <a:t>0.285</a:t>
+                      </a:r>
+                    </a:p>
+                  </a:txBody>
+                  <a:tcPr marL="38100" marR="38100" marT="0" marB="0" anchor="ctr">
+                    <a:solidFill>
+                      <a:srgbClr val="F2F4F7"/>
+                    </a:solidFill>
+                  </a:tcPr>
+                </a:tc>
+                <a:tc>
+                  <a:txBody>
+                    <a:bodyPr/>
+                    <a:lstStyle/>
+                    <a:p>
+                      <a:pPr algn="ctr"/>
+                      <a:r>
+                        <a:rPr sz="1100" b="0" i="0">
+                          <a:solidFill>
+                            <a:srgbClr val="222222"/>
+                          </a:solidFill>
+                          <a:latin typeface="NanumGothic"/>
+                          <a:ea typeface="NanumGothic"/>
+                        </a:rPr>
+                        <a:t>0.614</a:t>
+                      </a:r>
+                    </a:p>
+                  </a:txBody>
+                  <a:tcPr marL="38100" marR="38100" marT="0" marB="0" anchor="ctr">
+                    <a:solidFill>
+                      <a:srgbClr val="F2F4F7"/>
+                    </a:solidFill>
+                  </a:tcPr>
+                </a:tc>
+                <a:tc>
+                  <a:txBody>
+                    <a:bodyPr/>
+                    <a:lstStyle/>
+                    <a:p>
+                      <a:pPr algn="ctr"/>
+                      <a:r>
+                        <a:rPr sz="1100" b="0" i="0">
+                          <a:solidFill>
+                            <a:srgbClr val="222222"/>
+                          </a:solidFill>
+                          <a:latin typeface="NanumGothic"/>
+                          <a:ea typeface="NanumGothic"/>
+                        </a:rPr>
+                        <a:t>0.302</a:t>
+                      </a:r>
+                    </a:p>
+                  </a:txBody>
+                  <a:tcPr marL="38100" marR="38100" marT="0" marB="0" anchor="ctr">
+                    <a:solidFill>
+                      <a:srgbClr val="F2F4F7"/>
+                    </a:solidFill>
+                  </a:tcPr>
+                </a:tc>
+                <a:tc>
+                  <a:txBody>
+                    <a:bodyPr/>
+                    <a:lstStyle/>
+                    <a:p>
+                      <a:pPr algn="ctr"/>
+                      <a:r>
+                        <a:rPr sz="1100" b="0" i="0">
+                          <a:solidFill>
+                            <a:srgbClr val="222222"/>
+                          </a:solidFill>
+                          <a:latin typeface="NanumGothic"/>
+                          <a:ea typeface="NanumGothic"/>
+                        </a:rPr>
+                        <a:t>0.403</a:t>
+                      </a:r>
+                    </a:p>
+                  </a:txBody>
+                  <a:tcPr marL="38100" marR="38100" marT="0" marB="0" anchor="ctr">
+                    <a:solidFill>
+                      <a:srgbClr val="F2F4F7"/>
+                    </a:solidFill>
+                  </a:tcPr>
+                </a:tc>
+                <a:tc>
+                  <a:txBody>
+                    <a:bodyPr/>
+                    <a:lstStyle/>
+                    <a:p>
+                      <a:pPr algn="ctr"/>
+                      <a:r>
+                        <a:rPr sz="1100" b="0" i="0">
+                          <a:solidFill>
+                            <a:srgbClr val="222222"/>
+                          </a:solidFill>
+                          <a:latin typeface="NanumGothic"/>
+                          <a:ea typeface="NanumGothic"/>
+                        </a:rPr>
+                        <a:t>0.276</a:t>
+                      </a:r>
+                    </a:p>
+                  </a:txBody>
+                  <a:tcPr marL="38100" marR="38100" marT="0" marB="0" anchor="ctr">
+                    <a:solidFill>
+                      <a:srgbClr val="F2F4F7"/>
+                    </a:solidFill>
+                  </a:tcPr>
+                </a:tc>
+              </a:tr>
+            </a:tbl>
+          </a:graphicData>
+        </a:graphic>
+      </p:graphicFrame>
+      <p:sp>
+        <p:nvSpPr>
+          <p:cNvPr id="5" name="Rounded Rectangle 4"/>
+          <p:cNvSpPr/>
+          <p:nvPr/>
+        </p:nvSpPr>
+        <p:spPr>
+          <a:xfrm>
+            <a:off x="502920" y="4526280"/>
+            <a:ext cx="11155680" cy="1234440"/>
+          </a:xfrm>
+          <a:prstGeom prst="roundRect">
+            <a:avLst>
+              <a:gd name="adj" fmla="val 6000"/>
+            </a:avLst>
+          </a:prstGeom>
+          <a:solidFill>
+            <a:srgbClr val="EDF1F6"/>
+          </a:solidFill>
+          <a:ln w="9525">
+            <a:solidFill>
+              <a:srgbClr val="D3DDE8"/>
+            </a:solidFill>
+          </a:ln>
+          <a:effectLst/>
+        </p:spPr>
+        <p:style>
+          <a:lnRef idx="1">
+            <a:schemeClr val="accent1"/>
+          </a:lnRef>
+          <a:fillRef idx="3">
+            <a:schemeClr val="accent1"/>
+          </a:fillRef>
+          <a:effectRef idx="2">
+            <a:schemeClr val="accent1"/>
+          </a:effectRef>
+          <a:fontRef idx="minor">
+            <a:schemeClr val="lt1"/>
+          </a:fontRef>
+        </p:style>
+        <p:txBody>
+          <a:bodyPr rtlCol="0" anchor="ctr"/>
+          <a:lstStyle/>
+          <a:p>
+            <a:pPr algn="ctr"/>
+          </a:p>
+        </p:txBody>
+      </p:sp>
+      <p:sp>
+        <p:nvSpPr>
+          <p:cNvPr id="6" name="TextBox 5"/>
+          <p:cNvSpPr txBox="1"/>
+          <p:nvPr/>
+        </p:nvSpPr>
+        <p:spPr>
+          <a:xfrm>
+            <a:off x="777240" y="4736592"/>
+            <a:ext cx="10607040" cy="868680"/>
+          </a:xfrm>
+          <a:prstGeom prst="rect">
+            <a:avLst/>
+          </a:prstGeom>
+          <a:noFill/>
+        </p:spPr>
+        <p:txBody>
+          <a:bodyPr wrap="square" lIns="25400" rIns="25400" tIns="12700" bIns="12700" anchor="t">
+            <a:spAutoFit/>
+          </a:bodyPr>
+          <a:lstStyle/>
+          <a:p>
+            <a:pPr algn="l">
+              <a:lnSpc>
+                <a:spcPct val="130000"/>
+              </a:lnSpc>
+            </a:pPr>
+            <a:r>
+              <a:rPr sz="1400" b="1" i="0">
+                <a:solidFill>
+                  <a:srgbClr val="1F2A37"/>
+                </a:solidFill>
+                <a:latin typeface="NanumGothic"/>
+                <a:ea typeface="NanumGothic"/>
+              </a:rPr>
+              <a:t>개입 arm ≈ vanilla (±0.001~0.003) → clean-IID do-no-harm parity (향상이 아니라 무해함).</a:t>
+            </a:r>
+          </a:p>
+          <a:p>
+            <a:pPr algn="l">
+              <a:lnSpc>
+                <a:spcPct val="130000"/>
+              </a:lnSpc>
+            </a:pPr>
+            <a:r>
+              <a:rPr sz="1300" b="0" i="0">
+                <a:solidFill>
+                  <a:srgbClr val="222222"/>
+                </a:solidFill>
+                <a:latin typeface="NanumGothic"/>
+                <a:ea typeface="NanumGothic"/>
+              </a:rPr>
+              <a:t>학습 자체는 base 대비 ROUGE 크게↑(예: 1B 0.217→0.284), MMLU는 SFT 분포-밖이라 소폭↓.</a:t>
+            </a:r>
+          </a:p>
+        </p:txBody>
+      </p:sp>
+      <p:sp>
+        <p:nvSpPr>
+          <p:cNvPr id="7" name="TextBox 6"/>
+          <p:cNvSpPr txBox="1"/>
+          <p:nvPr/>
+        </p:nvSpPr>
+        <p:spPr>
+          <a:xfrm>
+            <a:off x="11551920" y="6510528"/>
+            <a:ext cx="457200" cy="274320"/>
+          </a:xfrm>
+          <a:prstGeom prst="rect">
+            <a:avLst/>
+          </a:prstGeom>
+          <a:noFill/>
+        </p:spPr>
+        <p:txBody>
+          <a:bodyPr wrap="none">
+            <a:spAutoFit/>
+          </a:bodyPr>
+          <a:lstStyle/>
+          <a:p>
+            <a:pPr algn="r"/>
+            <a:r>
+              <a:rPr sz="900" b="0" i="0">
+                <a:solidFill>
+                  <a:srgbClr val="7A7A7A"/>
+                </a:solidFill>
+                <a:latin typeface="NanumGothic"/>
+                <a:ea typeface="NanumGothic"/>
+              </a:rPr>
+              <a:t>12</a:t>
+            </a:r>
+          </a:p>
+        </p:txBody>
+      </p:sp>
+    </p:spTree>
+  </p:cSld>
+  <p:clrMapOvr>
+    <a:masterClrMapping/>
+  </p:clrMapOvr>
+</p:sld>
+</file>
+
+<file path=ppt/slides/slide16.xml><?xml version="1.0" encoding="utf-8"?>
+<p:sld xmlns:a="http://schemas.openxmlformats.org/drawingml/2006/main" xmlns:p="http://schemas.openxmlformats.org/presentationml/2006/main" xmlns:r="http://schemas.openxmlformats.org/officeDocument/2006/relationships">
+  <p:cSld>
+    <p:spTree>
+      <p:nvGrpSpPr>
+        <p:cNvPr id="1" name=""/>
+        <p:cNvGrpSpPr/>
+        <p:nvPr/>
+      </p:nvGrpSpPr>
+      <p:grpSpPr/>
+      <p:sp>
+        <p:nvSpPr>
+          <p:cNvPr id="2" name="TextBox 1"/>
+          <p:cNvSpPr txBox="1"/>
+          <p:nvPr/>
+        </p:nvSpPr>
+        <p:spPr>
+          <a:xfrm>
+            <a:off x="411480" y="292608"/>
+            <a:ext cx="11338560" cy="731520"/>
+          </a:xfrm>
+          <a:prstGeom prst="rect">
+            <a:avLst/>
+          </a:prstGeom>
+          <a:noFill/>
+        </p:spPr>
+        <p:txBody>
+          <a:bodyPr wrap="square" lIns="25400" rIns="25400" tIns="12700" bIns="12700" anchor="t">
+            <a:spAutoFit/>
+          </a:bodyPr>
+          <a:lstStyle/>
+          <a:p>
+            <a:pPr algn="l">
+              <a:lnSpc>
+                <a:spcPct val="100000"/>
+              </a:lnSpc>
+            </a:pPr>
+            <a:r>
+              <a:rPr sz="2600" b="1" i="0">
+                <a:solidFill>
+                  <a:srgbClr val="1F2A37"/>
+                </a:solidFill>
+                <a:latin typeface="NanumGothic"/>
+                <a:ea typeface="NanumGothic"/>
+              </a:rPr>
+              <a:t>Performance — Aggregation (CNN)</a:t>
+            </a:r>
+          </a:p>
+        </p:txBody>
+      </p:sp>
+      <p:sp>
+        <p:nvSpPr>
+          <p:cNvPr id="3" name="TextBox 2"/>
+          <p:cNvSpPr txBox="1"/>
+          <p:nvPr/>
+        </p:nvSpPr>
+        <p:spPr>
+          <a:xfrm>
+            <a:off x="411480" y="1078992"/>
+            <a:ext cx="11338560" cy="457200"/>
+          </a:xfrm>
+          <a:prstGeom prst="rect">
+            <a:avLst/>
+          </a:prstGeom>
+          <a:noFill/>
+        </p:spPr>
+        <p:txBody>
+          <a:bodyPr wrap="square" lIns="25400" rIns="25400" tIns="12700" bIns="12700" anchor="t">
+            <a:spAutoFit/>
+          </a:bodyPr>
+          <a:lstStyle/>
+          <a:p>
+            <a:pPr algn="l">
+              <a:lnSpc>
+                <a:spcPct val="105000"/>
+              </a:lnSpc>
+            </a:pPr>
+            <a:r>
+              <a:rPr sz="1200" b="0" i="0">
+                <a:solidFill>
+                  <a:srgbClr val="3C4654"/>
+                </a:solidFill>
+                <a:latin typeface="NanumGothic"/>
+                <a:ea typeface="NanumGothic"/>
+              </a:rPr>
+              <a:t>cross-device N=100, 라운드당 10% 참여 · 위협 그룹별 최종 test 정확도(↑) · 3-seed.</a:t>
+            </a:r>
+          </a:p>
+        </p:txBody>
+      </p:sp>
+      <p:graphicFrame>
+        <p:nvGraphicFramePr>
+          <p:cNvPr id="4" name="Table 3"/>
+          <p:cNvGraphicFramePr>
+            <a:graphicFrameLocks noGrp="1"/>
+          </p:cNvGraphicFramePr>
+          <p:nvPr/>
+        </p:nvGraphicFramePr>
+        <p:xfrm>
+          <a:off x="411480" y="2011680"/>
+          <a:ext cx="11384278" cy="2487168"/>
+        </p:xfrm>
+        <a:graphic>
+          <a:graphicData uri="http://schemas.openxmlformats.org/drawingml/2006/table">
+            <a:tbl>
+              <a:tblPr>
+                <a:tableStyleId>{5C22544A-7EE6-4342-B048-85BDC9FD1C3A}</a:tableStyleId>
+              </a:tblPr>
+              <a:tblGrid>
+                <a:gridCol w="2196966"/>
+                <a:gridCol w="1997242"/>
+                <a:gridCol w="2396690"/>
+                <a:gridCol w="2396690"/>
+                <a:gridCol w="2396690"/>
+              </a:tblGrid>
+              <a:tr h="310896">
+                <a:tc>
+                  <a:txBody>
+                    <a:bodyPr/>
+                    <a:lstStyle/>
+                    <a:p>
+                      <a:pPr algn="l"/>
+                      <a:r>
+                        <a:rPr sz="1150" b="1" i="0">
+                          <a:solidFill>
+                            <a:srgbClr val="FFFFFF"/>
+                          </a:solidFill>
+                          <a:latin typeface="NanumGothic"/>
+                          <a:ea typeface="NanumGothic"/>
+                        </a:rPr>
+                        <a:t>arm</a:t>
+                      </a:r>
+                    </a:p>
+                  </a:txBody>
+                  <a:tcPr marL="38100" marR="38100" marT="12700" marB="12700" anchor="ctr">
+                    <a:solidFill>
+                      <a:srgbClr val="33475B"/>
+                    </a:solidFill>
+                  </a:tcPr>
+                </a:tc>
+                <a:tc>
+                  <a:txBody>
+                    <a:bodyPr/>
+                    <a:lstStyle/>
+                    <a:p>
+                      <a:pPr algn="ctr"/>
+                      <a:r>
+                        <a:rPr sz="1150" b="1" i="0">
+                          <a:solidFill>
+                            <a:srgbClr val="FFFFFF"/>
+                          </a:solidFill>
+                          <a:latin typeface="NanumGothic"/>
+                          <a:ea typeface="NanumGothic"/>
+                        </a:rPr>
+                        <a:t>clean</a:t>
+                      </a:r>
+                    </a:p>
+                  </a:txBody>
+                  <a:tcPr marL="38100" marR="38100" marT="12700" marB="12700" anchor="ctr">
+                    <a:solidFill>
+                      <a:srgbClr val="33475B"/>
+                    </a:solidFill>
+                  </a:tcPr>
+                </a:tc>
+                <a:tc>
+                  <a:txBody>
+                    <a:bodyPr/>
+                    <a:lstStyle/>
+                    <a:p>
+                      <a:pPr algn="ctr"/>
+                      <a:r>
+                        <a:rPr sz="1150" b="1" i="0">
+                          <a:solidFill>
+                            <a:srgbClr val="FFFFFF"/>
+                          </a:solidFill>
+                          <a:latin typeface="NanumGothic"/>
+                          <a:ea typeface="NanumGothic"/>
+                        </a:rPr>
+                        <a:t>free-rider</a:t>
+                      </a:r>
+                    </a:p>
+                  </a:txBody>
+                  <a:tcPr marL="38100" marR="38100" marT="12700" marB="12700" anchor="ctr">
+                    <a:solidFill>
+                      <a:srgbClr val="33475B"/>
+                    </a:solidFill>
+                  </a:tcPr>
+                </a:tc>
+                <a:tc>
+                  <a:txBody>
+                    <a:bodyPr/>
+                    <a:lstStyle/>
+                    <a:p>
+                      <a:pPr algn="ctr"/>
+                      <a:r>
+                        <a:rPr sz="1150" b="1" i="0">
+                          <a:solidFill>
+                            <a:srgbClr val="FFFFFF"/>
+                          </a:solidFill>
+                          <a:latin typeface="NanumGothic"/>
+                          <a:ea typeface="NanumGothic"/>
+                        </a:rPr>
+                        <a:t>grad_noise</a:t>
+                      </a:r>
+                    </a:p>
+                  </a:txBody>
+                  <a:tcPr marL="38100" marR="38100" marT="12700" marB="12700" anchor="ctr">
+                    <a:solidFill>
+                      <a:srgbClr val="33475B"/>
+                    </a:solidFill>
+                  </a:tcPr>
+                </a:tc>
+                <a:tc>
+                  <a:txBody>
+                    <a:bodyPr/>
+                    <a:lstStyle/>
+                    <a:p>
+                      <a:pPr algn="ctr"/>
+                      <a:r>
+                        <a:rPr sz="1150" b="1" i="0">
+                          <a:solidFill>
+                            <a:srgbClr val="FFFFFF"/>
+                          </a:solidFill>
+                          <a:latin typeface="NanumGothic"/>
+                          <a:ea typeface="NanumGothic"/>
+                        </a:rPr>
+                        <a:t>label_flip</a:t>
+                      </a:r>
+                    </a:p>
+                  </a:txBody>
+                  <a:tcPr marL="38100" marR="38100" marT="12700" marB="12700" anchor="ctr">
+                    <a:solidFill>
+                      <a:srgbClr val="33475B"/>
+                    </a:solidFill>
+                  </a:tcPr>
+                </a:tc>
+              </a:tr>
+              <a:tr h="310896">
+                <a:tc>
+                  <a:txBody>
+                    <a:bodyPr/>
+                    <a:lstStyle/>
+                    <a:p>
+                      <a:pPr algn="l"/>
+                      <a:r>
+                        <a:rPr sz="1150" b="0" i="0">
+                          <a:solidFill>
+                            <a:srgbClr val="222222"/>
+                          </a:solidFill>
+                          <a:latin typeface="NanumGothic"/>
+                          <a:ea typeface="NanumGothic"/>
+                        </a:rPr>
+                        <a:t>vanilla</a:t>
+                      </a:r>
+                    </a:p>
+                  </a:txBody>
+                  <a:tcPr marL="38100" marR="38100" marT="0" marB="0" anchor="ctr">
+                    <a:solidFill>
+                      <a:srgbClr val="FFFFFF"/>
+                    </a:solidFill>
+                  </a:tcPr>
+                </a:tc>
+                <a:tc>
+                  <a:txBody>
+                    <a:bodyPr/>
+                    <a:lstStyle/>
+                    <a:p>
+                      <a:pPr algn="ctr"/>
+                      <a:r>
+                        <a:rPr sz="1150" b="0" i="0">
+                          <a:solidFill>
+                            <a:srgbClr val="222222"/>
+                          </a:solidFill>
+                          <a:latin typeface="NanumGothic"/>
+                          <a:ea typeface="NanumGothic"/>
+                        </a:rPr>
+                        <a:t>0.686</a:t>
+                      </a:r>
+                    </a:p>
+                  </a:txBody>
+                  <a:tcPr marL="38100" marR="38100" marT="0" marB="0" anchor="ctr">
+                    <a:solidFill>
+                      <a:srgbClr val="FFFFFF"/>
+                    </a:solidFill>
+                  </a:tcPr>
+                </a:tc>
+                <a:tc>
+                  <a:txBody>
+                    <a:bodyPr/>
+                    <a:lstStyle/>
+                    <a:p>
+                      <a:pPr algn="ctr"/>
+                      <a:r>
+                        <a:rPr sz="1150" b="0" i="0">
+                          <a:solidFill>
+                            <a:srgbClr val="222222"/>
+                          </a:solidFill>
+                          <a:latin typeface="NanumGothic"/>
+                          <a:ea typeface="NanumGothic"/>
+                        </a:rPr>
+                        <a:t>0.646</a:t>
+                      </a:r>
+                    </a:p>
+                  </a:txBody>
+                  <a:tcPr marL="38100" marR="38100" marT="0" marB="0" anchor="ctr">
+                    <a:solidFill>
+                      <a:srgbClr val="FFFFFF"/>
+                    </a:solidFill>
+                  </a:tcPr>
+                </a:tc>
+                <a:tc>
+                  <a:txBody>
+                    <a:bodyPr/>
+                    <a:lstStyle/>
+                    <a:p>
+                      <a:pPr algn="ctr"/>
+                      <a:r>
+                        <a:rPr sz="1150" b="0" i="0">
+                          <a:solidFill>
+                            <a:srgbClr val="222222"/>
+                          </a:solidFill>
+                          <a:latin typeface="NanumGothic"/>
+                          <a:ea typeface="NanumGothic"/>
+                        </a:rPr>
+                        <a:t>0.499</a:t>
+                      </a:r>
+                    </a:p>
+                  </a:txBody>
+                  <a:tcPr marL="38100" marR="38100" marT="0" marB="0" anchor="ctr">
+                    <a:solidFill>
+                      <a:srgbClr val="FFFFFF"/>
+                    </a:solidFill>
+                  </a:tcPr>
+                </a:tc>
+                <a:tc>
+                  <a:txBody>
+                    <a:bodyPr/>
+                    <a:lstStyle/>
+                    <a:p>
+                      <a:pPr algn="ctr"/>
+                      <a:r>
+                        <a:rPr sz="1150" b="0" i="0">
+                          <a:solidFill>
+                            <a:srgbClr val="222222"/>
+                          </a:solidFill>
+                          <a:latin typeface="NanumGothic"/>
+                          <a:ea typeface="NanumGothic"/>
+                        </a:rPr>
+                        <a:t>0.583</a:t>
+                      </a:r>
+                    </a:p>
+                  </a:txBody>
+                  <a:tcPr marL="38100" marR="38100" marT="0" marB="0" anchor="ctr">
+                    <a:solidFill>
+                      <a:srgbClr val="FFFFFF"/>
+                    </a:solidFill>
+                  </a:tcPr>
+                </a:tc>
+              </a:tr>
+              <a:tr h="310896">
+                <a:tc>
+                  <a:txBody>
+                    <a:bodyPr/>
+                    <a:lstStyle/>
+                    <a:p>
+                      <a:pPr algn="l"/>
+                      <a:r>
+                        <a:rPr sz="1150" b="0" i="0">
+                          <a:solidFill>
+                            <a:srgbClr val="222222"/>
+                          </a:solidFill>
+                          <a:latin typeface="NanumGothic"/>
+                          <a:ea typeface="NanumGothic"/>
+                        </a:rPr>
+                        <a:t>flirds_mult</a:t>
+                      </a:r>
+                    </a:p>
+                  </a:txBody>
+                  <a:tcPr marL="38100" marR="38100" marT="0" marB="0" anchor="ctr">
+                    <a:solidFill>
+                      <a:srgbClr val="F2F4F7"/>
+                    </a:solidFill>
+                  </a:tcPr>
+                </a:tc>
+                <a:tc>
+                  <a:txBody>
+                    <a:bodyPr/>
+                    <a:lstStyle/>
+                    <a:p>
+                      <a:pPr algn="ctr"/>
+                      <a:r>
+                        <a:rPr sz="1150" b="0" i="0">
+                          <a:solidFill>
+                            <a:srgbClr val="222222"/>
+                          </a:solidFill>
+                          <a:latin typeface="NanumGothic"/>
+                          <a:ea typeface="NanumGothic"/>
+                        </a:rPr>
+                        <a:t>0.698</a:t>
+                      </a:r>
+                    </a:p>
+                  </a:txBody>
+                  <a:tcPr marL="38100" marR="38100" marT="0" marB="0" anchor="ctr">
+                    <a:solidFill>
+                      <a:srgbClr val="F2F4F7"/>
+                    </a:solidFill>
+                  </a:tcPr>
+                </a:tc>
+                <a:tc>
+                  <a:txBody>
+                    <a:bodyPr/>
+                    <a:lstStyle/>
+                    <a:p>
+                      <a:pPr algn="ctr"/>
+                      <a:r>
+                        <a:rPr sz="1150" b="0" i="0">
+                          <a:solidFill>
+                            <a:srgbClr val="222222"/>
+                          </a:solidFill>
+                          <a:latin typeface="NanumGothic"/>
+                          <a:ea typeface="NanumGothic"/>
+                        </a:rPr>
+                        <a:t>0.662</a:t>
+                      </a:r>
+                    </a:p>
+                  </a:txBody>
+                  <a:tcPr marL="38100" marR="38100" marT="0" marB="0" anchor="ctr">
+                    <a:solidFill>
+                      <a:srgbClr val="F2F4F7"/>
+                    </a:solidFill>
+                  </a:tcPr>
+                </a:tc>
+                <a:tc>
+                  <a:txBody>
+                    <a:bodyPr/>
+                    <a:lstStyle/>
+                    <a:p>
+                      <a:pPr algn="ctr"/>
+                      <a:r>
+                        <a:rPr sz="1150" b="0" i="0">
+                          <a:solidFill>
+                            <a:srgbClr val="222222"/>
+                          </a:solidFill>
+                          <a:latin typeface="NanumGothic"/>
+                          <a:ea typeface="NanumGothic"/>
+                        </a:rPr>
+                        <a:t>0.609</a:t>
+                      </a:r>
+                    </a:p>
+                  </a:txBody>
+                  <a:tcPr marL="38100" marR="38100" marT="0" marB="0" anchor="ctr">
+                    <a:solidFill>
+                      <a:srgbClr val="F2F4F7"/>
+                    </a:solidFill>
+                  </a:tcPr>
+                </a:tc>
+                <a:tc>
+                  <a:txBody>
+                    <a:bodyPr/>
+                    <a:lstStyle/>
+                    <a:p>
+                      <a:pPr algn="ctr"/>
+                      <a:r>
+                        <a:rPr sz="1150" b="0" i="0">
+                          <a:solidFill>
+                            <a:srgbClr val="222222"/>
+                          </a:solidFill>
+                          <a:latin typeface="NanumGothic"/>
+                          <a:ea typeface="NanumGothic"/>
+                        </a:rPr>
+                        <a:t>0.626</a:t>
+                      </a:r>
+                    </a:p>
+                  </a:txBody>
+                  <a:tcPr marL="38100" marR="38100" marT="0" marB="0" anchor="ctr">
+                    <a:solidFill>
+                      <a:srgbClr val="F2F4F7"/>
+                    </a:solidFill>
+                  </a:tcPr>
+                </a:tc>
+              </a:tr>
+              <a:tr h="310896">
+                <a:tc>
+                  <a:txBody>
+                    <a:bodyPr/>
+                    <a:lstStyle/>
+                    <a:p>
+                      <a:pPr algn="l"/>
+                      <a:r>
+                        <a:rPr sz="1150" b="0" i="0">
+                          <a:solidFill>
+                            <a:srgbClr val="222222"/>
+                          </a:solidFill>
+                          <a:latin typeface="NanumGothic"/>
+                          <a:ea typeface="NanumGothic"/>
+                        </a:rPr>
+                        <a:t>flirds_repl</a:t>
+                      </a:r>
+                    </a:p>
+                  </a:txBody>
+                  <a:tcPr marL="38100" marR="38100" marT="0" marB="0" anchor="ctr">
+                    <a:solidFill>
+                      <a:srgbClr val="FFFFFF"/>
+                    </a:solidFill>
+                  </a:tcPr>
+                </a:tc>
+                <a:tc>
+                  <a:txBody>
+                    <a:bodyPr/>
+                    <a:lstStyle/>
+                    <a:p>
+                      <a:pPr algn="ctr"/>
+                      <a:r>
+                        <a:rPr sz="1150" b="1" i="0">
+                          <a:solidFill>
+                            <a:srgbClr val="222222"/>
+                          </a:solidFill>
+                          <a:latin typeface="NanumGothic"/>
+                          <a:ea typeface="NanumGothic"/>
+                        </a:rPr>
+                        <a:t>0.734</a:t>
+                      </a:r>
+                    </a:p>
+                  </a:txBody>
+                  <a:tcPr marL="38100" marR="38100" marT="0" marB="0" anchor="ctr">
+                    <a:solidFill>
+                      <a:srgbClr val="FFFFFF"/>
+                    </a:solidFill>
+                  </a:tcPr>
+                </a:tc>
+                <a:tc>
+                  <a:txBody>
+                    <a:bodyPr/>
+                    <a:lstStyle/>
+                    <a:p>
+                      <a:pPr algn="ctr"/>
+                      <a:r>
+                        <a:rPr sz="1150" b="1" i="0">
+                          <a:solidFill>
+                            <a:srgbClr val="222222"/>
+                          </a:solidFill>
+                          <a:latin typeface="NanumGothic"/>
+                          <a:ea typeface="NanumGothic"/>
+                        </a:rPr>
+                        <a:t>0.704</a:t>
+                      </a:r>
+                    </a:p>
+                  </a:txBody>
+                  <a:tcPr marL="38100" marR="38100" marT="0" marB="0" anchor="ctr">
+                    <a:solidFill>
+                      <a:srgbClr val="FFFFFF"/>
+                    </a:solidFill>
+                  </a:tcPr>
+                </a:tc>
+                <a:tc>
+                  <a:txBody>
+                    <a:bodyPr/>
+                    <a:lstStyle/>
+                    <a:p>
+                      <a:pPr algn="ctr"/>
+                      <a:r>
+                        <a:rPr sz="1150" b="0" i="0">
+                          <a:solidFill>
+                            <a:srgbClr val="222222"/>
+                          </a:solidFill>
+                          <a:latin typeface="NanumGothic"/>
+                          <a:ea typeface="NanumGothic"/>
+                        </a:rPr>
+                        <a:t>0.621</a:t>
+                      </a:r>
+                    </a:p>
+                  </a:txBody>
+                  <a:tcPr marL="38100" marR="38100" marT="0" marB="0" anchor="ctr">
+                    <a:solidFill>
+                      <a:srgbClr val="FFFFFF"/>
+                    </a:solidFill>
+                  </a:tcPr>
+                </a:tc>
+                <a:tc>
+                  <a:txBody>
+                    <a:bodyPr/>
+                    <a:lstStyle/>
+                    <a:p>
+                      <a:pPr algn="ctr"/>
+                      <a:r>
+                        <a:rPr sz="1150" b="1" i="0">
+                          <a:solidFill>
+                            <a:srgbClr val="222222"/>
+                          </a:solidFill>
+                          <a:latin typeface="NanumGothic"/>
+                          <a:ea typeface="NanumGothic"/>
+                        </a:rPr>
+                        <a:t>0.652</a:t>
+                      </a:r>
+                    </a:p>
+                  </a:txBody>
+                  <a:tcPr marL="38100" marR="38100" marT="0" marB="0" anchor="ctr">
+                    <a:solidFill>
+                      <a:srgbClr val="FFFFFF"/>
+                    </a:solidFill>
+                  </a:tcPr>
+                </a:tc>
+              </a:tr>
+              <a:tr h="310896">
+                <a:tc>
+                  <a:txBody>
+                    <a:bodyPr/>
+                    <a:lstStyle/>
+                    <a:p>
+                      <a:pPr algn="l"/>
+                      <a:r>
+                        <a:rPr sz="1150" b="0" i="0">
+                          <a:solidFill>
+                            <a:srgbClr val="222222"/>
+                          </a:solidFill>
+                          <a:latin typeface="NanumGothic"/>
+                          <a:ea typeface="NanumGothic"/>
+                        </a:rPr>
+                        <a:t>flirds_add</a:t>
+                      </a:r>
+                    </a:p>
+                  </a:txBody>
+                  <a:tcPr marL="38100" marR="38100" marT="0" marB="0" anchor="ctr">
+                    <a:solidFill>
+                      <a:srgbClr val="F2F4F7"/>
+                    </a:solidFill>
+                  </a:tcPr>
+                </a:tc>
+                <a:tc>
+                  <a:txBody>
+                    <a:bodyPr/>
+                    <a:lstStyle/>
+                    <a:p>
+                      <a:pPr algn="ctr"/>
+                      <a:r>
+                        <a:rPr sz="1150" b="0" i="0">
+                          <a:solidFill>
+                            <a:srgbClr val="222222"/>
+                          </a:solidFill>
+                          <a:latin typeface="NanumGothic"/>
+                          <a:ea typeface="NanumGothic"/>
+                        </a:rPr>
+                        <a:t>0.733</a:t>
+                      </a:r>
+                    </a:p>
+                  </a:txBody>
+                  <a:tcPr marL="38100" marR="38100" marT="0" marB="0" anchor="ctr">
+                    <a:solidFill>
+                      <a:srgbClr val="F2F4F7"/>
+                    </a:solidFill>
+                  </a:tcPr>
+                </a:tc>
+                <a:tc>
+                  <a:txBody>
+                    <a:bodyPr/>
+                    <a:lstStyle/>
+                    <a:p>
+                      <a:pPr algn="ctr"/>
+                      <a:r>
+                        <a:rPr sz="1150" b="0" i="0">
+                          <a:solidFill>
+                            <a:srgbClr val="222222"/>
+                          </a:solidFill>
+                          <a:latin typeface="NanumGothic"/>
+                          <a:ea typeface="NanumGothic"/>
+                        </a:rPr>
+                        <a:t>0.702</a:t>
+                      </a:r>
+                    </a:p>
+                  </a:txBody>
+                  <a:tcPr marL="38100" marR="38100" marT="0" marB="0" anchor="ctr">
+                    <a:solidFill>
+                      <a:srgbClr val="F2F4F7"/>
+                    </a:solidFill>
+                  </a:tcPr>
+                </a:tc>
+                <a:tc>
+                  <a:txBody>
+                    <a:bodyPr/>
+                    <a:lstStyle/>
+                    <a:p>
+                      <a:pPr algn="ctr"/>
+                      <a:r>
+                        <a:rPr sz="1150" b="0" i="0">
+                          <a:solidFill>
+                            <a:srgbClr val="222222"/>
+                          </a:solidFill>
+                          <a:latin typeface="NanumGothic"/>
+                          <a:ea typeface="NanumGothic"/>
+                        </a:rPr>
+                        <a:t>0.604</a:t>
+                      </a:r>
+                    </a:p>
+                  </a:txBody>
+                  <a:tcPr marL="38100" marR="38100" marT="0" marB="0" anchor="ctr">
+                    <a:solidFill>
+                      <a:srgbClr val="F2F4F7"/>
+                    </a:solidFill>
+                  </a:tcPr>
+                </a:tc>
+                <a:tc>
+                  <a:txBody>
+                    <a:bodyPr/>
+                    <a:lstStyle/>
+                    <a:p>
+                      <a:pPr algn="ctr"/>
+                      <a:r>
+                        <a:rPr sz="1150" b="0" i="0">
+                          <a:solidFill>
+                            <a:srgbClr val="222222"/>
+                          </a:solidFill>
+                          <a:latin typeface="NanumGothic"/>
+                          <a:ea typeface="NanumGothic"/>
+                        </a:rPr>
+                        <a:t>0.635</a:t>
+                      </a:r>
+                    </a:p>
+                  </a:txBody>
+                  <a:tcPr marL="38100" marR="38100" marT="0" marB="0" anchor="ctr">
+                    <a:solidFill>
+                      <a:srgbClr val="F2F4F7"/>
+                    </a:solidFill>
+                  </a:tcPr>
+                </a:tc>
+              </a:tr>
+              <a:tr h="310896">
+                <a:tc>
+                  <a:txBody>
+                    <a:bodyPr/>
+                    <a:lstStyle/>
+                    <a:p>
+                      <a:pPr algn="l"/>
+                      <a:r>
+                        <a:rPr sz="1150" b="0" i="0">
+                          <a:solidFill>
+                            <a:srgbClr val="222222"/>
+                          </a:solidFill>
+                          <a:latin typeface="NanumGothic"/>
+                          <a:ea typeface="NanumGothic"/>
+                        </a:rPr>
+                        <a:t>shapleyfl</a:t>
+                      </a:r>
+                    </a:p>
+                  </a:txBody>
+                  <a:tcPr marL="38100" marR="38100" marT="0" marB="0" anchor="ctr">
+                    <a:solidFill>
+                      <a:srgbClr val="FFFFFF"/>
+                    </a:solidFill>
+                  </a:tcPr>
+                </a:tc>
+                <a:tc>
+                  <a:txBody>
+                    <a:bodyPr/>
+                    <a:lstStyle/>
+                    <a:p>
+                      <a:pPr algn="ctr"/>
+                      <a:r>
+                        <a:rPr sz="1150" b="0" i="0">
+                          <a:solidFill>
+                            <a:srgbClr val="222222"/>
+                          </a:solidFill>
+                          <a:latin typeface="NanumGothic"/>
+                          <a:ea typeface="NanumGothic"/>
+                        </a:rPr>
+                        <a:t>0.702</a:t>
+                      </a:r>
+                    </a:p>
+                  </a:txBody>
+                  <a:tcPr marL="38100" marR="38100" marT="0" marB="0" anchor="ctr">
+                    <a:solidFill>
+                      <a:srgbClr val="FFFFFF"/>
+                    </a:solidFill>
+                  </a:tcPr>
+                </a:tc>
+                <a:tc>
+                  <a:txBody>
+                    <a:bodyPr/>
+                    <a:lstStyle/>
+                    <a:p>
+                      <a:pPr algn="ctr"/>
+                      <a:r>
+                        <a:rPr sz="1150" b="0" i="0">
+                          <a:solidFill>
+                            <a:srgbClr val="222222"/>
+                          </a:solidFill>
+                          <a:latin typeface="NanumGothic"/>
+                          <a:ea typeface="NanumGothic"/>
+                        </a:rPr>
+                        <a:t>0.645</a:t>
+                      </a:r>
+                    </a:p>
+                  </a:txBody>
+                  <a:tcPr marL="38100" marR="38100" marT="0" marB="0" anchor="ctr">
+                    <a:solidFill>
+                      <a:srgbClr val="FFFFFF"/>
+                    </a:solidFill>
+                  </a:tcPr>
+                </a:tc>
+                <a:tc>
+                  <a:txBody>
+                    <a:bodyPr/>
+                    <a:lstStyle/>
+                    <a:p>
+                      <a:pPr algn="ctr"/>
+                      <a:r>
+                        <a:rPr sz="1150" b="1" i="0">
+                          <a:solidFill>
+                            <a:srgbClr val="222222"/>
+                          </a:solidFill>
+                          <a:latin typeface="NanumGothic"/>
+                          <a:ea typeface="NanumGothic"/>
+                        </a:rPr>
+                        <a:t>0.645</a:t>
+                      </a:r>
+                    </a:p>
+                  </a:txBody>
+                  <a:tcPr marL="38100" marR="38100" marT="0" marB="0" anchor="ctr">
+                    <a:solidFill>
+                      <a:srgbClr val="FFFFFF"/>
+                    </a:solidFill>
+                  </a:tcPr>
+                </a:tc>
+                <a:tc>
+                  <a:txBody>
+                    <a:bodyPr/>
+                    <a:lstStyle/>
+                    <a:p>
+                      <a:pPr algn="ctr"/>
+                      <a:r>
+                        <a:rPr sz="1150" b="0" i="0">
+                          <a:solidFill>
+                            <a:srgbClr val="222222"/>
+                          </a:solidFill>
+                          <a:latin typeface="NanumGothic"/>
+                          <a:ea typeface="NanumGothic"/>
+                        </a:rPr>
+                        <a:t>0.622</a:t>
+                      </a:r>
+                    </a:p>
+                  </a:txBody>
+                  <a:tcPr marL="38100" marR="38100" marT="0" marB="0" anchor="ctr">
+                    <a:solidFill>
+                      <a:srgbClr val="FFFFFF"/>
+                    </a:solidFill>
+                  </a:tcPr>
+                </a:tc>
+              </a:tr>
+              <a:tr h="310896">
+                <a:tc>
+                  <a:txBody>
+                    <a:bodyPr/>
+                    <a:lstStyle/>
+                    <a:p>
+                      <a:pPr algn="l"/>
+                      <a:r>
+                        <a:rPr sz="1150" b="0" i="0">
+                          <a:solidFill>
+                            <a:srgbClr val="222222"/>
+                          </a:solidFill>
+                          <a:latin typeface="NanumGothic"/>
+                          <a:ea typeface="NanumGothic"/>
+                        </a:rPr>
+                        <a:t>fedif</a:t>
+                      </a:r>
+                    </a:p>
+                  </a:txBody>
+                  <a:tcPr marL="38100" marR="38100" marT="0" marB="0" anchor="ctr">
+                    <a:solidFill>
+                      <a:srgbClr val="F2F4F7"/>
+                    </a:solidFill>
+                  </a:tcPr>
+                </a:tc>
+                <a:tc>
+                  <a:txBody>
+                    <a:bodyPr/>
+                    <a:lstStyle/>
+                    <a:p>
+                      <a:pPr algn="ctr"/>
+                      <a:r>
+                        <a:rPr sz="1150" b="0" i="0">
+                          <a:solidFill>
+                            <a:srgbClr val="222222"/>
+                          </a:solidFill>
+                          <a:latin typeface="NanumGothic"/>
+                          <a:ea typeface="NanumGothic"/>
+                        </a:rPr>
+                        <a:t>0.685</a:t>
+                      </a:r>
+                    </a:p>
+                  </a:txBody>
+                  <a:tcPr marL="38100" marR="38100" marT="0" marB="0" anchor="ctr">
+                    <a:solidFill>
+                      <a:srgbClr val="F2F4F7"/>
+                    </a:solidFill>
+                  </a:tcPr>
+                </a:tc>
+                <a:tc>
+                  <a:txBody>
+                    <a:bodyPr/>
+                    <a:lstStyle/>
+                    <a:p>
+                      <a:pPr algn="ctr"/>
+                      <a:r>
+                        <a:rPr sz="1150" b="0" i="0">
+                          <a:solidFill>
+                            <a:srgbClr val="222222"/>
+                          </a:solidFill>
+                          <a:latin typeface="NanumGothic"/>
+                          <a:ea typeface="NanumGothic"/>
+                        </a:rPr>
+                        <a:t>0.654</a:t>
+                      </a:r>
+                    </a:p>
+                  </a:txBody>
+                  <a:tcPr marL="38100" marR="38100" marT="0" marB="0" anchor="ctr">
+                    <a:solidFill>
+                      <a:srgbClr val="F2F4F7"/>
+                    </a:solidFill>
+                  </a:tcPr>
+                </a:tc>
+                <a:tc>
+                  <a:txBody>
+                    <a:bodyPr/>
+                    <a:lstStyle/>
+                    <a:p>
+                      <a:pPr algn="ctr"/>
+                      <a:r>
+                        <a:rPr sz="1150" b="0" i="0">
+                          <a:solidFill>
+                            <a:srgbClr val="222222"/>
+                          </a:solidFill>
+                          <a:latin typeface="NanumGothic"/>
+                          <a:ea typeface="NanumGothic"/>
+                        </a:rPr>
+                        <a:t>0.624</a:t>
+                      </a:r>
+                    </a:p>
+                  </a:txBody>
+                  <a:tcPr marL="38100" marR="38100" marT="0" marB="0" anchor="ctr">
+                    <a:solidFill>
+                      <a:srgbClr val="F2F4F7"/>
+                    </a:solidFill>
+                  </a:tcPr>
+                </a:tc>
+                <a:tc>
+                  <a:txBody>
+                    <a:bodyPr/>
+                    <a:lstStyle/>
+                    <a:p>
+                      <a:pPr algn="ctr"/>
+                      <a:r>
+                        <a:rPr sz="1150" b="0" i="0">
+                          <a:solidFill>
+                            <a:srgbClr val="222222"/>
+                          </a:solidFill>
+                          <a:latin typeface="NanumGothic"/>
+                          <a:ea typeface="NanumGothic"/>
+                        </a:rPr>
+                        <a:t>0.623</a:t>
+                      </a:r>
+                    </a:p>
+                  </a:txBody>
+                  <a:tcPr marL="38100" marR="38100" marT="0" marB="0" anchor="ctr">
+                    <a:solidFill>
+                      <a:srgbClr val="F2F4F7"/>
+                    </a:solidFill>
+                  </a:tcPr>
+                </a:tc>
+              </a:tr>
+              <a:tr h="310896">
+                <a:tc>
+                  <a:txBody>
+                    <a:bodyPr/>
+                    <a:lstStyle/>
+                    <a:p>
+                      <a:pPr algn="l"/>
+                      <a:r>
+                        <a:rPr sz="1150" b="0" i="0">
+                          <a:solidFill>
+                            <a:srgbClr val="222222"/>
+                          </a:solidFill>
+                          <a:latin typeface="NanumGothic"/>
+                          <a:ea typeface="NanumGothic"/>
+                        </a:rPr>
+                        <a:t>sfedavg</a:t>
+                      </a:r>
+                    </a:p>
+                  </a:txBody>
+                  <a:tcPr marL="38100" marR="38100" marT="0" marB="0" anchor="ctr">
+                    <a:solidFill>
+                      <a:srgbClr val="FFFFFF"/>
+                    </a:solidFill>
+                  </a:tcPr>
+                </a:tc>
+                <a:tc>
+                  <a:txBody>
+                    <a:bodyPr/>
+                    <a:lstStyle/>
+                    <a:p>
+                      <a:pPr algn="ctr"/>
+                      <a:r>
+                        <a:rPr sz="1150" b="0" i="0">
+                          <a:solidFill>
+                            <a:srgbClr val="222222"/>
+                          </a:solidFill>
+                          <a:latin typeface="NanumGothic"/>
+                          <a:ea typeface="NanumGothic"/>
+                        </a:rPr>
+                        <a:t>0.695</a:t>
+                      </a:r>
+                    </a:p>
+                  </a:txBody>
+                  <a:tcPr marL="38100" marR="38100" marT="0" marB="0" anchor="ctr">
+                    <a:solidFill>
+                      <a:srgbClr val="FFFFFF"/>
+                    </a:solidFill>
+                  </a:tcPr>
+                </a:tc>
+                <a:tc>
+                  <a:txBody>
+                    <a:bodyPr/>
+                    <a:lstStyle/>
+                    <a:p>
+                      <a:pPr algn="ctr"/>
+                      <a:r>
+                        <a:rPr sz="1150" b="0" i="0">
+                          <a:solidFill>
+                            <a:srgbClr val="222222"/>
+                          </a:solidFill>
+                          <a:latin typeface="NanumGothic"/>
+                          <a:ea typeface="NanumGothic"/>
+                        </a:rPr>
+                        <a:t>0.655</a:t>
+                      </a:r>
+                    </a:p>
+                  </a:txBody>
+                  <a:tcPr marL="38100" marR="38100" marT="0" marB="0" anchor="ctr">
+                    <a:solidFill>
+                      <a:srgbClr val="FFFFFF"/>
+                    </a:solidFill>
+                  </a:tcPr>
+                </a:tc>
+                <a:tc>
+                  <a:txBody>
+                    <a:bodyPr/>
+                    <a:lstStyle/>
+                    <a:p>
+                      <a:pPr algn="ctr"/>
+                      <a:r>
+                        <a:rPr sz="1150" b="0" i="0">
+                          <a:solidFill>
+                            <a:srgbClr val="222222"/>
+                          </a:solidFill>
+                          <a:latin typeface="NanumGothic"/>
+                          <a:ea typeface="NanumGothic"/>
+                        </a:rPr>
+                        <a:t>0.510</a:t>
+                      </a:r>
+                    </a:p>
+                  </a:txBody>
+                  <a:tcPr marL="38100" marR="38100" marT="0" marB="0" anchor="ctr">
+                    <a:solidFill>
+                      <a:srgbClr val="FFFFFF"/>
+                    </a:solidFill>
+                  </a:tcPr>
+                </a:tc>
+                <a:tc>
+                  <a:txBody>
+                    <a:bodyPr/>
+                    <a:lstStyle/>
+                    <a:p>
+                      <a:pPr algn="ctr"/>
+                      <a:r>
+                        <a:rPr sz="1150" b="0" i="0">
+                          <a:solidFill>
+                            <a:srgbClr val="222222"/>
+                          </a:solidFill>
+                          <a:latin typeface="NanumGothic"/>
+                          <a:ea typeface="NanumGothic"/>
+                        </a:rPr>
+                        <a:t>0.598</a:t>
+                      </a:r>
+                    </a:p>
+                  </a:txBody>
+                  <a:tcPr marL="38100" marR="38100" marT="0" marB="0" anchor="ctr">
+                    <a:solidFill>
+                      <a:srgbClr val="FFFFFF"/>
+                    </a:solidFill>
+                  </a:tcPr>
+                </a:tc>
+              </a:tr>
+            </a:tbl>
+          </a:graphicData>
+        </a:graphic>
+      </p:graphicFrame>
+      <p:sp>
+        <p:nvSpPr>
+          <p:cNvPr id="5" name="TextBox 4"/>
+          <p:cNvSpPr txBox="1"/>
+          <p:nvPr/>
+        </p:nvSpPr>
+        <p:spPr>
+          <a:xfrm>
+            <a:off x="502920" y="4983480"/>
+            <a:ext cx="11155680" cy="822960"/>
+          </a:xfrm>
+          <a:prstGeom prst="rect">
+            <a:avLst/>
+          </a:prstGeom>
+          <a:noFill/>
+        </p:spPr>
+        <p:txBody>
+          <a:bodyPr wrap="square" lIns="25400" rIns="25400" tIns="12700" bIns="12700" anchor="t">
+            <a:spAutoFit/>
+          </a:bodyPr>
+          <a:lstStyle/>
+          <a:p>
+            <a:pPr algn="l">
+              <a:lnSpc>
+                <a:spcPct val="125000"/>
+              </a:lnSpc>
+            </a:pPr>
+            <a:r>
+              <a:rPr sz="1350" b="1" i="0">
+                <a:solidFill>
+                  <a:srgbClr val="1F2A37"/>
+                </a:solidFill>
+                <a:latin typeface="NanumGothic"/>
+                <a:ea typeface="NanumGothic"/>
+              </a:rPr>
+              <a:t>오염(grad_noise · label_flip)에서 기여도-가중이 정확도를 회복(grad_noise 0.499 → 0.62+); clean은 parity~소폭↑.</a:t>
+            </a:r>
+          </a:p>
+          <a:p>
+            <a:pPr algn="l">
+              <a:lnSpc>
+                <a:spcPct val="125000"/>
+              </a:lnSpc>
+            </a:pPr>
+            <a:r>
+              <a:rPr sz="1200" b="0" i="0">
+                <a:solidFill>
+                  <a:srgbClr val="7A7A7A"/>
+                </a:solidFill>
+                <a:latin typeface="NanumGothic"/>
+                <a:ea typeface="NanumGothic"/>
+              </a:rPr>
+              <a:t>flirds_repl/add는 크기-skew(dir1) 전용 arm. arm 중 항상 최강은 아님(grad_noise는 shapleyfl 0.645).</a:t>
+            </a:r>
+          </a:p>
+        </p:txBody>
+      </p:sp>
+      <p:sp>
+        <p:nvSpPr>
+          <p:cNvPr id="6" name="TextBox 5"/>
+          <p:cNvSpPr txBox="1"/>
+          <p:nvPr/>
+        </p:nvSpPr>
+        <p:spPr>
+          <a:xfrm>
+            <a:off x="11551920" y="6510528"/>
+            <a:ext cx="457200" cy="274320"/>
+          </a:xfrm>
+          <a:prstGeom prst="rect">
+            <a:avLst/>
+          </a:prstGeom>
+          <a:noFill/>
+        </p:spPr>
+        <p:txBody>
+          <a:bodyPr wrap="none">
+            <a:spAutoFit/>
+          </a:bodyPr>
+          <a:lstStyle/>
+          <a:p>
+            <a:pPr algn="r"/>
+            <a:r>
+              <a:rPr sz="900" b="0" i="0">
+                <a:solidFill>
+                  <a:srgbClr val="7A7A7A"/>
+                </a:solidFill>
+                <a:latin typeface="NanumGothic"/>
+                <a:ea typeface="NanumGothic"/>
+              </a:rPr>
+              <a:t>13</a:t>
+            </a:r>
+          </a:p>
+        </p:txBody>
+      </p:sp>
+    </p:spTree>
+  </p:cSld>
+  <p:clrMapOvr>
+    <a:masterClrMapping/>
+  </p:clrMapOvr>
+</p:sld>
+</file>
+
+<file path=ppt/slides/slide17.xml><?xml version="1.0" encoding="utf-8"?>
+<p:sld xmlns:a="http://schemas.openxmlformats.org/drawingml/2006/main" xmlns:p="http://schemas.openxmlformats.org/presentationml/2006/main" xmlns:r="http://schemas.openxmlformats.org/officeDocument/2006/relationships">
+  <p:cSld>
+    <p:spTree>
+      <p:nvGrpSpPr>
+        <p:cNvPr id="1" name=""/>
+        <p:cNvGrpSpPr/>
+        <p:nvPr/>
+      </p:nvGrpSpPr>
+      <p:grpSpPr/>
+      <p:sp>
+        <p:nvSpPr>
+          <p:cNvPr id="2" name="TextBox 1"/>
+          <p:cNvSpPr txBox="1"/>
+          <p:nvPr/>
+        </p:nvSpPr>
+        <p:spPr>
+          <a:xfrm>
+            <a:off x="411480" y="292608"/>
+            <a:ext cx="11338560" cy="731520"/>
+          </a:xfrm>
+          <a:prstGeom prst="rect">
+            <a:avLst/>
+          </a:prstGeom>
+          <a:noFill/>
+        </p:spPr>
+        <p:txBody>
+          <a:bodyPr wrap="square" lIns="25400" rIns="25400" tIns="12700" bIns="12700" anchor="t">
+            <a:spAutoFit/>
+          </a:bodyPr>
+          <a:lstStyle/>
+          <a:p>
+            <a:pPr algn="l">
+              <a:lnSpc>
+                <a:spcPct val="100000"/>
+              </a:lnSpc>
+            </a:pPr>
+            <a:r>
+              <a:rPr sz="2600" b="1" i="0">
+                <a:solidFill>
+                  <a:srgbClr val="1F2A37"/>
+                </a:solidFill>
+                <a:latin typeface="NanumGothic"/>
+                <a:ea typeface="NanumGothic"/>
+              </a:rPr>
+              <a:t>Convergence — rounds-to-target</a:t>
+            </a:r>
+          </a:p>
+        </p:txBody>
+      </p:sp>
+      <p:sp>
+        <p:nvSpPr>
+          <p:cNvPr id="3" name="TextBox 2"/>
+          <p:cNvSpPr txBox="1"/>
+          <p:nvPr/>
+        </p:nvSpPr>
+        <p:spPr>
+          <a:xfrm>
+            <a:off x="411480" y="1078992"/>
+            <a:ext cx="11338560" cy="457200"/>
+          </a:xfrm>
+          <a:prstGeom prst="rect">
+            <a:avLst/>
+          </a:prstGeom>
+          <a:noFill/>
+        </p:spPr>
+        <p:txBody>
+          <a:bodyPr wrap="square" lIns="25400" rIns="25400" tIns="12700" bIns="12700" anchor="t">
+            <a:spAutoFit/>
+          </a:bodyPr>
+          <a:lstStyle/>
+          <a:p>
+            <a:pPr algn="l">
+              <a:lnSpc>
+                <a:spcPct val="105000"/>
+              </a:lnSpc>
+            </a:pPr>
+            <a:r>
+              <a:rPr sz="1200" b="0" i="0">
+                <a:solidFill>
+                  <a:srgbClr val="3C4654"/>
+                </a:solidFill>
+                <a:latin typeface="NanumGothic"/>
+                <a:ea typeface="NanumGothic"/>
+              </a:rPr>
+              <a:t>목표 정확도/손실에 도달한 라운드(↓). 효과는 오염·대형 모델에서 두드러짐.</a:t>
+            </a:r>
+          </a:p>
+        </p:txBody>
+      </p:sp>
+      <p:graphicFrame>
+        <p:nvGraphicFramePr>
+          <p:cNvPr id="4" name="Table 3"/>
+          <p:cNvGraphicFramePr>
+            <a:graphicFrameLocks noGrp="1"/>
+          </p:cNvGraphicFramePr>
+          <p:nvPr/>
+        </p:nvGraphicFramePr>
+        <p:xfrm>
+          <a:off x="411480" y="2103120"/>
+          <a:ext cx="11384277" cy="2286000"/>
+        </p:xfrm>
+        <a:graphic>
+          <a:graphicData uri="http://schemas.openxmlformats.org/drawingml/2006/table">
+            <a:tbl>
+              <a:tblPr>
+                <a:tableStyleId>{5C22544A-7EE6-4342-B048-85BDC9FD1C3A}</a:tableStyleId>
+              </a:tblPr>
+              <a:tblGrid>
+                <a:gridCol w="4437939"/>
+                <a:gridCol w="2218969"/>
+                <a:gridCol w="2218969"/>
+                <a:gridCol w="2508400"/>
+              </a:tblGrid>
+              <a:tr h="457200">
+                <a:tc>
+                  <a:txBody>
+                    <a:bodyPr/>
+                    <a:lstStyle/>
+                    <a:p>
+                      <a:pPr algn="l"/>
+                      <a:r>
+                        <a:rPr sz="1300" b="1" i="0">
+                          <a:solidFill>
+                            <a:srgbClr val="FFFFFF"/>
+                          </a:solidFill>
+                          <a:latin typeface="NanumGothic"/>
+                          <a:ea typeface="NanumGothic"/>
+                        </a:rPr>
+                        <a:t>설정</a:t>
+                      </a:r>
+                    </a:p>
+                  </a:txBody>
+                  <a:tcPr marL="38100" marR="38100" marT="12700" marB="12700" anchor="ctr">
+                    <a:solidFill>
+                      <a:srgbClr val="33475B"/>
+                    </a:solidFill>
+                  </a:tcPr>
+                </a:tc>
+                <a:tc>
+                  <a:txBody>
+                    <a:bodyPr/>
+                    <a:lstStyle/>
+                    <a:p>
+                      <a:pPr algn="ctr"/>
+                      <a:r>
+                        <a:rPr sz="1300" b="1" i="0">
+                          <a:solidFill>
+                            <a:srgbClr val="FFFFFF"/>
+                          </a:solidFill>
+                          <a:latin typeface="NanumGothic"/>
+                          <a:ea typeface="NanumGothic"/>
+                        </a:rPr>
+                        <a:t>vanilla</a:t>
+                      </a:r>
+                    </a:p>
+                  </a:txBody>
+                  <a:tcPr marL="38100" marR="38100" marT="12700" marB="12700" anchor="ctr">
+                    <a:solidFill>
+                      <a:srgbClr val="33475B"/>
+                    </a:solidFill>
+                  </a:tcPr>
+                </a:tc>
+                <a:tc>
+                  <a:txBody>
+                    <a:bodyPr/>
+                    <a:lstStyle/>
+                    <a:p>
+                      <a:pPr algn="ctr"/>
+                      <a:r>
+                        <a:rPr sz="1300" b="1" i="0">
+                          <a:solidFill>
+                            <a:srgbClr val="FFFFFF"/>
+                          </a:solidFill>
+                          <a:latin typeface="NanumGothic"/>
+                          <a:ea typeface="NanumGothic"/>
+                        </a:rPr>
+                        <a:t>flirds</a:t>
+                      </a:r>
+                    </a:p>
+                  </a:txBody>
+                  <a:tcPr marL="38100" marR="38100" marT="12700" marB="12700" anchor="ctr">
+                    <a:solidFill>
+                      <a:srgbClr val="33475B"/>
+                    </a:solidFill>
+                  </a:tcPr>
+                </a:tc>
+                <a:tc>
+                  <a:txBody>
+                    <a:bodyPr/>
+                    <a:lstStyle/>
+                    <a:p>
+                      <a:pPr algn="ctr"/>
+                      <a:r>
+                        <a:rPr sz="1300" b="1" i="0">
+                          <a:solidFill>
+                            <a:srgbClr val="FFFFFF"/>
+                          </a:solidFill>
+                          <a:latin typeface="NanumGothic"/>
+                          <a:ea typeface="NanumGothic"/>
+                        </a:rPr>
+                        <a:t>효과</a:t>
+                      </a:r>
+                    </a:p>
+                  </a:txBody>
+                  <a:tcPr marL="38100" marR="38100" marT="12700" marB="12700" anchor="ctr">
+                    <a:solidFill>
+                      <a:srgbClr val="33475B"/>
+                    </a:solidFill>
+                  </a:tcPr>
+                </a:tc>
+              </a:tr>
+              <a:tr h="457200">
+                <a:tc>
+                  <a:txBody>
+                    <a:bodyPr/>
+                    <a:lstStyle/>
+                    <a:p>
+                      <a:pPr algn="l"/>
+                      <a:r>
+                        <a:rPr sz="1300" b="0" i="0">
+                          <a:solidFill>
+                            <a:srgbClr val="222222"/>
+                          </a:solidFill>
+                          <a:latin typeface="NanumGothic"/>
+                          <a:ea typeface="NanumGothic"/>
+                        </a:rPr>
+                        <a:t>LLM 7B std (rounds-to-val-loss)</a:t>
+                      </a:r>
+                    </a:p>
+                  </a:txBody>
+                  <a:tcPr marL="38100" marR="38100" marT="0" marB="0" anchor="ctr">
+                    <a:solidFill>
+                      <a:srgbClr val="FFFFFF"/>
+                    </a:solidFill>
+                  </a:tcPr>
+                </a:tc>
+                <a:tc>
+                  <a:txBody>
+                    <a:bodyPr/>
+                    <a:lstStyle/>
+                    <a:p>
+                      <a:pPr algn="ctr"/>
+                      <a:r>
+                        <a:rPr sz="1300" b="0" i="0">
+                          <a:solidFill>
+                            <a:srgbClr val="222222"/>
+                          </a:solidFill>
+                          <a:latin typeface="NanumGothic"/>
+                          <a:ea typeface="NanumGothic"/>
+                        </a:rPr>
+                        <a:t>184.7</a:t>
+                      </a:r>
+                    </a:p>
+                  </a:txBody>
+                  <a:tcPr marL="38100" marR="38100" marT="0" marB="0" anchor="ctr">
+                    <a:solidFill>
+                      <a:srgbClr val="FFFFFF"/>
+                    </a:solidFill>
+                  </a:tcPr>
+                </a:tc>
+                <a:tc>
+                  <a:txBody>
+                    <a:bodyPr/>
+                    <a:lstStyle/>
+                    <a:p>
+                      <a:pPr algn="ctr"/>
+                      <a:r>
+                        <a:rPr sz="1300" b="1" i="0">
+                          <a:solidFill>
+                            <a:srgbClr val="222222"/>
+                          </a:solidFill>
+                          <a:latin typeface="NanumGothic"/>
+                          <a:ea typeface="NanumGothic"/>
+                        </a:rPr>
+                        <a:t>153.0</a:t>
+                      </a:r>
+                    </a:p>
+                  </a:txBody>
+                  <a:tcPr marL="38100" marR="38100" marT="0" marB="0" anchor="ctr">
+                    <a:solidFill>
+                      <a:srgbClr val="FFFFFF"/>
+                    </a:solidFill>
+                  </a:tcPr>
+                </a:tc>
+                <a:tc>
+                  <a:txBody>
+                    <a:bodyPr/>
+                    <a:lstStyle/>
+                    <a:p>
+                      <a:pPr algn="ctr"/>
+                      <a:r>
+                        <a:rPr sz="1300" b="0" i="0">
+                          <a:solidFill>
+                            <a:srgbClr val="222222"/>
+                          </a:solidFill>
+                          <a:latin typeface="NanumGothic"/>
+                          <a:ea typeface="NanumGothic"/>
+                        </a:rPr>
+                        <a:t>~17% ↓</a:t>
+                      </a:r>
+                    </a:p>
+                  </a:txBody>
+                  <a:tcPr marL="38100" marR="38100" marT="0" marB="0" anchor="ctr">
+                    <a:solidFill>
+                      <a:srgbClr val="FFFFFF"/>
+                    </a:solidFill>
+                  </a:tcPr>
+                </a:tc>
+              </a:tr>
+              <a:tr h="457200">
+                <a:tc>
+                  <a:txBody>
+                    <a:bodyPr/>
+                    <a:lstStyle/>
+                    <a:p>
+                      <a:pPr algn="l"/>
+                      <a:r>
+                        <a:rPr sz="1300" b="0" i="0">
+                          <a:solidFill>
+                            <a:srgbClr val="222222"/>
+                          </a:solidFill>
+                          <a:latin typeface="NanumGothic"/>
+                          <a:ea typeface="NanumGothic"/>
+                        </a:rPr>
+                        <a:t>CNN grad_noise</a:t>
+                      </a:r>
+                    </a:p>
+                  </a:txBody>
+                  <a:tcPr marL="38100" marR="38100" marT="0" marB="0" anchor="ctr">
+                    <a:solidFill>
+                      <a:srgbClr val="F2F4F7"/>
+                    </a:solidFill>
+                  </a:tcPr>
+                </a:tc>
+                <a:tc>
+                  <a:txBody>
+                    <a:bodyPr/>
+                    <a:lstStyle/>
+                    <a:p>
+                      <a:pPr algn="ctr"/>
+                      <a:r>
+                        <a:rPr sz="1300" b="0" i="0">
+                          <a:solidFill>
+                            <a:srgbClr val="222222"/>
+                          </a:solidFill>
+                          <a:latin typeface="NanumGothic"/>
+                          <a:ea typeface="NanumGothic"/>
+                        </a:rPr>
+                        <a:t>27.2</a:t>
+                      </a:r>
+                    </a:p>
+                  </a:txBody>
+                  <a:tcPr marL="38100" marR="38100" marT="0" marB="0" anchor="ctr">
+                    <a:solidFill>
+                      <a:srgbClr val="F2F4F7"/>
+                    </a:solidFill>
+                  </a:tcPr>
+                </a:tc>
+                <a:tc>
+                  <a:txBody>
+                    <a:bodyPr/>
+                    <a:lstStyle/>
+                    <a:p>
+                      <a:pPr algn="ctr"/>
+                      <a:r>
+                        <a:rPr sz="1300" b="1" i="0">
+                          <a:solidFill>
+                            <a:srgbClr val="222222"/>
+                          </a:solidFill>
+                          <a:latin typeface="NanumGothic"/>
+                          <a:ea typeface="NanumGothic"/>
+                        </a:rPr>
+                        <a:t>6.3</a:t>
+                      </a:r>
+                    </a:p>
+                  </a:txBody>
+                  <a:tcPr marL="38100" marR="38100" marT="0" marB="0" anchor="ctr">
+                    <a:solidFill>
+                      <a:srgbClr val="F2F4F7"/>
+                    </a:solidFill>
+                  </a:tcPr>
+                </a:tc>
+                <a:tc>
+                  <a:txBody>
+                    <a:bodyPr/>
+                    <a:lstStyle/>
+                    <a:p>
+                      <a:pPr algn="ctr"/>
+                      <a:r>
+                        <a:rPr sz="1300" b="0" i="0">
+                          <a:solidFill>
+                            <a:srgbClr val="222222"/>
+                          </a:solidFill>
+                          <a:latin typeface="NanumGothic"/>
+                          <a:ea typeface="NanumGothic"/>
+                        </a:rPr>
+                        <a:t>크게 ↓</a:t>
+                      </a:r>
+                    </a:p>
+                  </a:txBody>
+                  <a:tcPr marL="38100" marR="38100" marT="0" marB="0" anchor="ctr">
+                    <a:solidFill>
+                      <a:srgbClr val="F2F4F7"/>
+                    </a:solidFill>
+                  </a:tcPr>
+                </a:tc>
+              </a:tr>
+              <a:tr h="457200">
+                <a:tc>
+                  <a:txBody>
+                    <a:bodyPr/>
+                    <a:lstStyle/>
+                    <a:p>
+                      <a:pPr algn="l"/>
+                      <a:r>
+                        <a:rPr sz="1300" b="0" i="0">
+                          <a:solidFill>
+                            <a:srgbClr val="222222"/>
+                          </a:solidFill>
+                          <a:latin typeface="NanumGothic"/>
+                          <a:ea typeface="NanumGothic"/>
+                        </a:rPr>
+                        <a:t>CNN free-rider</a:t>
+                      </a:r>
+                    </a:p>
+                  </a:txBody>
+                  <a:tcPr marL="38100" marR="38100" marT="0" marB="0" anchor="ctr">
+                    <a:solidFill>
+                      <a:srgbClr val="FFFFFF"/>
+                    </a:solidFill>
+                  </a:tcPr>
+                </a:tc>
+                <a:tc>
+                  <a:txBody>
+                    <a:bodyPr/>
+                    <a:lstStyle/>
+                    <a:p>
+                      <a:pPr algn="ctr"/>
+                      <a:r>
+                        <a:rPr sz="1300" b="0" i="0">
+                          <a:solidFill>
+                            <a:srgbClr val="222222"/>
+                          </a:solidFill>
+                          <a:latin typeface="NanumGothic"/>
+                          <a:ea typeface="NanumGothic"/>
+                        </a:rPr>
+                        <a:t>41.2</a:t>
+                      </a:r>
+                    </a:p>
+                  </a:txBody>
+                  <a:tcPr marL="38100" marR="38100" marT="0" marB="0" anchor="ctr">
+                    <a:solidFill>
+                      <a:srgbClr val="FFFFFF"/>
+                    </a:solidFill>
+                  </a:tcPr>
+                </a:tc>
+                <a:tc>
+                  <a:txBody>
+                    <a:bodyPr/>
+                    <a:lstStyle/>
+                    <a:p>
+                      <a:pPr algn="ctr"/>
+                      <a:r>
+                        <a:rPr sz="1300" b="1" i="0">
+                          <a:solidFill>
+                            <a:srgbClr val="222222"/>
+                          </a:solidFill>
+                          <a:latin typeface="NanumGothic"/>
+                          <a:ea typeface="NanumGothic"/>
+                        </a:rPr>
+                        <a:t>7.7</a:t>
+                      </a:r>
+                    </a:p>
+                  </a:txBody>
+                  <a:tcPr marL="38100" marR="38100" marT="0" marB="0" anchor="ctr">
+                    <a:solidFill>
+                      <a:srgbClr val="FFFFFF"/>
+                    </a:solidFill>
+                  </a:tcPr>
+                </a:tc>
+                <a:tc>
+                  <a:txBody>
+                    <a:bodyPr/>
+                    <a:lstStyle/>
+                    <a:p>
+                      <a:pPr algn="ctr"/>
+                      <a:r>
+                        <a:rPr sz="1300" b="0" i="0">
+                          <a:solidFill>
+                            <a:srgbClr val="222222"/>
+                          </a:solidFill>
+                          <a:latin typeface="NanumGothic"/>
+                          <a:ea typeface="NanumGothic"/>
+                        </a:rPr>
+                        <a:t>크게 ↓</a:t>
+                      </a:r>
+                    </a:p>
+                  </a:txBody>
+                  <a:tcPr marL="38100" marR="38100" marT="0" marB="0" anchor="ctr">
+                    <a:solidFill>
+                      <a:srgbClr val="FFFFFF"/>
+                    </a:solidFill>
+                  </a:tcPr>
+                </a:tc>
+              </a:tr>
+              <a:tr h="457200">
+                <a:tc>
+                  <a:txBody>
+                    <a:bodyPr/>
+                    <a:lstStyle/>
+                    <a:p>
+                      <a:pPr algn="l"/>
+                      <a:r>
+                        <a:rPr sz="1300" b="0" i="0">
+                          <a:solidFill>
+                            <a:srgbClr val="222222"/>
+                          </a:solidFill>
+                          <a:latin typeface="NanumGothic"/>
+                          <a:ea typeface="NanumGothic"/>
+                        </a:rPr>
+                        <a:t>LLM 1B / 3B std</a:t>
+                      </a:r>
+                    </a:p>
+                  </a:txBody>
+                  <a:tcPr marL="38100" marR="38100" marT="0" marB="0" anchor="ctr">
+                    <a:solidFill>
+                      <a:srgbClr val="F2F4F7"/>
+                    </a:solidFill>
+                  </a:tcPr>
+                </a:tc>
+                <a:tc>
+                  <a:txBody>
+                    <a:bodyPr/>
+                    <a:lstStyle/>
+                    <a:p>
+                      <a:pPr algn="ctr"/>
+                      <a:r>
+                        <a:rPr sz="1300" b="0" i="0">
+                          <a:solidFill>
+                            <a:srgbClr val="222222"/>
+                          </a:solidFill>
+                          <a:latin typeface="NanumGothic"/>
+                          <a:ea typeface="NanumGothic"/>
+                        </a:rPr>
+                        <a:t>~199</a:t>
+                      </a:r>
+                    </a:p>
+                  </a:txBody>
+                  <a:tcPr marL="38100" marR="38100" marT="0" marB="0" anchor="ctr">
+                    <a:solidFill>
+                      <a:srgbClr val="F2F4F7"/>
+                    </a:solidFill>
+                  </a:tcPr>
+                </a:tc>
+                <a:tc>
+                  <a:txBody>
+                    <a:bodyPr/>
+                    <a:lstStyle/>
+                    <a:p>
+                      <a:pPr algn="ctr"/>
+                      <a:r>
+                        <a:rPr sz="1300" b="0" i="0">
+                          <a:solidFill>
+                            <a:srgbClr val="222222"/>
+                          </a:solidFill>
+                          <a:latin typeface="NanumGothic"/>
+                          <a:ea typeface="NanumGothic"/>
+                        </a:rPr>
+                        <a:t>~195</a:t>
+                      </a:r>
+                    </a:p>
+                  </a:txBody>
+                  <a:tcPr marL="38100" marR="38100" marT="0" marB="0" anchor="ctr">
+                    <a:solidFill>
+                      <a:srgbClr val="F2F4F7"/>
+                    </a:solidFill>
+                  </a:tcPr>
+                </a:tc>
+                <a:tc>
+                  <a:txBody>
+                    <a:bodyPr/>
+                    <a:lstStyle/>
+                    <a:p>
+                      <a:pPr algn="ctr"/>
+                      <a:r>
+                        <a:rPr sz="1300" b="0" i="0">
+                          <a:solidFill>
+                            <a:srgbClr val="222222"/>
+                          </a:solidFill>
+                          <a:latin typeface="NanumGothic"/>
+                          <a:ea typeface="NanumGothic"/>
+                        </a:rPr>
+                        <a:t>≈ 동률</a:t>
+                      </a:r>
+                    </a:p>
+                  </a:txBody>
+                  <a:tcPr marL="38100" marR="38100" marT="0" marB="0" anchor="ctr">
+                    <a:solidFill>
+                      <a:srgbClr val="F2F4F7"/>
+                    </a:solidFill>
+                  </a:tcPr>
+                </a:tc>
+              </a:tr>
+            </a:tbl>
+          </a:graphicData>
+        </a:graphic>
+      </p:graphicFrame>
+      <p:sp>
+        <p:nvSpPr>
+          <p:cNvPr id="5" name="TextBox 4"/>
+          <p:cNvSpPr txBox="1"/>
+          <p:nvPr/>
+        </p:nvSpPr>
+        <p:spPr>
+          <a:xfrm>
+            <a:off x="502920" y="4754880"/>
+            <a:ext cx="11155680" cy="822960"/>
+          </a:xfrm>
+          <a:prstGeom prst="rect">
+            <a:avLst/>
+          </a:prstGeom>
+          <a:noFill/>
+        </p:spPr>
+        <p:txBody>
+          <a:bodyPr wrap="square" lIns="25400" rIns="25400" tIns="12700" bIns="12700" anchor="t">
+            <a:spAutoFit/>
+          </a:bodyPr>
+          <a:lstStyle/>
+          <a:p>
+            <a:pPr algn="l">
+              <a:lnSpc>
+                <a:spcPct val="130000"/>
+              </a:lnSpc>
+            </a:pPr>
+            <a:r>
+              <a:rPr sz="1400" b="1" i="0">
+                <a:solidFill>
+                  <a:srgbClr val="1F2A37"/>
+                </a:solidFill>
+                <a:latin typeface="NanumGothic"/>
+                <a:ea typeface="NanumGothic"/>
+              </a:rPr>
+              <a:t>clean-IID는 거의 동률; 오염·대형(7B)에서 기여도-가중이 도달을 앞당김 (단 7B는 seed std 겹침).</a:t>
+            </a:r>
+          </a:p>
+          <a:p>
+            <a:pPr algn="l">
+              <a:lnSpc>
+                <a:spcPct val="130000"/>
+              </a:lnSpc>
+            </a:pPr>
+            <a:r>
+              <a:rPr sz="1250" b="0" i="0">
+                <a:solidFill>
+                  <a:srgbClr val="222222"/>
+                </a:solidFill>
+                <a:latin typeface="NanumGothic"/>
+                <a:ea typeface="NanumGothic"/>
+              </a:rPr>
+              <a:t>flirds = 곱셈/교체 가중(설정별 최적 arm).</a:t>
+            </a:r>
+          </a:p>
+        </p:txBody>
+      </p:sp>
+      <p:sp>
+        <p:nvSpPr>
+          <p:cNvPr id="6" name="TextBox 5"/>
+          <p:cNvSpPr txBox="1"/>
+          <p:nvPr/>
+        </p:nvSpPr>
+        <p:spPr>
+          <a:xfrm>
+            <a:off x="11551920" y="6510528"/>
+            <a:ext cx="457200" cy="274320"/>
+          </a:xfrm>
+          <a:prstGeom prst="rect">
+            <a:avLst/>
+          </a:prstGeom>
+          <a:noFill/>
+        </p:spPr>
+        <p:txBody>
+          <a:bodyPr wrap="none">
+            <a:spAutoFit/>
+          </a:bodyPr>
+          <a:lstStyle/>
+          <a:p>
+            <a:pPr algn="r"/>
+            <a:r>
+              <a:rPr sz="900" b="0" i="0">
+                <a:solidFill>
+                  <a:srgbClr val="7A7A7A"/>
+                </a:solidFill>
+                <a:latin typeface="NanumGothic"/>
+                <a:ea typeface="NanumGothic"/>
+              </a:rPr>
+              <a:t>14</a:t>
             </a:r>
           </a:p>
         </p:txBody>
@@ -6365,7 +11694,7 @@
                 <a:latin typeface="NanumGothic"/>
                 <a:ea typeface="NanumGothic"/>
               </a:rPr>
-              <a:t>3</a:t>
+              <a:t>2</a:t>
             </a:r>
           </a:p>
         </p:txBody>
@@ -7127,7 +12456,7 @@
                 <a:latin typeface="NanumGothic"/>
                 <a:ea typeface="NanumGothic"/>
               </a:rPr>
-              <a:t>4</a:t>
+              <a:t>3</a:t>
             </a:r>
           </a:p>
         </p:txBody>
@@ -7731,7 +13060,7 @@
                 <a:latin typeface="NanumGothic"/>
                 <a:ea typeface="NanumGothic"/>
               </a:rPr>
-              <a:t>5</a:t>
+              <a:t>4</a:t>
             </a:r>
           </a:p>
         </p:txBody>
@@ -8036,7 +13365,7 @@
                 <a:latin typeface="NanumGothic"/>
                 <a:ea typeface="NanumGothic"/>
               </a:rPr>
-              <a:t>6</a:t>
+              <a:t>5</a:t>
             </a:r>
           </a:p>
         </p:txBody>
@@ -8982,7 +14311,7 @@
                 <a:latin typeface="NanumGothic"/>
                 <a:ea typeface="NanumGothic"/>
               </a:rPr>
-              <a:t>8</a:t>
+              <a:t>6</a:t>
             </a:r>
           </a:p>
         </p:txBody>
@@ -9917,7 +15246,7 @@
                 <a:latin typeface="NanumGothic"/>
                 <a:ea typeface="NanumGothic"/>
               </a:rPr>
-              <a:t>9</a:t>
+              <a:t>7</a:t>
             </a:r>
           </a:p>
         </p:txBody>
@@ -10102,1286 +15431,6 @@
           </a:p>
         </p:txBody>
       </p:sp>
-      <p:graphicFrame>
-        <p:nvGraphicFramePr>
-          <p:cNvPr id="4" name="Table 3"/>
-          <p:cNvGraphicFramePr>
-            <a:graphicFrameLocks noGrp="1"/>
-          </p:cNvGraphicFramePr>
-          <p:nvPr>
-            <p:extLst>
-              <p:ext uri="{D42A27DB-BD31-4B8C-83A1-F6EECF244321}">
-                <p14:modId xmlns:p14="http://schemas.microsoft.com/office/powerpoint/2010/main" val="2885213719"/>
-              </p:ext>
-            </p:extLst>
-          </p:nvPr>
-        </p:nvGraphicFramePr>
-        <p:xfrm>
-          <a:off x="411480" y="1965960"/>
-          <a:ext cx="11384276" cy="2926080"/>
-        </p:xfrm>
-        <a:graphic>
-          <a:graphicData uri="http://schemas.openxmlformats.org/drawingml/2006/table">
-            <a:tbl>
-              <a:tblPr>
-                <a:tableStyleId>{5C22544A-7EE6-4342-B048-85BDC9FD1C3A}</a:tableStyleId>
-              </a:tblPr>
-              <a:tblGrid>
-                <a:gridCol w="2157021">
-                  <a:extLst>
-                    <a:ext uri="{9D8B030D-6E8A-4147-A177-3AD203B41FA5}">
-                      <a16:colId xmlns:a16="http://schemas.microsoft.com/office/drawing/2014/main" val="20000"/>
-                    </a:ext>
-                  </a:extLst>
-                </a:gridCol>
-                <a:gridCol w="1797517">
-                  <a:extLst>
-                    <a:ext uri="{9D8B030D-6E8A-4147-A177-3AD203B41FA5}">
-                      <a16:colId xmlns:a16="http://schemas.microsoft.com/office/drawing/2014/main" val="20001"/>
-                    </a:ext>
-                  </a:extLst>
-                </a:gridCol>
-                <a:gridCol w="1797517">
-                  <a:extLst>
-                    <a:ext uri="{9D8B030D-6E8A-4147-A177-3AD203B41FA5}">
-                      <a16:colId xmlns:a16="http://schemas.microsoft.com/office/drawing/2014/main" val="20002"/>
-                    </a:ext>
-                  </a:extLst>
-                </a:gridCol>
-                <a:gridCol w="1797517">
-                  <a:extLst>
-                    <a:ext uri="{9D8B030D-6E8A-4147-A177-3AD203B41FA5}">
-                      <a16:colId xmlns:a16="http://schemas.microsoft.com/office/drawing/2014/main" val="20003"/>
-                    </a:ext>
-                  </a:extLst>
-                </a:gridCol>
-                <a:gridCol w="1917352">
-                  <a:extLst>
-                    <a:ext uri="{9D8B030D-6E8A-4147-A177-3AD203B41FA5}">
-                      <a16:colId xmlns:a16="http://schemas.microsoft.com/office/drawing/2014/main" val="20004"/>
-                    </a:ext>
-                  </a:extLst>
-                </a:gridCol>
-                <a:gridCol w="1917352">
-                  <a:extLst>
-                    <a:ext uri="{9D8B030D-6E8A-4147-A177-3AD203B41FA5}">
-                      <a16:colId xmlns:a16="http://schemas.microsoft.com/office/drawing/2014/main" val="20005"/>
-                    </a:ext>
-                  </a:extLst>
-                </a:gridCol>
-              </a:tblGrid>
-              <a:tr h="365760">
-                <a:tc>
-                  <a:txBody>
-                    <a:bodyPr/>
-                    <a:lstStyle/>
-                    <a:p>
-                      <a:pPr algn="l"/>
-                      <a:r>
-                        <a:rPr sz="1200" b="1" i="0" dirty="0">
-                          <a:solidFill>
-                            <a:srgbClr val="FFFFFF"/>
-                          </a:solidFill>
-                          <a:latin typeface="NanumGothic"/>
-                          <a:ea typeface="NanumGothic"/>
-                        </a:rPr>
-                        <a:t>method</a:t>
-                      </a:r>
-                    </a:p>
-                  </a:txBody>
-                  <a:tcPr marL="38100" marR="38100" marT="12700" marB="12700" anchor="ctr">
-                    <a:solidFill>
-                      <a:srgbClr val="33475B"/>
-                    </a:solidFill>
-                  </a:tcPr>
-                </a:tc>
-                <a:tc>
-                  <a:txBody>
-                    <a:bodyPr/>
-                    <a:lstStyle/>
-                    <a:p>
-                      <a:pPr algn="ctr"/>
-                      <a:r>
-                        <a:rPr sz="1200" b="1" i="0">
-                          <a:solidFill>
-                            <a:srgbClr val="FFFFFF"/>
-                          </a:solidFill>
-                          <a:latin typeface="NanumGothic"/>
-                          <a:ea typeface="NanumGothic"/>
-                        </a:rPr>
-                        <a:t>1B std</a:t>
-                      </a:r>
-                    </a:p>
-                  </a:txBody>
-                  <a:tcPr marL="38100" marR="38100" marT="12700" marB="12700" anchor="ctr">
-                    <a:solidFill>
-                      <a:srgbClr val="33475B"/>
-                    </a:solidFill>
-                  </a:tcPr>
-                </a:tc>
-                <a:tc>
-                  <a:txBody>
-                    <a:bodyPr/>
-                    <a:lstStyle/>
-                    <a:p>
-                      <a:pPr algn="ctr"/>
-                      <a:r>
-                        <a:rPr sz="1200" b="1" i="0">
-                          <a:solidFill>
-                            <a:srgbClr val="FFFFFF"/>
-                          </a:solidFill>
-                          <a:latin typeface="NanumGothic"/>
-                          <a:ea typeface="NanumGothic"/>
-                        </a:rPr>
-                        <a:t>3B std</a:t>
-                      </a:r>
-                    </a:p>
-                  </a:txBody>
-                  <a:tcPr marL="38100" marR="38100" marT="12700" marB="12700" anchor="ctr">
-                    <a:solidFill>
-                      <a:srgbClr val="33475B"/>
-                    </a:solidFill>
-                  </a:tcPr>
-                </a:tc>
-                <a:tc>
-                  <a:txBody>
-                    <a:bodyPr/>
-                    <a:lstStyle/>
-                    <a:p>
-                      <a:pPr algn="ctr"/>
-                      <a:r>
-                        <a:rPr sz="1200" b="1" i="0">
-                          <a:solidFill>
-                            <a:srgbClr val="FFFFFF"/>
-                          </a:solidFill>
-                          <a:latin typeface="NanumGothic"/>
-                          <a:ea typeface="NanumGothic"/>
-                        </a:rPr>
-                        <a:t>7B std</a:t>
-                      </a:r>
-                    </a:p>
-                  </a:txBody>
-                  <a:tcPr marL="38100" marR="38100" marT="12700" marB="12700" anchor="ctr">
-                    <a:solidFill>
-                      <a:srgbClr val="33475B"/>
-                    </a:solidFill>
-                  </a:tcPr>
-                </a:tc>
-                <a:tc>
-                  <a:txBody>
-                    <a:bodyPr/>
-                    <a:lstStyle/>
-                    <a:p>
-                      <a:pPr algn="ctr"/>
-                      <a:r>
-                        <a:rPr sz="1200" b="1" i="0">
-                          <a:solidFill>
-                            <a:srgbClr val="FFFFFF"/>
-                          </a:solidFill>
-                          <a:latin typeface="NanumGothic"/>
-                          <a:ea typeface="NanumGothic"/>
-                        </a:rPr>
-                        <a:t>1B anchor</a:t>
-                      </a:r>
-                    </a:p>
-                  </a:txBody>
-                  <a:tcPr marL="38100" marR="38100" marT="12700" marB="12700" anchor="ctr">
-                    <a:solidFill>
-                      <a:srgbClr val="33475B"/>
-                    </a:solidFill>
-                  </a:tcPr>
-                </a:tc>
-                <a:tc>
-                  <a:txBody>
-                    <a:bodyPr/>
-                    <a:lstStyle/>
-                    <a:p>
-                      <a:pPr algn="ctr"/>
-                      <a:r>
-                        <a:rPr sz="1200" b="1" i="0">
-                          <a:solidFill>
-                            <a:srgbClr val="FFFFFF"/>
-                          </a:solidFill>
-                          <a:latin typeface="NanumGothic"/>
-                          <a:ea typeface="NanumGothic"/>
-                        </a:rPr>
-                        <a:t>7B anchor</a:t>
-                      </a:r>
-                    </a:p>
-                  </a:txBody>
-                  <a:tcPr marL="38100" marR="38100" marT="12700" marB="12700" anchor="ctr">
-                    <a:solidFill>
-                      <a:srgbClr val="33475B"/>
-                    </a:solidFill>
-                  </a:tcPr>
-                </a:tc>
-                <a:extLst>
-                  <a:ext uri="{0D108BD9-81ED-4DB2-BD59-A6C34878D82A}">
-                    <a16:rowId xmlns:a16="http://schemas.microsoft.com/office/drawing/2014/main" val="10000"/>
-                  </a:ext>
-                </a:extLst>
-              </a:tr>
-              <a:tr h="365760">
-                <a:tc>
-                  <a:txBody>
-                    <a:bodyPr/>
-                    <a:lstStyle/>
-                    <a:p>
-                      <a:pPr algn="l"/>
-                      <a:r>
-                        <a:rPr sz="1200" b="0" i="0">
-                          <a:solidFill>
-                            <a:srgbClr val="222222"/>
-                          </a:solidFill>
-                          <a:latin typeface="NanumGothic"/>
-                          <a:ea typeface="NanumGothic"/>
-                        </a:rPr>
-                        <a:t>Flirds</a:t>
-                      </a:r>
-                    </a:p>
-                  </a:txBody>
-                  <a:tcPr marL="38100" marR="38100" marT="0" marB="0" anchor="ctr">
-                    <a:solidFill>
-                      <a:srgbClr val="FFFFFF"/>
-                    </a:solidFill>
-                  </a:tcPr>
-                </a:tc>
-                <a:tc>
-                  <a:txBody>
-                    <a:bodyPr/>
-                    <a:lstStyle/>
-                    <a:p>
-                      <a:pPr algn="ctr"/>
-                      <a:r>
-                        <a:rPr sz="1200" b="1" i="0">
-                          <a:solidFill>
-                            <a:srgbClr val="222222"/>
-                          </a:solidFill>
-                          <a:latin typeface="NanumGothic"/>
-                          <a:ea typeface="NanumGothic"/>
-                        </a:rPr>
-                        <a:t>1.000</a:t>
-                      </a:r>
-                    </a:p>
-                  </a:txBody>
-                  <a:tcPr marL="38100" marR="38100" marT="0" marB="0" anchor="ctr">
-                    <a:solidFill>
-                      <a:srgbClr val="FFFFFF"/>
-                    </a:solidFill>
-                  </a:tcPr>
-                </a:tc>
-                <a:tc>
-                  <a:txBody>
-                    <a:bodyPr/>
-                    <a:lstStyle/>
-                    <a:p>
-                      <a:pPr algn="ctr"/>
-                      <a:r>
-                        <a:rPr sz="1200" b="1" i="0">
-                          <a:solidFill>
-                            <a:srgbClr val="222222"/>
-                          </a:solidFill>
-                          <a:latin typeface="NanumGothic"/>
-                          <a:ea typeface="NanumGothic"/>
-                        </a:rPr>
-                        <a:t>1.000</a:t>
-                      </a:r>
-                    </a:p>
-                  </a:txBody>
-                  <a:tcPr marL="38100" marR="38100" marT="0" marB="0" anchor="ctr">
-                    <a:solidFill>
-                      <a:srgbClr val="FFFFFF"/>
-                    </a:solidFill>
-                  </a:tcPr>
-                </a:tc>
-                <a:tc>
-                  <a:txBody>
-                    <a:bodyPr/>
-                    <a:lstStyle/>
-                    <a:p>
-                      <a:pPr algn="ctr"/>
-                      <a:r>
-                        <a:rPr sz="1200" b="0" i="0">
-                          <a:solidFill>
-                            <a:srgbClr val="222222"/>
-                          </a:solidFill>
-                          <a:latin typeface="NanumGothic"/>
-                          <a:ea typeface="NanumGothic"/>
-                        </a:rPr>
-                        <a:t>0.999</a:t>
-                      </a:r>
-                    </a:p>
-                  </a:txBody>
-                  <a:tcPr marL="38100" marR="38100" marT="0" marB="0" anchor="ctr">
-                    <a:solidFill>
-                      <a:srgbClr val="FFFFFF"/>
-                    </a:solidFill>
-                  </a:tcPr>
-                </a:tc>
-                <a:tc>
-                  <a:txBody>
-                    <a:bodyPr/>
-                    <a:lstStyle/>
-                    <a:p>
-                      <a:pPr algn="ctr"/>
-                      <a:r>
-                        <a:rPr sz="1200" b="1" i="0">
-                          <a:solidFill>
-                            <a:srgbClr val="222222"/>
-                          </a:solidFill>
-                          <a:latin typeface="NanumGothic"/>
-                          <a:ea typeface="NanumGothic"/>
-                        </a:rPr>
-                        <a:t>1.000</a:t>
-                      </a:r>
-                    </a:p>
-                  </a:txBody>
-                  <a:tcPr marL="38100" marR="38100" marT="0" marB="0" anchor="ctr">
-                    <a:solidFill>
-                      <a:srgbClr val="FFFFFF"/>
-                    </a:solidFill>
-                  </a:tcPr>
-                </a:tc>
-                <a:tc>
-                  <a:txBody>
-                    <a:bodyPr/>
-                    <a:lstStyle/>
-                    <a:p>
-                      <a:pPr algn="ctr"/>
-                      <a:r>
-                        <a:rPr sz="1200" b="1" i="0">
-                          <a:solidFill>
-                            <a:srgbClr val="222222"/>
-                          </a:solidFill>
-                          <a:latin typeface="NanumGothic"/>
-                          <a:ea typeface="NanumGothic"/>
-                        </a:rPr>
-                        <a:t>1.000</a:t>
-                      </a:r>
-                    </a:p>
-                  </a:txBody>
-                  <a:tcPr marL="38100" marR="38100" marT="0" marB="0" anchor="ctr">
-                    <a:solidFill>
-                      <a:srgbClr val="FFFFFF"/>
-                    </a:solidFill>
-                  </a:tcPr>
-                </a:tc>
-                <a:extLst>
-                  <a:ext uri="{0D108BD9-81ED-4DB2-BD59-A6C34878D82A}">
-                    <a16:rowId xmlns:a16="http://schemas.microsoft.com/office/drawing/2014/main" val="10001"/>
-                  </a:ext>
-                </a:extLst>
-              </a:tr>
-              <a:tr h="365760">
-                <a:tc>
-                  <a:txBody>
-                    <a:bodyPr/>
-                    <a:lstStyle/>
-                    <a:p>
-                      <a:pPr algn="l"/>
-                      <a:r>
-                        <a:rPr sz="1200" b="0" i="0">
-                          <a:solidFill>
-                            <a:srgbClr val="222222"/>
-                          </a:solidFill>
-                          <a:latin typeface="NanumGothic"/>
-                          <a:ea typeface="NanumGothic"/>
-                        </a:rPr>
-                        <a:t>Flirds-1st</a:t>
-                      </a:r>
-                    </a:p>
-                  </a:txBody>
-                  <a:tcPr marL="38100" marR="38100" marT="0" marB="0" anchor="ctr">
-                    <a:solidFill>
-                      <a:srgbClr val="F2F4F7"/>
-                    </a:solidFill>
-                  </a:tcPr>
-                </a:tc>
-                <a:tc>
-                  <a:txBody>
-                    <a:bodyPr/>
-                    <a:lstStyle/>
-                    <a:p>
-                      <a:pPr algn="ctr"/>
-                      <a:r>
-                        <a:rPr sz="1200" b="0" i="0">
-                          <a:solidFill>
-                            <a:srgbClr val="222222"/>
-                          </a:solidFill>
-                          <a:latin typeface="NanumGothic"/>
-                          <a:ea typeface="NanumGothic"/>
-                        </a:rPr>
-                        <a:t>0.999</a:t>
-                      </a:r>
-                    </a:p>
-                  </a:txBody>
-                  <a:tcPr marL="38100" marR="38100" marT="0" marB="0" anchor="ctr">
-                    <a:solidFill>
-                      <a:srgbClr val="F2F4F7"/>
-                    </a:solidFill>
-                  </a:tcPr>
-                </a:tc>
-                <a:tc>
-                  <a:txBody>
-                    <a:bodyPr/>
-                    <a:lstStyle/>
-                    <a:p>
-                      <a:pPr algn="ctr"/>
-                      <a:r>
-                        <a:rPr sz="1200" b="0" i="0">
-                          <a:solidFill>
-                            <a:srgbClr val="222222"/>
-                          </a:solidFill>
-                          <a:latin typeface="NanumGothic"/>
-                          <a:ea typeface="NanumGothic"/>
-                        </a:rPr>
-                        <a:t>1.000</a:t>
-                      </a:r>
-                    </a:p>
-                  </a:txBody>
-                  <a:tcPr marL="38100" marR="38100" marT="0" marB="0" anchor="ctr">
-                    <a:solidFill>
-                      <a:srgbClr val="F2F4F7"/>
-                    </a:solidFill>
-                  </a:tcPr>
-                </a:tc>
-                <a:tc>
-                  <a:txBody>
-                    <a:bodyPr/>
-                    <a:lstStyle/>
-                    <a:p>
-                      <a:pPr algn="ctr"/>
-                      <a:r>
-                        <a:rPr sz="1200" b="0" i="0">
-                          <a:solidFill>
-                            <a:srgbClr val="222222"/>
-                          </a:solidFill>
-                          <a:latin typeface="NanumGothic"/>
-                          <a:ea typeface="NanumGothic"/>
-                        </a:rPr>
-                        <a:t>0.998</a:t>
-                      </a:r>
-                    </a:p>
-                  </a:txBody>
-                  <a:tcPr marL="38100" marR="38100" marT="0" marB="0" anchor="ctr">
-                    <a:solidFill>
-                      <a:srgbClr val="F2F4F7"/>
-                    </a:solidFill>
-                  </a:tcPr>
-                </a:tc>
-                <a:tc>
-                  <a:txBody>
-                    <a:bodyPr/>
-                    <a:lstStyle/>
-                    <a:p>
-                      <a:pPr algn="ctr"/>
-                      <a:r>
-                        <a:rPr sz="1200" b="0" i="0">
-                          <a:solidFill>
-                            <a:srgbClr val="222222"/>
-                          </a:solidFill>
-                          <a:latin typeface="NanumGothic"/>
-                          <a:ea typeface="NanumGothic"/>
-                        </a:rPr>
-                        <a:t>1.000</a:t>
-                      </a:r>
-                    </a:p>
-                  </a:txBody>
-                  <a:tcPr marL="38100" marR="38100" marT="0" marB="0" anchor="ctr">
-                    <a:solidFill>
-                      <a:srgbClr val="F2F4F7"/>
-                    </a:solidFill>
-                  </a:tcPr>
-                </a:tc>
-                <a:tc>
-                  <a:txBody>
-                    <a:bodyPr/>
-                    <a:lstStyle/>
-                    <a:p>
-                      <a:pPr algn="ctr"/>
-                      <a:r>
-                        <a:rPr sz="1200" b="0" i="0">
-                          <a:solidFill>
-                            <a:srgbClr val="222222"/>
-                          </a:solidFill>
-                          <a:latin typeface="NanumGothic"/>
-                          <a:ea typeface="NanumGothic"/>
-                        </a:rPr>
-                        <a:t>1.000</a:t>
-                      </a:r>
-                    </a:p>
-                  </a:txBody>
-                  <a:tcPr marL="38100" marR="38100" marT="0" marB="0" anchor="ctr">
-                    <a:solidFill>
-                      <a:srgbClr val="F2F4F7"/>
-                    </a:solidFill>
-                  </a:tcPr>
-                </a:tc>
-                <a:extLst>
-                  <a:ext uri="{0D108BD9-81ED-4DB2-BD59-A6C34878D82A}">
-                    <a16:rowId xmlns:a16="http://schemas.microsoft.com/office/drawing/2014/main" val="10002"/>
-                  </a:ext>
-                </a:extLst>
-              </a:tr>
-              <a:tr h="365760">
-                <a:tc>
-                  <a:txBody>
-                    <a:bodyPr/>
-                    <a:lstStyle/>
-                    <a:p>
-                      <a:pPr algn="l"/>
-                      <a:r>
-                        <a:rPr sz="1200" b="0" i="0">
-                          <a:solidFill>
-                            <a:srgbClr val="222222"/>
-                          </a:solidFill>
-                          <a:latin typeface="NanumGothic"/>
-                          <a:ea typeface="NanumGothic"/>
-                        </a:rPr>
-                        <a:t>loss-heur</a:t>
-                      </a:r>
-                    </a:p>
-                  </a:txBody>
-                  <a:tcPr marL="38100" marR="38100" marT="0" marB="0" anchor="ctr">
-                    <a:solidFill>
-                      <a:srgbClr val="FFFFFF"/>
-                    </a:solidFill>
-                  </a:tcPr>
-                </a:tc>
-                <a:tc>
-                  <a:txBody>
-                    <a:bodyPr/>
-                    <a:lstStyle/>
-                    <a:p>
-                      <a:pPr algn="ctr"/>
-                      <a:r>
-                        <a:rPr sz="1200" b="1" i="0">
-                          <a:solidFill>
-                            <a:srgbClr val="222222"/>
-                          </a:solidFill>
-                          <a:latin typeface="NanumGothic"/>
-                          <a:ea typeface="NanumGothic"/>
-                        </a:rPr>
-                        <a:t>1.000</a:t>
-                      </a:r>
-                    </a:p>
-                  </a:txBody>
-                  <a:tcPr marL="38100" marR="38100" marT="0" marB="0" anchor="ctr">
-                    <a:solidFill>
-                      <a:srgbClr val="FFFFFF"/>
-                    </a:solidFill>
-                  </a:tcPr>
-                </a:tc>
-                <a:tc>
-                  <a:txBody>
-                    <a:bodyPr/>
-                    <a:lstStyle/>
-                    <a:p>
-                      <a:pPr algn="ctr"/>
-                      <a:r>
-                        <a:rPr sz="1200" b="0" i="0">
-                          <a:solidFill>
-                            <a:srgbClr val="222222"/>
-                          </a:solidFill>
-                          <a:latin typeface="NanumGothic"/>
-                          <a:ea typeface="NanumGothic"/>
-                        </a:rPr>
-                        <a:t>0.999</a:t>
-                      </a:r>
-                    </a:p>
-                  </a:txBody>
-                  <a:tcPr marL="38100" marR="38100" marT="0" marB="0" anchor="ctr">
-                    <a:solidFill>
-                      <a:srgbClr val="FFFFFF"/>
-                    </a:solidFill>
-                  </a:tcPr>
-                </a:tc>
-                <a:tc>
-                  <a:txBody>
-                    <a:bodyPr/>
-                    <a:lstStyle/>
-                    <a:p>
-                      <a:pPr algn="ctr"/>
-                      <a:r>
-                        <a:rPr sz="1200" b="1" i="0" dirty="0">
-                          <a:solidFill>
-                            <a:srgbClr val="222222"/>
-                          </a:solidFill>
-                          <a:latin typeface="NanumGothic"/>
-                          <a:ea typeface="NanumGothic"/>
-                        </a:rPr>
-                        <a:t>0.999</a:t>
-                      </a:r>
-                    </a:p>
-                  </a:txBody>
-                  <a:tcPr marL="38100" marR="38100" marT="0" marB="0" anchor="ctr">
-                    <a:solidFill>
-                      <a:srgbClr val="FFFFFF"/>
-                    </a:solidFill>
-                  </a:tcPr>
-                </a:tc>
-                <a:tc>
-                  <a:txBody>
-                    <a:bodyPr/>
-                    <a:lstStyle/>
-                    <a:p>
-                      <a:pPr algn="ctr"/>
-                      <a:r>
-                        <a:rPr sz="1200" b="0" i="0" dirty="0">
-                          <a:solidFill>
-                            <a:srgbClr val="222222"/>
-                          </a:solidFill>
-                          <a:latin typeface="NanumGothic"/>
-                          <a:ea typeface="NanumGothic"/>
-                        </a:rPr>
-                        <a:t>1.000</a:t>
-                      </a:r>
-                    </a:p>
-                  </a:txBody>
-                  <a:tcPr marL="38100" marR="38100" marT="0" marB="0" anchor="ctr">
-                    <a:solidFill>
-                      <a:srgbClr val="FFFFFF"/>
-                    </a:solidFill>
-                  </a:tcPr>
-                </a:tc>
-                <a:tc>
-                  <a:txBody>
-                    <a:bodyPr/>
-                    <a:lstStyle/>
-                    <a:p>
-                      <a:pPr algn="ctr"/>
-                      <a:r>
-                        <a:rPr sz="1200" b="0" i="0">
-                          <a:solidFill>
-                            <a:srgbClr val="222222"/>
-                          </a:solidFill>
-                          <a:latin typeface="NanumGothic"/>
-                          <a:ea typeface="NanumGothic"/>
-                        </a:rPr>
-                        <a:t>1.000</a:t>
-                      </a:r>
-                    </a:p>
-                  </a:txBody>
-                  <a:tcPr marL="38100" marR="38100" marT="0" marB="0" anchor="ctr">
-                    <a:solidFill>
-                      <a:srgbClr val="FFFFFF"/>
-                    </a:solidFill>
-                  </a:tcPr>
-                </a:tc>
-                <a:extLst>
-                  <a:ext uri="{0D108BD9-81ED-4DB2-BD59-A6C34878D82A}">
-                    <a16:rowId xmlns:a16="http://schemas.microsoft.com/office/drawing/2014/main" val="10003"/>
-                  </a:ext>
-                </a:extLst>
-              </a:tr>
-              <a:tr h="365760">
-                <a:tc>
-                  <a:txBody>
-                    <a:bodyPr/>
-                    <a:lstStyle/>
-                    <a:p>
-                      <a:pPr algn="l"/>
-                      <a:r>
-                        <a:rPr sz="1200" b="0" i="0">
-                          <a:solidFill>
-                            <a:srgbClr val="222222"/>
-                          </a:solidFill>
-                          <a:latin typeface="NanumGothic"/>
-                          <a:ea typeface="NanumGothic"/>
-                        </a:rPr>
-                        <a:t>GTG</a:t>
-                      </a:r>
-                    </a:p>
-                  </a:txBody>
-                  <a:tcPr marL="38100" marR="38100" marT="0" marB="0" anchor="ctr">
-                    <a:solidFill>
-                      <a:srgbClr val="F2F4F7"/>
-                    </a:solidFill>
-                  </a:tcPr>
-                </a:tc>
-                <a:tc>
-                  <a:txBody>
-                    <a:bodyPr/>
-                    <a:lstStyle/>
-                    <a:p>
-                      <a:pPr algn="ctr"/>
-                      <a:r>
-                        <a:rPr sz="1200" b="0" i="0">
-                          <a:solidFill>
-                            <a:srgbClr val="222222"/>
-                          </a:solidFill>
-                          <a:latin typeface="NanumGothic"/>
-                          <a:ea typeface="NanumGothic"/>
-                        </a:rPr>
-                        <a:t>0.975</a:t>
-                      </a:r>
-                    </a:p>
-                  </a:txBody>
-                  <a:tcPr marL="38100" marR="38100" marT="0" marB="0" anchor="ctr">
-                    <a:solidFill>
-                      <a:srgbClr val="F2F4F7"/>
-                    </a:solidFill>
-                  </a:tcPr>
-                </a:tc>
-                <a:tc>
-                  <a:txBody>
-                    <a:bodyPr/>
-                    <a:lstStyle/>
-                    <a:p>
-                      <a:pPr algn="ctr"/>
-                      <a:r>
-                        <a:rPr sz="1200" b="0" i="0">
-                          <a:solidFill>
-                            <a:srgbClr val="222222"/>
-                          </a:solidFill>
-                          <a:latin typeface="NanumGothic"/>
-                          <a:ea typeface="NanumGothic"/>
-                        </a:rPr>
-                        <a:t>0.988</a:t>
-                      </a:r>
-                    </a:p>
-                  </a:txBody>
-                  <a:tcPr marL="38100" marR="38100" marT="0" marB="0" anchor="ctr">
-                    <a:solidFill>
-                      <a:srgbClr val="F2F4F7"/>
-                    </a:solidFill>
-                  </a:tcPr>
-                </a:tc>
-                <a:tc>
-                  <a:txBody>
-                    <a:bodyPr/>
-                    <a:lstStyle/>
-                    <a:p>
-                      <a:pPr algn="ctr"/>
-                      <a:r>
-                        <a:rPr sz="1200" b="0" i="0">
-                          <a:solidFill>
-                            <a:srgbClr val="222222"/>
-                          </a:solidFill>
-                          <a:latin typeface="NanumGothic"/>
-                          <a:ea typeface="NanumGothic"/>
-                        </a:rPr>
-                        <a:t>0.977</a:t>
-                      </a:r>
-                    </a:p>
-                  </a:txBody>
-                  <a:tcPr marL="38100" marR="38100" marT="0" marB="0" anchor="ctr">
-                    <a:solidFill>
-                      <a:srgbClr val="F2F4F7"/>
-                    </a:solidFill>
-                  </a:tcPr>
-                </a:tc>
-                <a:tc>
-                  <a:txBody>
-                    <a:bodyPr/>
-                    <a:lstStyle/>
-                    <a:p>
-                      <a:pPr algn="ctr"/>
-                      <a:r>
-                        <a:rPr sz="1200" b="0" i="0">
-                          <a:solidFill>
-                            <a:srgbClr val="222222"/>
-                          </a:solidFill>
-                          <a:latin typeface="NanumGothic"/>
-                          <a:ea typeface="NanumGothic"/>
-                        </a:rPr>
-                        <a:t>1.000</a:t>
-                      </a:r>
-                    </a:p>
-                  </a:txBody>
-                  <a:tcPr marL="38100" marR="38100" marT="0" marB="0" anchor="ctr">
-                    <a:solidFill>
-                      <a:srgbClr val="F2F4F7"/>
-                    </a:solidFill>
-                  </a:tcPr>
-                </a:tc>
-                <a:tc>
-                  <a:txBody>
-                    <a:bodyPr/>
-                    <a:lstStyle/>
-                    <a:p>
-                      <a:pPr algn="ctr"/>
-                      <a:r>
-                        <a:rPr sz="1200" b="0" i="0">
-                          <a:solidFill>
-                            <a:srgbClr val="222222"/>
-                          </a:solidFill>
-                          <a:latin typeface="NanumGothic"/>
-                          <a:ea typeface="NanumGothic"/>
-                        </a:rPr>
-                        <a:t>1.000</a:t>
-                      </a:r>
-                    </a:p>
-                  </a:txBody>
-                  <a:tcPr marL="38100" marR="38100" marT="0" marB="0" anchor="ctr">
-                    <a:solidFill>
-                      <a:srgbClr val="F2F4F7"/>
-                    </a:solidFill>
-                  </a:tcPr>
-                </a:tc>
-                <a:extLst>
-                  <a:ext uri="{0D108BD9-81ED-4DB2-BD59-A6C34878D82A}">
-                    <a16:rowId xmlns:a16="http://schemas.microsoft.com/office/drawing/2014/main" val="10004"/>
-                  </a:ext>
-                </a:extLst>
-              </a:tr>
-              <a:tr h="365760">
-                <a:tc>
-                  <a:txBody>
-                    <a:bodyPr/>
-                    <a:lstStyle/>
-                    <a:p>
-                      <a:pPr algn="l"/>
-                      <a:r>
-                        <a:rPr sz="1200" b="0" i="0">
-                          <a:solidFill>
-                            <a:srgbClr val="222222"/>
-                          </a:solidFill>
-                          <a:latin typeface="NanumGothic"/>
-                          <a:ea typeface="NanumGothic"/>
-                        </a:rPr>
-                        <a:t>FedSV</a:t>
-                      </a:r>
-                    </a:p>
-                  </a:txBody>
-                  <a:tcPr marL="38100" marR="38100" marT="0" marB="0" anchor="ctr">
-                    <a:solidFill>
-                      <a:srgbClr val="FFFFFF"/>
-                    </a:solidFill>
-                  </a:tcPr>
-                </a:tc>
-                <a:tc>
-                  <a:txBody>
-                    <a:bodyPr/>
-                    <a:lstStyle/>
-                    <a:p>
-                      <a:pPr algn="ctr"/>
-                      <a:r>
-                        <a:rPr sz="1200" b="0" i="0">
-                          <a:solidFill>
-                            <a:srgbClr val="222222"/>
-                          </a:solidFill>
-                          <a:latin typeface="NanumGothic"/>
-                          <a:ea typeface="NanumGothic"/>
-                        </a:rPr>
-                        <a:t>0.910</a:t>
-                      </a:r>
-                    </a:p>
-                  </a:txBody>
-                  <a:tcPr marL="38100" marR="38100" marT="0" marB="0" anchor="ctr">
-                    <a:solidFill>
-                      <a:srgbClr val="FFFFFF"/>
-                    </a:solidFill>
-                  </a:tcPr>
-                </a:tc>
-                <a:tc>
-                  <a:txBody>
-                    <a:bodyPr/>
-                    <a:lstStyle/>
-                    <a:p>
-                      <a:pPr algn="ctr"/>
-                      <a:r>
-                        <a:rPr sz="1200" b="0" i="0">
-                          <a:solidFill>
-                            <a:srgbClr val="222222"/>
-                          </a:solidFill>
-                          <a:latin typeface="NanumGothic"/>
-                          <a:ea typeface="NanumGothic"/>
-                        </a:rPr>
-                        <a:t>0.952</a:t>
-                      </a:r>
-                    </a:p>
-                  </a:txBody>
-                  <a:tcPr marL="38100" marR="38100" marT="0" marB="0" anchor="ctr">
-                    <a:solidFill>
-                      <a:srgbClr val="FFFFFF"/>
-                    </a:solidFill>
-                  </a:tcPr>
-                </a:tc>
-                <a:tc>
-                  <a:txBody>
-                    <a:bodyPr/>
-                    <a:lstStyle/>
-                    <a:p>
-                      <a:pPr algn="ctr"/>
-                      <a:r>
-                        <a:rPr sz="1200" b="0" i="0">
-                          <a:solidFill>
-                            <a:srgbClr val="222222"/>
-                          </a:solidFill>
-                          <a:latin typeface="NanumGothic"/>
-                          <a:ea typeface="NanumGothic"/>
-                        </a:rPr>
-                        <a:t>0.968</a:t>
-                      </a:r>
-                    </a:p>
-                  </a:txBody>
-                  <a:tcPr marL="38100" marR="38100" marT="0" marB="0" anchor="ctr">
-                    <a:solidFill>
-                      <a:srgbClr val="FFFFFF"/>
-                    </a:solidFill>
-                  </a:tcPr>
-                </a:tc>
-                <a:tc>
-                  <a:txBody>
-                    <a:bodyPr/>
-                    <a:lstStyle/>
-                    <a:p>
-                      <a:pPr algn="ctr"/>
-                      <a:r>
-                        <a:rPr sz="1200" b="0" i="0">
-                          <a:solidFill>
-                            <a:srgbClr val="222222"/>
-                          </a:solidFill>
-                          <a:latin typeface="NanumGothic"/>
-                          <a:ea typeface="NanumGothic"/>
-                        </a:rPr>
-                        <a:t>0.700</a:t>
-                      </a:r>
-                    </a:p>
-                  </a:txBody>
-                  <a:tcPr marL="38100" marR="38100" marT="0" marB="0" anchor="ctr">
-                    <a:solidFill>
-                      <a:srgbClr val="FFFFFF"/>
-                    </a:solidFill>
-                  </a:tcPr>
-                </a:tc>
-                <a:tc>
-                  <a:txBody>
-                    <a:bodyPr/>
-                    <a:lstStyle/>
-                    <a:p>
-                      <a:pPr algn="ctr"/>
-                      <a:r>
-                        <a:rPr sz="1200" b="0" i="0">
-                          <a:solidFill>
-                            <a:srgbClr val="222222"/>
-                          </a:solidFill>
-                          <a:latin typeface="NanumGothic"/>
-                          <a:ea typeface="NanumGothic"/>
-                        </a:rPr>
-                        <a:t>0.933</a:t>
-                      </a:r>
-                    </a:p>
-                  </a:txBody>
-                  <a:tcPr marL="38100" marR="38100" marT="0" marB="0" anchor="ctr">
-                    <a:solidFill>
-                      <a:srgbClr val="FFFFFF"/>
-                    </a:solidFill>
-                  </a:tcPr>
-                </a:tc>
-                <a:extLst>
-                  <a:ext uri="{0D108BD9-81ED-4DB2-BD59-A6C34878D82A}">
-                    <a16:rowId xmlns:a16="http://schemas.microsoft.com/office/drawing/2014/main" val="10005"/>
-                  </a:ext>
-                </a:extLst>
-              </a:tr>
-              <a:tr h="365760">
-                <a:tc>
-                  <a:txBody>
-                    <a:bodyPr/>
-                    <a:lstStyle/>
-                    <a:p>
-                      <a:pPr algn="l"/>
-                      <a:r>
-                        <a:rPr sz="1200" b="0" i="0">
-                          <a:solidFill>
-                            <a:srgbClr val="222222"/>
-                          </a:solidFill>
-                          <a:latin typeface="NanumGothic"/>
-                          <a:ea typeface="NanumGothic"/>
-                        </a:rPr>
-                        <a:t>ShapleyFL</a:t>
-                      </a:r>
-                    </a:p>
-                  </a:txBody>
-                  <a:tcPr marL="38100" marR="38100" marT="0" marB="0" anchor="ctr">
-                    <a:solidFill>
-                      <a:srgbClr val="F2F4F7"/>
-                    </a:solidFill>
-                  </a:tcPr>
-                </a:tc>
-                <a:tc>
-                  <a:txBody>
-                    <a:bodyPr/>
-                    <a:lstStyle/>
-                    <a:p>
-                      <a:pPr algn="ctr"/>
-                      <a:r>
-                        <a:rPr sz="1200" b="0" i="0">
-                          <a:solidFill>
-                            <a:srgbClr val="222222"/>
-                          </a:solidFill>
-                          <a:latin typeface="NanumGothic"/>
-                          <a:ea typeface="NanumGothic"/>
-                        </a:rPr>
-                        <a:t>0.194</a:t>
-                      </a:r>
-                    </a:p>
-                  </a:txBody>
-                  <a:tcPr marL="38100" marR="38100" marT="0" marB="0" anchor="ctr">
-                    <a:solidFill>
-                      <a:srgbClr val="F2F4F7"/>
-                    </a:solidFill>
-                  </a:tcPr>
-                </a:tc>
-                <a:tc>
-                  <a:txBody>
-                    <a:bodyPr/>
-                    <a:lstStyle/>
-                    <a:p>
-                      <a:pPr algn="ctr"/>
-                      <a:r>
-                        <a:rPr sz="1200" b="0" i="0">
-                          <a:solidFill>
-                            <a:srgbClr val="222222"/>
-                          </a:solidFill>
-                          <a:latin typeface="NanumGothic"/>
-                          <a:ea typeface="NanumGothic"/>
-                        </a:rPr>
-                        <a:t>0.227</a:t>
-                      </a:r>
-                    </a:p>
-                  </a:txBody>
-                  <a:tcPr marL="38100" marR="38100" marT="0" marB="0" anchor="ctr">
-                    <a:solidFill>
-                      <a:srgbClr val="F2F4F7"/>
-                    </a:solidFill>
-                  </a:tcPr>
-                </a:tc>
-                <a:tc>
-                  <a:txBody>
-                    <a:bodyPr/>
-                    <a:lstStyle/>
-                    <a:p>
-                      <a:pPr algn="ctr"/>
-                      <a:r>
-                        <a:rPr sz="1200" b="0" i="0">
-                          <a:solidFill>
-                            <a:srgbClr val="222222"/>
-                          </a:solidFill>
-                          <a:latin typeface="NanumGothic"/>
-                          <a:ea typeface="NanumGothic"/>
-                        </a:rPr>
-                        <a:t>0.406</a:t>
-                      </a:r>
-                    </a:p>
-                  </a:txBody>
-                  <a:tcPr marL="38100" marR="38100" marT="0" marB="0" anchor="ctr">
-                    <a:solidFill>
-                      <a:srgbClr val="F2F4F7"/>
-                    </a:solidFill>
-                  </a:tcPr>
-                </a:tc>
-                <a:tc>
-                  <a:txBody>
-                    <a:bodyPr/>
-                    <a:lstStyle/>
-                    <a:p>
-                      <a:pPr algn="ctr"/>
-                      <a:r>
-                        <a:rPr sz="1200" b="0" i="0">
-                          <a:solidFill>
-                            <a:srgbClr val="222222"/>
-                          </a:solidFill>
-                          <a:latin typeface="NanumGothic"/>
-                          <a:ea typeface="NanumGothic"/>
-                        </a:rPr>
-                        <a:t>0.700</a:t>
-                      </a:r>
-                    </a:p>
-                  </a:txBody>
-                  <a:tcPr marL="38100" marR="38100" marT="0" marB="0" anchor="ctr">
-                    <a:solidFill>
-                      <a:srgbClr val="F2F4F7"/>
-                    </a:solidFill>
-                  </a:tcPr>
-                </a:tc>
-                <a:tc>
-                  <a:txBody>
-                    <a:bodyPr/>
-                    <a:lstStyle/>
-                    <a:p>
-                      <a:pPr algn="ctr"/>
-                      <a:r>
-                        <a:rPr sz="1200" b="0" i="0">
-                          <a:solidFill>
-                            <a:srgbClr val="222222"/>
-                          </a:solidFill>
-                          <a:latin typeface="NanumGothic"/>
-                          <a:ea typeface="NanumGothic"/>
-                        </a:rPr>
-                        <a:t>0.833</a:t>
-                      </a:r>
-                    </a:p>
-                  </a:txBody>
-                  <a:tcPr marL="38100" marR="38100" marT="0" marB="0" anchor="ctr">
-                    <a:solidFill>
-                      <a:srgbClr val="F2F4F7"/>
-                    </a:solidFill>
-                  </a:tcPr>
-                </a:tc>
-                <a:extLst>
-                  <a:ext uri="{0D108BD9-81ED-4DB2-BD59-A6C34878D82A}">
-                    <a16:rowId xmlns:a16="http://schemas.microsoft.com/office/drawing/2014/main" val="10006"/>
-                  </a:ext>
-                </a:extLst>
-              </a:tr>
-              <a:tr h="365760">
-                <a:tc>
-                  <a:txBody>
-                    <a:bodyPr/>
-                    <a:lstStyle/>
-                    <a:p>
-                      <a:pPr algn="l"/>
-                      <a:r>
-                        <a:rPr sz="1200" b="0" i="0">
-                          <a:solidFill>
-                            <a:srgbClr val="222222"/>
-                          </a:solidFill>
-                          <a:latin typeface="NanumGothic"/>
-                          <a:ea typeface="NanumGothic"/>
-                        </a:rPr>
-                        <a:t>FedIF</a:t>
-                      </a:r>
-                    </a:p>
-                  </a:txBody>
-                  <a:tcPr marL="38100" marR="38100" marT="0" marB="0" anchor="ctr">
-                    <a:solidFill>
-                      <a:srgbClr val="FFFFFF"/>
-                    </a:solidFill>
-                  </a:tcPr>
-                </a:tc>
-                <a:tc>
-                  <a:txBody>
-                    <a:bodyPr/>
-                    <a:lstStyle/>
-                    <a:p>
-                      <a:pPr algn="ctr"/>
-                      <a:r>
-                        <a:rPr sz="1200" b="0" i="0">
-                          <a:solidFill>
-                            <a:srgbClr val="222222"/>
-                          </a:solidFill>
-                          <a:latin typeface="NanumGothic"/>
-                          <a:ea typeface="NanumGothic"/>
-                        </a:rPr>
-                        <a:t>0.157</a:t>
-                      </a:r>
-                    </a:p>
-                  </a:txBody>
-                  <a:tcPr marL="38100" marR="38100" marT="0" marB="0" anchor="ctr">
-                    <a:solidFill>
-                      <a:srgbClr val="FFFFFF"/>
-                    </a:solidFill>
-                  </a:tcPr>
-                </a:tc>
-                <a:tc>
-                  <a:txBody>
-                    <a:bodyPr/>
-                    <a:lstStyle/>
-                    <a:p>
-                      <a:pPr algn="ctr"/>
-                      <a:r>
-                        <a:rPr sz="1200" b="0" i="0">
-                          <a:solidFill>
-                            <a:srgbClr val="222222"/>
-                          </a:solidFill>
-                          <a:latin typeface="NanumGothic"/>
-                          <a:ea typeface="NanumGothic"/>
-                        </a:rPr>
-                        <a:t>0.211</a:t>
-                      </a:r>
-                    </a:p>
-                  </a:txBody>
-                  <a:tcPr marL="38100" marR="38100" marT="0" marB="0" anchor="ctr">
-                    <a:solidFill>
-                      <a:srgbClr val="FFFFFF"/>
-                    </a:solidFill>
-                  </a:tcPr>
-                </a:tc>
-                <a:tc>
-                  <a:txBody>
-                    <a:bodyPr/>
-                    <a:lstStyle/>
-                    <a:p>
-                      <a:pPr algn="ctr"/>
-                      <a:r>
-                        <a:rPr sz="1200" b="0" i="0">
-                          <a:solidFill>
-                            <a:srgbClr val="222222"/>
-                          </a:solidFill>
-                          <a:latin typeface="NanumGothic"/>
-                          <a:ea typeface="NanumGothic"/>
-                        </a:rPr>
-                        <a:t>0.480</a:t>
-                      </a:r>
-                    </a:p>
-                  </a:txBody>
-                  <a:tcPr marL="38100" marR="38100" marT="0" marB="0" anchor="ctr">
-                    <a:solidFill>
-                      <a:srgbClr val="FFFFFF"/>
-                    </a:solidFill>
-                  </a:tcPr>
-                </a:tc>
-                <a:tc>
-                  <a:txBody>
-                    <a:bodyPr/>
-                    <a:lstStyle/>
-                    <a:p>
-                      <a:pPr algn="ctr"/>
-                      <a:r>
-                        <a:rPr sz="1200" b="0" i="0">
-                          <a:solidFill>
-                            <a:srgbClr val="222222"/>
-                          </a:solidFill>
-                          <a:latin typeface="NanumGothic"/>
-                          <a:ea typeface="NanumGothic"/>
-                        </a:rPr>
-                        <a:t>0.067</a:t>
-                      </a:r>
-                    </a:p>
-                  </a:txBody>
-                  <a:tcPr marL="38100" marR="38100" marT="0" marB="0" anchor="ctr">
-                    <a:solidFill>
-                      <a:srgbClr val="FFFFFF"/>
-                    </a:solidFill>
-                  </a:tcPr>
-                </a:tc>
-                <a:tc>
-                  <a:txBody>
-                    <a:bodyPr/>
-                    <a:lstStyle/>
-                    <a:p>
-                      <a:pPr algn="ctr"/>
-                      <a:r>
-                        <a:rPr sz="1200" b="0" i="0" dirty="0">
-                          <a:solidFill>
-                            <a:srgbClr val="222222"/>
-                          </a:solidFill>
-                          <a:latin typeface="NanumGothic"/>
-                          <a:ea typeface="NanumGothic"/>
-                        </a:rPr>
-                        <a:t>0.200</a:t>
-                      </a:r>
-                    </a:p>
-                  </a:txBody>
-                  <a:tcPr marL="38100" marR="38100" marT="0" marB="0" anchor="ctr">
-                    <a:solidFill>
-                      <a:srgbClr val="FFFFFF"/>
-                    </a:solidFill>
-                  </a:tcPr>
-                </a:tc>
-                <a:extLst>
-                  <a:ext uri="{0D108BD9-81ED-4DB2-BD59-A6C34878D82A}">
-                    <a16:rowId xmlns:a16="http://schemas.microsoft.com/office/drawing/2014/main" val="10007"/>
-                  </a:ext>
-                </a:extLst>
-              </a:tr>
-            </a:tbl>
-          </a:graphicData>
-        </a:graphic>
-      </p:graphicFrame>
       <p:sp>
         <p:nvSpPr>
           <p:cNvPr id="5" name="TextBox 4"/>
@@ -11605,11 +15654,1402 @@
                 <a:latin typeface="NanumGothic"/>
                 <a:ea typeface="NanumGothic"/>
               </a:rPr>
-              <a:t>10</a:t>
+              <a:t>8</a:t>
             </a:r>
           </a:p>
         </p:txBody>
       </p:sp>
+      <p:graphicFrame>
+        <p:nvGraphicFramePr>
+          <p:cNvPr id="7" name="Table 6"/>
+          <p:cNvGraphicFramePr>
+            <a:graphicFrameLocks noGrp="1"/>
+          </p:cNvGraphicFramePr>
+          <p:nvPr/>
+        </p:nvGraphicFramePr>
+        <p:xfrm>
+          <a:off x="411480" y="1965960"/>
+          <a:ext cx="11384278" cy="2926080"/>
+        </p:xfrm>
+        <a:graphic>
+          <a:graphicData uri="http://schemas.openxmlformats.org/drawingml/2006/table">
+            <a:tbl>
+              <a:tblPr>
+                <a:tableStyleId>{5C22544A-7EE6-4342-B048-85BDC9FD1C3A}</a:tableStyleId>
+              </a:tblPr>
+              <a:tblGrid>
+                <a:gridCol w="2103616"/>
+                <a:gridCol w="1546777"/>
+                <a:gridCol w="1546777"/>
+                <a:gridCol w="1546777"/>
+                <a:gridCol w="1546777"/>
+                <a:gridCol w="1546777"/>
+                <a:gridCol w="1546777"/>
+              </a:tblGrid>
+              <a:tr h="365760">
+                <a:tc>
+                  <a:txBody>
+                    <a:bodyPr/>
+                    <a:lstStyle/>
+                    <a:p>
+                      <a:pPr algn="l"/>
+                      <a:r>
+                        <a:rPr sz="1100" b="1" i="0">
+                          <a:solidFill>
+                            <a:srgbClr val="FFFFFF"/>
+                          </a:solidFill>
+                          <a:latin typeface="NanumGothic"/>
+                          <a:ea typeface="NanumGothic"/>
+                        </a:rPr>
+                        <a:t>method</a:t>
+                      </a:r>
+                    </a:p>
+                  </a:txBody>
+                  <a:tcPr marL="38100" marR="38100" marT="12700" marB="12700" anchor="ctr">
+                    <a:solidFill>
+                      <a:srgbClr val="33475B"/>
+                    </a:solidFill>
+                  </a:tcPr>
+                </a:tc>
+                <a:tc>
+                  <a:txBody>
+                    <a:bodyPr/>
+                    <a:lstStyle/>
+                    <a:p>
+                      <a:pPr algn="ctr"/>
+                      <a:r>
+                        <a:rPr sz="1100" b="1" i="0">
+                          <a:solidFill>
+                            <a:srgbClr val="FFFFFF"/>
+                          </a:solidFill>
+                          <a:latin typeface="NanumGothic"/>
+                          <a:ea typeface="NanumGothic"/>
+                        </a:rPr>
+                        <a:t>1B std</a:t>
+                      </a:r>
+                    </a:p>
+                  </a:txBody>
+                  <a:tcPr marL="38100" marR="38100" marT="12700" marB="12700" anchor="ctr">
+                    <a:solidFill>
+                      <a:srgbClr val="33475B"/>
+                    </a:solidFill>
+                  </a:tcPr>
+                </a:tc>
+                <a:tc>
+                  <a:txBody>
+                    <a:bodyPr/>
+                    <a:lstStyle/>
+                    <a:p>
+                      <a:pPr algn="ctr"/>
+                      <a:r>
+                        <a:rPr sz="1100" b="1" i="0">
+                          <a:solidFill>
+                            <a:srgbClr val="FFFFFF"/>
+                          </a:solidFill>
+                          <a:latin typeface="NanumGothic"/>
+                          <a:ea typeface="NanumGothic"/>
+                        </a:rPr>
+                        <a:t>3B std</a:t>
+                      </a:r>
+                    </a:p>
+                  </a:txBody>
+                  <a:tcPr marL="38100" marR="38100" marT="12700" marB="12700" anchor="ctr">
+                    <a:solidFill>
+                      <a:srgbClr val="33475B"/>
+                    </a:solidFill>
+                  </a:tcPr>
+                </a:tc>
+                <a:tc>
+                  <a:txBody>
+                    <a:bodyPr/>
+                    <a:lstStyle/>
+                    <a:p>
+                      <a:pPr algn="ctr"/>
+                      <a:r>
+                        <a:rPr sz="1100" b="1" i="0">
+                          <a:solidFill>
+                            <a:srgbClr val="FFFFFF"/>
+                          </a:solidFill>
+                          <a:latin typeface="NanumGothic"/>
+                          <a:ea typeface="NanumGothic"/>
+                        </a:rPr>
+                        <a:t>7B std</a:t>
+                      </a:r>
+                    </a:p>
+                  </a:txBody>
+                  <a:tcPr marL="38100" marR="38100" marT="12700" marB="12700" anchor="ctr">
+                    <a:solidFill>
+                      <a:srgbClr val="33475B"/>
+                    </a:solidFill>
+                  </a:tcPr>
+                </a:tc>
+                <a:tc>
+                  <a:txBody>
+                    <a:bodyPr/>
+                    <a:lstStyle/>
+                    <a:p>
+                      <a:pPr algn="ctr"/>
+                      <a:r>
+                        <a:rPr sz="1100" b="1" i="0">
+                          <a:solidFill>
+                            <a:srgbClr val="FFFFFF"/>
+                          </a:solidFill>
+                          <a:latin typeface="NanumGothic"/>
+                          <a:ea typeface="NanumGothic"/>
+                        </a:rPr>
+                        <a:t>1B anchor</a:t>
+                      </a:r>
+                    </a:p>
+                  </a:txBody>
+                  <a:tcPr marL="38100" marR="38100" marT="12700" marB="12700" anchor="ctr">
+                    <a:solidFill>
+                      <a:srgbClr val="33475B"/>
+                    </a:solidFill>
+                  </a:tcPr>
+                </a:tc>
+                <a:tc>
+                  <a:txBody>
+                    <a:bodyPr/>
+                    <a:lstStyle/>
+                    <a:p>
+                      <a:pPr algn="ctr"/>
+                      <a:r>
+                        <a:rPr sz="1100" b="1" i="0">
+                          <a:solidFill>
+                            <a:srgbClr val="FFFFFF"/>
+                          </a:solidFill>
+                          <a:latin typeface="NanumGothic"/>
+                          <a:ea typeface="NanumGothic"/>
+                        </a:rPr>
+                        <a:t>3B anchor</a:t>
+                      </a:r>
+                    </a:p>
+                  </a:txBody>
+                  <a:tcPr marL="38100" marR="38100" marT="12700" marB="12700" anchor="ctr">
+                    <a:solidFill>
+                      <a:srgbClr val="33475B"/>
+                    </a:solidFill>
+                  </a:tcPr>
+                </a:tc>
+                <a:tc>
+                  <a:txBody>
+                    <a:bodyPr/>
+                    <a:lstStyle/>
+                    <a:p>
+                      <a:pPr algn="ctr"/>
+                      <a:r>
+                        <a:rPr sz="1100" b="1" i="0">
+                          <a:solidFill>
+                            <a:srgbClr val="FFFFFF"/>
+                          </a:solidFill>
+                          <a:latin typeface="NanumGothic"/>
+                          <a:ea typeface="NanumGothic"/>
+                        </a:rPr>
+                        <a:t>7B anchor</a:t>
+                      </a:r>
+                    </a:p>
+                  </a:txBody>
+                  <a:tcPr marL="38100" marR="38100" marT="12700" marB="12700" anchor="ctr">
+                    <a:solidFill>
+                      <a:srgbClr val="33475B"/>
+                    </a:solidFill>
+                  </a:tcPr>
+                </a:tc>
+              </a:tr>
+              <a:tr h="365760">
+                <a:tc>
+                  <a:txBody>
+                    <a:bodyPr/>
+                    <a:lstStyle/>
+                    <a:p>
+                      <a:pPr algn="l"/>
+                      <a:r>
+                        <a:rPr sz="1100" b="0" i="0">
+                          <a:solidFill>
+                            <a:srgbClr val="222222"/>
+                          </a:solidFill>
+                          <a:latin typeface="NanumGothic"/>
+                          <a:ea typeface="NanumGothic"/>
+                        </a:rPr>
+                        <a:t>Flirds</a:t>
+                      </a:r>
+                    </a:p>
+                  </a:txBody>
+                  <a:tcPr marL="38100" marR="38100" marT="0" marB="0" anchor="ctr">
+                    <a:solidFill>
+                      <a:srgbClr val="FFFFFF"/>
+                    </a:solidFill>
+                  </a:tcPr>
+                </a:tc>
+                <a:tc>
+                  <a:txBody>
+                    <a:bodyPr/>
+                    <a:lstStyle/>
+                    <a:p>
+                      <a:pPr algn="ctr"/>
+                      <a:r>
+                        <a:rPr sz="1100" b="1" i="0">
+                          <a:solidFill>
+                            <a:srgbClr val="222222"/>
+                          </a:solidFill>
+                          <a:latin typeface="NanumGothic"/>
+                          <a:ea typeface="NanumGothic"/>
+                        </a:rPr>
+                        <a:t>1.000</a:t>
+                      </a:r>
+                    </a:p>
+                  </a:txBody>
+                  <a:tcPr marL="38100" marR="38100" marT="0" marB="0" anchor="ctr">
+                    <a:solidFill>
+                      <a:srgbClr val="FFFFFF"/>
+                    </a:solidFill>
+                  </a:tcPr>
+                </a:tc>
+                <a:tc>
+                  <a:txBody>
+                    <a:bodyPr/>
+                    <a:lstStyle/>
+                    <a:p>
+                      <a:pPr algn="ctr"/>
+                      <a:r>
+                        <a:rPr sz="1100" b="1" i="0">
+                          <a:solidFill>
+                            <a:srgbClr val="222222"/>
+                          </a:solidFill>
+                          <a:latin typeface="NanumGothic"/>
+                          <a:ea typeface="NanumGothic"/>
+                        </a:rPr>
+                        <a:t>1.000</a:t>
+                      </a:r>
+                    </a:p>
+                  </a:txBody>
+                  <a:tcPr marL="38100" marR="38100" marT="0" marB="0" anchor="ctr">
+                    <a:solidFill>
+                      <a:srgbClr val="FFFFFF"/>
+                    </a:solidFill>
+                  </a:tcPr>
+                </a:tc>
+                <a:tc>
+                  <a:txBody>
+                    <a:bodyPr/>
+                    <a:lstStyle/>
+                    <a:p>
+                      <a:pPr algn="ctr"/>
+                      <a:r>
+                        <a:rPr sz="1100" b="0" i="0">
+                          <a:solidFill>
+                            <a:srgbClr val="222222"/>
+                          </a:solidFill>
+                          <a:latin typeface="NanumGothic"/>
+                          <a:ea typeface="NanumGothic"/>
+                        </a:rPr>
+                        <a:t>0.999</a:t>
+                      </a:r>
+                    </a:p>
+                  </a:txBody>
+                  <a:tcPr marL="38100" marR="38100" marT="0" marB="0" anchor="ctr">
+                    <a:solidFill>
+                      <a:srgbClr val="FFFFFF"/>
+                    </a:solidFill>
+                  </a:tcPr>
+                </a:tc>
+                <a:tc>
+                  <a:txBody>
+                    <a:bodyPr/>
+                    <a:lstStyle/>
+                    <a:p>
+                      <a:pPr algn="ctr"/>
+                      <a:r>
+                        <a:rPr sz="1100" b="1" i="0">
+                          <a:solidFill>
+                            <a:srgbClr val="222222"/>
+                          </a:solidFill>
+                          <a:latin typeface="NanumGothic"/>
+                          <a:ea typeface="NanumGothic"/>
+                        </a:rPr>
+                        <a:t>1.000</a:t>
+                      </a:r>
+                    </a:p>
+                  </a:txBody>
+                  <a:tcPr marL="38100" marR="38100" marT="0" marB="0" anchor="ctr">
+                    <a:solidFill>
+                      <a:srgbClr val="FFFFFF"/>
+                    </a:solidFill>
+                  </a:tcPr>
+                </a:tc>
+                <a:tc>
+                  <a:txBody>
+                    <a:bodyPr/>
+                    <a:lstStyle/>
+                    <a:p>
+                      <a:pPr algn="ctr"/>
+                      <a:r>
+                        <a:rPr sz="1100" b="0" i="0">
+                          <a:solidFill>
+                            <a:srgbClr val="222222"/>
+                          </a:solidFill>
+                          <a:latin typeface="NanumGothic"/>
+                          <a:ea typeface="NanumGothic"/>
+                        </a:rPr>
+                        <a:t>0.967</a:t>
+                      </a:r>
+                    </a:p>
+                  </a:txBody>
+                  <a:tcPr marL="38100" marR="38100" marT="0" marB="0" anchor="ctr">
+                    <a:solidFill>
+                      <a:srgbClr val="FFFFFF"/>
+                    </a:solidFill>
+                  </a:tcPr>
+                </a:tc>
+                <a:tc>
+                  <a:txBody>
+                    <a:bodyPr/>
+                    <a:lstStyle/>
+                    <a:p>
+                      <a:pPr algn="ctr"/>
+                      <a:r>
+                        <a:rPr sz="1100" b="1" i="0">
+                          <a:solidFill>
+                            <a:srgbClr val="222222"/>
+                          </a:solidFill>
+                          <a:latin typeface="NanumGothic"/>
+                          <a:ea typeface="NanumGothic"/>
+                        </a:rPr>
+                        <a:t>1.000</a:t>
+                      </a:r>
+                    </a:p>
+                  </a:txBody>
+                  <a:tcPr marL="38100" marR="38100" marT="0" marB="0" anchor="ctr">
+                    <a:solidFill>
+                      <a:srgbClr val="FFFFFF"/>
+                    </a:solidFill>
+                  </a:tcPr>
+                </a:tc>
+              </a:tr>
+              <a:tr h="365760">
+                <a:tc>
+                  <a:txBody>
+                    <a:bodyPr/>
+                    <a:lstStyle/>
+                    <a:p>
+                      <a:pPr algn="l"/>
+                      <a:r>
+                        <a:rPr sz="1100" b="0" i="0">
+                          <a:solidFill>
+                            <a:srgbClr val="222222"/>
+                          </a:solidFill>
+                          <a:latin typeface="NanumGothic"/>
+                          <a:ea typeface="NanumGothic"/>
+                        </a:rPr>
+                        <a:t>Flirds-1st</a:t>
+                      </a:r>
+                    </a:p>
+                  </a:txBody>
+                  <a:tcPr marL="38100" marR="38100" marT="0" marB="0" anchor="ctr">
+                    <a:solidFill>
+                      <a:srgbClr val="F2F4F7"/>
+                    </a:solidFill>
+                  </a:tcPr>
+                </a:tc>
+                <a:tc>
+                  <a:txBody>
+                    <a:bodyPr/>
+                    <a:lstStyle/>
+                    <a:p>
+                      <a:pPr algn="ctr"/>
+                      <a:r>
+                        <a:rPr sz="1100" b="0" i="0">
+                          <a:solidFill>
+                            <a:srgbClr val="222222"/>
+                          </a:solidFill>
+                          <a:latin typeface="NanumGothic"/>
+                          <a:ea typeface="NanumGothic"/>
+                        </a:rPr>
+                        <a:t>0.999</a:t>
+                      </a:r>
+                    </a:p>
+                  </a:txBody>
+                  <a:tcPr marL="38100" marR="38100" marT="0" marB="0" anchor="ctr">
+                    <a:solidFill>
+                      <a:srgbClr val="F2F4F7"/>
+                    </a:solidFill>
+                  </a:tcPr>
+                </a:tc>
+                <a:tc>
+                  <a:txBody>
+                    <a:bodyPr/>
+                    <a:lstStyle/>
+                    <a:p>
+                      <a:pPr algn="ctr"/>
+                      <a:r>
+                        <a:rPr sz="1100" b="0" i="0">
+                          <a:solidFill>
+                            <a:srgbClr val="222222"/>
+                          </a:solidFill>
+                          <a:latin typeface="NanumGothic"/>
+                          <a:ea typeface="NanumGothic"/>
+                        </a:rPr>
+                        <a:t>1.000</a:t>
+                      </a:r>
+                    </a:p>
+                  </a:txBody>
+                  <a:tcPr marL="38100" marR="38100" marT="0" marB="0" anchor="ctr">
+                    <a:solidFill>
+                      <a:srgbClr val="F2F4F7"/>
+                    </a:solidFill>
+                  </a:tcPr>
+                </a:tc>
+                <a:tc>
+                  <a:txBody>
+                    <a:bodyPr/>
+                    <a:lstStyle/>
+                    <a:p>
+                      <a:pPr algn="ctr"/>
+                      <a:r>
+                        <a:rPr sz="1100" b="0" i="0">
+                          <a:solidFill>
+                            <a:srgbClr val="222222"/>
+                          </a:solidFill>
+                          <a:latin typeface="NanumGothic"/>
+                          <a:ea typeface="NanumGothic"/>
+                        </a:rPr>
+                        <a:t>0.998</a:t>
+                      </a:r>
+                    </a:p>
+                  </a:txBody>
+                  <a:tcPr marL="38100" marR="38100" marT="0" marB="0" anchor="ctr">
+                    <a:solidFill>
+                      <a:srgbClr val="F2F4F7"/>
+                    </a:solidFill>
+                  </a:tcPr>
+                </a:tc>
+                <a:tc>
+                  <a:txBody>
+                    <a:bodyPr/>
+                    <a:lstStyle/>
+                    <a:p>
+                      <a:pPr algn="ctr"/>
+                      <a:r>
+                        <a:rPr sz="1100" b="0" i="0">
+                          <a:solidFill>
+                            <a:srgbClr val="222222"/>
+                          </a:solidFill>
+                          <a:latin typeface="NanumGothic"/>
+                          <a:ea typeface="NanumGothic"/>
+                        </a:rPr>
+                        <a:t>1.000</a:t>
+                      </a:r>
+                    </a:p>
+                  </a:txBody>
+                  <a:tcPr marL="38100" marR="38100" marT="0" marB="0" anchor="ctr">
+                    <a:solidFill>
+                      <a:srgbClr val="F2F4F7"/>
+                    </a:solidFill>
+                  </a:tcPr>
+                </a:tc>
+                <a:tc>
+                  <a:txBody>
+                    <a:bodyPr/>
+                    <a:lstStyle/>
+                    <a:p>
+                      <a:pPr algn="ctr"/>
+                      <a:r>
+                        <a:rPr sz="1100" b="1" i="0">
+                          <a:solidFill>
+                            <a:srgbClr val="222222"/>
+                          </a:solidFill>
+                          <a:latin typeface="NanumGothic"/>
+                          <a:ea typeface="NanumGothic"/>
+                        </a:rPr>
+                        <a:t>1.000</a:t>
+                      </a:r>
+                    </a:p>
+                  </a:txBody>
+                  <a:tcPr marL="38100" marR="38100" marT="0" marB="0" anchor="ctr">
+                    <a:solidFill>
+                      <a:srgbClr val="F2F4F7"/>
+                    </a:solidFill>
+                  </a:tcPr>
+                </a:tc>
+                <a:tc>
+                  <a:txBody>
+                    <a:bodyPr/>
+                    <a:lstStyle/>
+                    <a:p>
+                      <a:pPr algn="ctr"/>
+                      <a:r>
+                        <a:rPr sz="1100" b="0" i="0">
+                          <a:solidFill>
+                            <a:srgbClr val="222222"/>
+                          </a:solidFill>
+                          <a:latin typeface="NanumGothic"/>
+                          <a:ea typeface="NanumGothic"/>
+                        </a:rPr>
+                        <a:t>1.000</a:t>
+                      </a:r>
+                    </a:p>
+                  </a:txBody>
+                  <a:tcPr marL="38100" marR="38100" marT="0" marB="0" anchor="ctr">
+                    <a:solidFill>
+                      <a:srgbClr val="F2F4F7"/>
+                    </a:solidFill>
+                  </a:tcPr>
+                </a:tc>
+              </a:tr>
+              <a:tr h="365760">
+                <a:tc>
+                  <a:txBody>
+                    <a:bodyPr/>
+                    <a:lstStyle/>
+                    <a:p>
+                      <a:pPr algn="l"/>
+                      <a:r>
+                        <a:rPr sz="1100" b="0" i="0">
+                          <a:solidFill>
+                            <a:srgbClr val="222222"/>
+                          </a:solidFill>
+                          <a:latin typeface="NanumGothic"/>
+                          <a:ea typeface="NanumGothic"/>
+                        </a:rPr>
+                        <a:t>loss-heur</a:t>
+                      </a:r>
+                    </a:p>
+                  </a:txBody>
+                  <a:tcPr marL="38100" marR="38100" marT="0" marB="0" anchor="ctr">
+                    <a:solidFill>
+                      <a:srgbClr val="FFFFFF"/>
+                    </a:solidFill>
+                  </a:tcPr>
+                </a:tc>
+                <a:tc>
+                  <a:txBody>
+                    <a:bodyPr/>
+                    <a:lstStyle/>
+                    <a:p>
+                      <a:pPr algn="ctr"/>
+                      <a:r>
+                        <a:rPr sz="1100" b="1" i="0">
+                          <a:solidFill>
+                            <a:srgbClr val="222222"/>
+                          </a:solidFill>
+                          <a:latin typeface="NanumGothic"/>
+                          <a:ea typeface="NanumGothic"/>
+                        </a:rPr>
+                        <a:t>1.000</a:t>
+                      </a:r>
+                    </a:p>
+                  </a:txBody>
+                  <a:tcPr marL="38100" marR="38100" marT="0" marB="0" anchor="ctr">
+                    <a:solidFill>
+                      <a:srgbClr val="FFFFFF"/>
+                    </a:solidFill>
+                  </a:tcPr>
+                </a:tc>
+                <a:tc>
+                  <a:txBody>
+                    <a:bodyPr/>
+                    <a:lstStyle/>
+                    <a:p>
+                      <a:pPr algn="ctr"/>
+                      <a:r>
+                        <a:rPr sz="1100" b="0" i="0">
+                          <a:solidFill>
+                            <a:srgbClr val="222222"/>
+                          </a:solidFill>
+                          <a:latin typeface="NanumGothic"/>
+                          <a:ea typeface="NanumGothic"/>
+                        </a:rPr>
+                        <a:t>0.999</a:t>
+                      </a:r>
+                    </a:p>
+                  </a:txBody>
+                  <a:tcPr marL="38100" marR="38100" marT="0" marB="0" anchor="ctr">
+                    <a:solidFill>
+                      <a:srgbClr val="FFFFFF"/>
+                    </a:solidFill>
+                  </a:tcPr>
+                </a:tc>
+                <a:tc>
+                  <a:txBody>
+                    <a:bodyPr/>
+                    <a:lstStyle/>
+                    <a:p>
+                      <a:pPr algn="ctr"/>
+                      <a:r>
+                        <a:rPr sz="1100" b="0" i="0">
+                          <a:solidFill>
+                            <a:srgbClr val="222222"/>
+                          </a:solidFill>
+                          <a:latin typeface="NanumGothic"/>
+                          <a:ea typeface="NanumGothic"/>
+                        </a:rPr>
+                        <a:t>0.999</a:t>
+                      </a:r>
+                    </a:p>
+                  </a:txBody>
+                  <a:tcPr marL="38100" marR="38100" marT="0" marB="0" anchor="ctr">
+                    <a:solidFill>
+                      <a:srgbClr val="FFFFFF"/>
+                    </a:solidFill>
+                  </a:tcPr>
+                </a:tc>
+                <a:tc>
+                  <a:txBody>
+                    <a:bodyPr/>
+                    <a:lstStyle/>
+                    <a:p>
+                      <a:pPr algn="ctr"/>
+                      <a:r>
+                        <a:rPr sz="1100" b="0" i="0">
+                          <a:solidFill>
+                            <a:srgbClr val="222222"/>
+                          </a:solidFill>
+                          <a:latin typeface="NanumGothic"/>
+                          <a:ea typeface="NanumGothic"/>
+                        </a:rPr>
+                        <a:t>1.000</a:t>
+                      </a:r>
+                    </a:p>
+                  </a:txBody>
+                  <a:tcPr marL="38100" marR="38100" marT="0" marB="0" anchor="ctr">
+                    <a:solidFill>
+                      <a:srgbClr val="FFFFFF"/>
+                    </a:solidFill>
+                  </a:tcPr>
+                </a:tc>
+                <a:tc>
+                  <a:txBody>
+                    <a:bodyPr/>
+                    <a:lstStyle/>
+                    <a:p>
+                      <a:pPr algn="ctr"/>
+                      <a:r>
+                        <a:rPr sz="1100" b="0" i="0">
+                          <a:solidFill>
+                            <a:srgbClr val="222222"/>
+                          </a:solidFill>
+                          <a:latin typeface="NanumGothic"/>
+                          <a:ea typeface="NanumGothic"/>
+                        </a:rPr>
+                        <a:t>1.000</a:t>
+                      </a:r>
+                    </a:p>
+                  </a:txBody>
+                  <a:tcPr marL="38100" marR="38100" marT="0" marB="0" anchor="ctr">
+                    <a:solidFill>
+                      <a:srgbClr val="FFFFFF"/>
+                    </a:solidFill>
+                  </a:tcPr>
+                </a:tc>
+                <a:tc>
+                  <a:txBody>
+                    <a:bodyPr/>
+                    <a:lstStyle/>
+                    <a:p>
+                      <a:pPr algn="ctr"/>
+                      <a:r>
+                        <a:rPr sz="1100" b="0" i="0">
+                          <a:solidFill>
+                            <a:srgbClr val="222222"/>
+                          </a:solidFill>
+                          <a:latin typeface="NanumGothic"/>
+                          <a:ea typeface="NanumGothic"/>
+                        </a:rPr>
+                        <a:t>1.000</a:t>
+                      </a:r>
+                    </a:p>
+                  </a:txBody>
+                  <a:tcPr marL="38100" marR="38100" marT="0" marB="0" anchor="ctr">
+                    <a:solidFill>
+                      <a:srgbClr val="FFFFFF"/>
+                    </a:solidFill>
+                  </a:tcPr>
+                </a:tc>
+              </a:tr>
+              <a:tr h="365760">
+                <a:tc>
+                  <a:txBody>
+                    <a:bodyPr/>
+                    <a:lstStyle/>
+                    <a:p>
+                      <a:pPr algn="l"/>
+                      <a:r>
+                        <a:rPr sz="1100" b="0" i="0">
+                          <a:solidFill>
+                            <a:srgbClr val="222222"/>
+                          </a:solidFill>
+                          <a:latin typeface="NanumGothic"/>
+                          <a:ea typeface="NanumGothic"/>
+                        </a:rPr>
+                        <a:t>GTG</a:t>
+                      </a:r>
+                    </a:p>
+                  </a:txBody>
+                  <a:tcPr marL="38100" marR="38100" marT="0" marB="0" anchor="ctr">
+                    <a:solidFill>
+                      <a:srgbClr val="F2F4F7"/>
+                    </a:solidFill>
+                  </a:tcPr>
+                </a:tc>
+                <a:tc>
+                  <a:txBody>
+                    <a:bodyPr/>
+                    <a:lstStyle/>
+                    <a:p>
+                      <a:pPr algn="ctr"/>
+                      <a:r>
+                        <a:rPr sz="1100" b="0" i="0">
+                          <a:solidFill>
+                            <a:srgbClr val="222222"/>
+                          </a:solidFill>
+                          <a:latin typeface="NanumGothic"/>
+                          <a:ea typeface="NanumGothic"/>
+                        </a:rPr>
+                        <a:t>0.975</a:t>
+                      </a:r>
+                    </a:p>
+                  </a:txBody>
+                  <a:tcPr marL="38100" marR="38100" marT="0" marB="0" anchor="ctr">
+                    <a:solidFill>
+                      <a:srgbClr val="F2F4F7"/>
+                    </a:solidFill>
+                  </a:tcPr>
+                </a:tc>
+                <a:tc>
+                  <a:txBody>
+                    <a:bodyPr/>
+                    <a:lstStyle/>
+                    <a:p>
+                      <a:pPr algn="ctr"/>
+                      <a:r>
+                        <a:rPr sz="1100" b="0" i="0">
+                          <a:solidFill>
+                            <a:srgbClr val="222222"/>
+                          </a:solidFill>
+                          <a:latin typeface="NanumGothic"/>
+                          <a:ea typeface="NanumGothic"/>
+                        </a:rPr>
+                        <a:t>0.988</a:t>
+                      </a:r>
+                    </a:p>
+                  </a:txBody>
+                  <a:tcPr marL="38100" marR="38100" marT="0" marB="0" anchor="ctr">
+                    <a:solidFill>
+                      <a:srgbClr val="F2F4F7"/>
+                    </a:solidFill>
+                  </a:tcPr>
+                </a:tc>
+                <a:tc>
+                  <a:txBody>
+                    <a:bodyPr/>
+                    <a:lstStyle/>
+                    <a:p>
+                      <a:pPr algn="ctr"/>
+                      <a:r>
+                        <a:rPr sz="1100" b="0" i="0">
+                          <a:solidFill>
+                            <a:srgbClr val="222222"/>
+                          </a:solidFill>
+                          <a:latin typeface="NanumGothic"/>
+                          <a:ea typeface="NanumGothic"/>
+                        </a:rPr>
+                        <a:t>0.977</a:t>
+                      </a:r>
+                    </a:p>
+                  </a:txBody>
+                  <a:tcPr marL="38100" marR="38100" marT="0" marB="0" anchor="ctr">
+                    <a:solidFill>
+                      <a:srgbClr val="F2F4F7"/>
+                    </a:solidFill>
+                  </a:tcPr>
+                </a:tc>
+                <a:tc>
+                  <a:txBody>
+                    <a:bodyPr/>
+                    <a:lstStyle/>
+                    <a:p>
+                      <a:pPr algn="ctr"/>
+                      <a:r>
+                        <a:rPr sz="1100" b="0" i="0">
+                          <a:solidFill>
+                            <a:srgbClr val="222222"/>
+                          </a:solidFill>
+                          <a:latin typeface="NanumGothic"/>
+                          <a:ea typeface="NanumGothic"/>
+                        </a:rPr>
+                        <a:t>1.000</a:t>
+                      </a:r>
+                    </a:p>
+                  </a:txBody>
+                  <a:tcPr marL="38100" marR="38100" marT="0" marB="0" anchor="ctr">
+                    <a:solidFill>
+                      <a:srgbClr val="F2F4F7"/>
+                    </a:solidFill>
+                  </a:tcPr>
+                </a:tc>
+                <a:tc>
+                  <a:txBody>
+                    <a:bodyPr/>
+                    <a:lstStyle/>
+                    <a:p>
+                      <a:pPr algn="ctr"/>
+                      <a:r>
+                        <a:rPr sz="1100" b="0" i="0">
+                          <a:solidFill>
+                            <a:srgbClr val="222222"/>
+                          </a:solidFill>
+                          <a:latin typeface="NanumGothic"/>
+                          <a:ea typeface="NanumGothic"/>
+                        </a:rPr>
+                        <a:t>1.000</a:t>
+                      </a:r>
+                    </a:p>
+                  </a:txBody>
+                  <a:tcPr marL="38100" marR="38100" marT="0" marB="0" anchor="ctr">
+                    <a:solidFill>
+                      <a:srgbClr val="F2F4F7"/>
+                    </a:solidFill>
+                  </a:tcPr>
+                </a:tc>
+                <a:tc>
+                  <a:txBody>
+                    <a:bodyPr/>
+                    <a:lstStyle/>
+                    <a:p>
+                      <a:pPr algn="ctr"/>
+                      <a:r>
+                        <a:rPr sz="1100" b="0" i="0">
+                          <a:solidFill>
+                            <a:srgbClr val="222222"/>
+                          </a:solidFill>
+                          <a:latin typeface="NanumGothic"/>
+                          <a:ea typeface="NanumGothic"/>
+                        </a:rPr>
+                        <a:t>1.000</a:t>
+                      </a:r>
+                    </a:p>
+                  </a:txBody>
+                  <a:tcPr marL="38100" marR="38100" marT="0" marB="0" anchor="ctr">
+                    <a:solidFill>
+                      <a:srgbClr val="F2F4F7"/>
+                    </a:solidFill>
+                  </a:tcPr>
+                </a:tc>
+              </a:tr>
+              <a:tr h="365760">
+                <a:tc>
+                  <a:txBody>
+                    <a:bodyPr/>
+                    <a:lstStyle/>
+                    <a:p>
+                      <a:pPr algn="l"/>
+                      <a:r>
+                        <a:rPr sz="1100" b="0" i="0">
+                          <a:solidFill>
+                            <a:srgbClr val="222222"/>
+                          </a:solidFill>
+                          <a:latin typeface="NanumGothic"/>
+                          <a:ea typeface="NanumGothic"/>
+                        </a:rPr>
+                        <a:t>FedSV</a:t>
+                      </a:r>
+                    </a:p>
+                  </a:txBody>
+                  <a:tcPr marL="38100" marR="38100" marT="0" marB="0" anchor="ctr">
+                    <a:solidFill>
+                      <a:srgbClr val="FFFFFF"/>
+                    </a:solidFill>
+                  </a:tcPr>
+                </a:tc>
+                <a:tc>
+                  <a:txBody>
+                    <a:bodyPr/>
+                    <a:lstStyle/>
+                    <a:p>
+                      <a:pPr algn="ctr"/>
+                      <a:r>
+                        <a:rPr sz="1100" b="0" i="0">
+                          <a:solidFill>
+                            <a:srgbClr val="222222"/>
+                          </a:solidFill>
+                          <a:latin typeface="NanumGothic"/>
+                          <a:ea typeface="NanumGothic"/>
+                        </a:rPr>
+                        <a:t>0.910</a:t>
+                      </a:r>
+                    </a:p>
+                  </a:txBody>
+                  <a:tcPr marL="38100" marR="38100" marT="0" marB="0" anchor="ctr">
+                    <a:solidFill>
+                      <a:srgbClr val="FFFFFF"/>
+                    </a:solidFill>
+                  </a:tcPr>
+                </a:tc>
+                <a:tc>
+                  <a:txBody>
+                    <a:bodyPr/>
+                    <a:lstStyle/>
+                    <a:p>
+                      <a:pPr algn="ctr"/>
+                      <a:r>
+                        <a:rPr sz="1100" b="0" i="0">
+                          <a:solidFill>
+                            <a:srgbClr val="222222"/>
+                          </a:solidFill>
+                          <a:latin typeface="NanumGothic"/>
+                          <a:ea typeface="NanumGothic"/>
+                        </a:rPr>
+                        <a:t>0.952</a:t>
+                      </a:r>
+                    </a:p>
+                  </a:txBody>
+                  <a:tcPr marL="38100" marR="38100" marT="0" marB="0" anchor="ctr">
+                    <a:solidFill>
+                      <a:srgbClr val="FFFFFF"/>
+                    </a:solidFill>
+                  </a:tcPr>
+                </a:tc>
+                <a:tc>
+                  <a:txBody>
+                    <a:bodyPr/>
+                    <a:lstStyle/>
+                    <a:p>
+                      <a:pPr algn="ctr"/>
+                      <a:r>
+                        <a:rPr sz="1100" b="0" i="0">
+                          <a:solidFill>
+                            <a:srgbClr val="222222"/>
+                          </a:solidFill>
+                          <a:latin typeface="NanumGothic"/>
+                          <a:ea typeface="NanumGothic"/>
+                        </a:rPr>
+                        <a:t>0.968</a:t>
+                      </a:r>
+                    </a:p>
+                  </a:txBody>
+                  <a:tcPr marL="38100" marR="38100" marT="0" marB="0" anchor="ctr">
+                    <a:solidFill>
+                      <a:srgbClr val="FFFFFF"/>
+                    </a:solidFill>
+                  </a:tcPr>
+                </a:tc>
+                <a:tc>
+                  <a:txBody>
+                    <a:bodyPr/>
+                    <a:lstStyle/>
+                    <a:p>
+                      <a:pPr algn="ctr"/>
+                      <a:r>
+                        <a:rPr sz="1100" b="0" i="0">
+                          <a:solidFill>
+                            <a:srgbClr val="222222"/>
+                          </a:solidFill>
+                          <a:latin typeface="NanumGothic"/>
+                          <a:ea typeface="NanumGothic"/>
+                        </a:rPr>
+                        <a:t>0.700</a:t>
+                      </a:r>
+                    </a:p>
+                  </a:txBody>
+                  <a:tcPr marL="38100" marR="38100" marT="0" marB="0" anchor="ctr">
+                    <a:solidFill>
+                      <a:srgbClr val="FFFFFF"/>
+                    </a:solidFill>
+                  </a:tcPr>
+                </a:tc>
+                <a:tc>
+                  <a:txBody>
+                    <a:bodyPr/>
+                    <a:lstStyle/>
+                    <a:p>
+                      <a:pPr algn="ctr"/>
+                      <a:r>
+                        <a:rPr sz="1100" b="0" i="0">
+                          <a:solidFill>
+                            <a:srgbClr val="222222"/>
+                          </a:solidFill>
+                          <a:latin typeface="NanumGothic"/>
+                          <a:ea typeface="NanumGothic"/>
+                        </a:rPr>
+                        <a:t>0.700</a:t>
+                      </a:r>
+                    </a:p>
+                  </a:txBody>
+                  <a:tcPr marL="38100" marR="38100" marT="0" marB="0" anchor="ctr">
+                    <a:solidFill>
+                      <a:srgbClr val="FFFFFF"/>
+                    </a:solidFill>
+                  </a:tcPr>
+                </a:tc>
+                <a:tc>
+                  <a:txBody>
+                    <a:bodyPr/>
+                    <a:lstStyle/>
+                    <a:p>
+                      <a:pPr algn="ctr"/>
+                      <a:r>
+                        <a:rPr sz="1100" b="0" i="0">
+                          <a:solidFill>
+                            <a:srgbClr val="222222"/>
+                          </a:solidFill>
+                          <a:latin typeface="NanumGothic"/>
+                          <a:ea typeface="NanumGothic"/>
+                        </a:rPr>
+                        <a:t>0.933</a:t>
+                      </a:r>
+                    </a:p>
+                  </a:txBody>
+                  <a:tcPr marL="38100" marR="38100" marT="0" marB="0" anchor="ctr">
+                    <a:solidFill>
+                      <a:srgbClr val="FFFFFF"/>
+                    </a:solidFill>
+                  </a:tcPr>
+                </a:tc>
+              </a:tr>
+              <a:tr h="365760">
+                <a:tc>
+                  <a:txBody>
+                    <a:bodyPr/>
+                    <a:lstStyle/>
+                    <a:p>
+                      <a:pPr algn="l"/>
+                      <a:r>
+                        <a:rPr sz="1100" b="0" i="0">
+                          <a:solidFill>
+                            <a:srgbClr val="222222"/>
+                          </a:solidFill>
+                          <a:latin typeface="NanumGothic"/>
+                          <a:ea typeface="NanumGothic"/>
+                        </a:rPr>
+                        <a:t>ShapleyFL</a:t>
+                      </a:r>
+                    </a:p>
+                  </a:txBody>
+                  <a:tcPr marL="38100" marR="38100" marT="0" marB="0" anchor="ctr">
+                    <a:solidFill>
+                      <a:srgbClr val="F2F4F7"/>
+                    </a:solidFill>
+                  </a:tcPr>
+                </a:tc>
+                <a:tc>
+                  <a:txBody>
+                    <a:bodyPr/>
+                    <a:lstStyle/>
+                    <a:p>
+                      <a:pPr algn="ctr"/>
+                      <a:r>
+                        <a:rPr sz="1100" b="0" i="0">
+                          <a:solidFill>
+                            <a:srgbClr val="222222"/>
+                          </a:solidFill>
+                          <a:latin typeface="NanumGothic"/>
+                          <a:ea typeface="NanumGothic"/>
+                        </a:rPr>
+                        <a:t>0.194</a:t>
+                      </a:r>
+                    </a:p>
+                  </a:txBody>
+                  <a:tcPr marL="38100" marR="38100" marT="0" marB="0" anchor="ctr">
+                    <a:solidFill>
+                      <a:srgbClr val="F2F4F7"/>
+                    </a:solidFill>
+                  </a:tcPr>
+                </a:tc>
+                <a:tc>
+                  <a:txBody>
+                    <a:bodyPr/>
+                    <a:lstStyle/>
+                    <a:p>
+                      <a:pPr algn="ctr"/>
+                      <a:r>
+                        <a:rPr sz="1100" b="0" i="0">
+                          <a:solidFill>
+                            <a:srgbClr val="222222"/>
+                          </a:solidFill>
+                          <a:latin typeface="NanumGothic"/>
+                          <a:ea typeface="NanumGothic"/>
+                        </a:rPr>
+                        <a:t>0.227</a:t>
+                      </a:r>
+                    </a:p>
+                  </a:txBody>
+                  <a:tcPr marL="38100" marR="38100" marT="0" marB="0" anchor="ctr">
+                    <a:solidFill>
+                      <a:srgbClr val="F2F4F7"/>
+                    </a:solidFill>
+                  </a:tcPr>
+                </a:tc>
+                <a:tc>
+                  <a:txBody>
+                    <a:bodyPr/>
+                    <a:lstStyle/>
+                    <a:p>
+                      <a:pPr algn="ctr"/>
+                      <a:r>
+                        <a:rPr sz="1100" b="0" i="0">
+                          <a:solidFill>
+                            <a:srgbClr val="222222"/>
+                          </a:solidFill>
+                          <a:latin typeface="NanumGothic"/>
+                          <a:ea typeface="NanumGothic"/>
+                        </a:rPr>
+                        <a:t>0.406</a:t>
+                      </a:r>
+                    </a:p>
+                  </a:txBody>
+                  <a:tcPr marL="38100" marR="38100" marT="0" marB="0" anchor="ctr">
+                    <a:solidFill>
+                      <a:srgbClr val="F2F4F7"/>
+                    </a:solidFill>
+                  </a:tcPr>
+                </a:tc>
+                <a:tc>
+                  <a:txBody>
+                    <a:bodyPr/>
+                    <a:lstStyle/>
+                    <a:p>
+                      <a:pPr algn="ctr"/>
+                      <a:r>
+                        <a:rPr sz="1100" b="0" i="0">
+                          <a:solidFill>
+                            <a:srgbClr val="222222"/>
+                          </a:solidFill>
+                          <a:latin typeface="NanumGothic"/>
+                          <a:ea typeface="NanumGothic"/>
+                        </a:rPr>
+                        <a:t>0.700</a:t>
+                      </a:r>
+                    </a:p>
+                  </a:txBody>
+                  <a:tcPr marL="38100" marR="38100" marT="0" marB="0" anchor="ctr">
+                    <a:solidFill>
+                      <a:srgbClr val="F2F4F7"/>
+                    </a:solidFill>
+                  </a:tcPr>
+                </a:tc>
+                <a:tc>
+                  <a:txBody>
+                    <a:bodyPr/>
+                    <a:lstStyle/>
+                    <a:p>
+                      <a:pPr algn="ctr"/>
+                      <a:r>
+                        <a:rPr sz="1100" b="0" i="0">
+                          <a:solidFill>
+                            <a:srgbClr val="222222"/>
+                          </a:solidFill>
+                          <a:latin typeface="NanumGothic"/>
+                          <a:ea typeface="NanumGothic"/>
+                        </a:rPr>
+                        <a:t>0.100</a:t>
+                      </a:r>
+                    </a:p>
+                  </a:txBody>
+                  <a:tcPr marL="38100" marR="38100" marT="0" marB="0" anchor="ctr">
+                    <a:solidFill>
+                      <a:srgbClr val="F2F4F7"/>
+                    </a:solidFill>
+                  </a:tcPr>
+                </a:tc>
+                <a:tc>
+                  <a:txBody>
+                    <a:bodyPr/>
+                    <a:lstStyle/>
+                    <a:p>
+                      <a:pPr algn="ctr"/>
+                      <a:r>
+                        <a:rPr sz="1100" b="0" i="0">
+                          <a:solidFill>
+                            <a:srgbClr val="222222"/>
+                          </a:solidFill>
+                          <a:latin typeface="NanumGothic"/>
+                          <a:ea typeface="NanumGothic"/>
+                        </a:rPr>
+                        <a:t>0.833</a:t>
+                      </a:r>
+                    </a:p>
+                  </a:txBody>
+                  <a:tcPr marL="38100" marR="38100" marT="0" marB="0" anchor="ctr">
+                    <a:solidFill>
+                      <a:srgbClr val="F2F4F7"/>
+                    </a:solidFill>
+                  </a:tcPr>
+                </a:tc>
+              </a:tr>
+              <a:tr h="365760">
+                <a:tc>
+                  <a:txBody>
+                    <a:bodyPr/>
+                    <a:lstStyle/>
+                    <a:p>
+                      <a:pPr algn="l"/>
+                      <a:r>
+                        <a:rPr sz="1100" b="0" i="0">
+                          <a:solidFill>
+                            <a:srgbClr val="222222"/>
+                          </a:solidFill>
+                          <a:latin typeface="NanumGothic"/>
+                          <a:ea typeface="NanumGothic"/>
+                        </a:rPr>
+                        <a:t>FedIF</a:t>
+                      </a:r>
+                    </a:p>
+                  </a:txBody>
+                  <a:tcPr marL="38100" marR="38100" marT="0" marB="0" anchor="ctr">
+                    <a:solidFill>
+                      <a:srgbClr val="FFFFFF"/>
+                    </a:solidFill>
+                  </a:tcPr>
+                </a:tc>
+                <a:tc>
+                  <a:txBody>
+                    <a:bodyPr/>
+                    <a:lstStyle/>
+                    <a:p>
+                      <a:pPr algn="ctr"/>
+                      <a:r>
+                        <a:rPr sz="1100" b="0" i="0">
+                          <a:solidFill>
+                            <a:srgbClr val="222222"/>
+                          </a:solidFill>
+                          <a:latin typeface="NanumGothic"/>
+                          <a:ea typeface="NanumGothic"/>
+                        </a:rPr>
+                        <a:t>0.157</a:t>
+                      </a:r>
+                    </a:p>
+                  </a:txBody>
+                  <a:tcPr marL="38100" marR="38100" marT="0" marB="0" anchor="ctr">
+                    <a:solidFill>
+                      <a:srgbClr val="FFFFFF"/>
+                    </a:solidFill>
+                  </a:tcPr>
+                </a:tc>
+                <a:tc>
+                  <a:txBody>
+                    <a:bodyPr/>
+                    <a:lstStyle/>
+                    <a:p>
+                      <a:pPr algn="ctr"/>
+                      <a:r>
+                        <a:rPr sz="1100" b="0" i="0">
+                          <a:solidFill>
+                            <a:srgbClr val="222222"/>
+                          </a:solidFill>
+                          <a:latin typeface="NanumGothic"/>
+                          <a:ea typeface="NanumGothic"/>
+                        </a:rPr>
+                        <a:t>0.211</a:t>
+                      </a:r>
+                    </a:p>
+                  </a:txBody>
+                  <a:tcPr marL="38100" marR="38100" marT="0" marB="0" anchor="ctr">
+                    <a:solidFill>
+                      <a:srgbClr val="FFFFFF"/>
+                    </a:solidFill>
+                  </a:tcPr>
+                </a:tc>
+                <a:tc>
+                  <a:txBody>
+                    <a:bodyPr/>
+                    <a:lstStyle/>
+                    <a:p>
+                      <a:pPr algn="ctr"/>
+                      <a:r>
+                        <a:rPr sz="1100" b="0" i="0">
+                          <a:solidFill>
+                            <a:srgbClr val="222222"/>
+                          </a:solidFill>
+                          <a:latin typeface="NanumGothic"/>
+                          <a:ea typeface="NanumGothic"/>
+                        </a:rPr>
+                        <a:t>0.480</a:t>
+                      </a:r>
+                    </a:p>
+                  </a:txBody>
+                  <a:tcPr marL="38100" marR="38100" marT="0" marB="0" anchor="ctr">
+                    <a:solidFill>
+                      <a:srgbClr val="FFFFFF"/>
+                    </a:solidFill>
+                  </a:tcPr>
+                </a:tc>
+                <a:tc>
+                  <a:txBody>
+                    <a:bodyPr/>
+                    <a:lstStyle/>
+                    <a:p>
+                      <a:pPr algn="ctr"/>
+                      <a:r>
+                        <a:rPr sz="1100" b="0" i="0">
+                          <a:solidFill>
+                            <a:srgbClr val="222222"/>
+                          </a:solidFill>
+                          <a:latin typeface="NanumGothic"/>
+                          <a:ea typeface="NanumGothic"/>
+                        </a:rPr>
+                        <a:t>0.067</a:t>
+                      </a:r>
+                    </a:p>
+                  </a:txBody>
+                  <a:tcPr marL="38100" marR="38100" marT="0" marB="0" anchor="ctr">
+                    <a:solidFill>
+                      <a:srgbClr val="FFFFFF"/>
+                    </a:solidFill>
+                  </a:tcPr>
+                </a:tc>
+                <a:tc>
+                  <a:txBody>
+                    <a:bodyPr/>
+                    <a:lstStyle/>
+                    <a:p>
+                      <a:pPr algn="ctr"/>
+                      <a:r>
+                        <a:rPr sz="1100" b="0" i="0">
+                          <a:solidFill>
+                            <a:srgbClr val="222222"/>
+                          </a:solidFill>
+                          <a:latin typeface="NanumGothic"/>
+                          <a:ea typeface="NanumGothic"/>
+                        </a:rPr>
+                        <a:t>0.067</a:t>
+                      </a:r>
+                    </a:p>
+                  </a:txBody>
+                  <a:tcPr marL="38100" marR="38100" marT="0" marB="0" anchor="ctr">
+                    <a:solidFill>
+                      <a:srgbClr val="FFFFFF"/>
+                    </a:solidFill>
+                  </a:tcPr>
+                </a:tc>
+                <a:tc>
+                  <a:txBody>
+                    <a:bodyPr/>
+                    <a:lstStyle/>
+                    <a:p>
+                      <a:pPr algn="ctr"/>
+                      <a:r>
+                        <a:rPr sz="1100" b="0" i="0">
+                          <a:solidFill>
+                            <a:srgbClr val="222222"/>
+                          </a:solidFill>
+                          <a:latin typeface="NanumGothic"/>
+                          <a:ea typeface="NanumGothic"/>
+                        </a:rPr>
+                        <a:t>0.200</a:t>
+                      </a:r>
+                    </a:p>
+                  </a:txBody>
+                  <a:tcPr marL="38100" marR="38100" marT="0" marB="0" anchor="ctr">
+                    <a:solidFill>
+                      <a:srgbClr val="FFFFFF"/>
+                    </a:solidFill>
+                  </a:tcPr>
+                </a:tc>
+              </a:tr>
+            </a:tbl>
+          </a:graphicData>
+        </a:graphic>
+      </p:graphicFrame>
     </p:spTree>
   </p:cSld>
   <p:clrMapOvr>
@@ -12767,7 +18207,7 @@
                 <a:latin typeface="NanumGothic"/>
                 <a:ea typeface="NanumGothic"/>
               </a:rPr>
-              <a:t>11</a:t>
+              <a:t>10</a:t>
             </a:r>
           </a:p>
         </p:txBody>

--- a/research-wiki/survey/presentations/flirds-seminar-intro/flirds-seminar-intro.pptx
+++ b/research-wiki/survey/presentations/flirds-seminar-intro/flirds-seminar-intro.pptx
@@ -10,14 +10,17 @@
     <p:sldId id="259" r:id="rId4"/>
     <p:sldId id="260" r:id="rId5"/>
     <p:sldId id="261" r:id="rId6"/>
-    <p:sldId id="263" r:id="rId7"/>
-    <p:sldId id="264" r:id="rId8"/>
-    <p:sldId id="265" r:id="rId9"/>
-    <p:sldId id="272" r:id="rId10"/>
-    <p:sldId id="266" r:id="rId11"/>
-    <p:sldId id="267" r:id="rId12"/>
-    <p:sldId id="268" r:id="rId13"/>
-    <p:sldId id="271" r:id="rId14"/>
+    <p:sldId id="273" r:id="rId7"/>
+    <p:sldId id="274" r:id="rId8"/>
+    <p:sldId id="275" r:id="rId9"/>
+    <p:sldId id="263" r:id="rId10"/>
+    <p:sldId id="264" r:id="rId11"/>
+    <p:sldId id="265" r:id="rId12"/>
+    <p:sldId id="272" r:id="rId13"/>
+    <p:sldId id="266" r:id="rId14"/>
+    <p:sldId id="267" r:id="rId15"/>
+    <p:sldId id="268" r:id="rId16"/>
+    <p:sldId id="271" r:id="rId17"/>
   </p:sldIdLst>
   <p:sldSz cx="12192000" cy="6858000"/>
   <p:notesSz cx="6858000" cy="9144000"/>
@@ -314,7 +317,7 @@
           <a:p>
             <a:fld id="{5BCAD085-E8A6-8845-BD4E-CB4CCA059FC4}" type="datetimeFigureOut">
               <a:rPr lang="en-US" smtClean="0"/>
-              <a:t>6/30/2026</a:t>
+              <a:t>7/1/2026</a:t>
             </a:fld>
             <a:endParaRPr lang="en-US"/>
           </a:p>
@@ -482,7 +485,7 @@
           <a:p>
             <a:fld id="{5BCAD085-E8A6-8845-BD4E-CB4CCA059FC4}" type="datetimeFigureOut">
               <a:rPr lang="en-US" smtClean="0"/>
-              <a:t>6/30/2026</a:t>
+              <a:t>7/1/2026</a:t>
             </a:fld>
             <a:endParaRPr lang="en-US"/>
           </a:p>
@@ -660,7 +663,7 @@
           <a:p>
             <a:fld id="{5BCAD085-E8A6-8845-BD4E-CB4CCA059FC4}" type="datetimeFigureOut">
               <a:rPr lang="en-US" smtClean="0"/>
-              <a:t>6/30/2026</a:t>
+              <a:t>7/1/2026</a:t>
             </a:fld>
             <a:endParaRPr lang="en-US"/>
           </a:p>
@@ -828,7 +831,7 @@
           <a:p>
             <a:fld id="{5BCAD085-E8A6-8845-BD4E-CB4CCA059FC4}" type="datetimeFigureOut">
               <a:rPr lang="en-US" smtClean="0"/>
-              <a:t>6/30/2026</a:t>
+              <a:t>7/1/2026</a:t>
             </a:fld>
             <a:endParaRPr lang="en-US"/>
           </a:p>
@@ -1073,7 +1076,7 @@
           <a:p>
             <a:fld id="{5BCAD085-E8A6-8845-BD4E-CB4CCA059FC4}" type="datetimeFigureOut">
               <a:rPr lang="en-US" smtClean="0"/>
-              <a:t>6/30/2026</a:t>
+              <a:t>7/1/2026</a:t>
             </a:fld>
             <a:endParaRPr lang="en-US"/>
           </a:p>
@@ -1358,7 +1361,7 @@
           <a:p>
             <a:fld id="{5BCAD085-E8A6-8845-BD4E-CB4CCA059FC4}" type="datetimeFigureOut">
               <a:rPr lang="en-US" smtClean="0"/>
-              <a:t>6/30/2026</a:t>
+              <a:t>7/1/2026</a:t>
             </a:fld>
             <a:endParaRPr lang="en-US"/>
           </a:p>
@@ -1777,7 +1780,7 @@
           <a:p>
             <a:fld id="{5BCAD085-E8A6-8845-BD4E-CB4CCA059FC4}" type="datetimeFigureOut">
               <a:rPr lang="en-US" smtClean="0"/>
-              <a:t>6/30/2026</a:t>
+              <a:t>7/1/2026</a:t>
             </a:fld>
             <a:endParaRPr lang="en-US"/>
           </a:p>
@@ -1894,7 +1897,7 @@
           <a:p>
             <a:fld id="{5BCAD085-E8A6-8845-BD4E-CB4CCA059FC4}" type="datetimeFigureOut">
               <a:rPr lang="en-US" smtClean="0"/>
-              <a:t>6/30/2026</a:t>
+              <a:t>7/1/2026</a:t>
             </a:fld>
             <a:endParaRPr lang="en-US"/>
           </a:p>
@@ -1989,7 +1992,7 @@
           <a:p>
             <a:fld id="{5BCAD085-E8A6-8845-BD4E-CB4CCA059FC4}" type="datetimeFigureOut">
               <a:rPr lang="en-US" smtClean="0"/>
-              <a:t>6/30/2026</a:t>
+              <a:t>7/1/2026</a:t>
             </a:fld>
             <a:endParaRPr lang="en-US"/>
           </a:p>
@@ -2264,7 +2267,7 @@
           <a:p>
             <a:fld id="{5BCAD085-E8A6-8845-BD4E-CB4CCA059FC4}" type="datetimeFigureOut">
               <a:rPr lang="en-US" smtClean="0"/>
-              <a:t>6/30/2026</a:t>
+              <a:t>7/1/2026</a:t>
             </a:fld>
             <a:endParaRPr lang="en-US"/>
           </a:p>
@@ -2516,7 +2519,7 @@
           <a:p>
             <a:fld id="{5BCAD085-E8A6-8845-BD4E-CB4CCA059FC4}" type="datetimeFigureOut">
               <a:rPr lang="en-US" smtClean="0"/>
-              <a:t>6/30/2026</a:t>
+              <a:t>7/1/2026</a:t>
             </a:fld>
             <a:endParaRPr lang="en-US"/>
           </a:p>
@@ -2727,7 +2730,7 @@
           <a:p>
             <a:fld id="{5BCAD085-E8A6-8845-BD4E-CB4CCA059FC4}" type="datetimeFigureOut">
               <a:rPr lang="en-US" smtClean="0"/>
-              <a:t>6/30/2026</a:t>
+              <a:t>7/1/2026</a:t>
             </a:fld>
             <a:endParaRPr lang="en-US"/>
           </a:p>
@@ -3353,6 +3356,3796 @@
         <p:spPr>
           <a:xfrm>
             <a:off x="411480" y="292608"/>
+            <a:ext cx="11338560" cy="702756"/>
+          </a:xfrm>
+          <a:prstGeom prst="rect">
+            <a:avLst/>
+          </a:prstGeom>
+          <a:noFill/>
+        </p:spPr>
+        <p:txBody>
+          <a:bodyPr wrap="square" lIns="25400" tIns="12700" rIns="25400" bIns="12700" anchor="t">
+            <a:spAutoFit/>
+          </a:bodyPr>
+          <a:lstStyle/>
+          <a:p>
+            <a:pPr algn="l">
+              <a:lnSpc>
+                <a:spcPct val="100000"/>
+              </a:lnSpc>
+            </a:pPr>
+            <a:r>
+              <a:rPr sz="4400" b="1" i="0" dirty="0">
+                <a:solidFill>
+                  <a:srgbClr val="1F2A37"/>
+                </a:solidFill>
+                <a:latin typeface="+mj-lt"/>
+                <a:ea typeface="NanumGothic"/>
+              </a:rPr>
+              <a:t>Approximation Error Analysis</a:t>
+            </a:r>
+          </a:p>
+        </p:txBody>
+      </p:sp>
+      <p:sp>
+        <p:nvSpPr>
+          <p:cNvPr id="4" name="Rounded Rectangle 3"/>
+          <p:cNvSpPr/>
+          <p:nvPr/>
+        </p:nvSpPr>
+        <p:spPr>
+          <a:xfrm>
+            <a:off x="502920" y="1774288"/>
+            <a:ext cx="5486400" cy="2468880"/>
+          </a:xfrm>
+          <a:prstGeom prst="roundRect">
+            <a:avLst>
+              <a:gd name="adj" fmla="val 6000"/>
+            </a:avLst>
+          </a:prstGeom>
+          <a:solidFill>
+            <a:srgbClr val="EDF1F6"/>
+          </a:solidFill>
+          <a:ln w="9525">
+            <a:solidFill>
+              <a:srgbClr val="D3DDE8"/>
+            </a:solidFill>
+          </a:ln>
+          <a:effectLst/>
+        </p:spPr>
+        <p:style>
+          <a:lnRef idx="1">
+            <a:schemeClr val="accent1"/>
+          </a:lnRef>
+          <a:fillRef idx="3">
+            <a:schemeClr val="accent1"/>
+          </a:fillRef>
+          <a:effectRef idx="2">
+            <a:schemeClr val="accent1"/>
+          </a:effectRef>
+          <a:fontRef idx="minor">
+            <a:schemeClr val="lt1"/>
+          </a:fontRef>
+        </p:style>
+        <p:txBody>
+          <a:bodyPr rtlCol="0" anchor="ctr"/>
+          <a:lstStyle/>
+          <a:p>
+            <a:pPr algn="ctr"/>
+            <a:endParaRPr sz="2800"/>
+          </a:p>
+        </p:txBody>
+      </p:sp>
+      <p:sp>
+        <p:nvSpPr>
+          <p:cNvPr id="5" name="TextBox 4"/>
+          <p:cNvSpPr txBox="1"/>
+          <p:nvPr/>
+        </p:nvSpPr>
+        <p:spPr>
+          <a:xfrm>
+            <a:off x="777240" y="2002888"/>
+            <a:ext cx="4937760" cy="1524648"/>
+          </a:xfrm>
+          <a:prstGeom prst="rect">
+            <a:avLst/>
+          </a:prstGeom>
+          <a:noFill/>
+        </p:spPr>
+        <p:txBody>
+          <a:bodyPr wrap="square" lIns="25400" tIns="12700" rIns="25400" bIns="12700" anchor="t">
+            <a:spAutoFit/>
+          </a:bodyPr>
+          <a:lstStyle/>
+          <a:p>
+            <a:pPr algn="l">
+              <a:lnSpc>
+                <a:spcPct val="135000"/>
+              </a:lnSpc>
+            </a:pPr>
+            <a:r>
+              <a:rPr sz="2000" b="1" i="0" dirty="0">
+                <a:solidFill>
+                  <a:srgbClr val="33475B"/>
+                </a:solidFill>
+                <a:ea typeface="NanumGothic"/>
+              </a:rPr>
+              <a:t>IRDS — </a:t>
+            </a:r>
+            <a:r>
+              <a:rPr lang="en-US" sz="2000" b="1" dirty="0">
+                <a:solidFill>
+                  <a:srgbClr val="33475B"/>
+                </a:solidFill>
+                <a:ea typeface="NanumGothic"/>
+              </a:rPr>
+              <a:t>Centralized</a:t>
+            </a:r>
+            <a:r>
+              <a:rPr sz="2000" b="1" i="0" dirty="0">
+                <a:solidFill>
+                  <a:srgbClr val="33475B"/>
+                </a:solidFill>
+                <a:ea typeface="NanumGothic"/>
+              </a:rPr>
+              <a:t> per-step</a:t>
+            </a:r>
+            <a:r>
+              <a:rPr lang="en-US" sz="2000" b="1" i="0" dirty="0">
+                <a:solidFill>
+                  <a:srgbClr val="33475B"/>
+                </a:solidFill>
+                <a:ea typeface="NanumGothic"/>
+              </a:rPr>
+              <a:t> per-sample</a:t>
+            </a:r>
+            <a:endParaRPr sz="2000" b="1" i="0" dirty="0">
+              <a:solidFill>
+                <a:srgbClr val="33475B"/>
+              </a:solidFill>
+              <a:ea typeface="NanumGothic"/>
+            </a:endParaRPr>
+          </a:p>
+          <a:p>
+            <a:pPr algn="l">
+              <a:lnSpc>
+                <a:spcPct val="135000"/>
+              </a:lnSpc>
+            </a:pPr>
+            <a:r>
+              <a:rPr b="0" i="0" dirty="0">
+                <a:solidFill>
+                  <a:srgbClr val="222222"/>
+                </a:solidFill>
+                <a:ea typeface="NanumGothic"/>
+              </a:rPr>
+              <a:t>• ‖</a:t>
+            </a:r>
+            <a:r>
+              <a:rPr b="0" i="0" dirty="0" err="1">
+                <a:solidFill>
+                  <a:srgbClr val="222222"/>
+                </a:solidFill>
+                <a:ea typeface="NanumGothic"/>
+              </a:rPr>
+              <a:t>Δθ</a:t>
+            </a:r>
+            <a:r>
+              <a:rPr b="0" i="0" dirty="0">
+                <a:solidFill>
+                  <a:srgbClr val="222222"/>
+                </a:solidFill>
+                <a:ea typeface="NanumGothic"/>
+              </a:rPr>
+              <a:t>‖ </a:t>
+            </a:r>
+            <a:r>
+              <a:rPr b="0" i="0" dirty="0" err="1">
+                <a:solidFill>
+                  <a:srgbClr val="222222"/>
+                </a:solidFill>
+                <a:ea typeface="NanumGothic"/>
+              </a:rPr>
+              <a:t>작음</a:t>
+            </a:r>
+            <a:r>
+              <a:rPr b="0" i="0" dirty="0">
+                <a:solidFill>
+                  <a:srgbClr val="222222"/>
+                </a:solidFill>
+                <a:ea typeface="NanumGothic"/>
+              </a:rPr>
+              <a:t> (</a:t>
+            </a:r>
+            <a:r>
+              <a:rPr b="0" i="0" dirty="0" err="1">
+                <a:solidFill>
+                  <a:srgbClr val="222222"/>
+                </a:solidFill>
+                <a:ea typeface="NanumGothic"/>
+              </a:rPr>
+              <a:t>작은</a:t>
+            </a:r>
+            <a:r>
+              <a:rPr b="0" i="0" dirty="0">
+                <a:solidFill>
+                  <a:srgbClr val="222222"/>
+                </a:solidFill>
+                <a:ea typeface="NanumGothic"/>
+              </a:rPr>
+              <a:t> 한 </a:t>
+            </a:r>
+            <a:r>
+              <a:rPr b="0" i="0" dirty="0" err="1">
+                <a:solidFill>
+                  <a:srgbClr val="222222"/>
+                </a:solidFill>
+                <a:ea typeface="NanumGothic"/>
+              </a:rPr>
+              <a:t>스텝</a:t>
+            </a:r>
+            <a:r>
+              <a:rPr b="0" i="0" dirty="0">
+                <a:solidFill>
+                  <a:srgbClr val="222222"/>
+                </a:solidFill>
+                <a:ea typeface="NanumGothic"/>
+              </a:rPr>
+              <a:t>)</a:t>
+            </a:r>
+          </a:p>
+          <a:p>
+            <a:pPr algn="l">
+              <a:lnSpc>
+                <a:spcPct val="135000"/>
+              </a:lnSpc>
+            </a:pPr>
+            <a:r>
+              <a:rPr b="0" i="0" dirty="0">
+                <a:solidFill>
+                  <a:srgbClr val="222222"/>
+                </a:solidFill>
+                <a:ea typeface="NanumGothic"/>
+              </a:rPr>
+              <a:t>• 1차 </a:t>
+            </a:r>
+            <a:r>
+              <a:rPr b="0" i="0" dirty="0" err="1">
+                <a:solidFill>
+                  <a:srgbClr val="222222"/>
+                </a:solidFill>
+                <a:ea typeface="NanumGothic"/>
+              </a:rPr>
+              <a:t>잔차</a:t>
+            </a:r>
+            <a:r>
+              <a:rPr b="0" i="0" dirty="0">
+                <a:solidFill>
+                  <a:srgbClr val="222222"/>
+                </a:solidFill>
+                <a:ea typeface="NanumGothic"/>
+              </a:rPr>
+              <a:t> O(‖Δθ‖²) → </a:t>
+            </a:r>
+            <a:r>
+              <a:rPr b="0" i="0" dirty="0" err="1">
+                <a:solidFill>
+                  <a:srgbClr val="222222"/>
+                </a:solidFill>
+                <a:ea typeface="NanumGothic"/>
+              </a:rPr>
+              <a:t>이미</a:t>
+            </a:r>
+            <a:r>
+              <a:rPr b="0" i="0" dirty="0">
+                <a:solidFill>
+                  <a:srgbClr val="222222"/>
+                </a:solidFill>
+                <a:ea typeface="NanumGothic"/>
+              </a:rPr>
+              <a:t> </a:t>
+            </a:r>
+            <a:r>
+              <a:rPr b="0" i="0" dirty="0" err="1">
+                <a:solidFill>
+                  <a:srgbClr val="222222"/>
+                </a:solidFill>
+                <a:ea typeface="NanumGothic"/>
+              </a:rPr>
+              <a:t>작음</a:t>
+            </a:r>
+            <a:endParaRPr b="0" i="0" dirty="0">
+              <a:solidFill>
+                <a:srgbClr val="222222"/>
+              </a:solidFill>
+              <a:ea typeface="NanumGothic"/>
+            </a:endParaRPr>
+          </a:p>
+          <a:p>
+            <a:pPr algn="l">
+              <a:lnSpc>
+                <a:spcPct val="135000"/>
+              </a:lnSpc>
+            </a:pPr>
+            <a:r>
+              <a:rPr b="0" i="0" dirty="0">
+                <a:solidFill>
+                  <a:srgbClr val="222222"/>
+                </a:solidFill>
+                <a:ea typeface="NanumGothic"/>
+              </a:rPr>
+              <a:t>• 2차 항 </a:t>
+            </a:r>
+            <a:r>
+              <a:rPr b="0" i="0" dirty="0" err="1">
+                <a:solidFill>
+                  <a:srgbClr val="222222"/>
+                </a:solidFill>
+                <a:ea typeface="NanumGothic"/>
+              </a:rPr>
+              <a:t>역할</a:t>
+            </a:r>
+            <a:r>
+              <a:rPr b="0" i="0" dirty="0">
+                <a:solidFill>
+                  <a:srgbClr val="222222"/>
+                </a:solidFill>
+                <a:ea typeface="NanumGothic"/>
+              </a:rPr>
+              <a:t> </a:t>
+            </a:r>
+            <a:r>
+              <a:rPr b="0" i="0" dirty="0" err="1">
+                <a:solidFill>
+                  <a:srgbClr val="222222"/>
+                </a:solidFill>
+                <a:ea typeface="NanumGothic"/>
+              </a:rPr>
+              <a:t>미미</a:t>
+            </a:r>
+            <a:endParaRPr b="0" i="0" dirty="0">
+              <a:solidFill>
+                <a:srgbClr val="222222"/>
+              </a:solidFill>
+              <a:ea typeface="NanumGothic"/>
+            </a:endParaRPr>
+          </a:p>
+        </p:txBody>
+      </p:sp>
+      <p:sp>
+        <p:nvSpPr>
+          <p:cNvPr id="6" name="Rounded Rectangle 5"/>
+          <p:cNvSpPr/>
+          <p:nvPr/>
+        </p:nvSpPr>
+        <p:spPr>
+          <a:xfrm>
+            <a:off x="6263640" y="1774288"/>
+            <a:ext cx="5394960" cy="2468880"/>
+          </a:xfrm>
+          <a:prstGeom prst="roundRect">
+            <a:avLst>
+              <a:gd name="adj" fmla="val 6000"/>
+            </a:avLst>
+          </a:prstGeom>
+          <a:solidFill>
+            <a:srgbClr val="F7ECE8"/>
+          </a:solidFill>
+          <a:ln w="9525">
+            <a:solidFill>
+              <a:srgbClr val="E3C9C0"/>
+            </a:solidFill>
+          </a:ln>
+          <a:effectLst/>
+        </p:spPr>
+        <p:style>
+          <a:lnRef idx="1">
+            <a:schemeClr val="accent1"/>
+          </a:lnRef>
+          <a:fillRef idx="3">
+            <a:schemeClr val="accent1"/>
+          </a:fillRef>
+          <a:effectRef idx="2">
+            <a:schemeClr val="accent1"/>
+          </a:effectRef>
+          <a:fontRef idx="minor">
+            <a:schemeClr val="lt1"/>
+          </a:fontRef>
+        </p:style>
+        <p:txBody>
+          <a:bodyPr rtlCol="0" anchor="ctr"/>
+          <a:lstStyle/>
+          <a:p>
+            <a:pPr algn="ctr"/>
+            <a:endParaRPr sz="2800"/>
+          </a:p>
+        </p:txBody>
+      </p:sp>
+      <mc:AlternateContent xmlns:mc="http://schemas.openxmlformats.org/markup-compatibility/2006">
+        <mc:Choice xmlns:a14="http://schemas.microsoft.com/office/drawing/2010/main" Requires="a14">
+          <p:sp>
+            <p:nvSpPr>
+              <p:cNvPr id="7" name="TextBox 6"/>
+              <p:cNvSpPr txBox="1"/>
+              <p:nvPr/>
+            </p:nvSpPr>
+            <p:spPr>
+              <a:xfrm>
+                <a:off x="6537960" y="2002888"/>
+                <a:ext cx="4846320" cy="1576394"/>
+              </a:xfrm>
+              <a:prstGeom prst="rect">
+                <a:avLst/>
+              </a:prstGeom>
+              <a:noFill/>
+            </p:spPr>
+            <p:txBody>
+              <a:bodyPr wrap="square" lIns="25400" tIns="12700" rIns="25400" bIns="12700" anchor="t">
+                <a:spAutoFit/>
+              </a:bodyPr>
+              <a:lstStyle/>
+              <a:p>
+                <a:pPr algn="l">
+                  <a:lnSpc>
+                    <a:spcPct val="135000"/>
+                  </a:lnSpc>
+                </a:pPr>
+                <a:r>
+                  <a:rPr sz="2000" b="1" i="0" dirty="0" err="1">
+                    <a:solidFill>
+                      <a:srgbClr val="B85042"/>
+                    </a:solidFill>
+                    <a:ea typeface="NanumGothic"/>
+                  </a:rPr>
+                  <a:t>F</a:t>
+                </a:r>
+                <a:r>
+                  <a:rPr lang="en-US" sz="2000" b="1" i="0" dirty="0" err="1">
+                    <a:solidFill>
+                      <a:srgbClr val="B85042"/>
+                    </a:solidFill>
+                    <a:ea typeface="NanumGothic"/>
+                  </a:rPr>
+                  <a:t>lirds</a:t>
+                </a:r>
+                <a:r>
+                  <a:rPr sz="2000" b="1" i="0" dirty="0">
+                    <a:solidFill>
+                      <a:srgbClr val="B85042"/>
+                    </a:solidFill>
+                    <a:ea typeface="NanumGothic"/>
+                  </a:rPr>
+                  <a:t> — </a:t>
+                </a:r>
+                <a:r>
+                  <a:rPr lang="en-US" sz="2000" b="1" i="0" dirty="0">
+                    <a:solidFill>
+                      <a:srgbClr val="B85042"/>
+                    </a:solidFill>
+                    <a:ea typeface="NanumGothic"/>
+                  </a:rPr>
+                  <a:t>Federated per-round per-client</a:t>
+                </a:r>
+                <a:endParaRPr sz="2000" b="1" i="0" dirty="0">
+                  <a:solidFill>
+                    <a:srgbClr val="B85042"/>
+                  </a:solidFill>
+                  <a:ea typeface="NanumGothic"/>
+                </a:endParaRPr>
+              </a:p>
+              <a:p>
+                <a:pPr algn="l">
+                  <a:lnSpc>
+                    <a:spcPct val="135000"/>
+                  </a:lnSpc>
+                </a:pPr>
+                <a:r>
+                  <a:rPr b="0" i="0" dirty="0">
+                    <a:solidFill>
+                      <a:srgbClr val="222222"/>
+                    </a:solidFill>
+                    <a:ea typeface="NanumGothic"/>
+                  </a:rPr>
+                  <a:t>• ‖</a:t>
+                </a:r>
+                <a14:m>
+                  <m:oMath xmlns:m="http://schemas.openxmlformats.org/officeDocument/2006/math">
+                    <m:r>
+                      <m:rPr>
+                        <m:sty m:val="p"/>
+                      </m:rPr>
+                      <a:rPr lang="el-GR" b="0" i="0" dirty="0" smtClean="0">
+                        <a:solidFill>
+                          <a:srgbClr val="222222"/>
+                        </a:solidFill>
+                        <a:ea typeface="NanumGothic"/>
+                      </a:rPr>
+                      <m:t>Δ</m:t>
+                    </m:r>
+                    <m:sSub>
+                      <m:sSubPr>
+                        <m:ctrlPr>
+                          <a:rPr lang="el-GR" b="0" i="1" dirty="0" err="1">
+                            <a:solidFill>
+                              <a:srgbClr val="222222"/>
+                            </a:solidFill>
+                            <a:ea typeface="NanumGothic"/>
+                          </a:rPr>
+                        </m:ctrlPr>
+                      </m:sSubPr>
+                      <m:e>
+                        <m:r>
+                          <a:rPr lang="el-GR" b="0" i="1" dirty="0" err="1">
+                            <a:solidFill>
+                              <a:srgbClr val="222222"/>
+                            </a:solidFill>
+                            <a:ea typeface="NanumGothic"/>
+                          </a:rPr>
+                          <m:t>𝑤</m:t>
+                        </m:r>
+                      </m:e>
+                      <m:sub>
+                        <m:r>
+                          <a:rPr lang="el-GR" b="0" i="1" dirty="0" err="1">
+                            <a:solidFill>
+                              <a:srgbClr val="222222"/>
+                            </a:solidFill>
+                            <a:ea typeface="NanumGothic"/>
+                          </a:rPr>
+                          <m:t>𝑟𝑜𝑢𝑛𝑑</m:t>
+                        </m:r>
+                      </m:sub>
+                    </m:sSub>
+                  </m:oMath>
+                </a14:m>
+                <a:r>
+                  <a:rPr b="0" i="0" dirty="0">
+                    <a:solidFill>
+                      <a:srgbClr val="222222"/>
+                    </a:solidFill>
+                    <a:ea typeface="NanumGothic"/>
+                  </a:rPr>
+                  <a:t>‖ ≫ per-step</a:t>
+                </a:r>
+              </a:p>
+              <a:p>
+                <a:pPr algn="l">
+                  <a:lnSpc>
+                    <a:spcPct val="135000"/>
+                  </a:lnSpc>
+                </a:pPr>
+                <a:r>
+                  <a:rPr b="0" i="0" dirty="0">
+                    <a:solidFill>
+                      <a:srgbClr val="222222"/>
+                    </a:solidFill>
+                    <a:ea typeface="NanumGothic"/>
+                  </a:rPr>
+                  <a:t>• 1차 </a:t>
+                </a:r>
+                <a:r>
+                  <a:rPr b="0" i="0" dirty="0" err="1">
+                    <a:solidFill>
+                      <a:srgbClr val="222222"/>
+                    </a:solidFill>
+                    <a:ea typeface="NanumGothic"/>
+                  </a:rPr>
+                  <a:t>잔차</a:t>
+                </a:r>
+                <a:r>
+                  <a:rPr b="0" i="0" dirty="0">
+                    <a:solidFill>
+                      <a:srgbClr val="222222"/>
+                    </a:solidFill>
+                    <a:ea typeface="NanumGothic"/>
+                  </a:rPr>
+                  <a:t> </a:t>
+                </a:r>
+                <a14:m>
+                  <m:oMath xmlns:m="http://schemas.openxmlformats.org/officeDocument/2006/math">
+                    <m:r>
+                      <a:rPr lang="el-GR" b="0" i="1" dirty="0" smtClean="0">
+                        <a:solidFill>
+                          <a:srgbClr val="222222"/>
+                        </a:solidFill>
+                        <a:ea typeface="NanumGothic"/>
+                      </a:rPr>
+                      <m:t>𝑂</m:t>
+                    </m:r>
+                    <m:d>
+                      <m:dPr>
+                        <m:ctrlPr>
+                          <a:rPr lang="el-GR" b="0" i="1" dirty="0" smtClean="0">
+                            <a:solidFill>
+                              <a:srgbClr val="222222"/>
+                            </a:solidFill>
+                            <a:ea typeface="NanumGothic"/>
+                          </a:rPr>
+                        </m:ctrlPr>
+                      </m:dPr>
+                      <m:e>
+                        <m:sSup>
+                          <m:sSupPr>
+                            <m:ctrlPr>
+                              <a:rPr lang="el-GR" b="0" i="1" dirty="0">
+                                <a:solidFill>
+                                  <a:srgbClr val="222222"/>
+                                </a:solidFill>
+                                <a:ea typeface="NanumGothic"/>
+                              </a:rPr>
+                            </m:ctrlPr>
+                          </m:sSupPr>
+                          <m:e>
+                            <m:d>
+                              <m:dPr>
+                                <m:begChr m:val="‖"/>
+                                <m:endChr m:val="‖"/>
+                                <m:ctrlPr>
+                                  <a:rPr lang="el-GR" b="0" i="1" dirty="0" smtClean="0">
+                                    <a:solidFill>
+                                      <a:srgbClr val="222222"/>
+                                    </a:solidFill>
+                                    <a:ea typeface="NanumGothic"/>
+                                  </a:rPr>
+                                </m:ctrlPr>
+                              </m:dPr>
+                              <m:e>
+                                <m:r>
+                                  <m:rPr>
+                                    <m:sty m:val="p"/>
+                                  </m:rPr>
+                                  <a:rPr lang="el-GR" b="0" i="0" dirty="0" err="1">
+                                    <a:solidFill>
+                                      <a:srgbClr val="222222"/>
+                                    </a:solidFill>
+                                    <a:ea typeface="NanumGothic"/>
+                                  </a:rPr>
+                                  <m:t>Δ</m:t>
+                                </m:r>
+                                <m:sSub>
+                                  <m:sSubPr>
+                                    <m:ctrlPr>
+                                      <a:rPr lang="el-GR" b="0" i="1" dirty="0" smtClean="0">
+                                        <a:solidFill>
+                                          <a:srgbClr val="222222"/>
+                                        </a:solidFill>
+                                        <a:ea typeface="NanumGothic"/>
+                                      </a:rPr>
+                                    </m:ctrlPr>
+                                  </m:sSubPr>
+                                  <m:e>
+                                    <m:r>
+                                      <a:rPr lang="el-GR" b="0" i="1" dirty="0" err="1">
+                                        <a:solidFill>
+                                          <a:srgbClr val="222222"/>
+                                        </a:solidFill>
+                                        <a:ea typeface="NanumGothic"/>
+                                      </a:rPr>
+                                      <m:t>𝑤</m:t>
+                                    </m:r>
+                                  </m:e>
+                                  <m:sub>
+                                    <m:r>
+                                      <a:rPr lang="el-GR" b="0" i="1" dirty="0" smtClean="0">
+                                        <a:solidFill>
+                                          <a:srgbClr val="222222"/>
+                                        </a:solidFill>
+                                        <a:ea typeface="NanumGothic"/>
+                                      </a:rPr>
+                                      <m:t>𝑟𝑜𝑢𝑛𝑑</m:t>
+                                    </m:r>
+                                  </m:sub>
+                                </m:sSub>
+                              </m:e>
+                            </m:d>
+                          </m:e>
+                          <m:sup>
+                            <m:r>
+                              <a:rPr lang="el-GR" b="0" i="1" dirty="0">
+                                <a:solidFill>
+                                  <a:srgbClr val="222222"/>
+                                </a:solidFill>
+                                <a:ea typeface="NanumGothic"/>
+                              </a:rPr>
+                              <m:t>2</m:t>
+                            </m:r>
+                          </m:sup>
+                        </m:sSup>
+                      </m:e>
+                    </m:d>
+                  </m:oMath>
+                </a14:m>
+                <a:r>
+                  <a:rPr b="0" i="0" dirty="0">
+                    <a:solidFill>
+                      <a:srgbClr val="222222"/>
+                    </a:solidFill>
+                    <a:ea typeface="NanumGothic"/>
+                  </a:rPr>
+                  <a:t> </a:t>
+                </a:r>
+                <a:r>
+                  <a:rPr b="0" i="0" dirty="0" err="1">
+                    <a:solidFill>
+                      <a:srgbClr val="222222"/>
+                    </a:solidFill>
+                    <a:ea typeface="NanumGothic"/>
+                  </a:rPr>
+                  <a:t>커짐</a:t>
+                </a:r>
+                <a:endParaRPr b="0" i="0" dirty="0">
+                  <a:solidFill>
+                    <a:srgbClr val="222222"/>
+                  </a:solidFill>
+                  <a:ea typeface="NanumGothic"/>
+                </a:endParaRPr>
+              </a:p>
+              <a:p>
+                <a:pPr algn="l">
+                  <a:lnSpc>
+                    <a:spcPct val="135000"/>
+                  </a:lnSpc>
+                </a:pPr>
+                <a:r>
+                  <a:rPr b="1" i="0" dirty="0">
+                    <a:solidFill>
+                      <a:srgbClr val="1F2A37"/>
+                    </a:solidFill>
+                    <a:ea typeface="NanumGothic"/>
+                  </a:rPr>
+                  <a:t>• 2차(Hessian) </a:t>
+                </a:r>
+                <a:r>
+                  <a:rPr b="1" i="0" dirty="0" err="1">
+                    <a:solidFill>
+                      <a:srgbClr val="1F2A37"/>
+                    </a:solidFill>
+                    <a:ea typeface="NanumGothic"/>
+                  </a:rPr>
+                  <a:t>항으로</a:t>
+                </a:r>
+                <a:r>
+                  <a:rPr b="1" i="0" dirty="0">
+                    <a:solidFill>
+                      <a:srgbClr val="1F2A37"/>
+                    </a:solidFill>
+                    <a:ea typeface="NanumGothic"/>
+                  </a:rPr>
+                  <a:t> </a:t>
+                </a:r>
+                <a:r>
+                  <a:rPr b="1" i="0" dirty="0" err="1">
+                    <a:solidFill>
+                      <a:srgbClr val="1F2A37"/>
+                    </a:solidFill>
+                    <a:ea typeface="NanumGothic"/>
+                  </a:rPr>
+                  <a:t>잔차</a:t>
+                </a:r>
+                <a:r>
+                  <a:rPr b="1" i="0" dirty="0">
+                    <a:solidFill>
+                      <a:srgbClr val="1F2A37"/>
+                    </a:solidFill>
+                    <a:ea typeface="NanumGothic"/>
+                  </a:rPr>
+                  <a:t> ↓</a:t>
+                </a:r>
+              </a:p>
+            </p:txBody>
+          </p:sp>
+        </mc:Choice>
+        <mc:Fallback>
+          <p:sp>
+            <p:nvSpPr>
+              <p:cNvPr id="7" name="TextBox 6"/>
+              <p:cNvSpPr txBox="1">
+                <a:spLocks noRot="1" noChangeAspect="1" noMove="1" noResize="1" noEditPoints="1" noAdjustHandles="1" noChangeArrowheads="1" noChangeShapeType="1" noTextEdit="1"/>
+              </p:cNvSpPr>
+              <p:nvPr/>
+            </p:nvSpPr>
+            <p:spPr>
+              <a:xfrm>
+                <a:off x="6537960" y="2002888"/>
+                <a:ext cx="4846320" cy="1576394"/>
+              </a:xfrm>
+              <a:prstGeom prst="rect">
+                <a:avLst/>
+              </a:prstGeom>
+              <a:blipFill>
+                <a:blip r:embed="rId2"/>
+                <a:stretch>
+                  <a:fillRect l="-2767" b="-7364"/>
+                </a:stretch>
+              </a:blipFill>
+            </p:spPr>
+            <p:txBody>
+              <a:bodyPr/>
+              <a:lstStyle/>
+              <a:p>
+                <a:r>
+                  <a:rPr lang="ko-KR" altLang="en-US">
+                    <a:noFill/>
+                  </a:rPr>
+                  <a:t> </a:t>
+                </a:r>
+              </a:p>
+            </p:txBody>
+          </p:sp>
+        </mc:Fallback>
+      </mc:AlternateContent>
+      <p:sp>
+        <p:nvSpPr>
+          <p:cNvPr id="9" name="TextBox 8"/>
+          <p:cNvSpPr txBox="1"/>
+          <p:nvPr/>
+        </p:nvSpPr>
+        <p:spPr>
+          <a:xfrm>
+            <a:off x="11753617" y="6510528"/>
+            <a:ext cx="255198" cy="230832"/>
+          </a:xfrm>
+          <a:prstGeom prst="rect">
+            <a:avLst/>
+          </a:prstGeom>
+          <a:noFill/>
+        </p:spPr>
+        <p:txBody>
+          <a:bodyPr wrap="none">
+            <a:spAutoFit/>
+          </a:bodyPr>
+          <a:lstStyle/>
+          <a:p>
+            <a:pPr algn="r"/>
+            <a:r>
+              <a:rPr lang="en-US" sz="900" b="0" i="0" dirty="0">
+                <a:solidFill>
+                  <a:srgbClr val="7A7A7A"/>
+                </a:solidFill>
+                <a:latin typeface="NanumGothic"/>
+                <a:ea typeface="NanumGothic"/>
+              </a:rPr>
+              <a:t>9</a:t>
+            </a:r>
+            <a:endParaRPr sz="900" b="0" i="0" dirty="0">
+              <a:solidFill>
+                <a:srgbClr val="7A7A7A"/>
+              </a:solidFill>
+              <a:latin typeface="NanumGothic"/>
+              <a:ea typeface="NanumGothic"/>
+            </a:endParaRPr>
+          </a:p>
+        </p:txBody>
+      </p:sp>
+    </p:spTree>
+  </p:cSld>
+  <p:clrMapOvr>
+    <a:masterClrMapping/>
+  </p:clrMapOvr>
+</p:sld>
+</file>
+
+<file path=ppt/slides/slide11.xml><?xml version="1.0" encoding="utf-8"?>
+<p:sld xmlns:a="http://schemas.openxmlformats.org/drawingml/2006/main" xmlns:r="http://schemas.openxmlformats.org/officeDocument/2006/relationships" xmlns:p="http://schemas.openxmlformats.org/presentationml/2006/main">
+  <p:cSld>
+    <p:spTree>
+      <p:nvGrpSpPr>
+        <p:cNvPr id="1" name=""/>
+        <p:cNvGrpSpPr/>
+        <p:nvPr/>
+      </p:nvGrpSpPr>
+      <p:grpSpPr>
+        <a:xfrm>
+          <a:off x="0" y="0"/>
+          <a:ext cx="0" cy="0"/>
+          <a:chOff x="0" y="0"/>
+          <a:chExt cx="0" cy="0"/>
+        </a:xfrm>
+      </p:grpSpPr>
+      <p:sp>
+        <p:nvSpPr>
+          <p:cNvPr id="2" name="TextBox 1"/>
+          <p:cNvSpPr txBox="1"/>
+          <p:nvPr/>
+        </p:nvSpPr>
+        <p:spPr>
+          <a:xfrm>
+            <a:off x="411480" y="292608"/>
+            <a:ext cx="11338560" cy="641201"/>
+          </a:xfrm>
+          <a:prstGeom prst="rect">
+            <a:avLst/>
+          </a:prstGeom>
+          <a:noFill/>
+        </p:spPr>
+        <p:txBody>
+          <a:bodyPr wrap="square" lIns="25400" tIns="12700" rIns="25400" bIns="12700" anchor="t">
+            <a:spAutoFit/>
+          </a:bodyPr>
+          <a:lstStyle/>
+          <a:p>
+            <a:pPr algn="l">
+              <a:lnSpc>
+                <a:spcPct val="100000"/>
+              </a:lnSpc>
+            </a:pPr>
+            <a:r>
+              <a:rPr sz="4000" b="1" i="0" dirty="0">
+                <a:solidFill>
+                  <a:srgbClr val="1F2A37"/>
+                </a:solidFill>
+                <a:latin typeface="+mj-lt"/>
+                <a:ea typeface="NanumGothic"/>
+              </a:rPr>
+              <a:t>Fidelity (LLM)</a:t>
+            </a:r>
+          </a:p>
+        </p:txBody>
+      </p:sp>
+      <p:sp>
+        <p:nvSpPr>
+          <p:cNvPr id="3" name="TextBox 2"/>
+          <p:cNvSpPr txBox="1"/>
+          <p:nvPr/>
+        </p:nvSpPr>
+        <p:spPr>
+          <a:xfrm>
+            <a:off x="411480" y="1078992"/>
+            <a:ext cx="11338560" cy="595548"/>
+          </a:xfrm>
+          <a:prstGeom prst="rect">
+            <a:avLst/>
+          </a:prstGeom>
+          <a:noFill/>
+        </p:spPr>
+        <p:txBody>
+          <a:bodyPr wrap="square" lIns="25400" tIns="12700" rIns="25400" bIns="12700" anchor="t">
+            <a:spAutoFit/>
+          </a:bodyPr>
+          <a:lstStyle/>
+          <a:p>
+            <a:pPr algn="l">
+              <a:lnSpc>
+                <a:spcPct val="105000"/>
+              </a:lnSpc>
+            </a:pPr>
+            <a:r>
+              <a:rPr lang="en-US" dirty="0">
+                <a:solidFill>
+                  <a:srgbClr val="3C4654"/>
+                </a:solidFill>
+                <a:ea typeface="NanumGothic"/>
+              </a:rPr>
+              <a:t>Exact</a:t>
+            </a:r>
+            <a:r>
+              <a:rPr b="0" i="0" dirty="0">
+                <a:solidFill>
+                  <a:srgbClr val="3C4654"/>
+                </a:solidFill>
+                <a:ea typeface="NanumGothic"/>
+              </a:rPr>
+              <a:t> in-run </a:t>
+            </a:r>
+            <a:r>
+              <a:rPr lang="en-US" b="0" i="0" dirty="0" err="1">
+                <a:solidFill>
+                  <a:srgbClr val="3C4654"/>
+                </a:solidFill>
+                <a:ea typeface="NanumGothic"/>
+              </a:rPr>
+              <a:t>shapley</a:t>
+            </a:r>
+            <a:r>
+              <a:rPr lang="en-US" b="0" i="0" dirty="0">
+                <a:solidFill>
+                  <a:srgbClr val="3C4654"/>
+                </a:solidFill>
+                <a:ea typeface="NanumGothic"/>
+              </a:rPr>
+              <a:t> value </a:t>
+            </a:r>
+            <a:r>
+              <a:rPr b="0" i="0" dirty="0" err="1">
+                <a:solidFill>
+                  <a:srgbClr val="3C4654"/>
+                </a:solidFill>
+                <a:ea typeface="NanumGothic"/>
+              </a:rPr>
+              <a:t>대비</a:t>
+            </a:r>
+            <a:r>
+              <a:rPr b="0" i="0" dirty="0">
+                <a:solidFill>
+                  <a:srgbClr val="3C4654"/>
+                </a:solidFill>
+                <a:ea typeface="NanumGothic"/>
+              </a:rPr>
+              <a:t> Spearman (↑).</a:t>
+            </a:r>
+            <a:endParaRPr lang="en-US" b="0" i="0" dirty="0">
+              <a:solidFill>
+                <a:srgbClr val="3C4654"/>
+              </a:solidFill>
+              <a:ea typeface="NanumGothic"/>
+            </a:endParaRPr>
+          </a:p>
+          <a:p>
+            <a:pPr algn="l">
+              <a:lnSpc>
+                <a:spcPct val="105000"/>
+              </a:lnSpc>
+            </a:pPr>
+            <a:r>
+              <a:rPr b="0" i="0" dirty="0" err="1">
+                <a:solidFill>
+                  <a:srgbClr val="3C4654"/>
+                </a:solidFill>
+                <a:ea typeface="NanumGothic"/>
+              </a:rPr>
+              <a:t>LoRA</a:t>
+            </a:r>
+            <a:r>
+              <a:rPr b="0" i="0" dirty="0">
+                <a:solidFill>
+                  <a:srgbClr val="3C4654"/>
+                </a:solidFill>
+                <a:ea typeface="NanumGothic"/>
+              </a:rPr>
+              <a:t> · 3-seed.  std=N20·2/round, anchor=N5·full.</a:t>
+            </a:r>
+          </a:p>
+        </p:txBody>
+      </p:sp>
+      <p:sp>
+        <p:nvSpPr>
+          <p:cNvPr id="6" name="TextBox 5"/>
+          <p:cNvSpPr txBox="1"/>
+          <p:nvPr/>
+        </p:nvSpPr>
+        <p:spPr>
+          <a:xfrm>
+            <a:off x="11683084" y="6510528"/>
+            <a:ext cx="325731" cy="230832"/>
+          </a:xfrm>
+          <a:prstGeom prst="rect">
+            <a:avLst/>
+          </a:prstGeom>
+          <a:noFill/>
+        </p:spPr>
+        <p:txBody>
+          <a:bodyPr wrap="none">
+            <a:spAutoFit/>
+          </a:bodyPr>
+          <a:lstStyle/>
+          <a:p>
+            <a:pPr algn="r"/>
+            <a:r>
+              <a:rPr lang="en-US" sz="900" b="0" i="0" dirty="0">
+                <a:solidFill>
+                  <a:srgbClr val="7A7A7A"/>
+                </a:solidFill>
+                <a:latin typeface="NanumGothic"/>
+                <a:ea typeface="NanumGothic"/>
+              </a:rPr>
+              <a:t>10</a:t>
+            </a:r>
+            <a:endParaRPr sz="900" b="0" i="0" dirty="0">
+              <a:solidFill>
+                <a:srgbClr val="7A7A7A"/>
+              </a:solidFill>
+              <a:latin typeface="NanumGothic"/>
+              <a:ea typeface="NanumGothic"/>
+            </a:endParaRPr>
+          </a:p>
+        </p:txBody>
+      </p:sp>
+      <p:graphicFrame>
+        <p:nvGraphicFramePr>
+          <p:cNvPr id="7" name="Table 6"/>
+          <p:cNvGraphicFramePr>
+            <a:graphicFrameLocks noGrp="1"/>
+          </p:cNvGraphicFramePr>
+          <p:nvPr>
+            <p:extLst>
+              <p:ext uri="{D42A27DB-BD31-4B8C-83A1-F6EECF244321}">
+                <p14:modId xmlns:p14="http://schemas.microsoft.com/office/powerpoint/2010/main" val="3161554862"/>
+              </p:ext>
+            </p:extLst>
+          </p:nvPr>
+        </p:nvGraphicFramePr>
+        <p:xfrm>
+          <a:off x="411480" y="1965960"/>
+          <a:ext cx="11384278" cy="3581984"/>
+        </p:xfrm>
+        <a:graphic>
+          <a:graphicData uri="http://schemas.openxmlformats.org/drawingml/2006/table">
+            <a:tbl>
+              <a:tblPr>
+                <a:tableStyleId>{5C22544A-7EE6-4342-B048-85BDC9FD1C3A}</a:tableStyleId>
+              </a:tblPr>
+              <a:tblGrid>
+                <a:gridCol w="2103616">
+                  <a:extLst>
+                    <a:ext uri="{9D8B030D-6E8A-4147-A177-3AD203B41FA5}">
+                      <a16:colId xmlns:a16="http://schemas.microsoft.com/office/drawing/2014/main" val="20000"/>
+                    </a:ext>
+                  </a:extLst>
+                </a:gridCol>
+                <a:gridCol w="1546777">
+                  <a:extLst>
+                    <a:ext uri="{9D8B030D-6E8A-4147-A177-3AD203B41FA5}">
+                      <a16:colId xmlns:a16="http://schemas.microsoft.com/office/drawing/2014/main" val="20001"/>
+                    </a:ext>
+                  </a:extLst>
+                </a:gridCol>
+                <a:gridCol w="1546777">
+                  <a:extLst>
+                    <a:ext uri="{9D8B030D-6E8A-4147-A177-3AD203B41FA5}">
+                      <a16:colId xmlns:a16="http://schemas.microsoft.com/office/drawing/2014/main" val="20002"/>
+                    </a:ext>
+                  </a:extLst>
+                </a:gridCol>
+                <a:gridCol w="1546777">
+                  <a:extLst>
+                    <a:ext uri="{9D8B030D-6E8A-4147-A177-3AD203B41FA5}">
+                      <a16:colId xmlns:a16="http://schemas.microsoft.com/office/drawing/2014/main" val="20003"/>
+                    </a:ext>
+                  </a:extLst>
+                </a:gridCol>
+                <a:gridCol w="1546777">
+                  <a:extLst>
+                    <a:ext uri="{9D8B030D-6E8A-4147-A177-3AD203B41FA5}">
+                      <a16:colId xmlns:a16="http://schemas.microsoft.com/office/drawing/2014/main" val="20004"/>
+                    </a:ext>
+                  </a:extLst>
+                </a:gridCol>
+                <a:gridCol w="1546777">
+                  <a:extLst>
+                    <a:ext uri="{9D8B030D-6E8A-4147-A177-3AD203B41FA5}">
+                      <a16:colId xmlns:a16="http://schemas.microsoft.com/office/drawing/2014/main" val="20005"/>
+                    </a:ext>
+                  </a:extLst>
+                </a:gridCol>
+                <a:gridCol w="1546777">
+                  <a:extLst>
+                    <a:ext uri="{9D8B030D-6E8A-4147-A177-3AD203B41FA5}">
+                      <a16:colId xmlns:a16="http://schemas.microsoft.com/office/drawing/2014/main" val="20006"/>
+                    </a:ext>
+                  </a:extLst>
+                </a:gridCol>
+              </a:tblGrid>
+              <a:tr h="447748">
+                <a:tc>
+                  <a:txBody>
+                    <a:bodyPr/>
+                    <a:lstStyle/>
+                    <a:p>
+                      <a:pPr algn="l"/>
+                      <a:r>
+                        <a:rPr sz="1800" b="1" i="0" dirty="0">
+                          <a:solidFill>
+                            <a:srgbClr val="FFFFFF"/>
+                          </a:solidFill>
+                          <a:latin typeface="+mn-lt"/>
+                          <a:ea typeface="NanumGothic"/>
+                        </a:rPr>
+                        <a:t>method</a:t>
+                      </a:r>
+                    </a:p>
+                  </a:txBody>
+                  <a:tcPr marL="38100" marR="38100" marT="12700" marB="12700" anchor="ctr">
+                    <a:solidFill>
+                      <a:srgbClr val="33475B"/>
+                    </a:solidFill>
+                  </a:tcPr>
+                </a:tc>
+                <a:tc>
+                  <a:txBody>
+                    <a:bodyPr/>
+                    <a:lstStyle/>
+                    <a:p>
+                      <a:pPr algn="ctr"/>
+                      <a:r>
+                        <a:rPr sz="1800" b="1" i="0">
+                          <a:solidFill>
+                            <a:srgbClr val="FFFFFF"/>
+                          </a:solidFill>
+                          <a:latin typeface="+mn-lt"/>
+                          <a:ea typeface="NanumGothic"/>
+                        </a:rPr>
+                        <a:t>1B std</a:t>
+                      </a:r>
+                    </a:p>
+                  </a:txBody>
+                  <a:tcPr marL="38100" marR="38100" marT="12700" marB="12700" anchor="ctr">
+                    <a:solidFill>
+                      <a:srgbClr val="33475B"/>
+                    </a:solidFill>
+                  </a:tcPr>
+                </a:tc>
+                <a:tc>
+                  <a:txBody>
+                    <a:bodyPr/>
+                    <a:lstStyle/>
+                    <a:p>
+                      <a:pPr algn="ctr"/>
+                      <a:r>
+                        <a:rPr sz="1800" b="1" i="0">
+                          <a:solidFill>
+                            <a:srgbClr val="FFFFFF"/>
+                          </a:solidFill>
+                          <a:latin typeface="+mn-lt"/>
+                          <a:ea typeface="NanumGothic"/>
+                        </a:rPr>
+                        <a:t>3B std</a:t>
+                      </a:r>
+                    </a:p>
+                  </a:txBody>
+                  <a:tcPr marL="38100" marR="38100" marT="12700" marB="12700" anchor="ctr">
+                    <a:solidFill>
+                      <a:srgbClr val="33475B"/>
+                    </a:solidFill>
+                  </a:tcPr>
+                </a:tc>
+                <a:tc>
+                  <a:txBody>
+                    <a:bodyPr/>
+                    <a:lstStyle/>
+                    <a:p>
+                      <a:pPr algn="ctr"/>
+                      <a:r>
+                        <a:rPr sz="1800" b="1" i="0">
+                          <a:solidFill>
+                            <a:srgbClr val="FFFFFF"/>
+                          </a:solidFill>
+                          <a:latin typeface="+mn-lt"/>
+                          <a:ea typeface="NanumGothic"/>
+                        </a:rPr>
+                        <a:t>7B std</a:t>
+                      </a:r>
+                    </a:p>
+                  </a:txBody>
+                  <a:tcPr marL="38100" marR="38100" marT="12700" marB="12700" anchor="ctr">
+                    <a:solidFill>
+                      <a:srgbClr val="33475B"/>
+                    </a:solidFill>
+                  </a:tcPr>
+                </a:tc>
+                <a:tc>
+                  <a:txBody>
+                    <a:bodyPr/>
+                    <a:lstStyle/>
+                    <a:p>
+                      <a:pPr algn="ctr"/>
+                      <a:r>
+                        <a:rPr sz="1800" b="1" i="0">
+                          <a:solidFill>
+                            <a:srgbClr val="FFFFFF"/>
+                          </a:solidFill>
+                          <a:latin typeface="+mn-lt"/>
+                          <a:ea typeface="NanumGothic"/>
+                        </a:rPr>
+                        <a:t>1B anchor</a:t>
+                      </a:r>
+                    </a:p>
+                  </a:txBody>
+                  <a:tcPr marL="38100" marR="38100" marT="12700" marB="12700" anchor="ctr">
+                    <a:solidFill>
+                      <a:srgbClr val="33475B"/>
+                    </a:solidFill>
+                  </a:tcPr>
+                </a:tc>
+                <a:tc>
+                  <a:txBody>
+                    <a:bodyPr/>
+                    <a:lstStyle/>
+                    <a:p>
+                      <a:pPr algn="ctr"/>
+                      <a:r>
+                        <a:rPr sz="1800" b="1" i="0">
+                          <a:solidFill>
+                            <a:srgbClr val="FFFFFF"/>
+                          </a:solidFill>
+                          <a:latin typeface="+mn-lt"/>
+                          <a:ea typeface="NanumGothic"/>
+                        </a:rPr>
+                        <a:t>3B anchor</a:t>
+                      </a:r>
+                    </a:p>
+                  </a:txBody>
+                  <a:tcPr marL="38100" marR="38100" marT="12700" marB="12700" anchor="ctr">
+                    <a:solidFill>
+                      <a:srgbClr val="33475B"/>
+                    </a:solidFill>
+                  </a:tcPr>
+                </a:tc>
+                <a:tc>
+                  <a:txBody>
+                    <a:bodyPr/>
+                    <a:lstStyle/>
+                    <a:p>
+                      <a:pPr algn="ctr"/>
+                      <a:r>
+                        <a:rPr sz="1800" b="1" i="0">
+                          <a:solidFill>
+                            <a:srgbClr val="FFFFFF"/>
+                          </a:solidFill>
+                          <a:latin typeface="+mn-lt"/>
+                          <a:ea typeface="NanumGothic"/>
+                        </a:rPr>
+                        <a:t>7B anchor</a:t>
+                      </a:r>
+                    </a:p>
+                  </a:txBody>
+                  <a:tcPr marL="38100" marR="38100" marT="12700" marB="12700" anchor="ctr">
+                    <a:solidFill>
+                      <a:srgbClr val="33475B"/>
+                    </a:solidFill>
+                  </a:tcPr>
+                </a:tc>
+                <a:extLst>
+                  <a:ext uri="{0D108BD9-81ED-4DB2-BD59-A6C34878D82A}">
+                    <a16:rowId xmlns:a16="http://schemas.microsoft.com/office/drawing/2014/main" val="10000"/>
+                  </a:ext>
+                </a:extLst>
+              </a:tr>
+              <a:tr h="447748">
+                <a:tc>
+                  <a:txBody>
+                    <a:bodyPr/>
+                    <a:lstStyle/>
+                    <a:p>
+                      <a:pPr algn="l"/>
+                      <a:r>
+                        <a:rPr sz="1800" b="0" i="0" dirty="0" err="1">
+                          <a:solidFill>
+                            <a:srgbClr val="222222"/>
+                          </a:solidFill>
+                          <a:latin typeface="+mn-lt"/>
+                          <a:ea typeface="NanumGothic"/>
+                        </a:rPr>
+                        <a:t>Flirds</a:t>
+                      </a:r>
+                      <a:endParaRPr sz="1800" b="0" i="0" dirty="0">
+                        <a:solidFill>
+                          <a:srgbClr val="222222"/>
+                        </a:solidFill>
+                        <a:latin typeface="+mn-lt"/>
+                        <a:ea typeface="NanumGothic"/>
+                      </a:endParaRPr>
+                    </a:p>
+                  </a:txBody>
+                  <a:tcPr marL="38100" marR="38100" marT="0" marB="0" anchor="ctr">
+                    <a:solidFill>
+                      <a:srgbClr val="FFFFFF"/>
+                    </a:solidFill>
+                  </a:tcPr>
+                </a:tc>
+                <a:tc>
+                  <a:txBody>
+                    <a:bodyPr/>
+                    <a:lstStyle/>
+                    <a:p>
+                      <a:pPr algn="ctr"/>
+                      <a:r>
+                        <a:rPr sz="1800" b="1" i="0">
+                          <a:solidFill>
+                            <a:srgbClr val="222222"/>
+                          </a:solidFill>
+                          <a:latin typeface="+mn-lt"/>
+                          <a:ea typeface="NanumGothic"/>
+                        </a:rPr>
+                        <a:t>1.000</a:t>
+                      </a:r>
+                    </a:p>
+                  </a:txBody>
+                  <a:tcPr marL="38100" marR="38100" marT="0" marB="0" anchor="ctr">
+                    <a:solidFill>
+                      <a:srgbClr val="FFFFFF"/>
+                    </a:solidFill>
+                  </a:tcPr>
+                </a:tc>
+                <a:tc>
+                  <a:txBody>
+                    <a:bodyPr/>
+                    <a:lstStyle/>
+                    <a:p>
+                      <a:pPr algn="ctr"/>
+                      <a:r>
+                        <a:rPr sz="1800" b="1" i="0">
+                          <a:solidFill>
+                            <a:srgbClr val="222222"/>
+                          </a:solidFill>
+                          <a:latin typeface="+mn-lt"/>
+                          <a:ea typeface="NanumGothic"/>
+                        </a:rPr>
+                        <a:t>1.000</a:t>
+                      </a:r>
+                    </a:p>
+                  </a:txBody>
+                  <a:tcPr marL="38100" marR="38100" marT="0" marB="0" anchor="ctr">
+                    <a:solidFill>
+                      <a:srgbClr val="FFFFFF"/>
+                    </a:solidFill>
+                  </a:tcPr>
+                </a:tc>
+                <a:tc>
+                  <a:txBody>
+                    <a:bodyPr/>
+                    <a:lstStyle/>
+                    <a:p>
+                      <a:pPr algn="ctr"/>
+                      <a:r>
+                        <a:rPr sz="1800" b="1" i="0" dirty="0">
+                          <a:solidFill>
+                            <a:srgbClr val="222222"/>
+                          </a:solidFill>
+                          <a:latin typeface="+mn-lt"/>
+                          <a:ea typeface="NanumGothic"/>
+                        </a:rPr>
+                        <a:t>0.999</a:t>
+                      </a:r>
+                    </a:p>
+                  </a:txBody>
+                  <a:tcPr marL="38100" marR="38100" marT="0" marB="0" anchor="ctr">
+                    <a:solidFill>
+                      <a:srgbClr val="FFFFFF"/>
+                    </a:solidFill>
+                  </a:tcPr>
+                </a:tc>
+                <a:tc>
+                  <a:txBody>
+                    <a:bodyPr/>
+                    <a:lstStyle/>
+                    <a:p>
+                      <a:pPr algn="ctr"/>
+                      <a:r>
+                        <a:rPr sz="1800" b="1" i="0">
+                          <a:solidFill>
+                            <a:srgbClr val="222222"/>
+                          </a:solidFill>
+                          <a:latin typeface="+mn-lt"/>
+                          <a:ea typeface="NanumGothic"/>
+                        </a:rPr>
+                        <a:t>1.000</a:t>
+                      </a:r>
+                    </a:p>
+                  </a:txBody>
+                  <a:tcPr marL="38100" marR="38100" marT="0" marB="0" anchor="ctr">
+                    <a:solidFill>
+                      <a:srgbClr val="FFFFFF"/>
+                    </a:solidFill>
+                  </a:tcPr>
+                </a:tc>
+                <a:tc>
+                  <a:txBody>
+                    <a:bodyPr/>
+                    <a:lstStyle/>
+                    <a:p>
+                      <a:pPr algn="ctr"/>
+                      <a:r>
+                        <a:rPr sz="1800" b="0" i="0" dirty="0">
+                          <a:solidFill>
+                            <a:srgbClr val="222222"/>
+                          </a:solidFill>
+                          <a:latin typeface="+mn-lt"/>
+                          <a:ea typeface="NanumGothic"/>
+                        </a:rPr>
+                        <a:t>0.967</a:t>
+                      </a:r>
+                    </a:p>
+                  </a:txBody>
+                  <a:tcPr marL="38100" marR="38100" marT="0" marB="0" anchor="ctr">
+                    <a:solidFill>
+                      <a:srgbClr val="FFFFFF"/>
+                    </a:solidFill>
+                  </a:tcPr>
+                </a:tc>
+                <a:tc>
+                  <a:txBody>
+                    <a:bodyPr/>
+                    <a:lstStyle/>
+                    <a:p>
+                      <a:pPr algn="ctr"/>
+                      <a:r>
+                        <a:rPr sz="1800" b="1" i="0">
+                          <a:solidFill>
+                            <a:srgbClr val="222222"/>
+                          </a:solidFill>
+                          <a:latin typeface="+mn-lt"/>
+                          <a:ea typeface="NanumGothic"/>
+                        </a:rPr>
+                        <a:t>1.000</a:t>
+                      </a:r>
+                    </a:p>
+                  </a:txBody>
+                  <a:tcPr marL="38100" marR="38100" marT="0" marB="0" anchor="ctr">
+                    <a:solidFill>
+                      <a:srgbClr val="FFFFFF"/>
+                    </a:solidFill>
+                  </a:tcPr>
+                </a:tc>
+                <a:extLst>
+                  <a:ext uri="{0D108BD9-81ED-4DB2-BD59-A6C34878D82A}">
+                    <a16:rowId xmlns:a16="http://schemas.microsoft.com/office/drawing/2014/main" val="10001"/>
+                  </a:ext>
+                </a:extLst>
+              </a:tr>
+              <a:tr h="447748">
+                <a:tc>
+                  <a:txBody>
+                    <a:bodyPr/>
+                    <a:lstStyle/>
+                    <a:p>
+                      <a:pPr algn="l"/>
+                      <a:r>
+                        <a:rPr sz="1800" b="0" i="0">
+                          <a:solidFill>
+                            <a:srgbClr val="222222"/>
+                          </a:solidFill>
+                          <a:latin typeface="+mn-lt"/>
+                          <a:ea typeface="NanumGothic"/>
+                        </a:rPr>
+                        <a:t>Flirds-1st</a:t>
+                      </a:r>
+                    </a:p>
+                  </a:txBody>
+                  <a:tcPr marL="38100" marR="38100" marT="0" marB="0" anchor="ctr">
+                    <a:solidFill>
+                      <a:srgbClr val="F2F4F7"/>
+                    </a:solidFill>
+                  </a:tcPr>
+                </a:tc>
+                <a:tc>
+                  <a:txBody>
+                    <a:bodyPr/>
+                    <a:lstStyle/>
+                    <a:p>
+                      <a:pPr algn="ctr"/>
+                      <a:r>
+                        <a:rPr sz="1800" b="0" i="0">
+                          <a:solidFill>
+                            <a:srgbClr val="222222"/>
+                          </a:solidFill>
+                          <a:latin typeface="+mn-lt"/>
+                          <a:ea typeface="NanumGothic"/>
+                        </a:rPr>
+                        <a:t>0.999</a:t>
+                      </a:r>
+                    </a:p>
+                  </a:txBody>
+                  <a:tcPr marL="38100" marR="38100" marT="0" marB="0" anchor="ctr">
+                    <a:solidFill>
+                      <a:srgbClr val="F2F4F7"/>
+                    </a:solidFill>
+                  </a:tcPr>
+                </a:tc>
+                <a:tc>
+                  <a:txBody>
+                    <a:bodyPr/>
+                    <a:lstStyle/>
+                    <a:p>
+                      <a:pPr algn="ctr"/>
+                      <a:r>
+                        <a:rPr sz="1800" b="1" i="0" dirty="0">
+                          <a:solidFill>
+                            <a:srgbClr val="222222"/>
+                          </a:solidFill>
+                          <a:latin typeface="+mn-lt"/>
+                          <a:ea typeface="NanumGothic"/>
+                        </a:rPr>
+                        <a:t>1.000</a:t>
+                      </a:r>
+                    </a:p>
+                  </a:txBody>
+                  <a:tcPr marL="38100" marR="38100" marT="0" marB="0" anchor="ctr">
+                    <a:solidFill>
+                      <a:srgbClr val="F2F4F7"/>
+                    </a:solidFill>
+                  </a:tcPr>
+                </a:tc>
+                <a:tc>
+                  <a:txBody>
+                    <a:bodyPr/>
+                    <a:lstStyle/>
+                    <a:p>
+                      <a:pPr algn="ctr"/>
+                      <a:r>
+                        <a:rPr sz="1800" b="0" i="0">
+                          <a:solidFill>
+                            <a:srgbClr val="222222"/>
+                          </a:solidFill>
+                          <a:latin typeface="+mn-lt"/>
+                          <a:ea typeface="NanumGothic"/>
+                        </a:rPr>
+                        <a:t>0.998</a:t>
+                      </a:r>
+                    </a:p>
+                  </a:txBody>
+                  <a:tcPr marL="38100" marR="38100" marT="0" marB="0" anchor="ctr">
+                    <a:solidFill>
+                      <a:srgbClr val="F2F4F7"/>
+                    </a:solidFill>
+                  </a:tcPr>
+                </a:tc>
+                <a:tc>
+                  <a:txBody>
+                    <a:bodyPr/>
+                    <a:lstStyle/>
+                    <a:p>
+                      <a:pPr algn="ctr"/>
+                      <a:r>
+                        <a:rPr sz="1800" b="1" i="0" dirty="0">
+                          <a:solidFill>
+                            <a:srgbClr val="222222"/>
+                          </a:solidFill>
+                          <a:latin typeface="+mn-lt"/>
+                          <a:ea typeface="NanumGothic"/>
+                        </a:rPr>
+                        <a:t>1.000</a:t>
+                      </a:r>
+                    </a:p>
+                  </a:txBody>
+                  <a:tcPr marL="38100" marR="38100" marT="0" marB="0" anchor="ctr">
+                    <a:solidFill>
+                      <a:srgbClr val="F2F4F7"/>
+                    </a:solidFill>
+                  </a:tcPr>
+                </a:tc>
+                <a:tc>
+                  <a:txBody>
+                    <a:bodyPr/>
+                    <a:lstStyle/>
+                    <a:p>
+                      <a:pPr algn="ctr"/>
+                      <a:r>
+                        <a:rPr sz="1800" b="1" i="0">
+                          <a:solidFill>
+                            <a:srgbClr val="222222"/>
+                          </a:solidFill>
+                          <a:latin typeface="+mn-lt"/>
+                          <a:ea typeface="NanumGothic"/>
+                        </a:rPr>
+                        <a:t>1.000</a:t>
+                      </a:r>
+                    </a:p>
+                  </a:txBody>
+                  <a:tcPr marL="38100" marR="38100" marT="0" marB="0" anchor="ctr">
+                    <a:solidFill>
+                      <a:srgbClr val="F2F4F7"/>
+                    </a:solidFill>
+                  </a:tcPr>
+                </a:tc>
+                <a:tc>
+                  <a:txBody>
+                    <a:bodyPr/>
+                    <a:lstStyle/>
+                    <a:p>
+                      <a:pPr algn="ctr"/>
+                      <a:r>
+                        <a:rPr sz="1800" b="1" i="0" dirty="0">
+                          <a:solidFill>
+                            <a:srgbClr val="222222"/>
+                          </a:solidFill>
+                          <a:latin typeface="+mn-lt"/>
+                          <a:ea typeface="NanumGothic"/>
+                        </a:rPr>
+                        <a:t>1.000</a:t>
+                      </a:r>
+                    </a:p>
+                  </a:txBody>
+                  <a:tcPr marL="38100" marR="38100" marT="0" marB="0" anchor="ctr">
+                    <a:solidFill>
+                      <a:srgbClr val="F2F4F7"/>
+                    </a:solidFill>
+                  </a:tcPr>
+                </a:tc>
+                <a:extLst>
+                  <a:ext uri="{0D108BD9-81ED-4DB2-BD59-A6C34878D82A}">
+                    <a16:rowId xmlns:a16="http://schemas.microsoft.com/office/drawing/2014/main" val="10002"/>
+                  </a:ext>
+                </a:extLst>
+              </a:tr>
+              <a:tr h="447748">
+                <a:tc>
+                  <a:txBody>
+                    <a:bodyPr/>
+                    <a:lstStyle/>
+                    <a:p>
+                      <a:pPr algn="l"/>
+                      <a:r>
+                        <a:rPr sz="1800" b="0" i="0">
+                          <a:solidFill>
+                            <a:srgbClr val="222222"/>
+                          </a:solidFill>
+                          <a:latin typeface="+mn-lt"/>
+                          <a:ea typeface="NanumGothic"/>
+                        </a:rPr>
+                        <a:t>loss-heur</a:t>
+                      </a:r>
+                    </a:p>
+                  </a:txBody>
+                  <a:tcPr marL="38100" marR="38100" marT="0" marB="0" anchor="ctr">
+                    <a:solidFill>
+                      <a:srgbClr val="FFFFFF"/>
+                    </a:solidFill>
+                  </a:tcPr>
+                </a:tc>
+                <a:tc>
+                  <a:txBody>
+                    <a:bodyPr/>
+                    <a:lstStyle/>
+                    <a:p>
+                      <a:pPr algn="ctr"/>
+                      <a:r>
+                        <a:rPr sz="1800" b="1" i="0">
+                          <a:solidFill>
+                            <a:srgbClr val="222222"/>
+                          </a:solidFill>
+                          <a:latin typeface="+mn-lt"/>
+                          <a:ea typeface="NanumGothic"/>
+                        </a:rPr>
+                        <a:t>1.000</a:t>
+                      </a:r>
+                    </a:p>
+                  </a:txBody>
+                  <a:tcPr marL="38100" marR="38100" marT="0" marB="0" anchor="ctr">
+                    <a:solidFill>
+                      <a:srgbClr val="FFFFFF"/>
+                    </a:solidFill>
+                  </a:tcPr>
+                </a:tc>
+                <a:tc>
+                  <a:txBody>
+                    <a:bodyPr/>
+                    <a:lstStyle/>
+                    <a:p>
+                      <a:pPr algn="ctr"/>
+                      <a:r>
+                        <a:rPr sz="1800" b="0" i="0">
+                          <a:solidFill>
+                            <a:srgbClr val="222222"/>
+                          </a:solidFill>
+                          <a:latin typeface="+mn-lt"/>
+                          <a:ea typeface="NanumGothic"/>
+                        </a:rPr>
+                        <a:t>0.999</a:t>
+                      </a:r>
+                    </a:p>
+                  </a:txBody>
+                  <a:tcPr marL="38100" marR="38100" marT="0" marB="0" anchor="ctr">
+                    <a:solidFill>
+                      <a:srgbClr val="FFFFFF"/>
+                    </a:solidFill>
+                  </a:tcPr>
+                </a:tc>
+                <a:tc>
+                  <a:txBody>
+                    <a:bodyPr/>
+                    <a:lstStyle/>
+                    <a:p>
+                      <a:pPr algn="ctr"/>
+                      <a:r>
+                        <a:rPr sz="1800" b="1" i="0" dirty="0">
+                          <a:solidFill>
+                            <a:srgbClr val="222222"/>
+                          </a:solidFill>
+                          <a:latin typeface="+mn-lt"/>
+                          <a:ea typeface="NanumGothic"/>
+                        </a:rPr>
+                        <a:t>0.999</a:t>
+                      </a:r>
+                    </a:p>
+                  </a:txBody>
+                  <a:tcPr marL="38100" marR="38100" marT="0" marB="0" anchor="ctr">
+                    <a:solidFill>
+                      <a:srgbClr val="FFFFFF"/>
+                    </a:solidFill>
+                  </a:tcPr>
+                </a:tc>
+                <a:tc>
+                  <a:txBody>
+                    <a:bodyPr/>
+                    <a:lstStyle/>
+                    <a:p>
+                      <a:pPr algn="ctr"/>
+                      <a:r>
+                        <a:rPr sz="1800" b="1" i="0" dirty="0">
+                          <a:solidFill>
+                            <a:srgbClr val="222222"/>
+                          </a:solidFill>
+                          <a:latin typeface="+mn-lt"/>
+                          <a:ea typeface="NanumGothic"/>
+                        </a:rPr>
+                        <a:t>1.000</a:t>
+                      </a:r>
+                    </a:p>
+                  </a:txBody>
+                  <a:tcPr marL="38100" marR="38100" marT="0" marB="0" anchor="ctr">
+                    <a:solidFill>
+                      <a:srgbClr val="FFFFFF"/>
+                    </a:solidFill>
+                  </a:tcPr>
+                </a:tc>
+                <a:tc>
+                  <a:txBody>
+                    <a:bodyPr/>
+                    <a:lstStyle/>
+                    <a:p>
+                      <a:pPr algn="ctr"/>
+                      <a:r>
+                        <a:rPr sz="1800" b="1" i="0" dirty="0">
+                          <a:solidFill>
+                            <a:srgbClr val="222222"/>
+                          </a:solidFill>
+                          <a:latin typeface="+mn-lt"/>
+                          <a:ea typeface="NanumGothic"/>
+                        </a:rPr>
+                        <a:t>1.000</a:t>
+                      </a:r>
+                    </a:p>
+                  </a:txBody>
+                  <a:tcPr marL="38100" marR="38100" marT="0" marB="0" anchor="ctr">
+                    <a:solidFill>
+                      <a:srgbClr val="FFFFFF"/>
+                    </a:solidFill>
+                  </a:tcPr>
+                </a:tc>
+                <a:tc>
+                  <a:txBody>
+                    <a:bodyPr/>
+                    <a:lstStyle/>
+                    <a:p>
+                      <a:pPr algn="ctr"/>
+                      <a:r>
+                        <a:rPr sz="1800" b="1" i="0" dirty="0">
+                          <a:solidFill>
+                            <a:srgbClr val="222222"/>
+                          </a:solidFill>
+                          <a:latin typeface="+mn-lt"/>
+                          <a:ea typeface="NanumGothic"/>
+                        </a:rPr>
+                        <a:t>1.000</a:t>
+                      </a:r>
+                    </a:p>
+                  </a:txBody>
+                  <a:tcPr marL="38100" marR="38100" marT="0" marB="0" anchor="ctr">
+                    <a:solidFill>
+                      <a:srgbClr val="FFFFFF"/>
+                    </a:solidFill>
+                  </a:tcPr>
+                </a:tc>
+                <a:extLst>
+                  <a:ext uri="{0D108BD9-81ED-4DB2-BD59-A6C34878D82A}">
+                    <a16:rowId xmlns:a16="http://schemas.microsoft.com/office/drawing/2014/main" val="10003"/>
+                  </a:ext>
+                </a:extLst>
+              </a:tr>
+              <a:tr h="447748">
+                <a:tc>
+                  <a:txBody>
+                    <a:bodyPr/>
+                    <a:lstStyle/>
+                    <a:p>
+                      <a:pPr algn="l"/>
+                      <a:r>
+                        <a:rPr sz="1800" b="0" i="0">
+                          <a:solidFill>
+                            <a:srgbClr val="222222"/>
+                          </a:solidFill>
+                          <a:latin typeface="+mn-lt"/>
+                          <a:ea typeface="NanumGothic"/>
+                        </a:rPr>
+                        <a:t>GTG</a:t>
+                      </a:r>
+                    </a:p>
+                  </a:txBody>
+                  <a:tcPr marL="38100" marR="38100" marT="0" marB="0" anchor="ctr">
+                    <a:solidFill>
+                      <a:srgbClr val="F2F4F7"/>
+                    </a:solidFill>
+                  </a:tcPr>
+                </a:tc>
+                <a:tc>
+                  <a:txBody>
+                    <a:bodyPr/>
+                    <a:lstStyle/>
+                    <a:p>
+                      <a:pPr algn="ctr"/>
+                      <a:r>
+                        <a:rPr sz="1800" b="0" i="0">
+                          <a:solidFill>
+                            <a:srgbClr val="222222"/>
+                          </a:solidFill>
+                          <a:latin typeface="+mn-lt"/>
+                          <a:ea typeface="NanumGothic"/>
+                        </a:rPr>
+                        <a:t>0.975</a:t>
+                      </a:r>
+                    </a:p>
+                  </a:txBody>
+                  <a:tcPr marL="38100" marR="38100" marT="0" marB="0" anchor="ctr">
+                    <a:solidFill>
+                      <a:srgbClr val="F2F4F7"/>
+                    </a:solidFill>
+                  </a:tcPr>
+                </a:tc>
+                <a:tc>
+                  <a:txBody>
+                    <a:bodyPr/>
+                    <a:lstStyle/>
+                    <a:p>
+                      <a:pPr algn="ctr"/>
+                      <a:r>
+                        <a:rPr sz="1800" b="0" i="0">
+                          <a:solidFill>
+                            <a:srgbClr val="222222"/>
+                          </a:solidFill>
+                          <a:latin typeface="+mn-lt"/>
+                          <a:ea typeface="NanumGothic"/>
+                        </a:rPr>
+                        <a:t>0.988</a:t>
+                      </a:r>
+                    </a:p>
+                  </a:txBody>
+                  <a:tcPr marL="38100" marR="38100" marT="0" marB="0" anchor="ctr">
+                    <a:solidFill>
+                      <a:srgbClr val="F2F4F7"/>
+                    </a:solidFill>
+                  </a:tcPr>
+                </a:tc>
+                <a:tc>
+                  <a:txBody>
+                    <a:bodyPr/>
+                    <a:lstStyle/>
+                    <a:p>
+                      <a:pPr algn="ctr"/>
+                      <a:r>
+                        <a:rPr sz="1800" b="0" i="0">
+                          <a:solidFill>
+                            <a:srgbClr val="222222"/>
+                          </a:solidFill>
+                          <a:latin typeface="+mn-lt"/>
+                          <a:ea typeface="NanumGothic"/>
+                        </a:rPr>
+                        <a:t>0.977</a:t>
+                      </a:r>
+                    </a:p>
+                  </a:txBody>
+                  <a:tcPr marL="38100" marR="38100" marT="0" marB="0" anchor="ctr">
+                    <a:solidFill>
+                      <a:srgbClr val="F2F4F7"/>
+                    </a:solidFill>
+                  </a:tcPr>
+                </a:tc>
+                <a:tc>
+                  <a:txBody>
+                    <a:bodyPr/>
+                    <a:lstStyle/>
+                    <a:p>
+                      <a:pPr algn="ctr"/>
+                      <a:r>
+                        <a:rPr sz="1800" b="1" i="0" dirty="0">
+                          <a:solidFill>
+                            <a:srgbClr val="222222"/>
+                          </a:solidFill>
+                          <a:latin typeface="+mn-lt"/>
+                          <a:ea typeface="NanumGothic"/>
+                        </a:rPr>
+                        <a:t>1.000</a:t>
+                      </a:r>
+                    </a:p>
+                  </a:txBody>
+                  <a:tcPr marL="38100" marR="38100" marT="0" marB="0" anchor="ctr">
+                    <a:solidFill>
+                      <a:srgbClr val="F2F4F7"/>
+                    </a:solidFill>
+                  </a:tcPr>
+                </a:tc>
+                <a:tc>
+                  <a:txBody>
+                    <a:bodyPr/>
+                    <a:lstStyle/>
+                    <a:p>
+                      <a:pPr algn="ctr"/>
+                      <a:r>
+                        <a:rPr sz="1800" b="1" i="0" dirty="0">
+                          <a:solidFill>
+                            <a:srgbClr val="222222"/>
+                          </a:solidFill>
+                          <a:latin typeface="+mn-lt"/>
+                          <a:ea typeface="NanumGothic"/>
+                        </a:rPr>
+                        <a:t>1.000</a:t>
+                      </a:r>
+                    </a:p>
+                  </a:txBody>
+                  <a:tcPr marL="38100" marR="38100" marT="0" marB="0" anchor="ctr">
+                    <a:solidFill>
+                      <a:srgbClr val="F2F4F7"/>
+                    </a:solidFill>
+                  </a:tcPr>
+                </a:tc>
+                <a:tc>
+                  <a:txBody>
+                    <a:bodyPr/>
+                    <a:lstStyle/>
+                    <a:p>
+                      <a:pPr algn="ctr"/>
+                      <a:r>
+                        <a:rPr sz="1800" b="1" i="0" dirty="0">
+                          <a:solidFill>
+                            <a:srgbClr val="222222"/>
+                          </a:solidFill>
+                          <a:latin typeface="+mn-lt"/>
+                          <a:ea typeface="NanumGothic"/>
+                        </a:rPr>
+                        <a:t>1.000</a:t>
+                      </a:r>
+                    </a:p>
+                  </a:txBody>
+                  <a:tcPr marL="38100" marR="38100" marT="0" marB="0" anchor="ctr">
+                    <a:solidFill>
+                      <a:srgbClr val="F2F4F7"/>
+                    </a:solidFill>
+                  </a:tcPr>
+                </a:tc>
+                <a:extLst>
+                  <a:ext uri="{0D108BD9-81ED-4DB2-BD59-A6C34878D82A}">
+                    <a16:rowId xmlns:a16="http://schemas.microsoft.com/office/drawing/2014/main" val="10004"/>
+                  </a:ext>
+                </a:extLst>
+              </a:tr>
+              <a:tr h="447748">
+                <a:tc>
+                  <a:txBody>
+                    <a:bodyPr/>
+                    <a:lstStyle/>
+                    <a:p>
+                      <a:pPr algn="l"/>
+                      <a:r>
+                        <a:rPr sz="1800" b="0" i="0">
+                          <a:solidFill>
+                            <a:srgbClr val="222222"/>
+                          </a:solidFill>
+                          <a:latin typeface="+mn-lt"/>
+                          <a:ea typeface="NanumGothic"/>
+                        </a:rPr>
+                        <a:t>FedSV</a:t>
+                      </a:r>
+                    </a:p>
+                  </a:txBody>
+                  <a:tcPr marL="38100" marR="38100" marT="0" marB="0" anchor="ctr">
+                    <a:solidFill>
+                      <a:srgbClr val="FFFFFF"/>
+                    </a:solidFill>
+                  </a:tcPr>
+                </a:tc>
+                <a:tc>
+                  <a:txBody>
+                    <a:bodyPr/>
+                    <a:lstStyle/>
+                    <a:p>
+                      <a:pPr algn="ctr"/>
+                      <a:r>
+                        <a:rPr sz="1800" b="0" i="0">
+                          <a:solidFill>
+                            <a:srgbClr val="222222"/>
+                          </a:solidFill>
+                          <a:latin typeface="+mn-lt"/>
+                          <a:ea typeface="NanumGothic"/>
+                        </a:rPr>
+                        <a:t>0.910</a:t>
+                      </a:r>
+                    </a:p>
+                  </a:txBody>
+                  <a:tcPr marL="38100" marR="38100" marT="0" marB="0" anchor="ctr">
+                    <a:solidFill>
+                      <a:srgbClr val="FFFFFF"/>
+                    </a:solidFill>
+                  </a:tcPr>
+                </a:tc>
+                <a:tc>
+                  <a:txBody>
+                    <a:bodyPr/>
+                    <a:lstStyle/>
+                    <a:p>
+                      <a:pPr algn="ctr"/>
+                      <a:r>
+                        <a:rPr sz="1800" b="0" i="0">
+                          <a:solidFill>
+                            <a:srgbClr val="222222"/>
+                          </a:solidFill>
+                          <a:latin typeface="+mn-lt"/>
+                          <a:ea typeface="NanumGothic"/>
+                        </a:rPr>
+                        <a:t>0.952</a:t>
+                      </a:r>
+                    </a:p>
+                  </a:txBody>
+                  <a:tcPr marL="38100" marR="38100" marT="0" marB="0" anchor="ctr">
+                    <a:solidFill>
+                      <a:srgbClr val="FFFFFF"/>
+                    </a:solidFill>
+                  </a:tcPr>
+                </a:tc>
+                <a:tc>
+                  <a:txBody>
+                    <a:bodyPr/>
+                    <a:lstStyle/>
+                    <a:p>
+                      <a:pPr algn="ctr"/>
+                      <a:r>
+                        <a:rPr sz="1800" b="0" i="0">
+                          <a:solidFill>
+                            <a:srgbClr val="222222"/>
+                          </a:solidFill>
+                          <a:latin typeface="+mn-lt"/>
+                          <a:ea typeface="NanumGothic"/>
+                        </a:rPr>
+                        <a:t>0.968</a:t>
+                      </a:r>
+                    </a:p>
+                  </a:txBody>
+                  <a:tcPr marL="38100" marR="38100" marT="0" marB="0" anchor="ctr">
+                    <a:solidFill>
+                      <a:srgbClr val="FFFFFF"/>
+                    </a:solidFill>
+                  </a:tcPr>
+                </a:tc>
+                <a:tc>
+                  <a:txBody>
+                    <a:bodyPr/>
+                    <a:lstStyle/>
+                    <a:p>
+                      <a:pPr algn="ctr"/>
+                      <a:r>
+                        <a:rPr sz="1800" b="0" i="0">
+                          <a:solidFill>
+                            <a:srgbClr val="222222"/>
+                          </a:solidFill>
+                          <a:latin typeface="+mn-lt"/>
+                          <a:ea typeface="NanumGothic"/>
+                        </a:rPr>
+                        <a:t>0.700</a:t>
+                      </a:r>
+                    </a:p>
+                  </a:txBody>
+                  <a:tcPr marL="38100" marR="38100" marT="0" marB="0" anchor="ctr">
+                    <a:solidFill>
+                      <a:srgbClr val="FFFFFF"/>
+                    </a:solidFill>
+                  </a:tcPr>
+                </a:tc>
+                <a:tc>
+                  <a:txBody>
+                    <a:bodyPr/>
+                    <a:lstStyle/>
+                    <a:p>
+                      <a:pPr algn="ctr"/>
+                      <a:r>
+                        <a:rPr sz="1800" b="0" i="0" dirty="0">
+                          <a:solidFill>
+                            <a:srgbClr val="222222"/>
+                          </a:solidFill>
+                          <a:latin typeface="+mn-lt"/>
+                          <a:ea typeface="NanumGothic"/>
+                        </a:rPr>
+                        <a:t>0.700</a:t>
+                      </a:r>
+                    </a:p>
+                  </a:txBody>
+                  <a:tcPr marL="38100" marR="38100" marT="0" marB="0" anchor="ctr">
+                    <a:solidFill>
+                      <a:srgbClr val="FFFFFF"/>
+                    </a:solidFill>
+                  </a:tcPr>
+                </a:tc>
+                <a:tc>
+                  <a:txBody>
+                    <a:bodyPr/>
+                    <a:lstStyle/>
+                    <a:p>
+                      <a:pPr algn="ctr"/>
+                      <a:r>
+                        <a:rPr sz="1800" b="0" i="0">
+                          <a:solidFill>
+                            <a:srgbClr val="222222"/>
+                          </a:solidFill>
+                          <a:latin typeface="+mn-lt"/>
+                          <a:ea typeface="NanumGothic"/>
+                        </a:rPr>
+                        <a:t>0.933</a:t>
+                      </a:r>
+                    </a:p>
+                  </a:txBody>
+                  <a:tcPr marL="38100" marR="38100" marT="0" marB="0" anchor="ctr">
+                    <a:solidFill>
+                      <a:srgbClr val="FFFFFF"/>
+                    </a:solidFill>
+                  </a:tcPr>
+                </a:tc>
+                <a:extLst>
+                  <a:ext uri="{0D108BD9-81ED-4DB2-BD59-A6C34878D82A}">
+                    <a16:rowId xmlns:a16="http://schemas.microsoft.com/office/drawing/2014/main" val="10005"/>
+                  </a:ext>
+                </a:extLst>
+              </a:tr>
+              <a:tr h="447748">
+                <a:tc>
+                  <a:txBody>
+                    <a:bodyPr/>
+                    <a:lstStyle/>
+                    <a:p>
+                      <a:pPr algn="l"/>
+                      <a:r>
+                        <a:rPr sz="1800" b="0" i="0">
+                          <a:solidFill>
+                            <a:srgbClr val="222222"/>
+                          </a:solidFill>
+                          <a:latin typeface="+mn-lt"/>
+                          <a:ea typeface="NanumGothic"/>
+                        </a:rPr>
+                        <a:t>ShapleyFL</a:t>
+                      </a:r>
+                    </a:p>
+                  </a:txBody>
+                  <a:tcPr marL="38100" marR="38100" marT="0" marB="0" anchor="ctr">
+                    <a:solidFill>
+                      <a:srgbClr val="F2F4F7"/>
+                    </a:solidFill>
+                  </a:tcPr>
+                </a:tc>
+                <a:tc>
+                  <a:txBody>
+                    <a:bodyPr/>
+                    <a:lstStyle/>
+                    <a:p>
+                      <a:pPr algn="ctr"/>
+                      <a:r>
+                        <a:rPr sz="1800" b="0" i="0">
+                          <a:solidFill>
+                            <a:srgbClr val="222222"/>
+                          </a:solidFill>
+                          <a:latin typeface="+mn-lt"/>
+                          <a:ea typeface="NanumGothic"/>
+                        </a:rPr>
+                        <a:t>0.194</a:t>
+                      </a:r>
+                    </a:p>
+                  </a:txBody>
+                  <a:tcPr marL="38100" marR="38100" marT="0" marB="0" anchor="ctr">
+                    <a:solidFill>
+                      <a:srgbClr val="F2F4F7"/>
+                    </a:solidFill>
+                  </a:tcPr>
+                </a:tc>
+                <a:tc>
+                  <a:txBody>
+                    <a:bodyPr/>
+                    <a:lstStyle/>
+                    <a:p>
+                      <a:pPr algn="ctr"/>
+                      <a:r>
+                        <a:rPr sz="1800" b="0" i="0">
+                          <a:solidFill>
+                            <a:srgbClr val="222222"/>
+                          </a:solidFill>
+                          <a:latin typeface="+mn-lt"/>
+                          <a:ea typeface="NanumGothic"/>
+                        </a:rPr>
+                        <a:t>0.227</a:t>
+                      </a:r>
+                    </a:p>
+                  </a:txBody>
+                  <a:tcPr marL="38100" marR="38100" marT="0" marB="0" anchor="ctr">
+                    <a:solidFill>
+                      <a:srgbClr val="F2F4F7"/>
+                    </a:solidFill>
+                  </a:tcPr>
+                </a:tc>
+                <a:tc>
+                  <a:txBody>
+                    <a:bodyPr/>
+                    <a:lstStyle/>
+                    <a:p>
+                      <a:pPr algn="ctr"/>
+                      <a:r>
+                        <a:rPr sz="1800" b="0" i="0">
+                          <a:solidFill>
+                            <a:srgbClr val="222222"/>
+                          </a:solidFill>
+                          <a:latin typeface="+mn-lt"/>
+                          <a:ea typeface="NanumGothic"/>
+                        </a:rPr>
+                        <a:t>0.406</a:t>
+                      </a:r>
+                    </a:p>
+                  </a:txBody>
+                  <a:tcPr marL="38100" marR="38100" marT="0" marB="0" anchor="ctr">
+                    <a:solidFill>
+                      <a:srgbClr val="F2F4F7"/>
+                    </a:solidFill>
+                  </a:tcPr>
+                </a:tc>
+                <a:tc>
+                  <a:txBody>
+                    <a:bodyPr/>
+                    <a:lstStyle/>
+                    <a:p>
+                      <a:pPr algn="ctr"/>
+                      <a:r>
+                        <a:rPr sz="1800" b="0" i="0" dirty="0">
+                          <a:solidFill>
+                            <a:srgbClr val="222222"/>
+                          </a:solidFill>
+                          <a:latin typeface="+mn-lt"/>
+                          <a:ea typeface="NanumGothic"/>
+                        </a:rPr>
+                        <a:t>0.700</a:t>
+                      </a:r>
+                    </a:p>
+                  </a:txBody>
+                  <a:tcPr marL="38100" marR="38100" marT="0" marB="0" anchor="ctr">
+                    <a:solidFill>
+                      <a:srgbClr val="F2F4F7"/>
+                    </a:solidFill>
+                  </a:tcPr>
+                </a:tc>
+                <a:tc>
+                  <a:txBody>
+                    <a:bodyPr/>
+                    <a:lstStyle/>
+                    <a:p>
+                      <a:pPr algn="ctr"/>
+                      <a:r>
+                        <a:rPr sz="1800" b="0" i="0" dirty="0">
+                          <a:solidFill>
+                            <a:srgbClr val="222222"/>
+                          </a:solidFill>
+                          <a:latin typeface="+mn-lt"/>
+                          <a:ea typeface="NanumGothic"/>
+                        </a:rPr>
+                        <a:t>0.100</a:t>
+                      </a:r>
+                    </a:p>
+                  </a:txBody>
+                  <a:tcPr marL="38100" marR="38100" marT="0" marB="0" anchor="ctr">
+                    <a:solidFill>
+                      <a:srgbClr val="F2F4F7"/>
+                    </a:solidFill>
+                  </a:tcPr>
+                </a:tc>
+                <a:tc>
+                  <a:txBody>
+                    <a:bodyPr/>
+                    <a:lstStyle/>
+                    <a:p>
+                      <a:pPr algn="ctr"/>
+                      <a:r>
+                        <a:rPr sz="1800" b="0" i="0" dirty="0">
+                          <a:solidFill>
+                            <a:srgbClr val="222222"/>
+                          </a:solidFill>
+                          <a:latin typeface="+mn-lt"/>
+                          <a:ea typeface="NanumGothic"/>
+                        </a:rPr>
+                        <a:t>0.833</a:t>
+                      </a:r>
+                    </a:p>
+                  </a:txBody>
+                  <a:tcPr marL="38100" marR="38100" marT="0" marB="0" anchor="ctr">
+                    <a:solidFill>
+                      <a:srgbClr val="F2F4F7"/>
+                    </a:solidFill>
+                  </a:tcPr>
+                </a:tc>
+                <a:extLst>
+                  <a:ext uri="{0D108BD9-81ED-4DB2-BD59-A6C34878D82A}">
+                    <a16:rowId xmlns:a16="http://schemas.microsoft.com/office/drawing/2014/main" val="10006"/>
+                  </a:ext>
+                </a:extLst>
+              </a:tr>
+              <a:tr h="447748">
+                <a:tc>
+                  <a:txBody>
+                    <a:bodyPr/>
+                    <a:lstStyle/>
+                    <a:p>
+                      <a:pPr algn="l"/>
+                      <a:r>
+                        <a:rPr sz="1800" b="0" i="0">
+                          <a:solidFill>
+                            <a:srgbClr val="222222"/>
+                          </a:solidFill>
+                          <a:latin typeface="+mn-lt"/>
+                          <a:ea typeface="NanumGothic"/>
+                        </a:rPr>
+                        <a:t>FedIF</a:t>
+                      </a:r>
+                    </a:p>
+                  </a:txBody>
+                  <a:tcPr marL="38100" marR="38100" marT="0" marB="0" anchor="ctr">
+                    <a:solidFill>
+                      <a:srgbClr val="FFFFFF"/>
+                    </a:solidFill>
+                  </a:tcPr>
+                </a:tc>
+                <a:tc>
+                  <a:txBody>
+                    <a:bodyPr/>
+                    <a:lstStyle/>
+                    <a:p>
+                      <a:pPr algn="ctr"/>
+                      <a:r>
+                        <a:rPr sz="1800" b="0" i="0">
+                          <a:solidFill>
+                            <a:srgbClr val="222222"/>
+                          </a:solidFill>
+                          <a:latin typeface="+mn-lt"/>
+                          <a:ea typeface="NanumGothic"/>
+                        </a:rPr>
+                        <a:t>0.157</a:t>
+                      </a:r>
+                    </a:p>
+                  </a:txBody>
+                  <a:tcPr marL="38100" marR="38100" marT="0" marB="0" anchor="ctr">
+                    <a:solidFill>
+                      <a:srgbClr val="FFFFFF"/>
+                    </a:solidFill>
+                  </a:tcPr>
+                </a:tc>
+                <a:tc>
+                  <a:txBody>
+                    <a:bodyPr/>
+                    <a:lstStyle/>
+                    <a:p>
+                      <a:pPr algn="ctr"/>
+                      <a:r>
+                        <a:rPr sz="1800" b="0" i="0">
+                          <a:solidFill>
+                            <a:srgbClr val="222222"/>
+                          </a:solidFill>
+                          <a:latin typeface="+mn-lt"/>
+                          <a:ea typeface="NanumGothic"/>
+                        </a:rPr>
+                        <a:t>0.211</a:t>
+                      </a:r>
+                    </a:p>
+                  </a:txBody>
+                  <a:tcPr marL="38100" marR="38100" marT="0" marB="0" anchor="ctr">
+                    <a:solidFill>
+                      <a:srgbClr val="FFFFFF"/>
+                    </a:solidFill>
+                  </a:tcPr>
+                </a:tc>
+                <a:tc>
+                  <a:txBody>
+                    <a:bodyPr/>
+                    <a:lstStyle/>
+                    <a:p>
+                      <a:pPr algn="ctr"/>
+                      <a:r>
+                        <a:rPr sz="1800" b="0" i="0">
+                          <a:solidFill>
+                            <a:srgbClr val="222222"/>
+                          </a:solidFill>
+                          <a:latin typeface="+mn-lt"/>
+                          <a:ea typeface="NanumGothic"/>
+                        </a:rPr>
+                        <a:t>0.480</a:t>
+                      </a:r>
+                    </a:p>
+                  </a:txBody>
+                  <a:tcPr marL="38100" marR="38100" marT="0" marB="0" anchor="ctr">
+                    <a:solidFill>
+                      <a:srgbClr val="FFFFFF"/>
+                    </a:solidFill>
+                  </a:tcPr>
+                </a:tc>
+                <a:tc>
+                  <a:txBody>
+                    <a:bodyPr/>
+                    <a:lstStyle/>
+                    <a:p>
+                      <a:pPr algn="ctr"/>
+                      <a:r>
+                        <a:rPr sz="1800" b="0" i="0">
+                          <a:solidFill>
+                            <a:srgbClr val="222222"/>
+                          </a:solidFill>
+                          <a:latin typeface="+mn-lt"/>
+                          <a:ea typeface="NanumGothic"/>
+                        </a:rPr>
+                        <a:t>0.067</a:t>
+                      </a:r>
+                    </a:p>
+                  </a:txBody>
+                  <a:tcPr marL="38100" marR="38100" marT="0" marB="0" anchor="ctr">
+                    <a:solidFill>
+                      <a:srgbClr val="FFFFFF"/>
+                    </a:solidFill>
+                  </a:tcPr>
+                </a:tc>
+                <a:tc>
+                  <a:txBody>
+                    <a:bodyPr/>
+                    <a:lstStyle/>
+                    <a:p>
+                      <a:pPr algn="ctr"/>
+                      <a:r>
+                        <a:rPr sz="1800" b="0" i="0">
+                          <a:solidFill>
+                            <a:srgbClr val="222222"/>
+                          </a:solidFill>
+                          <a:latin typeface="+mn-lt"/>
+                          <a:ea typeface="NanumGothic"/>
+                        </a:rPr>
+                        <a:t>0.067</a:t>
+                      </a:r>
+                    </a:p>
+                  </a:txBody>
+                  <a:tcPr marL="38100" marR="38100" marT="0" marB="0" anchor="ctr">
+                    <a:solidFill>
+                      <a:srgbClr val="FFFFFF"/>
+                    </a:solidFill>
+                  </a:tcPr>
+                </a:tc>
+                <a:tc>
+                  <a:txBody>
+                    <a:bodyPr/>
+                    <a:lstStyle/>
+                    <a:p>
+                      <a:pPr algn="ctr"/>
+                      <a:r>
+                        <a:rPr sz="1800" b="0" i="0" dirty="0">
+                          <a:solidFill>
+                            <a:srgbClr val="222222"/>
+                          </a:solidFill>
+                          <a:latin typeface="+mn-lt"/>
+                          <a:ea typeface="NanumGothic"/>
+                        </a:rPr>
+                        <a:t>0.200</a:t>
+                      </a:r>
+                    </a:p>
+                  </a:txBody>
+                  <a:tcPr marL="38100" marR="38100" marT="0" marB="0" anchor="ctr">
+                    <a:solidFill>
+                      <a:srgbClr val="FFFFFF"/>
+                    </a:solidFill>
+                  </a:tcPr>
+                </a:tc>
+                <a:extLst>
+                  <a:ext uri="{0D108BD9-81ED-4DB2-BD59-A6C34878D82A}">
+                    <a16:rowId xmlns:a16="http://schemas.microsoft.com/office/drawing/2014/main" val="10007"/>
+                  </a:ext>
+                </a:extLst>
+              </a:tr>
+            </a:tbl>
+          </a:graphicData>
+        </a:graphic>
+      </p:graphicFrame>
+    </p:spTree>
+  </p:cSld>
+  <p:clrMapOvr>
+    <a:masterClrMapping/>
+  </p:clrMapOvr>
+</p:sld>
+</file>
+
+<file path=ppt/slides/slide12.xml><?xml version="1.0" encoding="utf-8"?>
+<p:sld xmlns:a="http://schemas.openxmlformats.org/drawingml/2006/main" xmlns:r="http://schemas.openxmlformats.org/officeDocument/2006/relationships" xmlns:p="http://schemas.openxmlformats.org/presentationml/2006/main">
+  <p:cSld>
+    <p:spTree>
+      <p:nvGrpSpPr>
+        <p:cNvPr id="1" name=""/>
+        <p:cNvGrpSpPr/>
+        <p:nvPr/>
+      </p:nvGrpSpPr>
+      <p:grpSpPr>
+        <a:xfrm>
+          <a:off x="0" y="0"/>
+          <a:ext cx="0" cy="0"/>
+          <a:chOff x="0" y="0"/>
+          <a:chExt cx="0" cy="0"/>
+        </a:xfrm>
+      </p:grpSpPr>
+      <p:sp>
+        <p:nvSpPr>
+          <p:cNvPr id="2" name="TextBox 1"/>
+          <p:cNvSpPr txBox="1"/>
+          <p:nvPr/>
+        </p:nvSpPr>
+        <p:spPr>
+          <a:xfrm>
+            <a:off x="411480" y="292608"/>
+            <a:ext cx="11338560" cy="641201"/>
+          </a:xfrm>
+          <a:prstGeom prst="rect">
+            <a:avLst/>
+          </a:prstGeom>
+          <a:noFill/>
+        </p:spPr>
+        <p:txBody>
+          <a:bodyPr wrap="square" lIns="25400" tIns="12700" rIns="25400" bIns="12700" anchor="t">
+            <a:spAutoFit/>
+          </a:bodyPr>
+          <a:lstStyle/>
+          <a:p>
+            <a:pPr algn="l">
+              <a:lnSpc>
+                <a:spcPct val="100000"/>
+              </a:lnSpc>
+            </a:pPr>
+            <a:r>
+              <a:rPr sz="4000" b="1" i="0" dirty="0">
+                <a:solidFill>
+                  <a:srgbClr val="1F2A37"/>
+                </a:solidFill>
+                <a:latin typeface="+mj-lt"/>
+                <a:ea typeface="NanumGothic"/>
+              </a:rPr>
+              <a:t>Fidelity (CNN)</a:t>
+            </a:r>
+          </a:p>
+        </p:txBody>
+      </p:sp>
+      <p:sp>
+        <p:nvSpPr>
+          <p:cNvPr id="3" name="TextBox 2"/>
+          <p:cNvSpPr txBox="1"/>
+          <p:nvPr/>
+        </p:nvSpPr>
+        <p:spPr>
+          <a:xfrm>
+            <a:off x="411480" y="1078992"/>
+            <a:ext cx="11338560" cy="589777"/>
+          </a:xfrm>
+          <a:prstGeom prst="rect">
+            <a:avLst/>
+          </a:prstGeom>
+          <a:noFill/>
+        </p:spPr>
+        <p:txBody>
+          <a:bodyPr wrap="square" lIns="25400" tIns="12700" rIns="25400" bIns="12700" anchor="t">
+            <a:spAutoFit/>
+          </a:bodyPr>
+          <a:lstStyle/>
+          <a:p>
+            <a:pPr>
+              <a:lnSpc>
+                <a:spcPct val="105000"/>
+              </a:lnSpc>
+            </a:pPr>
+            <a:r>
+              <a:rPr lang="en-US" altLang="ko-KR" dirty="0">
+                <a:solidFill>
+                  <a:srgbClr val="3C4654"/>
+                </a:solidFill>
+                <a:ea typeface="NanumGothic"/>
+              </a:rPr>
+              <a:t>Exact</a:t>
+            </a:r>
+            <a:r>
+              <a:rPr b="0" i="0" dirty="0">
+                <a:solidFill>
+                  <a:srgbClr val="3C4654"/>
+                </a:solidFill>
+                <a:ea typeface="NanumGothic"/>
+              </a:rPr>
+              <a:t> in-run </a:t>
+            </a:r>
+            <a:r>
+              <a:rPr lang="en-US" altLang="ko-KR" dirty="0" err="1">
+                <a:solidFill>
+                  <a:srgbClr val="3C4654"/>
+                </a:solidFill>
+                <a:ea typeface="NanumGothic"/>
+              </a:rPr>
+              <a:t>shapley</a:t>
+            </a:r>
+            <a:r>
+              <a:rPr lang="en-US" altLang="ko-KR" dirty="0">
+                <a:solidFill>
+                  <a:srgbClr val="3C4654"/>
+                </a:solidFill>
+                <a:ea typeface="NanumGothic"/>
+              </a:rPr>
+              <a:t> value </a:t>
+            </a:r>
+            <a:r>
+              <a:rPr b="0" i="0" dirty="0" err="1">
+                <a:solidFill>
+                  <a:srgbClr val="3C4654"/>
+                </a:solidFill>
+                <a:ea typeface="NanumGothic"/>
+              </a:rPr>
+              <a:t>대비</a:t>
+            </a:r>
+            <a:r>
+              <a:rPr b="0" i="0" dirty="0">
+                <a:solidFill>
+                  <a:srgbClr val="3C4654"/>
+                </a:solidFill>
+                <a:ea typeface="NanumGothic"/>
+              </a:rPr>
+              <a:t> </a:t>
+            </a:r>
+            <a:r>
+              <a:rPr lang="en-US" b="0" i="0" dirty="0">
+                <a:solidFill>
+                  <a:srgbClr val="3C4654"/>
+                </a:solidFill>
+                <a:ea typeface="NanumGothic"/>
+              </a:rPr>
+              <a:t>Spearman, Pearson </a:t>
+            </a:r>
+            <a:r>
+              <a:rPr lang="en-US" altLang="ko-KR" dirty="0">
+                <a:solidFill>
+                  <a:srgbClr val="3C4654"/>
+                </a:solidFill>
+                <a:ea typeface="NanumGothic"/>
+              </a:rPr>
+              <a:t>(↑)</a:t>
+            </a:r>
+            <a:endParaRPr lang="en-US" b="0" i="0" dirty="0">
+              <a:solidFill>
+                <a:srgbClr val="3C4654"/>
+              </a:solidFill>
+              <a:ea typeface="NanumGothic"/>
+            </a:endParaRPr>
+          </a:p>
+          <a:p>
+            <a:pPr>
+              <a:lnSpc>
+                <a:spcPct val="105000"/>
+              </a:lnSpc>
+            </a:pPr>
+            <a:r>
+              <a:rPr lang="en-US" b="0" i="0" dirty="0">
+                <a:solidFill>
+                  <a:srgbClr val="3C4654"/>
+                </a:solidFill>
+                <a:ea typeface="NanumGothic"/>
+              </a:rPr>
+              <a:t>C</a:t>
+            </a:r>
+            <a:r>
+              <a:rPr b="0" i="0" dirty="0">
+                <a:solidFill>
+                  <a:srgbClr val="3C4654"/>
+                </a:solidFill>
+                <a:ea typeface="NanumGothic"/>
+              </a:rPr>
+              <a:t>ross-silo N=10 × 3</a:t>
+            </a:r>
+            <a:r>
+              <a:rPr lang="ko-KR" altLang="en-US" b="0" i="0" dirty="0">
+                <a:solidFill>
+                  <a:srgbClr val="3C4654"/>
+                </a:solidFill>
+                <a:ea typeface="NanumGothic"/>
+              </a:rPr>
+              <a:t> </a:t>
+            </a:r>
+            <a:r>
+              <a:rPr b="0" i="0" dirty="0">
+                <a:solidFill>
+                  <a:srgbClr val="3C4654"/>
+                </a:solidFill>
+                <a:ea typeface="NanumGothic"/>
+              </a:rPr>
+              <a:t>seed.</a:t>
+            </a:r>
+          </a:p>
+        </p:txBody>
+      </p:sp>
+      <p:graphicFrame>
+        <p:nvGraphicFramePr>
+          <p:cNvPr id="4" name="Table 3"/>
+          <p:cNvGraphicFramePr>
+            <a:graphicFrameLocks noGrp="1"/>
+          </p:cNvGraphicFramePr>
+          <p:nvPr>
+            <p:extLst>
+              <p:ext uri="{D42A27DB-BD31-4B8C-83A1-F6EECF244321}">
+                <p14:modId xmlns:p14="http://schemas.microsoft.com/office/powerpoint/2010/main" val="1432130568"/>
+              </p:ext>
+            </p:extLst>
+          </p:nvPr>
+        </p:nvGraphicFramePr>
+        <p:xfrm>
+          <a:off x="411480" y="1930790"/>
+          <a:ext cx="9312812" cy="4302958"/>
+        </p:xfrm>
+        <a:graphic>
+          <a:graphicData uri="http://schemas.openxmlformats.org/drawingml/2006/table">
+            <a:tbl>
+              <a:tblPr>
+                <a:tableStyleId>{5C22544A-7EE6-4342-B048-85BDC9FD1C3A}</a:tableStyleId>
+              </a:tblPr>
+              <a:tblGrid>
+                <a:gridCol w="2739062">
+                  <a:extLst>
+                    <a:ext uri="{9D8B030D-6E8A-4147-A177-3AD203B41FA5}">
+                      <a16:colId xmlns:a16="http://schemas.microsoft.com/office/drawing/2014/main" val="20000"/>
+                    </a:ext>
+                  </a:extLst>
+                </a:gridCol>
+                <a:gridCol w="3286875">
+                  <a:extLst>
+                    <a:ext uri="{9D8B030D-6E8A-4147-A177-3AD203B41FA5}">
+                      <a16:colId xmlns:a16="http://schemas.microsoft.com/office/drawing/2014/main" val="20002"/>
+                    </a:ext>
+                  </a:extLst>
+                </a:gridCol>
+                <a:gridCol w="3286875">
+                  <a:extLst>
+                    <a:ext uri="{9D8B030D-6E8A-4147-A177-3AD203B41FA5}">
+                      <a16:colId xmlns:a16="http://schemas.microsoft.com/office/drawing/2014/main" val="20003"/>
+                    </a:ext>
+                  </a:extLst>
+                </a:gridCol>
+              </a:tblGrid>
+              <a:tr h="391178">
+                <a:tc>
+                  <a:txBody>
+                    <a:bodyPr/>
+                    <a:lstStyle/>
+                    <a:p>
+                      <a:pPr algn="l"/>
+                      <a:r>
+                        <a:rPr sz="1800" b="1" i="0" dirty="0">
+                          <a:solidFill>
+                            <a:srgbClr val="FFFFFF"/>
+                          </a:solidFill>
+                          <a:latin typeface="+mn-lt"/>
+                          <a:ea typeface="NanumGothic"/>
+                        </a:rPr>
+                        <a:t>method</a:t>
+                      </a:r>
+                    </a:p>
+                  </a:txBody>
+                  <a:tcPr marL="38100" marR="38100" marT="12700" marB="12700" anchor="ctr">
+                    <a:solidFill>
+                      <a:srgbClr val="33475B"/>
+                    </a:solidFill>
+                  </a:tcPr>
+                </a:tc>
+                <a:tc>
+                  <a:txBody>
+                    <a:bodyPr/>
+                    <a:lstStyle/>
+                    <a:p>
+                      <a:pPr algn="ctr"/>
+                      <a:r>
+                        <a:rPr sz="1800" b="1" i="0" dirty="0">
+                          <a:solidFill>
+                            <a:srgbClr val="FFFFFF"/>
+                          </a:solidFill>
+                          <a:latin typeface="+mn-lt"/>
+                          <a:ea typeface="NanumGothic"/>
+                        </a:rPr>
+                        <a:t>vs (b) Spearman ↑</a:t>
+                      </a:r>
+                    </a:p>
+                  </a:txBody>
+                  <a:tcPr marL="38100" marR="38100" marT="12700" marB="12700" anchor="ctr">
+                    <a:solidFill>
+                      <a:srgbClr val="33475B"/>
+                    </a:solidFill>
+                  </a:tcPr>
+                </a:tc>
+                <a:tc>
+                  <a:txBody>
+                    <a:bodyPr/>
+                    <a:lstStyle/>
+                    <a:p>
+                      <a:pPr algn="ctr"/>
+                      <a:r>
+                        <a:rPr sz="1800" b="1" i="0" dirty="0">
+                          <a:solidFill>
+                            <a:srgbClr val="FFFFFF"/>
+                          </a:solidFill>
+                          <a:latin typeface="+mn-lt"/>
+                          <a:ea typeface="NanumGothic"/>
+                        </a:rPr>
+                        <a:t>vs (b) Pearson ↑</a:t>
+                      </a:r>
+                    </a:p>
+                  </a:txBody>
+                  <a:tcPr marL="38100" marR="38100" marT="12700" marB="12700" anchor="ctr">
+                    <a:solidFill>
+                      <a:srgbClr val="33475B"/>
+                    </a:solidFill>
+                  </a:tcPr>
+                </a:tc>
+                <a:extLst>
+                  <a:ext uri="{0D108BD9-81ED-4DB2-BD59-A6C34878D82A}">
+                    <a16:rowId xmlns:a16="http://schemas.microsoft.com/office/drawing/2014/main" val="10000"/>
+                  </a:ext>
+                </a:extLst>
+              </a:tr>
+              <a:tr h="391178">
+                <a:tc>
+                  <a:txBody>
+                    <a:bodyPr/>
+                    <a:lstStyle/>
+                    <a:p>
+                      <a:pPr algn="l"/>
+                      <a:r>
+                        <a:rPr sz="1800" b="0" i="0" dirty="0" err="1">
+                          <a:solidFill>
+                            <a:srgbClr val="222222"/>
+                          </a:solidFill>
+                          <a:latin typeface="+mn-lt"/>
+                          <a:ea typeface="NanumGothic"/>
+                        </a:rPr>
+                        <a:t>Flirds</a:t>
+                      </a:r>
+                      <a:endParaRPr sz="1800" b="0" i="0" dirty="0">
+                        <a:solidFill>
+                          <a:srgbClr val="222222"/>
+                        </a:solidFill>
+                        <a:latin typeface="+mn-lt"/>
+                        <a:ea typeface="NanumGothic"/>
+                      </a:endParaRPr>
+                    </a:p>
+                  </a:txBody>
+                  <a:tcPr marL="38100" marR="38100" marT="0" marB="0" anchor="ctr">
+                    <a:solidFill>
+                      <a:srgbClr val="FFFFFF"/>
+                    </a:solidFill>
+                  </a:tcPr>
+                </a:tc>
+                <a:tc>
+                  <a:txBody>
+                    <a:bodyPr/>
+                    <a:lstStyle/>
+                    <a:p>
+                      <a:pPr algn="ctr"/>
+                      <a:r>
+                        <a:rPr sz="1800" b="0" i="0" u="sng" dirty="0">
+                          <a:solidFill>
+                            <a:srgbClr val="222222"/>
+                          </a:solidFill>
+                          <a:latin typeface="+mn-lt"/>
+                          <a:ea typeface="NanumGothic"/>
+                        </a:rPr>
+                        <a:t>0.919</a:t>
+                      </a:r>
+                    </a:p>
+                  </a:txBody>
+                  <a:tcPr marL="38100" marR="38100" marT="0" marB="0" anchor="ctr">
+                    <a:solidFill>
+                      <a:srgbClr val="FFFFFF"/>
+                    </a:solidFill>
+                  </a:tcPr>
+                </a:tc>
+                <a:tc>
+                  <a:txBody>
+                    <a:bodyPr/>
+                    <a:lstStyle/>
+                    <a:p>
+                      <a:pPr algn="ctr"/>
+                      <a:r>
+                        <a:rPr sz="1800" b="0" i="0" u="sng" dirty="0">
+                          <a:solidFill>
+                            <a:srgbClr val="222222"/>
+                          </a:solidFill>
+                          <a:latin typeface="+mn-lt"/>
+                          <a:ea typeface="NanumGothic"/>
+                        </a:rPr>
+                        <a:t>0.934</a:t>
+                      </a:r>
+                    </a:p>
+                  </a:txBody>
+                  <a:tcPr marL="38100" marR="38100" marT="0" marB="0" anchor="ctr">
+                    <a:solidFill>
+                      <a:srgbClr val="FFFFFF"/>
+                    </a:solidFill>
+                  </a:tcPr>
+                </a:tc>
+                <a:extLst>
+                  <a:ext uri="{0D108BD9-81ED-4DB2-BD59-A6C34878D82A}">
+                    <a16:rowId xmlns:a16="http://schemas.microsoft.com/office/drawing/2014/main" val="10001"/>
+                  </a:ext>
+                </a:extLst>
+              </a:tr>
+              <a:tr h="391178">
+                <a:tc>
+                  <a:txBody>
+                    <a:bodyPr/>
+                    <a:lstStyle/>
+                    <a:p>
+                      <a:pPr algn="l"/>
+                      <a:r>
+                        <a:rPr sz="1800" b="0" i="0" dirty="0">
+                          <a:solidFill>
+                            <a:srgbClr val="222222"/>
+                          </a:solidFill>
+                          <a:latin typeface="+mn-lt"/>
+                          <a:ea typeface="NanumGothic"/>
+                        </a:rPr>
+                        <a:t>Flirds-1st</a:t>
+                      </a:r>
+                    </a:p>
+                  </a:txBody>
+                  <a:tcPr marL="38100" marR="38100" marT="0" marB="0" anchor="ctr">
+                    <a:solidFill>
+                      <a:srgbClr val="F2F4F7"/>
+                    </a:solidFill>
+                  </a:tcPr>
+                </a:tc>
+                <a:tc>
+                  <a:txBody>
+                    <a:bodyPr/>
+                    <a:lstStyle/>
+                    <a:p>
+                      <a:pPr algn="ctr"/>
+                      <a:r>
+                        <a:rPr sz="1800" b="0" i="0">
+                          <a:solidFill>
+                            <a:srgbClr val="222222"/>
+                          </a:solidFill>
+                          <a:latin typeface="+mn-lt"/>
+                          <a:ea typeface="NanumGothic"/>
+                        </a:rPr>
+                        <a:t>0.832</a:t>
+                      </a:r>
+                    </a:p>
+                  </a:txBody>
+                  <a:tcPr marL="38100" marR="38100" marT="0" marB="0" anchor="ctr">
+                    <a:solidFill>
+                      <a:srgbClr val="F2F4F7"/>
+                    </a:solidFill>
+                  </a:tcPr>
+                </a:tc>
+                <a:tc>
+                  <a:txBody>
+                    <a:bodyPr/>
+                    <a:lstStyle/>
+                    <a:p>
+                      <a:pPr algn="ctr"/>
+                      <a:r>
+                        <a:rPr sz="1800" b="0" i="0">
+                          <a:solidFill>
+                            <a:srgbClr val="222222"/>
+                          </a:solidFill>
+                          <a:latin typeface="+mn-lt"/>
+                          <a:ea typeface="NanumGothic"/>
+                        </a:rPr>
+                        <a:t>0.853</a:t>
+                      </a:r>
+                    </a:p>
+                  </a:txBody>
+                  <a:tcPr marL="38100" marR="38100" marT="0" marB="0" anchor="ctr">
+                    <a:solidFill>
+                      <a:srgbClr val="F2F4F7"/>
+                    </a:solidFill>
+                  </a:tcPr>
+                </a:tc>
+                <a:extLst>
+                  <a:ext uri="{0D108BD9-81ED-4DB2-BD59-A6C34878D82A}">
+                    <a16:rowId xmlns:a16="http://schemas.microsoft.com/office/drawing/2014/main" val="10002"/>
+                  </a:ext>
+                </a:extLst>
+              </a:tr>
+              <a:tr h="391178">
+                <a:tc>
+                  <a:txBody>
+                    <a:bodyPr/>
+                    <a:lstStyle/>
+                    <a:p>
+                      <a:pPr algn="l"/>
+                      <a:r>
+                        <a:rPr sz="1800" b="0" i="0">
+                          <a:solidFill>
+                            <a:srgbClr val="222222"/>
+                          </a:solidFill>
+                          <a:latin typeface="+mn-lt"/>
+                          <a:ea typeface="NanumGothic"/>
+                        </a:rPr>
+                        <a:t>loss-heur</a:t>
+                      </a:r>
+                    </a:p>
+                  </a:txBody>
+                  <a:tcPr marL="38100" marR="38100" marT="0" marB="0" anchor="ctr">
+                    <a:solidFill>
+                      <a:srgbClr val="FFFFFF"/>
+                    </a:solidFill>
+                  </a:tcPr>
+                </a:tc>
+                <a:tc>
+                  <a:txBody>
+                    <a:bodyPr/>
+                    <a:lstStyle/>
+                    <a:p>
+                      <a:pPr algn="ctr"/>
+                      <a:r>
+                        <a:rPr sz="1800" b="0" i="0">
+                          <a:solidFill>
+                            <a:srgbClr val="222222"/>
+                          </a:solidFill>
+                          <a:latin typeface="+mn-lt"/>
+                          <a:ea typeface="NanumGothic"/>
+                        </a:rPr>
+                        <a:t>0.860</a:t>
+                      </a:r>
+                    </a:p>
+                  </a:txBody>
+                  <a:tcPr marL="38100" marR="38100" marT="0" marB="0" anchor="ctr">
+                    <a:solidFill>
+                      <a:srgbClr val="FFFFFF"/>
+                    </a:solidFill>
+                  </a:tcPr>
+                </a:tc>
+                <a:tc>
+                  <a:txBody>
+                    <a:bodyPr/>
+                    <a:lstStyle/>
+                    <a:p>
+                      <a:pPr algn="ctr"/>
+                      <a:r>
+                        <a:rPr sz="1800" b="0" i="0">
+                          <a:solidFill>
+                            <a:srgbClr val="222222"/>
+                          </a:solidFill>
+                          <a:latin typeface="+mn-lt"/>
+                          <a:ea typeface="NanumGothic"/>
+                        </a:rPr>
+                        <a:t>0.885</a:t>
+                      </a:r>
+                    </a:p>
+                  </a:txBody>
+                  <a:tcPr marL="38100" marR="38100" marT="0" marB="0" anchor="ctr">
+                    <a:solidFill>
+                      <a:srgbClr val="FFFFFF"/>
+                    </a:solidFill>
+                  </a:tcPr>
+                </a:tc>
+                <a:extLst>
+                  <a:ext uri="{0D108BD9-81ED-4DB2-BD59-A6C34878D82A}">
+                    <a16:rowId xmlns:a16="http://schemas.microsoft.com/office/drawing/2014/main" val="10003"/>
+                  </a:ext>
+                </a:extLst>
+              </a:tr>
+              <a:tr h="391178">
+                <a:tc>
+                  <a:txBody>
+                    <a:bodyPr/>
+                    <a:lstStyle/>
+                    <a:p>
+                      <a:pPr algn="l"/>
+                      <a:r>
+                        <a:rPr sz="1800" b="0" i="0">
+                          <a:solidFill>
+                            <a:srgbClr val="222222"/>
+                          </a:solidFill>
+                          <a:latin typeface="+mn-lt"/>
+                          <a:ea typeface="NanumGothic"/>
+                        </a:rPr>
+                        <a:t>Banzhaf</a:t>
+                      </a:r>
+                    </a:p>
+                  </a:txBody>
+                  <a:tcPr marL="38100" marR="38100" marT="0" marB="0" anchor="ctr">
+                    <a:solidFill>
+                      <a:srgbClr val="F2F4F7"/>
+                    </a:solidFill>
+                  </a:tcPr>
+                </a:tc>
+                <a:tc>
+                  <a:txBody>
+                    <a:bodyPr/>
+                    <a:lstStyle/>
+                    <a:p>
+                      <a:pPr algn="ctr"/>
+                      <a:r>
+                        <a:rPr sz="1800" b="1" i="0" dirty="0">
+                          <a:solidFill>
+                            <a:srgbClr val="222222"/>
+                          </a:solidFill>
+                          <a:latin typeface="+mn-lt"/>
+                          <a:ea typeface="NanumGothic"/>
+                        </a:rPr>
+                        <a:t>0.989</a:t>
+                      </a:r>
+                    </a:p>
+                  </a:txBody>
+                  <a:tcPr marL="38100" marR="38100" marT="0" marB="0" anchor="ctr">
+                    <a:solidFill>
+                      <a:srgbClr val="F2F4F7"/>
+                    </a:solidFill>
+                  </a:tcPr>
+                </a:tc>
+                <a:tc>
+                  <a:txBody>
+                    <a:bodyPr/>
+                    <a:lstStyle/>
+                    <a:p>
+                      <a:pPr algn="ctr"/>
+                      <a:r>
+                        <a:rPr sz="1800" b="1" i="0" dirty="0">
+                          <a:solidFill>
+                            <a:srgbClr val="222222"/>
+                          </a:solidFill>
+                          <a:latin typeface="+mn-lt"/>
+                          <a:ea typeface="NanumGothic"/>
+                        </a:rPr>
+                        <a:t>0.998</a:t>
+                      </a:r>
+                    </a:p>
+                  </a:txBody>
+                  <a:tcPr marL="38100" marR="38100" marT="0" marB="0" anchor="ctr">
+                    <a:solidFill>
+                      <a:srgbClr val="F2F4F7"/>
+                    </a:solidFill>
+                  </a:tcPr>
+                </a:tc>
+                <a:extLst>
+                  <a:ext uri="{0D108BD9-81ED-4DB2-BD59-A6C34878D82A}">
+                    <a16:rowId xmlns:a16="http://schemas.microsoft.com/office/drawing/2014/main" val="10004"/>
+                  </a:ext>
+                </a:extLst>
+              </a:tr>
+              <a:tr h="391178">
+                <a:tc>
+                  <a:txBody>
+                    <a:bodyPr/>
+                    <a:lstStyle/>
+                    <a:p>
+                      <a:pPr algn="l"/>
+                      <a:r>
+                        <a:rPr sz="1800" b="0" i="0">
+                          <a:solidFill>
+                            <a:srgbClr val="222222"/>
+                          </a:solidFill>
+                          <a:latin typeface="+mn-lt"/>
+                          <a:ea typeface="NanumGothic"/>
+                        </a:rPr>
+                        <a:t>GTG</a:t>
+                      </a:r>
+                    </a:p>
+                  </a:txBody>
+                  <a:tcPr marL="38100" marR="38100" marT="0" marB="0" anchor="ctr">
+                    <a:solidFill>
+                      <a:srgbClr val="FFFFFF"/>
+                    </a:solidFill>
+                  </a:tcPr>
+                </a:tc>
+                <a:tc>
+                  <a:txBody>
+                    <a:bodyPr/>
+                    <a:lstStyle/>
+                    <a:p>
+                      <a:pPr algn="ctr"/>
+                      <a:r>
+                        <a:rPr sz="1800" b="0" i="0" dirty="0">
+                          <a:solidFill>
+                            <a:srgbClr val="222222"/>
+                          </a:solidFill>
+                          <a:latin typeface="+mn-lt"/>
+                          <a:ea typeface="NanumGothic"/>
+                        </a:rPr>
+                        <a:t>0.569</a:t>
+                      </a:r>
+                    </a:p>
+                  </a:txBody>
+                  <a:tcPr marL="38100" marR="38100" marT="0" marB="0" anchor="ctr">
+                    <a:solidFill>
+                      <a:srgbClr val="FFFFFF"/>
+                    </a:solidFill>
+                  </a:tcPr>
+                </a:tc>
+                <a:tc>
+                  <a:txBody>
+                    <a:bodyPr/>
+                    <a:lstStyle/>
+                    <a:p>
+                      <a:pPr algn="ctr"/>
+                      <a:r>
+                        <a:rPr sz="1800" b="0" i="0">
+                          <a:solidFill>
+                            <a:srgbClr val="222222"/>
+                          </a:solidFill>
+                          <a:latin typeface="+mn-lt"/>
+                          <a:ea typeface="NanumGothic"/>
+                        </a:rPr>
+                        <a:t>0.612</a:t>
+                      </a:r>
+                    </a:p>
+                  </a:txBody>
+                  <a:tcPr marL="38100" marR="38100" marT="0" marB="0" anchor="ctr">
+                    <a:solidFill>
+                      <a:srgbClr val="FFFFFF"/>
+                    </a:solidFill>
+                  </a:tcPr>
+                </a:tc>
+                <a:extLst>
+                  <a:ext uri="{0D108BD9-81ED-4DB2-BD59-A6C34878D82A}">
+                    <a16:rowId xmlns:a16="http://schemas.microsoft.com/office/drawing/2014/main" val="10005"/>
+                  </a:ext>
+                </a:extLst>
+              </a:tr>
+              <a:tr h="391178">
+                <a:tc>
+                  <a:txBody>
+                    <a:bodyPr/>
+                    <a:lstStyle/>
+                    <a:p>
+                      <a:pPr algn="l"/>
+                      <a:r>
+                        <a:rPr sz="1800" b="0" i="0">
+                          <a:solidFill>
+                            <a:srgbClr val="222222"/>
+                          </a:solidFill>
+                          <a:latin typeface="+mn-lt"/>
+                          <a:ea typeface="NanumGothic"/>
+                        </a:rPr>
+                        <a:t>FedSV</a:t>
+                      </a:r>
+                    </a:p>
+                  </a:txBody>
+                  <a:tcPr marL="38100" marR="38100" marT="0" marB="0" anchor="ctr">
+                    <a:solidFill>
+                      <a:srgbClr val="F2F4F7"/>
+                    </a:solidFill>
+                  </a:tcPr>
+                </a:tc>
+                <a:tc>
+                  <a:txBody>
+                    <a:bodyPr/>
+                    <a:lstStyle/>
+                    <a:p>
+                      <a:pPr algn="ctr"/>
+                      <a:r>
+                        <a:rPr sz="1800" b="0" i="0">
+                          <a:solidFill>
+                            <a:srgbClr val="222222"/>
+                          </a:solidFill>
+                          <a:latin typeface="+mn-lt"/>
+                          <a:ea typeface="NanumGothic"/>
+                        </a:rPr>
+                        <a:t>0.401</a:t>
+                      </a:r>
+                    </a:p>
+                  </a:txBody>
+                  <a:tcPr marL="38100" marR="38100" marT="0" marB="0" anchor="ctr">
+                    <a:solidFill>
+                      <a:srgbClr val="F2F4F7"/>
+                    </a:solidFill>
+                  </a:tcPr>
+                </a:tc>
+                <a:tc>
+                  <a:txBody>
+                    <a:bodyPr/>
+                    <a:lstStyle/>
+                    <a:p>
+                      <a:pPr algn="ctr"/>
+                      <a:r>
+                        <a:rPr sz="1800" b="0" i="0" dirty="0">
+                          <a:solidFill>
+                            <a:srgbClr val="222222"/>
+                          </a:solidFill>
+                          <a:latin typeface="+mn-lt"/>
+                          <a:ea typeface="NanumGothic"/>
+                        </a:rPr>
+                        <a:t>0.410</a:t>
+                      </a:r>
+                    </a:p>
+                  </a:txBody>
+                  <a:tcPr marL="38100" marR="38100" marT="0" marB="0" anchor="ctr">
+                    <a:solidFill>
+                      <a:srgbClr val="F2F4F7"/>
+                    </a:solidFill>
+                  </a:tcPr>
+                </a:tc>
+                <a:extLst>
+                  <a:ext uri="{0D108BD9-81ED-4DB2-BD59-A6C34878D82A}">
+                    <a16:rowId xmlns:a16="http://schemas.microsoft.com/office/drawing/2014/main" val="10006"/>
+                  </a:ext>
+                </a:extLst>
+              </a:tr>
+              <a:tr h="391178">
+                <a:tc>
+                  <a:txBody>
+                    <a:bodyPr/>
+                    <a:lstStyle/>
+                    <a:p>
+                      <a:pPr algn="l"/>
+                      <a:r>
+                        <a:rPr sz="1800" b="0" i="0">
+                          <a:solidFill>
+                            <a:srgbClr val="222222"/>
+                          </a:solidFill>
+                          <a:latin typeface="+mn-lt"/>
+                          <a:ea typeface="NanumGothic"/>
+                        </a:rPr>
+                        <a:t>ComFedSV</a:t>
+                      </a:r>
+                    </a:p>
+                  </a:txBody>
+                  <a:tcPr marL="38100" marR="38100" marT="0" marB="0" anchor="ctr">
+                    <a:solidFill>
+                      <a:srgbClr val="FFFFFF"/>
+                    </a:solidFill>
+                  </a:tcPr>
+                </a:tc>
+                <a:tc>
+                  <a:txBody>
+                    <a:bodyPr/>
+                    <a:lstStyle/>
+                    <a:p>
+                      <a:pPr algn="ctr"/>
+                      <a:r>
+                        <a:rPr sz="1800" b="0" i="0">
+                          <a:solidFill>
+                            <a:srgbClr val="222222"/>
+                          </a:solidFill>
+                          <a:latin typeface="+mn-lt"/>
+                          <a:ea typeface="NanumGothic"/>
+                        </a:rPr>
+                        <a:t>0.348</a:t>
+                      </a:r>
+                    </a:p>
+                  </a:txBody>
+                  <a:tcPr marL="38100" marR="38100" marT="0" marB="0" anchor="ctr">
+                    <a:solidFill>
+                      <a:srgbClr val="FFFFFF"/>
+                    </a:solidFill>
+                  </a:tcPr>
+                </a:tc>
+                <a:tc>
+                  <a:txBody>
+                    <a:bodyPr/>
+                    <a:lstStyle/>
+                    <a:p>
+                      <a:pPr algn="ctr"/>
+                      <a:r>
+                        <a:rPr sz="1800" b="0" i="0" dirty="0">
+                          <a:solidFill>
+                            <a:srgbClr val="222222"/>
+                          </a:solidFill>
+                          <a:latin typeface="+mn-lt"/>
+                          <a:ea typeface="NanumGothic"/>
+                        </a:rPr>
+                        <a:t>0.328</a:t>
+                      </a:r>
+                    </a:p>
+                  </a:txBody>
+                  <a:tcPr marL="38100" marR="38100" marT="0" marB="0" anchor="ctr">
+                    <a:solidFill>
+                      <a:srgbClr val="FFFFFF"/>
+                    </a:solidFill>
+                  </a:tcPr>
+                </a:tc>
+                <a:extLst>
+                  <a:ext uri="{0D108BD9-81ED-4DB2-BD59-A6C34878D82A}">
+                    <a16:rowId xmlns:a16="http://schemas.microsoft.com/office/drawing/2014/main" val="10007"/>
+                  </a:ext>
+                </a:extLst>
+              </a:tr>
+              <a:tr h="391178">
+                <a:tc>
+                  <a:txBody>
+                    <a:bodyPr/>
+                    <a:lstStyle/>
+                    <a:p>
+                      <a:pPr algn="l"/>
+                      <a:r>
+                        <a:rPr sz="1800" b="0" i="0">
+                          <a:solidFill>
+                            <a:srgbClr val="222222"/>
+                          </a:solidFill>
+                          <a:latin typeface="+mn-lt"/>
+                          <a:ea typeface="NanumGothic"/>
+                        </a:rPr>
+                        <a:t>ShapleyFL</a:t>
+                      </a:r>
+                    </a:p>
+                  </a:txBody>
+                  <a:tcPr marL="38100" marR="38100" marT="0" marB="0" anchor="ctr">
+                    <a:solidFill>
+                      <a:srgbClr val="F2F4F7"/>
+                    </a:solidFill>
+                  </a:tcPr>
+                </a:tc>
+                <a:tc>
+                  <a:txBody>
+                    <a:bodyPr/>
+                    <a:lstStyle/>
+                    <a:p>
+                      <a:pPr algn="ctr"/>
+                      <a:r>
+                        <a:rPr sz="1800" b="0" i="0">
+                          <a:solidFill>
+                            <a:srgbClr val="222222"/>
+                          </a:solidFill>
+                          <a:latin typeface="+mn-lt"/>
+                          <a:ea typeface="NanumGothic"/>
+                        </a:rPr>
+                        <a:t>0.391</a:t>
+                      </a:r>
+                    </a:p>
+                  </a:txBody>
+                  <a:tcPr marL="38100" marR="38100" marT="0" marB="0" anchor="ctr">
+                    <a:solidFill>
+                      <a:srgbClr val="F2F4F7"/>
+                    </a:solidFill>
+                  </a:tcPr>
+                </a:tc>
+                <a:tc>
+                  <a:txBody>
+                    <a:bodyPr/>
+                    <a:lstStyle/>
+                    <a:p>
+                      <a:pPr algn="ctr"/>
+                      <a:r>
+                        <a:rPr sz="1800" b="0" i="0" dirty="0">
+                          <a:solidFill>
+                            <a:srgbClr val="222222"/>
+                          </a:solidFill>
+                          <a:latin typeface="+mn-lt"/>
+                          <a:ea typeface="NanumGothic"/>
+                        </a:rPr>
+                        <a:t>0.392</a:t>
+                      </a:r>
+                    </a:p>
+                  </a:txBody>
+                  <a:tcPr marL="38100" marR="38100" marT="0" marB="0" anchor="ctr">
+                    <a:solidFill>
+                      <a:srgbClr val="F2F4F7"/>
+                    </a:solidFill>
+                  </a:tcPr>
+                </a:tc>
+                <a:extLst>
+                  <a:ext uri="{0D108BD9-81ED-4DB2-BD59-A6C34878D82A}">
+                    <a16:rowId xmlns:a16="http://schemas.microsoft.com/office/drawing/2014/main" val="10008"/>
+                  </a:ext>
+                </a:extLst>
+              </a:tr>
+              <a:tr h="391178">
+                <a:tc>
+                  <a:txBody>
+                    <a:bodyPr/>
+                    <a:lstStyle/>
+                    <a:p>
+                      <a:pPr algn="l"/>
+                      <a:r>
+                        <a:rPr sz="1800" b="0" i="0">
+                          <a:solidFill>
+                            <a:srgbClr val="222222"/>
+                          </a:solidFill>
+                          <a:latin typeface="+mn-lt"/>
+                          <a:ea typeface="NanumGothic"/>
+                        </a:rPr>
+                        <a:t>FedIF</a:t>
+                      </a:r>
+                    </a:p>
+                  </a:txBody>
+                  <a:tcPr marL="38100" marR="38100" marT="0" marB="0" anchor="ctr">
+                    <a:solidFill>
+                      <a:srgbClr val="FFFFFF"/>
+                    </a:solidFill>
+                  </a:tcPr>
+                </a:tc>
+                <a:tc>
+                  <a:txBody>
+                    <a:bodyPr/>
+                    <a:lstStyle/>
+                    <a:p>
+                      <a:pPr algn="ctr"/>
+                      <a:r>
+                        <a:rPr sz="1800" b="0" i="0">
+                          <a:solidFill>
+                            <a:srgbClr val="222222"/>
+                          </a:solidFill>
+                          <a:latin typeface="+mn-lt"/>
+                          <a:ea typeface="NanumGothic"/>
+                        </a:rPr>
+                        <a:t>0.491</a:t>
+                      </a:r>
+                    </a:p>
+                  </a:txBody>
+                  <a:tcPr marL="38100" marR="38100" marT="0" marB="0" anchor="ctr">
+                    <a:solidFill>
+                      <a:srgbClr val="FFFFFF"/>
+                    </a:solidFill>
+                  </a:tcPr>
+                </a:tc>
+                <a:tc>
+                  <a:txBody>
+                    <a:bodyPr/>
+                    <a:lstStyle/>
+                    <a:p>
+                      <a:pPr algn="ctr"/>
+                      <a:r>
+                        <a:rPr sz="1800" b="0" i="0" dirty="0">
+                          <a:solidFill>
+                            <a:srgbClr val="222222"/>
+                          </a:solidFill>
+                          <a:latin typeface="+mn-lt"/>
+                          <a:ea typeface="NanumGothic"/>
+                        </a:rPr>
+                        <a:t>0.506</a:t>
+                      </a:r>
+                    </a:p>
+                  </a:txBody>
+                  <a:tcPr marL="38100" marR="38100" marT="0" marB="0" anchor="ctr">
+                    <a:solidFill>
+                      <a:srgbClr val="FFFFFF"/>
+                    </a:solidFill>
+                  </a:tcPr>
+                </a:tc>
+                <a:extLst>
+                  <a:ext uri="{0D108BD9-81ED-4DB2-BD59-A6C34878D82A}">
+                    <a16:rowId xmlns:a16="http://schemas.microsoft.com/office/drawing/2014/main" val="10009"/>
+                  </a:ext>
+                </a:extLst>
+              </a:tr>
+              <a:tr h="391178">
+                <a:tc>
+                  <a:txBody>
+                    <a:bodyPr/>
+                    <a:lstStyle/>
+                    <a:p>
+                      <a:pPr algn="l"/>
+                      <a:r>
+                        <a:rPr sz="1800" b="0" i="0">
+                          <a:solidFill>
+                            <a:srgbClr val="222222"/>
+                          </a:solidFill>
+                          <a:latin typeface="+mn-lt"/>
+                          <a:ea typeface="NanumGothic"/>
+                        </a:rPr>
+                        <a:t>Ripple</a:t>
+                      </a:r>
+                    </a:p>
+                  </a:txBody>
+                  <a:tcPr marL="38100" marR="38100" marT="0" marB="0" anchor="ctr">
+                    <a:solidFill>
+                      <a:srgbClr val="F2F4F7"/>
+                    </a:solidFill>
+                  </a:tcPr>
+                </a:tc>
+                <a:tc>
+                  <a:txBody>
+                    <a:bodyPr/>
+                    <a:lstStyle/>
+                    <a:p>
+                      <a:pPr algn="ctr"/>
+                      <a:r>
+                        <a:rPr sz="1800" b="0" i="0" dirty="0">
+                          <a:solidFill>
+                            <a:srgbClr val="222222"/>
+                          </a:solidFill>
+                          <a:latin typeface="+mn-lt"/>
+                          <a:ea typeface="NanumGothic"/>
+                        </a:rPr>
+                        <a:t>0.373</a:t>
+                      </a:r>
+                    </a:p>
+                  </a:txBody>
+                  <a:tcPr marL="38100" marR="38100" marT="0" marB="0" anchor="ctr">
+                    <a:solidFill>
+                      <a:srgbClr val="F2F4F7"/>
+                    </a:solidFill>
+                  </a:tcPr>
+                </a:tc>
+                <a:tc>
+                  <a:txBody>
+                    <a:bodyPr/>
+                    <a:lstStyle/>
+                    <a:p>
+                      <a:pPr algn="ctr"/>
+                      <a:r>
+                        <a:rPr sz="1800" b="0" i="0" dirty="0">
+                          <a:solidFill>
+                            <a:srgbClr val="222222"/>
+                          </a:solidFill>
+                          <a:latin typeface="+mn-lt"/>
+                          <a:ea typeface="NanumGothic"/>
+                        </a:rPr>
+                        <a:t>0.404</a:t>
+                      </a:r>
+                    </a:p>
+                  </a:txBody>
+                  <a:tcPr marL="38100" marR="38100" marT="0" marB="0" anchor="ctr">
+                    <a:solidFill>
+                      <a:srgbClr val="F2F4F7"/>
+                    </a:solidFill>
+                  </a:tcPr>
+                </a:tc>
+                <a:extLst>
+                  <a:ext uri="{0D108BD9-81ED-4DB2-BD59-A6C34878D82A}">
+                    <a16:rowId xmlns:a16="http://schemas.microsoft.com/office/drawing/2014/main" val="10010"/>
+                  </a:ext>
+                </a:extLst>
+              </a:tr>
+            </a:tbl>
+          </a:graphicData>
+        </a:graphic>
+      </p:graphicFrame>
+      <p:sp>
+        <p:nvSpPr>
+          <p:cNvPr id="6" name="TextBox 5"/>
+          <p:cNvSpPr txBox="1"/>
+          <p:nvPr/>
+        </p:nvSpPr>
+        <p:spPr>
+          <a:xfrm>
+            <a:off x="11683389" y="6510528"/>
+            <a:ext cx="325731" cy="230832"/>
+          </a:xfrm>
+          <a:prstGeom prst="rect">
+            <a:avLst/>
+          </a:prstGeom>
+          <a:noFill/>
+        </p:spPr>
+        <p:txBody>
+          <a:bodyPr wrap="none">
+            <a:spAutoFit/>
+          </a:bodyPr>
+          <a:lstStyle/>
+          <a:p>
+            <a:pPr algn="r"/>
+            <a:r>
+              <a:rPr lang="en-US" sz="900" b="0" i="0" dirty="0">
+                <a:solidFill>
+                  <a:srgbClr val="7A7A7A"/>
+                </a:solidFill>
+                <a:latin typeface="NanumGothic"/>
+                <a:ea typeface="NanumGothic"/>
+              </a:rPr>
+              <a:t>11</a:t>
+            </a:r>
+            <a:endParaRPr sz="900" b="0" i="0" dirty="0">
+              <a:solidFill>
+                <a:srgbClr val="7A7A7A"/>
+              </a:solidFill>
+              <a:latin typeface="NanumGothic"/>
+              <a:ea typeface="NanumGothic"/>
+            </a:endParaRPr>
+          </a:p>
+        </p:txBody>
+      </p:sp>
+    </p:spTree>
+  </p:cSld>
+  <p:clrMapOvr>
+    <a:masterClrMapping/>
+  </p:clrMapOvr>
+</p:sld>
+</file>
+
+<file path=ppt/slides/slide13.xml><?xml version="1.0" encoding="utf-8"?>
+<p:sld xmlns:a="http://schemas.openxmlformats.org/drawingml/2006/main" xmlns:r="http://schemas.openxmlformats.org/officeDocument/2006/relationships" xmlns:p="http://schemas.openxmlformats.org/presentationml/2006/main">
+  <p:cSld>
+    <p:spTree>
+      <p:nvGrpSpPr>
+        <p:cNvPr id="1" name=""/>
+        <p:cNvGrpSpPr/>
+        <p:nvPr/>
+      </p:nvGrpSpPr>
+      <p:grpSpPr>
+        <a:xfrm>
+          <a:off x="0" y="0"/>
+          <a:ext cx="0" cy="0"/>
+          <a:chOff x="0" y="0"/>
+          <a:chExt cx="0" cy="0"/>
+        </a:xfrm>
+      </p:grpSpPr>
+      <p:sp>
+        <p:nvSpPr>
+          <p:cNvPr id="2" name="TextBox 1"/>
+          <p:cNvSpPr txBox="1"/>
+          <p:nvPr/>
+        </p:nvSpPr>
+        <p:spPr>
+          <a:xfrm>
+            <a:off x="411480" y="292608"/>
             <a:ext cx="11338560" cy="641201"/>
           </a:xfrm>
           <a:prstGeom prst="rect">
@@ -4092,8 +7885,8 @@
         </p:nvSpPr>
         <p:spPr>
           <a:xfrm>
-            <a:off x="11551615" y="6510528"/>
-            <a:ext cx="457200" cy="274320"/>
+            <a:off x="11683084" y="6510528"/>
+            <a:ext cx="325731" cy="230832"/>
           </a:xfrm>
           <a:prstGeom prst="rect">
             <a:avLst/>
@@ -4108,15 +7901,22 @@
           <a:p>
             <a:pPr algn="r"/>
             <a:r>
-              <a:rPr sz="900" b="0" i="0">
+              <a:rPr lang="en-US" sz="900" b="0" i="0" dirty="0">
                 <a:solidFill>
                   <a:srgbClr val="7A7A7A"/>
                 </a:solidFill>
                 <a:latin typeface="NanumGothic"/>
                 <a:ea typeface="NanumGothic"/>
               </a:rPr>
-              <a:t>10</a:t>
-            </a:r>
+              <a:t>12</a:t>
+            </a:r>
+            <a:endParaRPr sz="900" b="0" i="0" dirty="0">
+              <a:solidFill>
+                <a:srgbClr val="7A7A7A"/>
+              </a:solidFill>
+              <a:latin typeface="NanumGothic"/>
+              <a:ea typeface="NanumGothic"/>
+            </a:endParaRPr>
           </a:p>
         </p:txBody>
       </p:sp>
@@ -4128,7 +7928,7 @@
 </p:sld>
 </file>
 
-<file path=ppt/slides/slide11.xml><?xml version="1.0" encoding="utf-8"?>
+<file path=ppt/slides/slide14.xml><?xml version="1.0" encoding="utf-8"?>
 <p:sld xmlns:a="http://schemas.openxmlformats.org/drawingml/2006/main" xmlns:r="http://schemas.openxmlformats.org/officeDocument/2006/relationships" xmlns:p="http://schemas.openxmlformats.org/presentationml/2006/main">
   <p:cSld>
     <p:spTree>
@@ -4743,8 +8543,8 @@
         </p:nvSpPr>
         <p:spPr>
           <a:xfrm>
-            <a:off x="11551615" y="6510528"/>
-            <a:ext cx="457200" cy="274320"/>
+            <a:off x="11683084" y="6510528"/>
+            <a:ext cx="325731" cy="230832"/>
           </a:xfrm>
           <a:prstGeom prst="rect">
             <a:avLst/>
@@ -4759,15 +8559,22 @@
           <a:p>
             <a:pPr algn="r"/>
             <a:r>
-              <a:rPr sz="900" b="0" i="0">
+              <a:rPr lang="en-US" sz="900" b="0" i="0" dirty="0">
                 <a:solidFill>
                   <a:srgbClr val="7A7A7A"/>
                 </a:solidFill>
                 <a:latin typeface="NanumGothic"/>
                 <a:ea typeface="NanumGothic"/>
               </a:rPr>
-              <a:t>15</a:t>
-            </a:r>
+              <a:t>13</a:t>
+            </a:r>
+            <a:endParaRPr sz="900" b="0" i="0" dirty="0">
+              <a:solidFill>
+                <a:srgbClr val="7A7A7A"/>
+              </a:solidFill>
+              <a:latin typeface="NanumGothic"/>
+              <a:ea typeface="NanumGothic"/>
+            </a:endParaRPr>
           </a:p>
         </p:txBody>
       </p:sp>
@@ -4779,7 +8586,7 @@
 </p:sld>
 </file>
 
-<file path=ppt/slides/slide12.xml><?xml version="1.0" encoding="utf-8"?>
+<file path=ppt/slides/slide15.xml><?xml version="1.0" encoding="utf-8"?>
 <p:sld xmlns:a="http://schemas.openxmlformats.org/drawingml/2006/main" xmlns:r="http://schemas.openxmlformats.org/officeDocument/2006/relationships" xmlns:p="http://schemas.openxmlformats.org/presentationml/2006/main">
   <p:cSld>
     <p:spTree>
@@ -5914,8 +9721,8 @@
         </p:nvSpPr>
         <p:spPr>
           <a:xfrm>
-            <a:off x="11551615" y="6510528"/>
-            <a:ext cx="457200" cy="274320"/>
+            <a:off x="11683084" y="6510528"/>
+            <a:ext cx="325731" cy="230832"/>
           </a:xfrm>
           <a:prstGeom prst="rect">
             <a:avLst/>
@@ -5930,15 +9737,22 @@
           <a:p>
             <a:pPr algn="r"/>
             <a:r>
-              <a:rPr sz="900" b="0" i="0">
+              <a:rPr lang="en-US" sz="900" b="0" i="0" dirty="0">
                 <a:solidFill>
                   <a:srgbClr val="7A7A7A"/>
                 </a:solidFill>
                 <a:latin typeface="NanumGothic"/>
                 <a:ea typeface="NanumGothic"/>
               </a:rPr>
-              <a:t>16</a:t>
-            </a:r>
+              <a:t>14</a:t>
+            </a:r>
+            <a:endParaRPr sz="900" b="0" i="0" dirty="0">
+              <a:solidFill>
+                <a:srgbClr val="7A7A7A"/>
+              </a:solidFill>
+              <a:latin typeface="NanumGothic"/>
+              <a:ea typeface="NanumGothic"/>
+            </a:endParaRPr>
           </a:p>
         </p:txBody>
       </p:sp>
@@ -5950,7 +9764,7 @@
 </p:sld>
 </file>
 
-<file path=ppt/slides/slide13.xml><?xml version="1.0" encoding="utf-8"?>
+<file path=ppt/slides/slide16.xml><?xml version="1.0" encoding="utf-8"?>
 <p:sld xmlns:a="http://schemas.openxmlformats.org/drawingml/2006/main" xmlns:r="http://schemas.openxmlformats.org/officeDocument/2006/relationships" xmlns:p="http://schemas.openxmlformats.org/presentationml/2006/main">
   <p:cSld>
     <p:spTree>
@@ -6100,8 +9914,8 @@
         </p:nvSpPr>
         <p:spPr>
           <a:xfrm>
-            <a:off x="11551615" y="6510528"/>
-            <a:ext cx="457200" cy="274320"/>
+            <a:off x="11683084" y="6510528"/>
+            <a:ext cx="325731" cy="230832"/>
           </a:xfrm>
           <a:prstGeom prst="rect">
             <a:avLst/>
@@ -6116,15 +9930,22 @@
           <a:p>
             <a:pPr algn="r"/>
             <a:r>
-              <a:rPr sz="900" b="0" i="0">
+              <a:rPr lang="en-US" sz="900" b="0" i="0" dirty="0">
                 <a:solidFill>
                   <a:srgbClr val="7A7A7A"/>
                 </a:solidFill>
                 <a:latin typeface="NanumGothic"/>
                 <a:ea typeface="NanumGothic"/>
               </a:rPr>
-              <a:t>17</a:t>
-            </a:r>
+              <a:t>15</a:t>
+            </a:r>
+            <a:endParaRPr sz="900" b="0" i="0" dirty="0">
+              <a:solidFill>
+                <a:srgbClr val="7A7A7A"/>
+              </a:solidFill>
+              <a:latin typeface="NanumGothic"/>
+              <a:ea typeface="NanumGothic"/>
+            </a:endParaRPr>
           </a:p>
         </p:txBody>
       </p:sp>
@@ -7106,8 +10927,8 @@
           </a:p>
         </p:txBody>
       </p:sp>
-      <mc:AlternateContent xmlns:mc="http://schemas.openxmlformats.org/markup-compatibility/2006" xmlns:a14="http://schemas.microsoft.com/office/drawing/2010/main">
-        <mc:Choice Requires="a14">
+      <mc:AlternateContent xmlns:mc="http://schemas.openxmlformats.org/markup-compatibility/2006">
+        <mc:Choice xmlns:a14="http://schemas.microsoft.com/office/drawing/2010/main" Requires="a14">
           <p:sp>
             <p:nvSpPr>
               <p:cNvPr id="4" name="TextBox 3"/>
@@ -7117,7 +10938,7 @@
             <p:spPr>
               <a:xfrm>
                 <a:off x="914400" y="3383280"/>
-                <a:ext cx="10332720" cy="641201"/>
+                <a:ext cx="10332720" cy="894860"/>
               </a:xfrm>
               <a:prstGeom prst="rect">
                 <a:avLst/>
@@ -7132,7 +10953,7 @@
               <a:p>
                 <a:pPr algn="ctr">
                   <a:lnSpc>
-                    <a:spcPct val="100000"/>
+                    <a:spcPct val="150000"/>
                   </a:lnSpc>
                 </a:pPr>
                 <a:r>
@@ -7252,10 +11073,10 @@
                       <m:t>∪{</m:t>
                     </m:r>
                     <m:r>
-                      <a:rPr lang="ko-KR" altLang="en-US" i="1" dirty="0" err="1">
+                      <a:rPr lang="en-US" altLang="ko-KR" b="0" i="1" dirty="0" smtClean="0">
                         <a:latin typeface="Cambria Math" panose="02040503050406030204" pitchFamily="18" charset="0"/>
                       </a:rPr>
-                      <m:t>𝑖</m:t>
+                      <m:t>𝑧</m:t>
                     </m:r>
                     <m:r>
                       <a:rPr lang="en-US" altLang="ko-KR" i="1" dirty="0">
@@ -7326,7 +11147,7 @@
               <a:p>
                 <a:pPr algn="ctr">
                   <a:lnSpc>
-                    <a:spcPct val="100000"/>
+                    <a:spcPct val="150000"/>
                   </a:lnSpc>
                 </a:pPr>
                 <a:r>
@@ -7450,7 +11271,7 @@
             </p:txBody>
           </p:sp>
         </mc:Choice>
-        <mc:Fallback xmlns="">
+        <mc:Fallback>
           <p:sp>
             <p:nvSpPr>
               <p:cNvPr id="4" name="TextBox 3"/>
@@ -7462,7 +11283,7 @@
             <p:spPr>
               <a:xfrm>
                 <a:off x="914400" y="3383280"/>
-                <a:ext cx="10332720" cy="641201"/>
+                <a:ext cx="10332720" cy="894860"/>
               </a:xfrm>
               <a:prstGeom prst="rect">
                 <a:avLst/>
@@ -7470,7 +11291,7 @@
               <a:blipFill>
                 <a:blip r:embed="rId2"/>
                 <a:stretch>
-                  <a:fillRect t="-14286" b="-22857"/>
+                  <a:fillRect b="-15646"/>
                 </a:stretch>
               </a:blipFill>
             </p:spPr>
@@ -7497,7 +11318,7 @@
         </p:nvSpPr>
         <p:spPr>
           <a:xfrm>
-            <a:off x="2194560" y="4297680"/>
+            <a:off x="2194560" y="4602480"/>
             <a:ext cx="7772400" cy="1188720"/>
           </a:xfrm>
           <a:prstGeom prst="roundRect">
@@ -7546,7 +11367,7 @@
         </p:nvSpPr>
         <p:spPr>
           <a:xfrm>
-            <a:off x="2468880" y="4526280"/>
+            <a:off x="2468880" y="4780280"/>
             <a:ext cx="7223760" cy="830997"/>
           </a:xfrm>
           <a:prstGeom prst="rect">
@@ -8187,7 +12008,7 @@
         </p:nvSpPr>
         <p:spPr>
           <a:xfrm>
-            <a:off x="929640" y="4172416"/>
+            <a:off x="929640" y="4318466"/>
             <a:ext cx="10332720" cy="333425"/>
           </a:xfrm>
           <a:prstGeom prst="rect">
@@ -8431,6 +12252,36 @@
           <a:xfrm>
             <a:off x="3638678" y="2960158"/>
             <a:ext cx="4914644" cy="642593"/>
+          </a:xfrm>
+          <a:prstGeom prst="rect">
+            <a:avLst/>
+          </a:prstGeom>
+        </p:spPr>
+      </p:pic>
+      <p:pic>
+        <p:nvPicPr>
+          <p:cNvPr id="8" name="그림 7">
+            <a:extLst>
+              <a:ext uri="{FF2B5EF4-FFF2-40B4-BE49-F238E27FC236}">
+                <a16:creationId xmlns:a16="http://schemas.microsoft.com/office/drawing/2014/main" id="{2E1F15DC-1D7C-58D2-8467-018267CF0821}"/>
+              </a:ext>
+            </a:extLst>
+          </p:cNvPr>
+          <p:cNvPicPr>
+            <a:picLocks noChangeAspect="1"/>
+          </p:cNvPicPr>
+          <p:nvPr/>
+        </p:nvPicPr>
+        <p:blipFill>
+          <a:blip r:embed="rId3"/>
+          <a:stretch>
+            <a:fillRect/>
+          </a:stretch>
+        </p:blipFill>
+        <p:spPr>
+          <a:xfrm>
+            <a:off x="1714500" y="5074113"/>
+            <a:ext cx="8392696" cy="704948"/>
           </a:xfrm>
           <a:prstGeom prst="rect">
             <a:avLst/>
@@ -8510,7 +12361,7 @@
         </p:nvSpPr>
         <p:spPr>
           <a:xfrm>
-            <a:off x="411480" y="1193481"/>
+            <a:off x="411480" y="1326479"/>
             <a:ext cx="11338560" cy="329321"/>
           </a:xfrm>
           <a:prstGeom prst="rect">
@@ -8815,16 +12666,208 @@
           </a:fontRef>
         </p:style>
       </p:cxnSp>
+      <p:pic>
+        <p:nvPicPr>
+          <p:cNvPr id="4" name="그림 3">
+            <a:extLst>
+              <a:ext uri="{FF2B5EF4-FFF2-40B4-BE49-F238E27FC236}">
+                <a16:creationId xmlns:a16="http://schemas.microsoft.com/office/drawing/2014/main" id="{C13DC016-09A2-77FF-9F06-584DFACE04D8}"/>
+              </a:ext>
+            </a:extLst>
+          </p:cNvPr>
+          <p:cNvPicPr>
+            <a:picLocks noChangeAspect="1"/>
+          </p:cNvPicPr>
+          <p:nvPr/>
+        </p:nvPicPr>
+        <p:blipFill>
+          <a:blip r:embed="rId4"/>
+          <a:stretch>
+            <a:fillRect/>
+          </a:stretch>
+        </p:blipFill>
+        <p:spPr>
+          <a:xfrm>
+            <a:off x="9619981" y="3944164"/>
+            <a:ext cx="2495819" cy="278000"/>
+          </a:xfrm>
+          <a:prstGeom prst="rect">
+            <a:avLst/>
+          </a:prstGeom>
+        </p:spPr>
+      </p:pic>
+      <p:pic>
+        <p:nvPicPr>
+          <p:cNvPr id="8" name="그림 7">
+            <a:extLst>
+              <a:ext uri="{FF2B5EF4-FFF2-40B4-BE49-F238E27FC236}">
+                <a16:creationId xmlns:a16="http://schemas.microsoft.com/office/drawing/2014/main" id="{9730AD83-E338-E212-FB38-26E66E97C9B2}"/>
+              </a:ext>
+            </a:extLst>
+          </p:cNvPr>
+          <p:cNvPicPr>
+            <a:picLocks noChangeAspect="1"/>
+          </p:cNvPicPr>
+          <p:nvPr/>
+        </p:nvPicPr>
+        <p:blipFill>
+          <a:blip r:embed="rId5"/>
+          <a:stretch>
+            <a:fillRect/>
+          </a:stretch>
+        </p:blipFill>
+        <p:spPr>
+          <a:xfrm>
+            <a:off x="10867890" y="4417222"/>
+            <a:ext cx="736616" cy="379469"/>
+          </a:xfrm>
+          <a:prstGeom prst="rect">
+            <a:avLst/>
+          </a:prstGeom>
+        </p:spPr>
+      </p:pic>
+      <mc:AlternateContent xmlns:mc="http://schemas.openxmlformats.org/markup-compatibility/2006">
+        <mc:Choice xmlns:a14="http://schemas.microsoft.com/office/drawing/2010/main" Requires="a14">
+          <p:sp>
+            <p:nvSpPr>
+              <p:cNvPr id="10" name="TextBox 9">
+                <a:extLst>
+                  <a:ext uri="{FF2B5EF4-FFF2-40B4-BE49-F238E27FC236}">
+                    <a16:creationId xmlns:a16="http://schemas.microsoft.com/office/drawing/2014/main" id="{C5A85D73-FEC4-29E1-BA76-49262126BBEF}"/>
+                  </a:ext>
+                </a:extLst>
+              </p:cNvPr>
+              <p:cNvSpPr txBox="1"/>
+              <p:nvPr/>
+            </p:nvSpPr>
+            <p:spPr>
+              <a:xfrm>
+                <a:off x="10420450" y="4367889"/>
+                <a:ext cx="470000" cy="461665"/>
+              </a:xfrm>
+              <a:prstGeom prst="rect">
+                <a:avLst/>
+              </a:prstGeom>
+              <a:noFill/>
+            </p:spPr>
+            <p:txBody>
+              <a:bodyPr wrap="none" rtlCol="0">
+                <a:spAutoFit/>
+              </a:bodyPr>
+              <a:lstStyle/>
+              <a:p>
+                <a14:m>
+                  <m:oMathPara xmlns:m="http://schemas.openxmlformats.org/officeDocument/2006/math">
+                    <m:oMathParaPr>
+                      <m:jc m:val="centerGroup"/>
+                    </m:oMathParaPr>
+                    <m:oMath xmlns:m="http://schemas.openxmlformats.org/officeDocument/2006/math">
+                      <m:r>
+                        <a:rPr lang="ko-KR" altLang="en-US" sz="2400" i="1" smtClean="0">
+                          <a:latin typeface="Cambria Math" panose="02040503050406030204" pitchFamily="18" charset="0"/>
+                        </a:rPr>
+                        <m:t>∝</m:t>
+                      </m:r>
+                    </m:oMath>
+                  </m:oMathPara>
+                </a14:m>
+                <a:endParaRPr lang="ko-KR" altLang="en-US" sz="2400" dirty="0"/>
+              </a:p>
+            </p:txBody>
+          </p:sp>
+        </mc:Choice>
+        <mc:Fallback>
+          <p:sp>
+            <p:nvSpPr>
+              <p:cNvPr id="10" name="TextBox 9">
+                <a:extLst>
+                  <a:ext uri="{FF2B5EF4-FFF2-40B4-BE49-F238E27FC236}">
+                    <a16:creationId xmlns:a16="http://schemas.microsoft.com/office/drawing/2014/main" id="{C5A85D73-FEC4-29E1-BA76-49262126BBEF}"/>
+                  </a:ext>
+                </a:extLst>
+              </p:cNvPr>
+              <p:cNvSpPr txBox="1">
+                <a:spLocks noRot="1" noChangeAspect="1" noMove="1" noResize="1" noEditPoints="1" noAdjustHandles="1" noChangeArrowheads="1" noChangeShapeType="1" noTextEdit="1"/>
+              </p:cNvSpPr>
+              <p:nvPr/>
+            </p:nvSpPr>
+            <p:spPr>
+              <a:xfrm>
+                <a:off x="10420450" y="4367889"/>
+                <a:ext cx="470000" cy="461665"/>
+              </a:xfrm>
+              <a:prstGeom prst="rect">
+                <a:avLst/>
+              </a:prstGeom>
+              <a:blipFill>
+                <a:blip r:embed="rId6"/>
+                <a:stretch>
+                  <a:fillRect/>
+                </a:stretch>
+              </a:blipFill>
+            </p:spPr>
+            <p:txBody>
+              <a:bodyPr/>
+              <a:lstStyle/>
+              <a:p>
+                <a:r>
+                  <a:rPr lang="ko-KR" altLang="en-US">
+                    <a:noFill/>
+                  </a:rPr>
+                  <a:t> </a:t>
+                </a:r>
+              </a:p>
+            </p:txBody>
+          </p:sp>
+        </mc:Fallback>
+      </mc:AlternateContent>
+    </p:spTree>
+  </p:cSld>
+  <p:clrMapOvr>
+    <a:masterClrMapping/>
+  </p:clrMapOvr>
+</p:sld>
+</file>
+
+<file path=ppt/slides/slide6.xml><?xml version="1.0" encoding="utf-8"?>
+<p:sld xmlns:a="http://schemas.openxmlformats.org/drawingml/2006/main" xmlns:r="http://schemas.openxmlformats.org/officeDocument/2006/relationships" xmlns:p="http://schemas.openxmlformats.org/presentationml/2006/main">
+  <p:cSld>
+    <p:spTree>
+      <p:nvGrpSpPr>
+        <p:cNvPr id="1" name="">
+          <a:extLst>
+            <a:ext uri="{FF2B5EF4-FFF2-40B4-BE49-F238E27FC236}">
+              <a16:creationId xmlns:a16="http://schemas.microsoft.com/office/drawing/2014/main" id="{AB8A437C-E6B2-8984-DE11-6909B75A0F1A}"/>
+            </a:ext>
+          </a:extLst>
+        </p:cNvPr>
+        <p:cNvGrpSpPr/>
+        <p:nvPr/>
+      </p:nvGrpSpPr>
+      <p:grpSpPr>
+        <a:xfrm>
+          <a:off x="0" y="0"/>
+          <a:ext cx="0" cy="0"/>
+          <a:chOff x="0" y="0"/>
+          <a:chExt cx="0" cy="0"/>
+        </a:xfrm>
+      </p:grpSpPr>
       <p:sp>
         <p:nvSpPr>
-          <p:cNvPr id="7" name="TextBox 6"/>
+          <p:cNvPr id="2" name="TextBox 1">
+            <a:extLst>
+              <a:ext uri="{FF2B5EF4-FFF2-40B4-BE49-F238E27FC236}">
+                <a16:creationId xmlns:a16="http://schemas.microsoft.com/office/drawing/2014/main" id="{9EBC0B13-7255-707B-CBFB-51EB2293D628}"/>
+              </a:ext>
+            </a:extLst>
+          </p:cNvPr>
           <p:cNvSpPr txBox="1"/>
           <p:nvPr/>
         </p:nvSpPr>
         <p:spPr>
           <a:xfrm>
-            <a:off x="1412044" y="4931971"/>
-            <a:ext cx="4846320" cy="302647"/>
+            <a:off x="411480" y="292608"/>
+            <a:ext cx="11338560" cy="641201"/>
           </a:xfrm>
           <a:prstGeom prst="rect">
             <a:avLst/>
@@ -8837,6 +12880,835 @@
           </a:bodyPr>
           <a:lstStyle/>
           <a:p>
+            <a:pPr algn="l">
+              <a:lnSpc>
+                <a:spcPct val="100000"/>
+              </a:lnSpc>
+            </a:pPr>
+            <a:r>
+              <a:rPr sz="4000" b="1" i="0" dirty="0">
+                <a:solidFill>
+                  <a:srgbClr val="1F2A37"/>
+                </a:solidFill>
+                <a:latin typeface="+mj-lt"/>
+                <a:ea typeface="NanumGothic"/>
+              </a:rPr>
+              <a:t>Taylor Expansion</a:t>
+            </a:r>
+            <a:r>
+              <a:rPr lang="en-US" sz="4000" b="1" i="0" dirty="0">
+                <a:solidFill>
+                  <a:srgbClr val="1F2A37"/>
+                </a:solidFill>
+                <a:latin typeface="+mj-lt"/>
+                <a:ea typeface="NanumGothic"/>
+              </a:rPr>
+              <a:t> – 1st</a:t>
+            </a:r>
+            <a:endParaRPr sz="4000" b="1" i="0" dirty="0">
+              <a:solidFill>
+                <a:srgbClr val="1F2A37"/>
+              </a:solidFill>
+              <a:latin typeface="+mj-lt"/>
+              <a:ea typeface="NanumGothic"/>
+            </a:endParaRPr>
+          </a:p>
+        </p:txBody>
+      </p:sp>
+      <p:sp>
+        <p:nvSpPr>
+          <p:cNvPr id="12" name="TextBox 11">
+            <a:extLst>
+              <a:ext uri="{FF2B5EF4-FFF2-40B4-BE49-F238E27FC236}">
+                <a16:creationId xmlns:a16="http://schemas.microsoft.com/office/drawing/2014/main" id="{7E424AE1-B078-0725-0C4D-7BF3AE7F08AF}"/>
+              </a:ext>
+            </a:extLst>
+          </p:cNvPr>
+          <p:cNvSpPr txBox="1"/>
+          <p:nvPr/>
+        </p:nvSpPr>
+        <p:spPr>
+          <a:xfrm>
+            <a:off x="11753617" y="6510528"/>
+            <a:ext cx="255198" cy="230832"/>
+          </a:xfrm>
+          <a:prstGeom prst="rect">
+            <a:avLst/>
+          </a:prstGeom>
+          <a:noFill/>
+        </p:spPr>
+        <p:txBody>
+          <a:bodyPr wrap="none">
+            <a:spAutoFit/>
+          </a:bodyPr>
+          <a:lstStyle/>
+          <a:p>
+            <a:pPr algn="r"/>
+            <a:r>
+              <a:rPr lang="en-US" sz="900" b="0" i="0" dirty="0">
+                <a:solidFill>
+                  <a:srgbClr val="7A7A7A"/>
+                </a:solidFill>
+                <a:latin typeface="NanumGothic"/>
+                <a:ea typeface="NanumGothic"/>
+              </a:rPr>
+              <a:t>6</a:t>
+            </a:r>
+            <a:endParaRPr sz="900" b="0" i="0" dirty="0">
+              <a:solidFill>
+                <a:srgbClr val="7A7A7A"/>
+              </a:solidFill>
+              <a:latin typeface="NanumGothic"/>
+              <a:ea typeface="NanumGothic"/>
+            </a:endParaRPr>
+          </a:p>
+        </p:txBody>
+      </p:sp>
+      <p:pic>
+        <p:nvPicPr>
+          <p:cNvPr id="6" name="그림 5">
+            <a:extLst>
+              <a:ext uri="{FF2B5EF4-FFF2-40B4-BE49-F238E27FC236}">
+                <a16:creationId xmlns:a16="http://schemas.microsoft.com/office/drawing/2014/main" id="{C34DA309-5471-4B14-9BB0-671FD02145BB}"/>
+              </a:ext>
+            </a:extLst>
+          </p:cNvPr>
+          <p:cNvPicPr>
+            <a:picLocks noChangeAspect="1"/>
+          </p:cNvPicPr>
+          <p:nvPr/>
+        </p:nvPicPr>
+        <p:blipFill>
+          <a:blip r:embed="rId2"/>
+          <a:stretch>
+            <a:fillRect/>
+          </a:stretch>
+        </p:blipFill>
+        <p:spPr>
+          <a:xfrm>
+            <a:off x="1114255" y="1918610"/>
+            <a:ext cx="8203294" cy="760305"/>
+          </a:xfrm>
+          <a:prstGeom prst="rect">
+            <a:avLst/>
+          </a:prstGeom>
+        </p:spPr>
+      </p:pic>
+      <p:pic>
+        <p:nvPicPr>
+          <p:cNvPr id="8" name="그림 7">
+            <a:extLst>
+              <a:ext uri="{FF2B5EF4-FFF2-40B4-BE49-F238E27FC236}">
+                <a16:creationId xmlns:a16="http://schemas.microsoft.com/office/drawing/2014/main" id="{5AFD92BA-D17B-74D2-2E42-B324A37B563A}"/>
+              </a:ext>
+            </a:extLst>
+          </p:cNvPr>
+          <p:cNvPicPr>
+            <a:picLocks noChangeAspect="1"/>
+          </p:cNvPicPr>
+          <p:nvPr/>
+        </p:nvPicPr>
+        <p:blipFill>
+          <a:blip r:embed="rId3"/>
+          <a:stretch>
+            <a:fillRect/>
+          </a:stretch>
+        </p:blipFill>
+        <p:spPr>
+          <a:xfrm>
+            <a:off x="972751" y="4329333"/>
+            <a:ext cx="3861690" cy="1196393"/>
+          </a:xfrm>
+          <a:prstGeom prst="rect">
+            <a:avLst/>
+          </a:prstGeom>
+        </p:spPr>
+      </p:pic>
+      <p:pic>
+        <p:nvPicPr>
+          <p:cNvPr id="10" name="그림 9">
+            <a:extLst>
+              <a:ext uri="{FF2B5EF4-FFF2-40B4-BE49-F238E27FC236}">
+                <a16:creationId xmlns:a16="http://schemas.microsoft.com/office/drawing/2014/main" id="{1989593A-9880-11BA-F39A-21C283D578DB}"/>
+              </a:ext>
+            </a:extLst>
+          </p:cNvPr>
+          <p:cNvPicPr>
+            <a:picLocks noChangeAspect="1"/>
+          </p:cNvPicPr>
+          <p:nvPr/>
+        </p:nvPicPr>
+        <p:blipFill>
+          <a:blip r:embed="rId4"/>
+          <a:stretch>
+            <a:fillRect/>
+          </a:stretch>
+        </p:blipFill>
+        <p:spPr>
+          <a:xfrm>
+            <a:off x="1114255" y="3089276"/>
+            <a:ext cx="8927083" cy="938340"/>
+          </a:xfrm>
+          <a:prstGeom prst="rect">
+            <a:avLst/>
+          </a:prstGeom>
+        </p:spPr>
+      </p:pic>
+    </p:spTree>
+    <p:extLst>
+      <p:ext uri="{BB962C8B-B14F-4D97-AF65-F5344CB8AC3E}">
+        <p14:creationId xmlns:p14="http://schemas.microsoft.com/office/powerpoint/2010/main" val="3896276544"/>
+      </p:ext>
+    </p:extLst>
+  </p:cSld>
+  <p:clrMapOvr>
+    <a:masterClrMapping/>
+  </p:clrMapOvr>
+</p:sld>
+</file>
+
+<file path=ppt/slides/slide7.xml><?xml version="1.0" encoding="utf-8"?>
+<p:sld xmlns:a="http://schemas.openxmlformats.org/drawingml/2006/main" xmlns:r="http://schemas.openxmlformats.org/officeDocument/2006/relationships" xmlns:p="http://schemas.openxmlformats.org/presentationml/2006/main">
+  <p:cSld>
+    <p:spTree>
+      <p:nvGrpSpPr>
+        <p:cNvPr id="1" name="">
+          <a:extLst>
+            <a:ext uri="{FF2B5EF4-FFF2-40B4-BE49-F238E27FC236}">
+              <a16:creationId xmlns:a16="http://schemas.microsoft.com/office/drawing/2014/main" id="{CE009743-76E9-38BC-5429-0EC7511A9F6F}"/>
+            </a:ext>
+          </a:extLst>
+        </p:cNvPr>
+        <p:cNvGrpSpPr/>
+        <p:nvPr/>
+      </p:nvGrpSpPr>
+      <p:grpSpPr>
+        <a:xfrm>
+          <a:off x="0" y="0"/>
+          <a:ext cx="0" cy="0"/>
+          <a:chOff x="0" y="0"/>
+          <a:chExt cx="0" cy="0"/>
+        </a:xfrm>
+      </p:grpSpPr>
+      <p:sp>
+        <p:nvSpPr>
+          <p:cNvPr id="2" name="TextBox 1">
+            <a:extLst>
+              <a:ext uri="{FF2B5EF4-FFF2-40B4-BE49-F238E27FC236}">
+                <a16:creationId xmlns:a16="http://schemas.microsoft.com/office/drawing/2014/main" id="{C1E51B81-498D-7A82-F20D-7EC4A356BFA8}"/>
+              </a:ext>
+            </a:extLst>
+          </p:cNvPr>
+          <p:cNvSpPr txBox="1"/>
+          <p:nvPr/>
+        </p:nvSpPr>
+        <p:spPr>
+          <a:xfrm>
+            <a:off x="411480" y="292608"/>
+            <a:ext cx="11338560" cy="641201"/>
+          </a:xfrm>
+          <a:prstGeom prst="rect">
+            <a:avLst/>
+          </a:prstGeom>
+          <a:noFill/>
+        </p:spPr>
+        <p:txBody>
+          <a:bodyPr wrap="square" lIns="25400" tIns="12700" rIns="25400" bIns="12700" anchor="t">
+            <a:spAutoFit/>
+          </a:bodyPr>
+          <a:lstStyle/>
+          <a:p>
+            <a:pPr algn="l">
+              <a:lnSpc>
+                <a:spcPct val="100000"/>
+              </a:lnSpc>
+            </a:pPr>
+            <a:r>
+              <a:rPr sz="4000" b="1" i="0" dirty="0">
+                <a:solidFill>
+                  <a:srgbClr val="1F2A37"/>
+                </a:solidFill>
+                <a:latin typeface="+mj-lt"/>
+                <a:ea typeface="NanumGothic"/>
+              </a:rPr>
+              <a:t>Taylor Expansion</a:t>
+            </a:r>
+            <a:r>
+              <a:rPr lang="en-US" sz="4000" b="1" i="0" dirty="0">
+                <a:solidFill>
+                  <a:srgbClr val="1F2A37"/>
+                </a:solidFill>
+                <a:latin typeface="+mj-lt"/>
+                <a:ea typeface="NanumGothic"/>
+              </a:rPr>
+              <a:t> – 2nd</a:t>
+            </a:r>
+            <a:endParaRPr sz="4000" b="1" i="0" dirty="0">
+              <a:solidFill>
+                <a:srgbClr val="1F2A37"/>
+              </a:solidFill>
+              <a:latin typeface="+mj-lt"/>
+              <a:ea typeface="NanumGothic"/>
+            </a:endParaRPr>
+          </a:p>
+        </p:txBody>
+      </p:sp>
+      <p:sp>
+        <p:nvSpPr>
+          <p:cNvPr id="12" name="TextBox 11">
+            <a:extLst>
+              <a:ext uri="{FF2B5EF4-FFF2-40B4-BE49-F238E27FC236}">
+                <a16:creationId xmlns:a16="http://schemas.microsoft.com/office/drawing/2014/main" id="{F21A4CF4-DC51-308B-B205-5DCAED4EACFF}"/>
+              </a:ext>
+            </a:extLst>
+          </p:cNvPr>
+          <p:cNvSpPr txBox="1"/>
+          <p:nvPr/>
+        </p:nvSpPr>
+        <p:spPr>
+          <a:xfrm>
+            <a:off x="11753617" y="6510528"/>
+            <a:ext cx="255198" cy="230832"/>
+          </a:xfrm>
+          <a:prstGeom prst="rect">
+            <a:avLst/>
+          </a:prstGeom>
+          <a:noFill/>
+        </p:spPr>
+        <p:txBody>
+          <a:bodyPr wrap="none">
+            <a:spAutoFit/>
+          </a:bodyPr>
+          <a:lstStyle/>
+          <a:p>
+            <a:pPr algn="r"/>
+            <a:r>
+              <a:rPr lang="en-US" sz="900" b="0" i="0" dirty="0">
+                <a:solidFill>
+                  <a:srgbClr val="7A7A7A"/>
+                </a:solidFill>
+                <a:latin typeface="NanumGothic"/>
+                <a:ea typeface="NanumGothic"/>
+              </a:rPr>
+              <a:t>7</a:t>
+            </a:r>
+            <a:endParaRPr sz="900" b="0" i="0" dirty="0">
+              <a:solidFill>
+                <a:srgbClr val="7A7A7A"/>
+              </a:solidFill>
+              <a:latin typeface="NanumGothic"/>
+              <a:ea typeface="NanumGothic"/>
+            </a:endParaRPr>
+          </a:p>
+        </p:txBody>
+      </p:sp>
+      <p:grpSp>
+        <p:nvGrpSpPr>
+          <p:cNvPr id="28" name="그룹 27">
+            <a:extLst>
+              <a:ext uri="{FF2B5EF4-FFF2-40B4-BE49-F238E27FC236}">
+                <a16:creationId xmlns:a16="http://schemas.microsoft.com/office/drawing/2014/main" id="{F29615D5-9766-434A-636A-3BD6235B7B6B}"/>
+              </a:ext>
+            </a:extLst>
+          </p:cNvPr>
+          <p:cNvGrpSpPr/>
+          <p:nvPr/>
+        </p:nvGrpSpPr>
+        <p:grpSpPr>
+          <a:xfrm>
+            <a:off x="1165082" y="1364353"/>
+            <a:ext cx="8213868" cy="787485"/>
+            <a:chOff x="1165082" y="1612857"/>
+            <a:chExt cx="8213868" cy="787485"/>
+          </a:xfrm>
+        </p:grpSpPr>
+        <p:pic>
+          <p:nvPicPr>
+            <p:cNvPr id="8" name="그림 7">
+              <a:extLst>
+                <a:ext uri="{FF2B5EF4-FFF2-40B4-BE49-F238E27FC236}">
+                  <a16:creationId xmlns:a16="http://schemas.microsoft.com/office/drawing/2014/main" id="{BBE8BD28-539F-4A0E-E398-CA20139C92FE}"/>
+                </a:ext>
+              </a:extLst>
+            </p:cNvPr>
+            <p:cNvPicPr>
+              <a:picLocks noChangeAspect="1"/>
+            </p:cNvPicPr>
+            <p:nvPr/>
+          </p:nvPicPr>
+          <p:blipFill>
+            <a:blip r:embed="rId2"/>
+            <a:stretch>
+              <a:fillRect/>
+            </a:stretch>
+          </p:blipFill>
+          <p:spPr>
+            <a:xfrm>
+              <a:off x="1165082" y="1612857"/>
+              <a:ext cx="1316577" cy="787485"/>
+            </a:xfrm>
+            <a:prstGeom prst="rect">
+              <a:avLst/>
+            </a:prstGeom>
+          </p:spPr>
+        </p:pic>
+        <p:pic>
+          <p:nvPicPr>
+            <p:cNvPr id="13" name="그림 12">
+              <a:extLst>
+                <a:ext uri="{FF2B5EF4-FFF2-40B4-BE49-F238E27FC236}">
+                  <a16:creationId xmlns:a16="http://schemas.microsoft.com/office/drawing/2014/main" id="{F5018F4C-5872-6928-E212-6C3D8790EA88}"/>
+                </a:ext>
+              </a:extLst>
+            </p:cNvPr>
+            <p:cNvPicPr>
+              <a:picLocks noChangeAspect="1"/>
+            </p:cNvPicPr>
+            <p:nvPr/>
+          </p:nvPicPr>
+          <p:blipFill>
+            <a:blip r:embed="rId3"/>
+            <a:stretch>
+              <a:fillRect/>
+            </a:stretch>
+          </p:blipFill>
+          <p:spPr>
+            <a:xfrm>
+              <a:off x="3063222" y="1682676"/>
+              <a:ext cx="6315728" cy="565972"/>
+            </a:xfrm>
+            <a:prstGeom prst="rect">
+              <a:avLst/>
+            </a:prstGeom>
+          </p:spPr>
+        </p:pic>
+        <p:pic>
+          <p:nvPicPr>
+            <p:cNvPr id="15" name="그림 14">
+              <a:extLst>
+                <a:ext uri="{FF2B5EF4-FFF2-40B4-BE49-F238E27FC236}">
+                  <a16:creationId xmlns:a16="http://schemas.microsoft.com/office/drawing/2014/main" id="{E392F7C1-1028-B717-E330-EF0020176B65}"/>
+                </a:ext>
+              </a:extLst>
+            </p:cNvPr>
+            <p:cNvPicPr>
+              <a:picLocks noChangeAspect="1"/>
+            </p:cNvPicPr>
+            <p:nvPr/>
+          </p:nvPicPr>
+          <p:blipFill>
+            <a:blip r:embed="rId4"/>
+            <a:stretch>
+              <a:fillRect/>
+            </a:stretch>
+          </p:blipFill>
+          <p:spPr>
+            <a:xfrm>
+              <a:off x="2593248" y="1934268"/>
+              <a:ext cx="350316" cy="256482"/>
+            </a:xfrm>
+            <a:prstGeom prst="rect">
+              <a:avLst/>
+            </a:prstGeom>
+          </p:spPr>
+        </p:pic>
+      </p:grpSp>
+      <p:pic>
+        <p:nvPicPr>
+          <p:cNvPr id="17" name="그림 16">
+            <a:extLst>
+              <a:ext uri="{FF2B5EF4-FFF2-40B4-BE49-F238E27FC236}">
+                <a16:creationId xmlns:a16="http://schemas.microsoft.com/office/drawing/2014/main" id="{1E7CF16F-B7F6-283B-6FF0-BC99C6C8512C}"/>
+              </a:ext>
+            </a:extLst>
+          </p:cNvPr>
+          <p:cNvPicPr>
+            <a:picLocks noChangeAspect="1"/>
+          </p:cNvPicPr>
+          <p:nvPr/>
+        </p:nvPicPr>
+        <p:blipFill>
+          <a:blip r:embed="rId5"/>
+          <a:stretch>
+            <a:fillRect/>
+          </a:stretch>
+        </p:blipFill>
+        <p:spPr>
+          <a:xfrm>
+            <a:off x="1007324" y="2471725"/>
+            <a:ext cx="10746293" cy="1687525"/>
+          </a:xfrm>
+          <a:prstGeom prst="rect">
+            <a:avLst/>
+          </a:prstGeom>
+        </p:spPr>
+      </p:pic>
+      <p:pic>
+        <p:nvPicPr>
+          <p:cNvPr id="19" name="그림 18">
+            <a:extLst>
+              <a:ext uri="{FF2B5EF4-FFF2-40B4-BE49-F238E27FC236}">
+                <a16:creationId xmlns:a16="http://schemas.microsoft.com/office/drawing/2014/main" id="{CC9AE361-3A70-1B6E-7293-0DF64718E5A0}"/>
+              </a:ext>
+            </a:extLst>
+          </p:cNvPr>
+          <p:cNvPicPr>
+            <a:picLocks noChangeAspect="1"/>
+          </p:cNvPicPr>
+          <p:nvPr/>
+        </p:nvPicPr>
+        <p:blipFill>
+          <a:blip r:embed="rId6"/>
+          <a:stretch>
+            <a:fillRect/>
+          </a:stretch>
+        </p:blipFill>
+        <p:spPr>
+          <a:xfrm>
+            <a:off x="9121465" y="4011582"/>
+            <a:ext cx="2231078" cy="392593"/>
+          </a:xfrm>
+          <a:prstGeom prst="rect">
+            <a:avLst/>
+          </a:prstGeom>
+        </p:spPr>
+      </p:pic>
+      <p:cxnSp>
+        <p:nvCxnSpPr>
+          <p:cNvPr id="20" name="연결선: 꺾임 19">
+            <a:extLst>
+              <a:ext uri="{FF2B5EF4-FFF2-40B4-BE49-F238E27FC236}">
+                <a16:creationId xmlns:a16="http://schemas.microsoft.com/office/drawing/2014/main" id="{EFE00972-DC5E-D204-B1E9-24F04467F3DE}"/>
+              </a:ext>
+            </a:extLst>
+          </p:cNvPr>
+          <p:cNvCxnSpPr>
+            <a:cxnSpLocks/>
+          </p:cNvCxnSpPr>
+          <p:nvPr/>
+        </p:nvCxnSpPr>
+        <p:spPr>
+          <a:xfrm>
+            <a:off x="8719632" y="4061464"/>
+            <a:ext cx="226159" cy="195571"/>
+          </a:xfrm>
+          <a:prstGeom prst="bentConnector3">
+            <a:avLst>
+              <a:gd name="adj1" fmla="val 5076"/>
+            </a:avLst>
+          </a:prstGeom>
+          <a:ln>
+            <a:tailEnd type="triangle"/>
+          </a:ln>
+        </p:spPr>
+        <p:style>
+          <a:lnRef idx="2">
+            <a:schemeClr val="dk1"/>
+          </a:lnRef>
+          <a:fillRef idx="0">
+            <a:schemeClr val="dk1"/>
+          </a:fillRef>
+          <a:effectRef idx="1">
+            <a:schemeClr val="dk1"/>
+          </a:effectRef>
+          <a:fontRef idx="minor">
+            <a:schemeClr val="tx1"/>
+          </a:fontRef>
+        </p:style>
+      </p:cxnSp>
+      <p:cxnSp>
+        <p:nvCxnSpPr>
+          <p:cNvPr id="23" name="연결선: 꺾임 22">
+            <a:extLst>
+              <a:ext uri="{FF2B5EF4-FFF2-40B4-BE49-F238E27FC236}">
+                <a16:creationId xmlns:a16="http://schemas.microsoft.com/office/drawing/2014/main" id="{6E19DCB3-22C9-F8AA-B71F-B741E0258E1D}"/>
+              </a:ext>
+            </a:extLst>
+          </p:cNvPr>
+          <p:cNvCxnSpPr>
+            <a:cxnSpLocks/>
+          </p:cNvCxnSpPr>
+          <p:nvPr/>
+        </p:nvCxnSpPr>
+        <p:spPr>
+          <a:xfrm flipV="1">
+            <a:off x="9714953" y="2471725"/>
+            <a:ext cx="226159" cy="178397"/>
+          </a:xfrm>
+          <a:prstGeom prst="bentConnector3">
+            <a:avLst>
+              <a:gd name="adj1" fmla="val 3349"/>
+            </a:avLst>
+          </a:prstGeom>
+          <a:ln>
+            <a:tailEnd type="triangle"/>
+          </a:ln>
+        </p:spPr>
+        <p:style>
+          <a:lnRef idx="2">
+            <a:schemeClr val="dk1"/>
+          </a:lnRef>
+          <a:fillRef idx="0">
+            <a:schemeClr val="dk1"/>
+          </a:fillRef>
+          <a:effectRef idx="1">
+            <a:schemeClr val="dk1"/>
+          </a:effectRef>
+          <a:fontRef idx="minor">
+            <a:schemeClr val="tx1"/>
+          </a:fontRef>
+        </p:style>
+      </p:cxnSp>
+      <p:pic>
+        <p:nvPicPr>
+          <p:cNvPr id="25" name="그림 24">
+            <a:extLst>
+              <a:ext uri="{FF2B5EF4-FFF2-40B4-BE49-F238E27FC236}">
+                <a16:creationId xmlns:a16="http://schemas.microsoft.com/office/drawing/2014/main" id="{05937C25-4E14-35B6-D65D-D53ECD703C81}"/>
+              </a:ext>
+            </a:extLst>
+          </p:cNvPr>
+          <p:cNvPicPr>
+            <a:picLocks noChangeAspect="1"/>
+          </p:cNvPicPr>
+          <p:nvPr/>
+        </p:nvPicPr>
+        <p:blipFill>
+          <a:blip r:embed="rId7"/>
+          <a:stretch>
+            <a:fillRect/>
+          </a:stretch>
+        </p:blipFill>
+        <p:spPr>
+          <a:xfrm>
+            <a:off x="10012087" y="2281880"/>
+            <a:ext cx="1487764" cy="308308"/>
+          </a:xfrm>
+          <a:prstGeom prst="rect">
+            <a:avLst/>
+          </a:prstGeom>
+        </p:spPr>
+      </p:pic>
+      <p:pic>
+        <p:nvPicPr>
+          <p:cNvPr id="27" name="그림 26">
+            <a:extLst>
+              <a:ext uri="{FF2B5EF4-FFF2-40B4-BE49-F238E27FC236}">
+                <a16:creationId xmlns:a16="http://schemas.microsoft.com/office/drawing/2014/main" id="{C5E5BDC2-AB8F-F994-522E-AC7E9DEB4D6A}"/>
+              </a:ext>
+            </a:extLst>
+          </p:cNvPr>
+          <p:cNvPicPr>
+            <a:picLocks noChangeAspect="1"/>
+          </p:cNvPicPr>
+          <p:nvPr/>
+        </p:nvPicPr>
+        <p:blipFill>
+          <a:blip r:embed="rId8"/>
+          <a:stretch>
+            <a:fillRect/>
+          </a:stretch>
+        </p:blipFill>
+        <p:spPr>
+          <a:xfrm>
+            <a:off x="1165082" y="4687579"/>
+            <a:ext cx="8263158" cy="1418426"/>
+          </a:xfrm>
+          <a:prstGeom prst="rect">
+            <a:avLst/>
+          </a:prstGeom>
+        </p:spPr>
+      </p:pic>
+    </p:spTree>
+    <p:extLst>
+      <p:ext uri="{BB962C8B-B14F-4D97-AF65-F5344CB8AC3E}">
+        <p14:creationId xmlns:p14="http://schemas.microsoft.com/office/powerpoint/2010/main" val="433404470"/>
+      </p:ext>
+    </p:extLst>
+  </p:cSld>
+  <p:clrMapOvr>
+    <a:masterClrMapping/>
+  </p:clrMapOvr>
+</p:sld>
+</file>
+
+<file path=ppt/slides/slide8.xml><?xml version="1.0" encoding="utf-8"?>
+<p:sld xmlns:a="http://schemas.openxmlformats.org/drawingml/2006/main" xmlns:r="http://schemas.openxmlformats.org/officeDocument/2006/relationships" xmlns:p="http://schemas.openxmlformats.org/presentationml/2006/main">
+  <p:cSld>
+    <p:spTree>
+      <p:nvGrpSpPr>
+        <p:cNvPr id="1" name="">
+          <a:extLst>
+            <a:ext uri="{FF2B5EF4-FFF2-40B4-BE49-F238E27FC236}">
+              <a16:creationId xmlns:a16="http://schemas.microsoft.com/office/drawing/2014/main" id="{D3248429-3DA6-0F21-8FE0-C1FBA2B06F07}"/>
+            </a:ext>
+          </a:extLst>
+        </p:cNvPr>
+        <p:cNvGrpSpPr/>
+        <p:nvPr/>
+      </p:nvGrpSpPr>
+      <p:grpSpPr>
+        <a:xfrm>
+          <a:off x="0" y="0"/>
+          <a:ext cx="0" cy="0"/>
+          <a:chOff x="0" y="0"/>
+          <a:chExt cx="0" cy="0"/>
+        </a:xfrm>
+      </p:grpSpPr>
+      <p:sp>
+        <p:nvSpPr>
+          <p:cNvPr id="2" name="TextBox 1">
+            <a:extLst>
+              <a:ext uri="{FF2B5EF4-FFF2-40B4-BE49-F238E27FC236}">
+                <a16:creationId xmlns:a16="http://schemas.microsoft.com/office/drawing/2014/main" id="{EB0F3A7A-2427-B111-5FB9-71C5348FAD37}"/>
+              </a:ext>
+            </a:extLst>
+          </p:cNvPr>
+          <p:cNvSpPr txBox="1"/>
+          <p:nvPr/>
+        </p:nvSpPr>
+        <p:spPr>
+          <a:xfrm>
+            <a:off x="411480" y="292608"/>
+            <a:ext cx="11338560" cy="641201"/>
+          </a:xfrm>
+          <a:prstGeom prst="rect">
+            <a:avLst/>
+          </a:prstGeom>
+          <a:noFill/>
+        </p:spPr>
+        <p:txBody>
+          <a:bodyPr wrap="square" lIns="25400" tIns="12700" rIns="25400" bIns="12700" anchor="t">
+            <a:spAutoFit/>
+          </a:bodyPr>
+          <a:lstStyle/>
+          <a:p>
+            <a:pPr algn="l">
+              <a:lnSpc>
+                <a:spcPct val="100000"/>
+              </a:lnSpc>
+            </a:pPr>
+            <a:r>
+              <a:rPr lang="en-US" sz="4000" b="1" i="0" dirty="0">
+                <a:solidFill>
+                  <a:srgbClr val="1F2A37"/>
+                </a:solidFill>
+                <a:latin typeface="+mj-lt"/>
+                <a:ea typeface="NanumGothic"/>
+              </a:rPr>
+              <a:t>Closed-form Shapely value</a:t>
+            </a:r>
+            <a:endParaRPr sz="4000" b="1" i="0" dirty="0">
+              <a:solidFill>
+                <a:srgbClr val="1F2A37"/>
+              </a:solidFill>
+              <a:latin typeface="+mj-lt"/>
+              <a:ea typeface="NanumGothic"/>
+            </a:endParaRPr>
+          </a:p>
+        </p:txBody>
+      </p:sp>
+      <p:sp>
+        <p:nvSpPr>
+          <p:cNvPr id="12" name="TextBox 11">
+            <a:extLst>
+              <a:ext uri="{FF2B5EF4-FFF2-40B4-BE49-F238E27FC236}">
+                <a16:creationId xmlns:a16="http://schemas.microsoft.com/office/drawing/2014/main" id="{C8438541-68A7-21A3-1C60-3B43DC5B5FB8}"/>
+              </a:ext>
+            </a:extLst>
+          </p:cNvPr>
+          <p:cNvSpPr txBox="1"/>
+          <p:nvPr/>
+        </p:nvSpPr>
+        <p:spPr>
+          <a:xfrm>
+            <a:off x="11753617" y="6510528"/>
+            <a:ext cx="255198" cy="230832"/>
+          </a:xfrm>
+          <a:prstGeom prst="rect">
+            <a:avLst/>
+          </a:prstGeom>
+          <a:noFill/>
+        </p:spPr>
+        <p:txBody>
+          <a:bodyPr wrap="none">
+            <a:spAutoFit/>
+          </a:bodyPr>
+          <a:lstStyle/>
+          <a:p>
+            <a:pPr algn="r"/>
+            <a:r>
+              <a:rPr lang="en-US" sz="900" b="0" i="0" dirty="0">
+                <a:solidFill>
+                  <a:srgbClr val="7A7A7A"/>
+                </a:solidFill>
+                <a:latin typeface="NanumGothic"/>
+                <a:ea typeface="NanumGothic"/>
+              </a:rPr>
+              <a:t>7</a:t>
+            </a:r>
+            <a:endParaRPr sz="900" b="0" i="0" dirty="0">
+              <a:solidFill>
+                <a:srgbClr val="7A7A7A"/>
+              </a:solidFill>
+              <a:latin typeface="NanumGothic"/>
+              <a:ea typeface="NanumGothic"/>
+            </a:endParaRPr>
+          </a:p>
+        </p:txBody>
+      </p:sp>
+      <p:pic>
+        <p:nvPicPr>
+          <p:cNvPr id="3" name="그림 2">
+            <a:extLst>
+              <a:ext uri="{FF2B5EF4-FFF2-40B4-BE49-F238E27FC236}">
+                <a16:creationId xmlns:a16="http://schemas.microsoft.com/office/drawing/2014/main" id="{C3F177D5-4DA8-F7EA-64EB-D2CE1B29ADC1}"/>
+              </a:ext>
+            </a:extLst>
+          </p:cNvPr>
+          <p:cNvPicPr>
+            <a:picLocks noChangeAspect="1"/>
+          </p:cNvPicPr>
+          <p:nvPr/>
+        </p:nvPicPr>
+        <p:blipFill>
+          <a:blip r:embed="rId2"/>
+          <a:stretch>
+            <a:fillRect/>
+          </a:stretch>
+        </p:blipFill>
+        <p:spPr>
+          <a:xfrm>
+            <a:off x="0" y="2346095"/>
+            <a:ext cx="12192000" cy="1507305"/>
+          </a:xfrm>
+          <a:prstGeom prst="rect">
+            <a:avLst/>
+          </a:prstGeom>
+        </p:spPr>
+      </p:pic>
+      <p:sp>
+        <p:nvSpPr>
+          <p:cNvPr id="7" name="TextBox 6"/>
+          <p:cNvSpPr txBox="1"/>
+          <p:nvPr/>
+        </p:nvSpPr>
+        <p:spPr>
+          <a:xfrm>
+            <a:off x="3145594" y="4487306"/>
+            <a:ext cx="3991806" cy="302647"/>
+          </a:xfrm>
+          <a:prstGeom prst="rect">
+            <a:avLst/>
+          </a:prstGeom>
+          <a:noFill/>
+        </p:spPr>
+        <p:txBody>
+          <a:bodyPr wrap="square" lIns="25400" tIns="12700" rIns="25400" bIns="12700" anchor="t">
+            <a:spAutoFit/>
+          </a:bodyPr>
+          <a:lstStyle/>
+          <a:p>
             <a:pPr algn="ctr">
               <a:lnSpc>
                 <a:spcPct val="100000"/>
@@ -8940,7 +13812,7 @@
         </p:nvSpPr>
         <p:spPr>
           <a:xfrm>
-            <a:off x="6189547" y="4931971"/>
+            <a:off x="7137400" y="4963039"/>
             <a:ext cx="4904349" cy="302647"/>
           </a:xfrm>
           <a:prstGeom prst="rect">
@@ -9057,7 +13929,7 @@
         </p:nvSpPr>
         <p:spPr>
           <a:xfrm>
-            <a:off x="1974752" y="4294983"/>
+            <a:off x="4778142" y="3767917"/>
             <a:ext cx="920481" cy="394980"/>
           </a:xfrm>
           <a:prstGeom prst="rect">
@@ -9096,7 +13968,7 @@
         </p:nvSpPr>
         <p:spPr>
           <a:xfrm>
-            <a:off x="6258364" y="4283152"/>
+            <a:off x="9282667" y="4243650"/>
             <a:ext cx="1012874" cy="394980"/>
           </a:xfrm>
           <a:prstGeom prst="rect">
@@ -9127,7 +13999,120 @@
           </a:p>
         </p:txBody>
       </p:sp>
+      <p:sp>
+        <p:nvSpPr>
+          <p:cNvPr id="8" name="사각형: 둥근 모서리 7">
+            <a:extLst>
+              <a:ext uri="{FF2B5EF4-FFF2-40B4-BE49-F238E27FC236}">
+                <a16:creationId xmlns:a16="http://schemas.microsoft.com/office/drawing/2014/main" id="{F66C12FE-DE1D-DEE1-D086-0324AE5B4F70}"/>
+              </a:ext>
+            </a:extLst>
+          </p:cNvPr>
+          <p:cNvSpPr/>
+          <p:nvPr/>
+        </p:nvSpPr>
+        <p:spPr>
+          <a:xfrm>
+            <a:off x="3870092" y="2574485"/>
+            <a:ext cx="1609958" cy="454465"/>
+          </a:xfrm>
+          <a:prstGeom prst="roundRect">
+            <a:avLst>
+              <a:gd name="adj" fmla="val 26448"/>
+            </a:avLst>
+          </a:prstGeom>
+          <a:noFill/>
+          <a:ln w="12700">
+            <a:solidFill>
+              <a:schemeClr val="accent6">
+                <a:lumMod val="75000"/>
+              </a:schemeClr>
+            </a:solidFill>
+          </a:ln>
+        </p:spPr>
+        <p:style>
+          <a:lnRef idx="1">
+            <a:schemeClr val="accent1"/>
+          </a:lnRef>
+          <a:fillRef idx="3">
+            <a:schemeClr val="accent1"/>
+          </a:fillRef>
+          <a:effectRef idx="2">
+            <a:schemeClr val="accent1"/>
+          </a:effectRef>
+          <a:fontRef idx="minor">
+            <a:schemeClr val="lt1"/>
+          </a:fontRef>
+        </p:style>
+        <p:txBody>
+          <a:bodyPr rtlCol="0" anchor="ctr"/>
+          <a:lstStyle/>
+          <a:p>
+            <a:pPr algn="ctr"/>
+            <a:endParaRPr lang="ko-KR" altLang="en-US"/>
+          </a:p>
+        </p:txBody>
+      </p:sp>
+      <p:sp>
+        <p:nvSpPr>
+          <p:cNvPr id="10" name="사각형: 둥근 모서리 9">
+            <a:extLst>
+              <a:ext uri="{FF2B5EF4-FFF2-40B4-BE49-F238E27FC236}">
+                <a16:creationId xmlns:a16="http://schemas.microsoft.com/office/drawing/2014/main" id="{1C2AF1CC-FDDF-951A-8709-A3619AD8D958}"/>
+              </a:ext>
+            </a:extLst>
+          </p:cNvPr>
+          <p:cNvSpPr/>
+          <p:nvPr/>
+        </p:nvSpPr>
+        <p:spPr>
+          <a:xfrm>
+            <a:off x="8704633" y="2298700"/>
+            <a:ext cx="3337116" cy="1079500"/>
+          </a:xfrm>
+          <a:prstGeom prst="roundRect">
+            <a:avLst>
+              <a:gd name="adj" fmla="val 29977"/>
+            </a:avLst>
+          </a:prstGeom>
+          <a:noFill/>
+          <a:ln w="12700">
+            <a:solidFill>
+              <a:schemeClr val="accent6">
+                <a:lumMod val="75000"/>
+              </a:schemeClr>
+            </a:solidFill>
+          </a:ln>
+        </p:spPr>
+        <p:style>
+          <a:lnRef idx="1">
+            <a:schemeClr val="accent1"/>
+          </a:lnRef>
+          <a:fillRef idx="3">
+            <a:schemeClr val="accent1"/>
+          </a:fillRef>
+          <a:effectRef idx="2">
+            <a:schemeClr val="accent1"/>
+          </a:effectRef>
+          <a:fontRef idx="minor">
+            <a:schemeClr val="lt1"/>
+          </a:fontRef>
+        </p:style>
+        <p:txBody>
+          <a:bodyPr rtlCol="0" anchor="ctr"/>
+          <a:lstStyle/>
+          <a:p>
+            <a:pPr algn="ctr"/>
+            <a:endParaRPr lang="ko-KR" altLang="en-US"/>
+          </a:p>
+        </p:txBody>
+      </p:sp>
     </p:spTree>
+    <p:extLst>
+      <p:ext uri="{BB962C8B-B14F-4D97-AF65-F5344CB8AC3E}">
+        <p14:creationId xmlns:p14="http://schemas.microsoft.com/office/powerpoint/2010/main" val="2808859670"/>
+      </p:ext>
+    </p:extLst>
   </p:cSld>
   <p:clrMapOvr>
     <a:masterClrMapping/>
@@ -9135,7 +14120,7 @@
 </p:sld>
 </file>
 
-<file path=ppt/slides/slide6.xml><?xml version="1.0" encoding="utf-8"?>
+<file path=ppt/slides/slide9.xml><?xml version="1.0" encoding="utf-8"?>
 <p:sld xmlns:a="http://schemas.openxmlformats.org/drawingml/2006/main" xmlns:r="http://schemas.openxmlformats.org/officeDocument/2006/relationships" xmlns:p="http://schemas.openxmlformats.org/presentationml/2006/main">
   <p:cSld>
     <p:spTree>
@@ -9614,8 +14599,8 @@
         </p:blipFill>
         <p:spPr>
           <a:xfrm>
-            <a:off x="5442902" y="4858692"/>
-            <a:ext cx="1336676" cy="566927"/>
+            <a:off x="5255186" y="4804085"/>
+            <a:ext cx="1681628" cy="713232"/>
           </a:xfrm>
           <a:prstGeom prst="rect">
             <a:avLst/>
@@ -9630,8 +14615,8 @@
         </p:nvSpPr>
         <p:spPr>
           <a:xfrm>
-            <a:off x="11551615" y="6510528"/>
-            <a:ext cx="457200" cy="274320"/>
+            <a:off x="11753617" y="6510528"/>
+            <a:ext cx="255198" cy="230832"/>
           </a:xfrm>
           <a:prstGeom prst="rect">
             <a:avLst/>
@@ -9646,3831 +14631,22 @@
           <a:p>
             <a:pPr algn="r"/>
             <a:r>
-              <a:rPr sz="900" b="0" i="0">
+              <a:rPr lang="en-US" sz="900" b="0" i="0" dirty="0">
                 <a:solidFill>
                   <a:srgbClr val="7A7A7A"/>
                 </a:solidFill>
                 <a:latin typeface="NanumGothic"/>
                 <a:ea typeface="NanumGothic"/>
               </a:rPr>
-              <a:t>6</a:t>
-            </a:r>
-          </a:p>
-        </p:txBody>
-      </p:sp>
-    </p:spTree>
-  </p:cSld>
-  <p:clrMapOvr>
-    <a:masterClrMapping/>
-  </p:clrMapOvr>
-</p:sld>
-</file>
-
-<file path=ppt/slides/slide7.xml><?xml version="1.0" encoding="utf-8"?>
-<p:sld xmlns:a="http://schemas.openxmlformats.org/drawingml/2006/main" xmlns:r="http://schemas.openxmlformats.org/officeDocument/2006/relationships" xmlns:p="http://schemas.openxmlformats.org/presentationml/2006/main">
-  <p:cSld>
-    <p:spTree>
-      <p:nvGrpSpPr>
-        <p:cNvPr id="1" name=""/>
-        <p:cNvGrpSpPr/>
-        <p:nvPr/>
-      </p:nvGrpSpPr>
-      <p:grpSpPr>
-        <a:xfrm>
-          <a:off x="0" y="0"/>
-          <a:ext cx="0" cy="0"/>
-          <a:chOff x="0" y="0"/>
-          <a:chExt cx="0" cy="0"/>
-        </a:xfrm>
-      </p:grpSpPr>
-      <p:sp>
-        <p:nvSpPr>
-          <p:cNvPr id="2" name="TextBox 1"/>
-          <p:cNvSpPr txBox="1"/>
-          <p:nvPr/>
-        </p:nvSpPr>
-        <p:spPr>
-          <a:xfrm>
-            <a:off x="411480" y="292608"/>
-            <a:ext cx="11338560" cy="702756"/>
-          </a:xfrm>
-          <a:prstGeom prst="rect">
-            <a:avLst/>
-          </a:prstGeom>
-          <a:noFill/>
-        </p:spPr>
-        <p:txBody>
-          <a:bodyPr wrap="square" lIns="25400" tIns="12700" rIns="25400" bIns="12700" anchor="t">
-            <a:spAutoFit/>
-          </a:bodyPr>
-          <a:lstStyle/>
-          <a:p>
-            <a:pPr algn="l">
-              <a:lnSpc>
-                <a:spcPct val="100000"/>
-              </a:lnSpc>
-            </a:pPr>
-            <a:r>
-              <a:rPr sz="4400" b="1" i="0">
-                <a:solidFill>
-                  <a:srgbClr val="1F2A37"/>
-                </a:solidFill>
-                <a:latin typeface="+mj-lt"/>
-                <a:ea typeface="NanumGothic"/>
-              </a:rPr>
-              <a:t>Approximation Error Analysis</a:t>
-            </a:r>
-          </a:p>
-        </p:txBody>
-      </p:sp>
-      <p:sp>
-        <p:nvSpPr>
-          <p:cNvPr id="4" name="Rounded Rectangle 3"/>
-          <p:cNvSpPr/>
-          <p:nvPr/>
-        </p:nvSpPr>
-        <p:spPr>
-          <a:xfrm>
-            <a:off x="502920" y="1774288"/>
-            <a:ext cx="5486400" cy="2468880"/>
-          </a:xfrm>
-          <a:prstGeom prst="roundRect">
-            <a:avLst>
-              <a:gd name="adj" fmla="val 6000"/>
-            </a:avLst>
-          </a:prstGeom>
-          <a:solidFill>
-            <a:srgbClr val="EDF1F6"/>
-          </a:solidFill>
-          <a:ln w="9525">
-            <a:solidFill>
-              <a:srgbClr val="D3DDE8"/>
-            </a:solidFill>
-          </a:ln>
-          <a:effectLst/>
-        </p:spPr>
-        <p:style>
-          <a:lnRef idx="1">
-            <a:schemeClr val="accent1"/>
-          </a:lnRef>
-          <a:fillRef idx="3">
-            <a:schemeClr val="accent1"/>
-          </a:fillRef>
-          <a:effectRef idx="2">
-            <a:schemeClr val="accent1"/>
-          </a:effectRef>
-          <a:fontRef idx="minor">
-            <a:schemeClr val="lt1"/>
-          </a:fontRef>
-        </p:style>
-        <p:txBody>
-          <a:bodyPr rtlCol="0" anchor="ctr"/>
-          <a:lstStyle/>
-          <a:p>
-            <a:pPr algn="ctr"/>
-            <a:endParaRPr sz="2800"/>
-          </a:p>
-        </p:txBody>
-      </p:sp>
-      <p:sp>
-        <p:nvSpPr>
-          <p:cNvPr id="5" name="TextBox 4"/>
-          <p:cNvSpPr txBox="1"/>
-          <p:nvPr/>
-        </p:nvSpPr>
-        <p:spPr>
-          <a:xfrm>
-            <a:off x="777240" y="2002888"/>
-            <a:ext cx="4937760" cy="1501373"/>
-          </a:xfrm>
-          <a:prstGeom prst="rect">
-            <a:avLst/>
-          </a:prstGeom>
-          <a:noFill/>
-        </p:spPr>
-        <p:txBody>
-          <a:bodyPr wrap="square" lIns="25400" tIns="12700" rIns="25400" bIns="12700" anchor="t">
-            <a:spAutoFit/>
-          </a:bodyPr>
-          <a:lstStyle/>
-          <a:p>
-            <a:pPr algn="l">
-              <a:lnSpc>
-                <a:spcPct val="135000"/>
-              </a:lnSpc>
-            </a:pPr>
-            <a:r>
-              <a:rPr sz="2000" b="1" i="0" dirty="0">
-                <a:solidFill>
-                  <a:srgbClr val="33475B"/>
-                </a:solidFill>
-                <a:latin typeface="NanumGothic"/>
-                <a:ea typeface="NanumGothic"/>
-              </a:rPr>
-              <a:t>IRDS — </a:t>
-            </a:r>
-            <a:r>
-              <a:rPr sz="2000" b="1" i="0" dirty="0" err="1">
-                <a:solidFill>
-                  <a:srgbClr val="33475B"/>
-                </a:solidFill>
-                <a:latin typeface="NanumGothic"/>
-                <a:ea typeface="NanumGothic"/>
-              </a:rPr>
-              <a:t>중앙집중</a:t>
-            </a:r>
-            <a:r>
-              <a:rPr sz="2000" b="1" i="0" dirty="0">
-                <a:solidFill>
-                  <a:srgbClr val="33475B"/>
-                </a:solidFill>
-                <a:latin typeface="NanumGothic"/>
-                <a:ea typeface="NanumGothic"/>
-              </a:rPr>
-              <a:t> per-step</a:t>
-            </a:r>
-          </a:p>
-          <a:p>
-            <a:pPr algn="l">
-              <a:lnSpc>
-                <a:spcPct val="135000"/>
-              </a:lnSpc>
-            </a:pPr>
-            <a:r>
-              <a:rPr b="0" i="0" dirty="0">
-                <a:solidFill>
-                  <a:srgbClr val="222222"/>
-                </a:solidFill>
-                <a:latin typeface="NanumGothic"/>
-                <a:ea typeface="NanumGothic"/>
-              </a:rPr>
-              <a:t>• ‖</a:t>
-            </a:r>
-            <a:r>
-              <a:rPr b="0" i="0" dirty="0" err="1">
-                <a:solidFill>
-                  <a:srgbClr val="222222"/>
-                </a:solidFill>
-                <a:latin typeface="NanumGothic"/>
-                <a:ea typeface="NanumGothic"/>
-              </a:rPr>
-              <a:t>Δθ</a:t>
-            </a:r>
-            <a:r>
-              <a:rPr b="0" i="0" dirty="0">
-                <a:solidFill>
-                  <a:srgbClr val="222222"/>
-                </a:solidFill>
-                <a:latin typeface="NanumGothic"/>
-                <a:ea typeface="NanumGothic"/>
-              </a:rPr>
-              <a:t>‖ </a:t>
-            </a:r>
-            <a:r>
-              <a:rPr b="0" i="0" dirty="0" err="1">
-                <a:solidFill>
-                  <a:srgbClr val="222222"/>
-                </a:solidFill>
-                <a:latin typeface="NanumGothic"/>
-                <a:ea typeface="NanumGothic"/>
-              </a:rPr>
-              <a:t>작음</a:t>
-            </a:r>
-            <a:r>
-              <a:rPr b="0" i="0" dirty="0">
-                <a:solidFill>
-                  <a:srgbClr val="222222"/>
-                </a:solidFill>
-                <a:latin typeface="NanumGothic"/>
-                <a:ea typeface="NanumGothic"/>
-              </a:rPr>
-              <a:t> (</a:t>
-            </a:r>
-            <a:r>
-              <a:rPr b="0" i="0" dirty="0" err="1">
-                <a:solidFill>
-                  <a:srgbClr val="222222"/>
-                </a:solidFill>
-                <a:latin typeface="NanumGothic"/>
-                <a:ea typeface="NanumGothic"/>
-              </a:rPr>
-              <a:t>작은</a:t>
-            </a:r>
-            <a:r>
-              <a:rPr b="0" i="0" dirty="0">
-                <a:solidFill>
-                  <a:srgbClr val="222222"/>
-                </a:solidFill>
-                <a:latin typeface="NanumGothic"/>
-                <a:ea typeface="NanumGothic"/>
-              </a:rPr>
-              <a:t> 한 </a:t>
-            </a:r>
-            <a:r>
-              <a:rPr b="0" i="0" dirty="0" err="1">
-                <a:solidFill>
-                  <a:srgbClr val="222222"/>
-                </a:solidFill>
-                <a:latin typeface="NanumGothic"/>
-                <a:ea typeface="NanumGothic"/>
-              </a:rPr>
-              <a:t>스텝</a:t>
-            </a:r>
-            <a:r>
-              <a:rPr b="0" i="0" dirty="0">
-                <a:solidFill>
-                  <a:srgbClr val="222222"/>
-                </a:solidFill>
-                <a:latin typeface="NanumGothic"/>
-                <a:ea typeface="NanumGothic"/>
-              </a:rPr>
-              <a:t>)</a:t>
-            </a:r>
-          </a:p>
-          <a:p>
-            <a:pPr algn="l">
-              <a:lnSpc>
-                <a:spcPct val="135000"/>
-              </a:lnSpc>
-            </a:pPr>
-            <a:r>
-              <a:rPr b="0" i="0" dirty="0">
-                <a:solidFill>
-                  <a:srgbClr val="222222"/>
-                </a:solidFill>
-                <a:latin typeface="NanumGothic"/>
-                <a:ea typeface="NanumGothic"/>
-              </a:rPr>
-              <a:t>• 1차 </a:t>
-            </a:r>
-            <a:r>
-              <a:rPr b="0" i="0" dirty="0" err="1">
-                <a:solidFill>
-                  <a:srgbClr val="222222"/>
-                </a:solidFill>
-                <a:latin typeface="NanumGothic"/>
-                <a:ea typeface="NanumGothic"/>
-              </a:rPr>
-              <a:t>잔차</a:t>
-            </a:r>
-            <a:r>
-              <a:rPr b="0" i="0" dirty="0">
-                <a:solidFill>
-                  <a:srgbClr val="222222"/>
-                </a:solidFill>
-                <a:latin typeface="NanumGothic"/>
-                <a:ea typeface="NanumGothic"/>
-              </a:rPr>
-              <a:t> O(‖Δθ‖²) → </a:t>
-            </a:r>
-            <a:r>
-              <a:rPr b="0" i="0" dirty="0" err="1">
-                <a:solidFill>
-                  <a:srgbClr val="222222"/>
-                </a:solidFill>
-                <a:latin typeface="NanumGothic"/>
-                <a:ea typeface="NanumGothic"/>
-              </a:rPr>
-              <a:t>이미</a:t>
-            </a:r>
-            <a:r>
-              <a:rPr b="0" i="0" dirty="0">
-                <a:solidFill>
-                  <a:srgbClr val="222222"/>
-                </a:solidFill>
-                <a:latin typeface="NanumGothic"/>
-                <a:ea typeface="NanumGothic"/>
-              </a:rPr>
-              <a:t> </a:t>
-            </a:r>
-            <a:r>
-              <a:rPr b="0" i="0" dirty="0" err="1">
-                <a:solidFill>
-                  <a:srgbClr val="222222"/>
-                </a:solidFill>
-                <a:latin typeface="NanumGothic"/>
-                <a:ea typeface="NanumGothic"/>
-              </a:rPr>
-              <a:t>작음</a:t>
-            </a:r>
-            <a:endParaRPr b="0" i="0" dirty="0">
+              <a:t>8</a:t>
+            </a:r>
+            <a:endParaRPr sz="900" b="0" i="0" dirty="0">
               <a:solidFill>
-                <a:srgbClr val="222222"/>
+                <a:srgbClr val="7A7A7A"/>
               </a:solidFill>
               <a:latin typeface="NanumGothic"/>
               <a:ea typeface="NanumGothic"/>
             </a:endParaRPr>
-          </a:p>
-          <a:p>
-            <a:pPr algn="l">
-              <a:lnSpc>
-                <a:spcPct val="135000"/>
-              </a:lnSpc>
-            </a:pPr>
-            <a:r>
-              <a:rPr b="0" i="0" dirty="0">
-                <a:solidFill>
-                  <a:srgbClr val="222222"/>
-                </a:solidFill>
-                <a:latin typeface="NanumGothic"/>
-                <a:ea typeface="NanumGothic"/>
-              </a:rPr>
-              <a:t>• 2차 항 </a:t>
-            </a:r>
-            <a:r>
-              <a:rPr b="0" i="0" dirty="0" err="1">
-                <a:solidFill>
-                  <a:srgbClr val="222222"/>
-                </a:solidFill>
-                <a:latin typeface="NanumGothic"/>
-                <a:ea typeface="NanumGothic"/>
-              </a:rPr>
-              <a:t>역할</a:t>
-            </a:r>
-            <a:r>
-              <a:rPr b="0" i="0" dirty="0">
-                <a:solidFill>
-                  <a:srgbClr val="222222"/>
-                </a:solidFill>
-                <a:latin typeface="NanumGothic"/>
-                <a:ea typeface="NanumGothic"/>
-              </a:rPr>
-              <a:t> </a:t>
-            </a:r>
-            <a:r>
-              <a:rPr b="0" i="0" dirty="0" err="1">
-                <a:solidFill>
-                  <a:srgbClr val="222222"/>
-                </a:solidFill>
-                <a:latin typeface="NanumGothic"/>
-                <a:ea typeface="NanumGothic"/>
-              </a:rPr>
-              <a:t>미미</a:t>
-            </a:r>
-            <a:endParaRPr b="0" i="0" dirty="0">
-              <a:solidFill>
-                <a:srgbClr val="222222"/>
-              </a:solidFill>
-              <a:latin typeface="NanumGothic"/>
-              <a:ea typeface="NanumGothic"/>
-            </a:endParaRPr>
-          </a:p>
-        </p:txBody>
-      </p:sp>
-      <p:sp>
-        <p:nvSpPr>
-          <p:cNvPr id="6" name="Rounded Rectangle 5"/>
-          <p:cNvSpPr/>
-          <p:nvPr/>
-        </p:nvSpPr>
-        <p:spPr>
-          <a:xfrm>
-            <a:off x="6263640" y="1774288"/>
-            <a:ext cx="5394960" cy="2468880"/>
-          </a:xfrm>
-          <a:prstGeom prst="roundRect">
-            <a:avLst>
-              <a:gd name="adj" fmla="val 6000"/>
-            </a:avLst>
-          </a:prstGeom>
-          <a:solidFill>
-            <a:srgbClr val="F7ECE8"/>
-          </a:solidFill>
-          <a:ln w="9525">
-            <a:solidFill>
-              <a:srgbClr val="E3C9C0"/>
-            </a:solidFill>
-          </a:ln>
-          <a:effectLst/>
-        </p:spPr>
-        <p:style>
-          <a:lnRef idx="1">
-            <a:schemeClr val="accent1"/>
-          </a:lnRef>
-          <a:fillRef idx="3">
-            <a:schemeClr val="accent1"/>
-          </a:fillRef>
-          <a:effectRef idx="2">
-            <a:schemeClr val="accent1"/>
-          </a:effectRef>
-          <a:fontRef idx="minor">
-            <a:schemeClr val="lt1"/>
-          </a:fontRef>
-        </p:style>
-        <p:txBody>
-          <a:bodyPr rtlCol="0" anchor="ctr"/>
-          <a:lstStyle/>
-          <a:p>
-            <a:pPr algn="ctr"/>
-            <a:endParaRPr sz="2800"/>
-          </a:p>
-        </p:txBody>
-      </p:sp>
-      <mc:AlternateContent xmlns:mc="http://schemas.openxmlformats.org/markup-compatibility/2006" xmlns:a14="http://schemas.microsoft.com/office/drawing/2010/main">
-        <mc:Choice Requires="a14">
-          <p:sp>
-            <p:nvSpPr>
-              <p:cNvPr id="7" name="TextBox 6"/>
-              <p:cNvSpPr txBox="1"/>
-              <p:nvPr/>
-            </p:nvSpPr>
-            <p:spPr>
-              <a:xfrm>
-                <a:off x="6537960" y="2002888"/>
-                <a:ext cx="4846320" cy="1520160"/>
-              </a:xfrm>
-              <a:prstGeom prst="rect">
-                <a:avLst/>
-              </a:prstGeom>
-              <a:noFill/>
-            </p:spPr>
-            <p:txBody>
-              <a:bodyPr wrap="square" lIns="25400" tIns="12700" rIns="25400" bIns="12700" anchor="t">
-                <a:spAutoFit/>
-              </a:bodyPr>
-              <a:lstStyle/>
-              <a:p>
-                <a:pPr algn="l">
-                  <a:lnSpc>
-                    <a:spcPct val="135000"/>
-                  </a:lnSpc>
-                </a:pPr>
-                <a:r>
-                  <a:rPr sz="2000" b="1" i="0" dirty="0">
-                    <a:solidFill>
-                      <a:srgbClr val="B85042"/>
-                    </a:solidFill>
-                    <a:latin typeface="NanumGothic"/>
-                    <a:ea typeface="NanumGothic"/>
-                  </a:rPr>
-                  <a:t>FL — </a:t>
-                </a:r>
-                <a:r>
-                  <a:rPr sz="2000" b="1" i="0" dirty="0" err="1">
-                    <a:solidFill>
-                      <a:srgbClr val="B85042"/>
-                    </a:solidFill>
-                    <a:latin typeface="NanumGothic"/>
-                    <a:ea typeface="NanumGothic"/>
-                  </a:rPr>
-                  <a:t>라운드당</a:t>
-                </a:r>
-                <a:r>
-                  <a:rPr sz="2000" b="1" i="0" dirty="0">
-                    <a:solidFill>
-                      <a:srgbClr val="B85042"/>
-                    </a:solidFill>
-                    <a:latin typeface="NanumGothic"/>
-                    <a:ea typeface="NanumGothic"/>
-                  </a:rPr>
-                  <a:t> multi-step</a:t>
-                </a:r>
-              </a:p>
-              <a:p>
-                <a:pPr algn="l">
-                  <a:lnSpc>
-                    <a:spcPct val="135000"/>
-                  </a:lnSpc>
-                </a:pPr>
-                <a:r>
-                  <a:rPr b="0" i="0" dirty="0">
-                    <a:solidFill>
-                      <a:srgbClr val="222222"/>
-                    </a:solidFill>
-                    <a:latin typeface="NanumGothic"/>
-                    <a:ea typeface="NanumGothic"/>
-                  </a:rPr>
-                  <a:t>• ‖</a:t>
-                </a:r>
-                <a14:m>
-                  <m:oMath xmlns:m="http://schemas.openxmlformats.org/officeDocument/2006/math">
-                    <m:r>
-                      <m:rPr>
-                        <m:sty m:val="p"/>
-                      </m:rPr>
-                      <a:rPr lang="el-GR" b="0" i="0" dirty="0" smtClean="0">
-                        <a:solidFill>
-                          <a:srgbClr val="222222"/>
-                        </a:solidFill>
-                        <a:latin typeface="Cambria Math" panose="02040503050406030204" pitchFamily="18" charset="0"/>
-                        <a:ea typeface="NanumGothic"/>
-                      </a:rPr>
-                      <m:t>Δ</m:t>
-                    </m:r>
-                    <m:sSub>
-                      <m:sSubPr>
-                        <m:ctrlPr>
-                          <a:rPr lang="el-GR" b="0" i="1" dirty="0" err="1">
-                            <a:solidFill>
-                              <a:srgbClr val="222222"/>
-                            </a:solidFill>
-                            <a:latin typeface="Cambria Math" panose="02040503050406030204" pitchFamily="18" charset="0"/>
-                            <a:ea typeface="NanumGothic"/>
-                          </a:rPr>
-                        </m:ctrlPr>
-                      </m:sSubPr>
-                      <m:e>
-                        <m:r>
-                          <a:rPr lang="el-GR" b="0" i="1" dirty="0" err="1">
-                            <a:solidFill>
-                              <a:srgbClr val="222222"/>
-                            </a:solidFill>
-                            <a:latin typeface="Cambria Math" panose="02040503050406030204" pitchFamily="18" charset="0"/>
-                            <a:ea typeface="NanumGothic"/>
-                          </a:rPr>
-                          <m:t>𝑤</m:t>
-                        </m:r>
-                      </m:e>
-                      <m:sub>
-                        <m:r>
-                          <a:rPr lang="el-GR" b="0" i="1" dirty="0" err="1">
-                            <a:solidFill>
-                              <a:srgbClr val="222222"/>
-                            </a:solidFill>
-                            <a:latin typeface="Cambria Math" panose="02040503050406030204" pitchFamily="18" charset="0"/>
-                            <a:ea typeface="NanumGothic"/>
-                          </a:rPr>
-                          <m:t>𝑟𝑜𝑢𝑛𝑑</m:t>
-                        </m:r>
-                      </m:sub>
-                    </m:sSub>
-                  </m:oMath>
-                </a14:m>
-                <a:r>
-                  <a:rPr b="0" i="0" dirty="0">
-                    <a:solidFill>
-                      <a:srgbClr val="222222"/>
-                    </a:solidFill>
-                    <a:latin typeface="NanumGothic"/>
-                    <a:ea typeface="NanumGothic"/>
-                  </a:rPr>
-                  <a:t>‖ ≫ per-step</a:t>
-                </a:r>
-              </a:p>
-              <a:p>
-                <a:pPr algn="l">
-                  <a:lnSpc>
-                    <a:spcPct val="135000"/>
-                  </a:lnSpc>
-                </a:pPr>
-                <a:r>
-                  <a:rPr b="0" i="0" dirty="0">
-                    <a:solidFill>
-                      <a:srgbClr val="222222"/>
-                    </a:solidFill>
-                    <a:latin typeface="NanumGothic"/>
-                    <a:ea typeface="NanumGothic"/>
-                  </a:rPr>
-                  <a:t>• 1차 </a:t>
-                </a:r>
-                <a:r>
-                  <a:rPr b="0" i="0" dirty="0" err="1">
-                    <a:solidFill>
-                      <a:srgbClr val="222222"/>
-                    </a:solidFill>
-                    <a:latin typeface="NanumGothic"/>
-                    <a:ea typeface="NanumGothic"/>
-                  </a:rPr>
-                  <a:t>잔차</a:t>
-                </a:r>
-                <a:r>
-                  <a:rPr b="0" i="0" dirty="0">
-                    <a:solidFill>
-                      <a:srgbClr val="222222"/>
-                    </a:solidFill>
-                    <a:latin typeface="NanumGothic"/>
-                    <a:ea typeface="NanumGothic"/>
-                  </a:rPr>
-                  <a:t> </a:t>
-                </a:r>
-                <a14:m>
-                  <m:oMath xmlns:m="http://schemas.openxmlformats.org/officeDocument/2006/math">
-                    <m:r>
-                      <a:rPr lang="el-GR" b="0" i="1" dirty="0" smtClean="0">
-                        <a:solidFill>
-                          <a:srgbClr val="222222"/>
-                        </a:solidFill>
-                        <a:latin typeface="Cambria Math" panose="02040503050406030204" pitchFamily="18" charset="0"/>
-                        <a:ea typeface="NanumGothic"/>
-                      </a:rPr>
-                      <m:t>𝑂</m:t>
-                    </m:r>
-                    <m:d>
-                      <m:dPr>
-                        <m:ctrlPr>
-                          <a:rPr lang="el-GR" b="0" i="1" dirty="0" smtClean="0">
-                            <a:solidFill>
-                              <a:srgbClr val="222222"/>
-                            </a:solidFill>
-                            <a:latin typeface="Cambria Math" panose="02040503050406030204" pitchFamily="18" charset="0"/>
-                            <a:ea typeface="NanumGothic"/>
-                          </a:rPr>
-                        </m:ctrlPr>
-                      </m:dPr>
-                      <m:e>
-                        <m:sSup>
-                          <m:sSupPr>
-                            <m:ctrlPr>
-                              <a:rPr lang="el-GR" b="0" i="1" dirty="0">
-                                <a:solidFill>
-                                  <a:srgbClr val="222222"/>
-                                </a:solidFill>
-                                <a:latin typeface="Cambria Math" panose="02040503050406030204" pitchFamily="18" charset="0"/>
-                                <a:ea typeface="NanumGothic"/>
-                              </a:rPr>
-                            </m:ctrlPr>
-                          </m:sSupPr>
-                          <m:e>
-                            <m:d>
-                              <m:dPr>
-                                <m:begChr m:val="‖"/>
-                                <m:endChr m:val="‖"/>
-                                <m:ctrlPr>
-                                  <a:rPr lang="el-GR" b="0" i="1" dirty="0" smtClean="0">
-                                    <a:solidFill>
-                                      <a:srgbClr val="222222"/>
-                                    </a:solidFill>
-                                    <a:latin typeface="Cambria Math" panose="02040503050406030204" pitchFamily="18" charset="0"/>
-                                    <a:ea typeface="NanumGothic"/>
-                                  </a:rPr>
-                                </m:ctrlPr>
-                              </m:dPr>
-                              <m:e>
-                                <m:r>
-                                  <m:rPr>
-                                    <m:sty m:val="p"/>
-                                  </m:rPr>
-                                  <a:rPr lang="el-GR" b="0" i="0" dirty="0" err="1">
-                                    <a:solidFill>
-                                      <a:srgbClr val="222222"/>
-                                    </a:solidFill>
-                                    <a:latin typeface="Cambria Math" panose="02040503050406030204" pitchFamily="18" charset="0"/>
-                                    <a:ea typeface="NanumGothic"/>
-                                  </a:rPr>
-                                  <m:t>Δ</m:t>
-                                </m:r>
-                                <m:sSub>
-                                  <m:sSubPr>
-                                    <m:ctrlPr>
-                                      <a:rPr lang="el-GR" b="0" i="1" dirty="0" smtClean="0">
-                                        <a:solidFill>
-                                          <a:srgbClr val="222222"/>
-                                        </a:solidFill>
-                                        <a:latin typeface="Cambria Math" panose="02040503050406030204" pitchFamily="18" charset="0"/>
-                                        <a:ea typeface="NanumGothic"/>
-                                      </a:rPr>
-                                    </m:ctrlPr>
-                                  </m:sSubPr>
-                                  <m:e>
-                                    <m:r>
-                                      <a:rPr lang="el-GR" b="0" i="1" dirty="0" err="1">
-                                        <a:solidFill>
-                                          <a:srgbClr val="222222"/>
-                                        </a:solidFill>
-                                        <a:latin typeface="Cambria Math" panose="02040503050406030204" pitchFamily="18" charset="0"/>
-                                        <a:ea typeface="NanumGothic"/>
-                                      </a:rPr>
-                                      <m:t>𝑤</m:t>
-                                    </m:r>
-                                  </m:e>
-                                  <m:sub>
-                                    <m:r>
-                                      <a:rPr lang="el-GR" b="0" i="1" dirty="0" smtClean="0">
-                                        <a:solidFill>
-                                          <a:srgbClr val="222222"/>
-                                        </a:solidFill>
-                                        <a:latin typeface="Cambria Math" panose="02040503050406030204" pitchFamily="18" charset="0"/>
-                                        <a:ea typeface="NanumGothic"/>
-                                      </a:rPr>
-                                      <m:t>𝑟𝑜𝑢𝑛𝑑</m:t>
-                                    </m:r>
-                                  </m:sub>
-                                </m:sSub>
-                              </m:e>
-                            </m:d>
-                          </m:e>
-                          <m:sup>
-                            <m:r>
-                              <a:rPr lang="el-GR" b="0" i="1" dirty="0">
-                                <a:solidFill>
-                                  <a:srgbClr val="222222"/>
-                                </a:solidFill>
-                                <a:latin typeface="Cambria Math" panose="02040503050406030204" pitchFamily="18" charset="0"/>
-                                <a:ea typeface="NanumGothic"/>
-                              </a:rPr>
-                              <m:t>2</m:t>
-                            </m:r>
-                          </m:sup>
-                        </m:sSup>
-                      </m:e>
-                    </m:d>
-                  </m:oMath>
-                </a14:m>
-                <a:r>
-                  <a:rPr b="0" i="0" dirty="0">
-                    <a:solidFill>
-                      <a:srgbClr val="222222"/>
-                    </a:solidFill>
-                    <a:latin typeface="NanumGothic"/>
-                    <a:ea typeface="NanumGothic"/>
-                  </a:rPr>
-                  <a:t> </a:t>
-                </a:r>
-                <a:r>
-                  <a:rPr b="0" i="0" dirty="0" err="1">
-                    <a:solidFill>
-                      <a:srgbClr val="222222"/>
-                    </a:solidFill>
-                    <a:latin typeface="NanumGothic"/>
-                    <a:ea typeface="NanumGothic"/>
-                  </a:rPr>
-                  <a:t>커짐</a:t>
-                </a:r>
-                <a:endParaRPr b="0" i="0" dirty="0">
-                  <a:solidFill>
-                    <a:srgbClr val="222222"/>
-                  </a:solidFill>
-                  <a:latin typeface="NanumGothic"/>
-                  <a:ea typeface="NanumGothic"/>
-                </a:endParaRPr>
-              </a:p>
-              <a:p>
-                <a:pPr algn="l">
-                  <a:lnSpc>
-                    <a:spcPct val="135000"/>
-                  </a:lnSpc>
-                </a:pPr>
-                <a:r>
-                  <a:rPr b="1" i="0" dirty="0">
-                    <a:solidFill>
-                      <a:srgbClr val="1F2A37"/>
-                    </a:solidFill>
-                    <a:latin typeface="NanumGothic"/>
-                    <a:ea typeface="NanumGothic"/>
-                  </a:rPr>
-                  <a:t>• 2차(Hessian) </a:t>
-                </a:r>
-                <a:r>
-                  <a:rPr b="1" i="0" dirty="0" err="1">
-                    <a:solidFill>
-                      <a:srgbClr val="1F2A37"/>
-                    </a:solidFill>
-                    <a:latin typeface="NanumGothic"/>
-                    <a:ea typeface="NanumGothic"/>
-                  </a:rPr>
-                  <a:t>항으로</a:t>
-                </a:r>
-                <a:r>
-                  <a:rPr b="1" i="0" dirty="0">
-                    <a:solidFill>
-                      <a:srgbClr val="1F2A37"/>
-                    </a:solidFill>
-                    <a:latin typeface="NanumGothic"/>
-                    <a:ea typeface="NanumGothic"/>
-                  </a:rPr>
-                  <a:t> </a:t>
-                </a:r>
-                <a:r>
-                  <a:rPr b="1" i="0" dirty="0" err="1">
-                    <a:solidFill>
-                      <a:srgbClr val="1F2A37"/>
-                    </a:solidFill>
-                    <a:latin typeface="NanumGothic"/>
-                    <a:ea typeface="NanumGothic"/>
-                  </a:rPr>
-                  <a:t>잔차</a:t>
-                </a:r>
-                <a:r>
-                  <a:rPr b="1" i="0" dirty="0">
-                    <a:solidFill>
-                      <a:srgbClr val="1F2A37"/>
-                    </a:solidFill>
-                    <a:latin typeface="NanumGothic"/>
-                    <a:ea typeface="NanumGothic"/>
-                  </a:rPr>
-                  <a:t> ↓</a:t>
-                </a:r>
-              </a:p>
-            </p:txBody>
-          </p:sp>
-        </mc:Choice>
-        <mc:Fallback xmlns="">
-          <p:sp>
-            <p:nvSpPr>
-              <p:cNvPr id="7" name="TextBox 6"/>
-              <p:cNvSpPr txBox="1">
-                <a:spLocks noRot="1" noChangeAspect="1" noMove="1" noResize="1" noEditPoints="1" noAdjustHandles="1" noChangeArrowheads="1" noChangeShapeType="1" noTextEdit="1"/>
-              </p:cNvSpPr>
-              <p:nvPr/>
-            </p:nvSpPr>
-            <p:spPr>
-              <a:xfrm>
-                <a:off x="6537960" y="2002888"/>
-                <a:ext cx="4846320" cy="1520160"/>
-              </a:xfrm>
-              <a:prstGeom prst="rect">
-                <a:avLst/>
-              </a:prstGeom>
-              <a:blipFill>
-                <a:blip r:embed="rId2"/>
-                <a:stretch>
-                  <a:fillRect l="-2767" t="-402" b="-8032"/>
-                </a:stretch>
-              </a:blipFill>
-            </p:spPr>
-            <p:txBody>
-              <a:bodyPr/>
-              <a:lstStyle/>
-              <a:p>
-                <a:r>
-                  <a:rPr lang="ko-KR" altLang="en-US">
-                    <a:noFill/>
-                  </a:rPr>
-                  <a:t> </a:t>
-                </a:r>
-              </a:p>
-            </p:txBody>
-          </p:sp>
-        </mc:Fallback>
-      </mc:AlternateContent>
-      <p:pic>
-        <p:nvPicPr>
-          <p:cNvPr id="8" name="Picture 7" descr="f8.png"/>
-          <p:cNvPicPr>
-            <a:picLocks noChangeAspect="1"/>
-          </p:cNvPicPr>
-          <p:nvPr/>
-        </p:nvPicPr>
-        <p:blipFill>
-          <a:blip r:embed="rId3"/>
-          <a:stretch>
-            <a:fillRect/>
-          </a:stretch>
-        </p:blipFill>
-        <p:spPr>
-          <a:xfrm>
-            <a:off x="3340720" y="4709512"/>
-            <a:ext cx="5510254" cy="548640"/>
-          </a:xfrm>
-          <a:prstGeom prst="rect">
-            <a:avLst/>
-          </a:prstGeom>
-        </p:spPr>
-      </p:pic>
-      <p:sp>
-        <p:nvSpPr>
-          <p:cNvPr id="9" name="TextBox 8"/>
-          <p:cNvSpPr txBox="1"/>
-          <p:nvPr/>
-        </p:nvSpPr>
-        <p:spPr>
-          <a:xfrm>
-            <a:off x="11551615" y="6510528"/>
-            <a:ext cx="457200" cy="274320"/>
-          </a:xfrm>
-          <a:prstGeom prst="rect">
-            <a:avLst/>
-          </a:prstGeom>
-          <a:noFill/>
-        </p:spPr>
-        <p:txBody>
-          <a:bodyPr wrap="none">
-            <a:spAutoFit/>
-          </a:bodyPr>
-          <a:lstStyle/>
-          <a:p>
-            <a:pPr algn="r"/>
-            <a:r>
-              <a:rPr sz="900" b="0" i="0">
-                <a:solidFill>
-                  <a:srgbClr val="7A7A7A"/>
-                </a:solidFill>
-                <a:latin typeface="NanumGothic"/>
-                <a:ea typeface="NanumGothic"/>
-              </a:rPr>
-              <a:t>7</a:t>
-            </a:r>
-          </a:p>
-        </p:txBody>
-      </p:sp>
-    </p:spTree>
-  </p:cSld>
-  <p:clrMapOvr>
-    <a:masterClrMapping/>
-  </p:clrMapOvr>
-</p:sld>
-</file>
-
-<file path=ppt/slides/slide8.xml><?xml version="1.0" encoding="utf-8"?>
-<p:sld xmlns:a="http://schemas.openxmlformats.org/drawingml/2006/main" xmlns:r="http://schemas.openxmlformats.org/officeDocument/2006/relationships" xmlns:p="http://schemas.openxmlformats.org/presentationml/2006/main">
-  <p:cSld>
-    <p:spTree>
-      <p:nvGrpSpPr>
-        <p:cNvPr id="1" name=""/>
-        <p:cNvGrpSpPr/>
-        <p:nvPr/>
-      </p:nvGrpSpPr>
-      <p:grpSpPr>
-        <a:xfrm>
-          <a:off x="0" y="0"/>
-          <a:ext cx="0" cy="0"/>
-          <a:chOff x="0" y="0"/>
-          <a:chExt cx="0" cy="0"/>
-        </a:xfrm>
-      </p:grpSpPr>
-      <p:sp>
-        <p:nvSpPr>
-          <p:cNvPr id="2" name="TextBox 1"/>
-          <p:cNvSpPr txBox="1"/>
-          <p:nvPr/>
-        </p:nvSpPr>
-        <p:spPr>
-          <a:xfrm>
-            <a:off x="411480" y="292608"/>
-            <a:ext cx="11338560" cy="641201"/>
-          </a:xfrm>
-          <a:prstGeom prst="rect">
-            <a:avLst/>
-          </a:prstGeom>
-          <a:noFill/>
-        </p:spPr>
-        <p:txBody>
-          <a:bodyPr wrap="square" lIns="25400" tIns="12700" rIns="25400" bIns="12700" anchor="t">
-            <a:spAutoFit/>
-          </a:bodyPr>
-          <a:lstStyle/>
-          <a:p>
-            <a:pPr algn="l">
-              <a:lnSpc>
-                <a:spcPct val="100000"/>
-              </a:lnSpc>
-            </a:pPr>
-            <a:r>
-              <a:rPr sz="4000" b="1" i="0" dirty="0">
-                <a:solidFill>
-                  <a:srgbClr val="1F2A37"/>
-                </a:solidFill>
-                <a:latin typeface="+mj-lt"/>
-                <a:ea typeface="NanumGothic"/>
-              </a:rPr>
-              <a:t>Fidelity (LLM)</a:t>
-            </a:r>
-          </a:p>
-        </p:txBody>
-      </p:sp>
-      <p:sp>
-        <p:nvSpPr>
-          <p:cNvPr id="3" name="TextBox 2"/>
-          <p:cNvSpPr txBox="1"/>
-          <p:nvPr/>
-        </p:nvSpPr>
-        <p:spPr>
-          <a:xfrm>
-            <a:off x="411480" y="1078992"/>
-            <a:ext cx="11338560" cy="595548"/>
-          </a:xfrm>
-          <a:prstGeom prst="rect">
-            <a:avLst/>
-          </a:prstGeom>
-          <a:noFill/>
-        </p:spPr>
-        <p:txBody>
-          <a:bodyPr wrap="square" lIns="25400" tIns="12700" rIns="25400" bIns="12700" anchor="t">
-            <a:spAutoFit/>
-          </a:bodyPr>
-          <a:lstStyle/>
-          <a:p>
-            <a:pPr algn="l">
-              <a:lnSpc>
-                <a:spcPct val="105000"/>
-              </a:lnSpc>
-            </a:pPr>
-            <a:r>
-              <a:rPr lang="en-US" dirty="0">
-                <a:solidFill>
-                  <a:srgbClr val="3C4654"/>
-                </a:solidFill>
-                <a:ea typeface="NanumGothic"/>
-              </a:rPr>
-              <a:t>Exact</a:t>
-            </a:r>
-            <a:r>
-              <a:rPr b="0" i="0" dirty="0">
-                <a:solidFill>
-                  <a:srgbClr val="3C4654"/>
-                </a:solidFill>
-                <a:ea typeface="NanumGothic"/>
-              </a:rPr>
-              <a:t> in-run </a:t>
-            </a:r>
-            <a:r>
-              <a:rPr lang="en-US" b="0" i="0" dirty="0" err="1">
-                <a:solidFill>
-                  <a:srgbClr val="3C4654"/>
-                </a:solidFill>
-                <a:ea typeface="NanumGothic"/>
-              </a:rPr>
-              <a:t>shapley</a:t>
-            </a:r>
-            <a:r>
-              <a:rPr lang="en-US" b="0" i="0" dirty="0">
-                <a:solidFill>
-                  <a:srgbClr val="3C4654"/>
-                </a:solidFill>
-                <a:ea typeface="NanumGothic"/>
-              </a:rPr>
-              <a:t> value </a:t>
-            </a:r>
-            <a:r>
-              <a:rPr b="0" i="0" dirty="0" err="1">
-                <a:solidFill>
-                  <a:srgbClr val="3C4654"/>
-                </a:solidFill>
-                <a:ea typeface="NanumGothic"/>
-              </a:rPr>
-              <a:t>대비</a:t>
-            </a:r>
-            <a:r>
-              <a:rPr b="0" i="0" dirty="0">
-                <a:solidFill>
-                  <a:srgbClr val="3C4654"/>
-                </a:solidFill>
-                <a:ea typeface="NanumGothic"/>
-              </a:rPr>
-              <a:t> Spearman (↑).</a:t>
-            </a:r>
-            <a:endParaRPr lang="en-US" b="0" i="0" dirty="0">
-              <a:solidFill>
-                <a:srgbClr val="3C4654"/>
-              </a:solidFill>
-              <a:ea typeface="NanumGothic"/>
-            </a:endParaRPr>
-          </a:p>
-          <a:p>
-            <a:pPr algn="l">
-              <a:lnSpc>
-                <a:spcPct val="105000"/>
-              </a:lnSpc>
-            </a:pPr>
-            <a:r>
-              <a:rPr b="0" i="0" dirty="0" err="1">
-                <a:solidFill>
-                  <a:srgbClr val="3C4654"/>
-                </a:solidFill>
-                <a:ea typeface="NanumGothic"/>
-              </a:rPr>
-              <a:t>LoRA</a:t>
-            </a:r>
-            <a:r>
-              <a:rPr b="0" i="0" dirty="0">
-                <a:solidFill>
-                  <a:srgbClr val="3C4654"/>
-                </a:solidFill>
-                <a:ea typeface="NanumGothic"/>
-              </a:rPr>
-              <a:t> · 3-seed.  std=N20·2/round, anchor=N5·full.</a:t>
-            </a:r>
-          </a:p>
-        </p:txBody>
-      </p:sp>
-      <p:sp>
-        <p:nvSpPr>
-          <p:cNvPr id="6" name="TextBox 5"/>
-          <p:cNvSpPr txBox="1"/>
-          <p:nvPr/>
-        </p:nvSpPr>
-        <p:spPr>
-          <a:xfrm>
-            <a:off x="11551615" y="6510528"/>
-            <a:ext cx="457200" cy="274320"/>
-          </a:xfrm>
-          <a:prstGeom prst="rect">
-            <a:avLst/>
-          </a:prstGeom>
-          <a:noFill/>
-        </p:spPr>
-        <p:txBody>
-          <a:bodyPr wrap="none">
-            <a:spAutoFit/>
-          </a:bodyPr>
-          <a:lstStyle/>
-          <a:p>
-            <a:pPr algn="r"/>
-            <a:r>
-              <a:rPr sz="900" b="0" i="0">
-                <a:solidFill>
-                  <a:srgbClr val="7A7A7A"/>
-                </a:solidFill>
-                <a:latin typeface="NanumGothic"/>
-                <a:ea typeface="NanumGothic"/>
-              </a:rPr>
-              <a:t>8</a:t>
-            </a:r>
-          </a:p>
-        </p:txBody>
-      </p:sp>
-      <p:graphicFrame>
-        <p:nvGraphicFramePr>
-          <p:cNvPr id="7" name="Table 6"/>
-          <p:cNvGraphicFramePr>
-            <a:graphicFrameLocks noGrp="1"/>
-          </p:cNvGraphicFramePr>
-          <p:nvPr>
-            <p:extLst>
-              <p:ext uri="{D42A27DB-BD31-4B8C-83A1-F6EECF244321}">
-                <p14:modId xmlns:p14="http://schemas.microsoft.com/office/powerpoint/2010/main" val="3161554862"/>
-              </p:ext>
-            </p:extLst>
-          </p:nvPr>
-        </p:nvGraphicFramePr>
-        <p:xfrm>
-          <a:off x="411480" y="1965960"/>
-          <a:ext cx="11384278" cy="3581984"/>
-        </p:xfrm>
-        <a:graphic>
-          <a:graphicData uri="http://schemas.openxmlformats.org/drawingml/2006/table">
-            <a:tbl>
-              <a:tblPr>
-                <a:tableStyleId>{5C22544A-7EE6-4342-B048-85BDC9FD1C3A}</a:tableStyleId>
-              </a:tblPr>
-              <a:tblGrid>
-                <a:gridCol w="2103616">
-                  <a:extLst>
-                    <a:ext uri="{9D8B030D-6E8A-4147-A177-3AD203B41FA5}">
-                      <a16:colId xmlns:a16="http://schemas.microsoft.com/office/drawing/2014/main" val="20000"/>
-                    </a:ext>
-                  </a:extLst>
-                </a:gridCol>
-                <a:gridCol w="1546777">
-                  <a:extLst>
-                    <a:ext uri="{9D8B030D-6E8A-4147-A177-3AD203B41FA5}">
-                      <a16:colId xmlns:a16="http://schemas.microsoft.com/office/drawing/2014/main" val="20001"/>
-                    </a:ext>
-                  </a:extLst>
-                </a:gridCol>
-                <a:gridCol w="1546777">
-                  <a:extLst>
-                    <a:ext uri="{9D8B030D-6E8A-4147-A177-3AD203B41FA5}">
-                      <a16:colId xmlns:a16="http://schemas.microsoft.com/office/drawing/2014/main" val="20002"/>
-                    </a:ext>
-                  </a:extLst>
-                </a:gridCol>
-                <a:gridCol w="1546777">
-                  <a:extLst>
-                    <a:ext uri="{9D8B030D-6E8A-4147-A177-3AD203B41FA5}">
-                      <a16:colId xmlns:a16="http://schemas.microsoft.com/office/drawing/2014/main" val="20003"/>
-                    </a:ext>
-                  </a:extLst>
-                </a:gridCol>
-                <a:gridCol w="1546777">
-                  <a:extLst>
-                    <a:ext uri="{9D8B030D-6E8A-4147-A177-3AD203B41FA5}">
-                      <a16:colId xmlns:a16="http://schemas.microsoft.com/office/drawing/2014/main" val="20004"/>
-                    </a:ext>
-                  </a:extLst>
-                </a:gridCol>
-                <a:gridCol w="1546777">
-                  <a:extLst>
-                    <a:ext uri="{9D8B030D-6E8A-4147-A177-3AD203B41FA5}">
-                      <a16:colId xmlns:a16="http://schemas.microsoft.com/office/drawing/2014/main" val="20005"/>
-                    </a:ext>
-                  </a:extLst>
-                </a:gridCol>
-                <a:gridCol w="1546777">
-                  <a:extLst>
-                    <a:ext uri="{9D8B030D-6E8A-4147-A177-3AD203B41FA5}">
-                      <a16:colId xmlns:a16="http://schemas.microsoft.com/office/drawing/2014/main" val="20006"/>
-                    </a:ext>
-                  </a:extLst>
-                </a:gridCol>
-              </a:tblGrid>
-              <a:tr h="447748">
-                <a:tc>
-                  <a:txBody>
-                    <a:bodyPr/>
-                    <a:lstStyle/>
-                    <a:p>
-                      <a:pPr algn="l"/>
-                      <a:r>
-                        <a:rPr sz="1800" b="1" i="0" dirty="0">
-                          <a:solidFill>
-                            <a:srgbClr val="FFFFFF"/>
-                          </a:solidFill>
-                          <a:latin typeface="+mn-lt"/>
-                          <a:ea typeface="NanumGothic"/>
-                        </a:rPr>
-                        <a:t>method</a:t>
-                      </a:r>
-                    </a:p>
-                  </a:txBody>
-                  <a:tcPr marL="38100" marR="38100" marT="12700" marB="12700" anchor="ctr">
-                    <a:solidFill>
-                      <a:srgbClr val="33475B"/>
-                    </a:solidFill>
-                  </a:tcPr>
-                </a:tc>
-                <a:tc>
-                  <a:txBody>
-                    <a:bodyPr/>
-                    <a:lstStyle/>
-                    <a:p>
-                      <a:pPr algn="ctr"/>
-                      <a:r>
-                        <a:rPr sz="1800" b="1" i="0">
-                          <a:solidFill>
-                            <a:srgbClr val="FFFFFF"/>
-                          </a:solidFill>
-                          <a:latin typeface="+mn-lt"/>
-                          <a:ea typeface="NanumGothic"/>
-                        </a:rPr>
-                        <a:t>1B std</a:t>
-                      </a:r>
-                    </a:p>
-                  </a:txBody>
-                  <a:tcPr marL="38100" marR="38100" marT="12700" marB="12700" anchor="ctr">
-                    <a:solidFill>
-                      <a:srgbClr val="33475B"/>
-                    </a:solidFill>
-                  </a:tcPr>
-                </a:tc>
-                <a:tc>
-                  <a:txBody>
-                    <a:bodyPr/>
-                    <a:lstStyle/>
-                    <a:p>
-                      <a:pPr algn="ctr"/>
-                      <a:r>
-                        <a:rPr sz="1800" b="1" i="0">
-                          <a:solidFill>
-                            <a:srgbClr val="FFFFFF"/>
-                          </a:solidFill>
-                          <a:latin typeface="+mn-lt"/>
-                          <a:ea typeface="NanumGothic"/>
-                        </a:rPr>
-                        <a:t>3B std</a:t>
-                      </a:r>
-                    </a:p>
-                  </a:txBody>
-                  <a:tcPr marL="38100" marR="38100" marT="12700" marB="12700" anchor="ctr">
-                    <a:solidFill>
-                      <a:srgbClr val="33475B"/>
-                    </a:solidFill>
-                  </a:tcPr>
-                </a:tc>
-                <a:tc>
-                  <a:txBody>
-                    <a:bodyPr/>
-                    <a:lstStyle/>
-                    <a:p>
-                      <a:pPr algn="ctr"/>
-                      <a:r>
-                        <a:rPr sz="1800" b="1" i="0">
-                          <a:solidFill>
-                            <a:srgbClr val="FFFFFF"/>
-                          </a:solidFill>
-                          <a:latin typeface="+mn-lt"/>
-                          <a:ea typeface="NanumGothic"/>
-                        </a:rPr>
-                        <a:t>7B std</a:t>
-                      </a:r>
-                    </a:p>
-                  </a:txBody>
-                  <a:tcPr marL="38100" marR="38100" marT="12700" marB="12700" anchor="ctr">
-                    <a:solidFill>
-                      <a:srgbClr val="33475B"/>
-                    </a:solidFill>
-                  </a:tcPr>
-                </a:tc>
-                <a:tc>
-                  <a:txBody>
-                    <a:bodyPr/>
-                    <a:lstStyle/>
-                    <a:p>
-                      <a:pPr algn="ctr"/>
-                      <a:r>
-                        <a:rPr sz="1800" b="1" i="0">
-                          <a:solidFill>
-                            <a:srgbClr val="FFFFFF"/>
-                          </a:solidFill>
-                          <a:latin typeface="+mn-lt"/>
-                          <a:ea typeface="NanumGothic"/>
-                        </a:rPr>
-                        <a:t>1B anchor</a:t>
-                      </a:r>
-                    </a:p>
-                  </a:txBody>
-                  <a:tcPr marL="38100" marR="38100" marT="12700" marB="12700" anchor="ctr">
-                    <a:solidFill>
-                      <a:srgbClr val="33475B"/>
-                    </a:solidFill>
-                  </a:tcPr>
-                </a:tc>
-                <a:tc>
-                  <a:txBody>
-                    <a:bodyPr/>
-                    <a:lstStyle/>
-                    <a:p>
-                      <a:pPr algn="ctr"/>
-                      <a:r>
-                        <a:rPr sz="1800" b="1" i="0">
-                          <a:solidFill>
-                            <a:srgbClr val="FFFFFF"/>
-                          </a:solidFill>
-                          <a:latin typeface="+mn-lt"/>
-                          <a:ea typeface="NanumGothic"/>
-                        </a:rPr>
-                        <a:t>3B anchor</a:t>
-                      </a:r>
-                    </a:p>
-                  </a:txBody>
-                  <a:tcPr marL="38100" marR="38100" marT="12700" marB="12700" anchor="ctr">
-                    <a:solidFill>
-                      <a:srgbClr val="33475B"/>
-                    </a:solidFill>
-                  </a:tcPr>
-                </a:tc>
-                <a:tc>
-                  <a:txBody>
-                    <a:bodyPr/>
-                    <a:lstStyle/>
-                    <a:p>
-                      <a:pPr algn="ctr"/>
-                      <a:r>
-                        <a:rPr sz="1800" b="1" i="0">
-                          <a:solidFill>
-                            <a:srgbClr val="FFFFFF"/>
-                          </a:solidFill>
-                          <a:latin typeface="+mn-lt"/>
-                          <a:ea typeface="NanumGothic"/>
-                        </a:rPr>
-                        <a:t>7B anchor</a:t>
-                      </a:r>
-                    </a:p>
-                  </a:txBody>
-                  <a:tcPr marL="38100" marR="38100" marT="12700" marB="12700" anchor="ctr">
-                    <a:solidFill>
-                      <a:srgbClr val="33475B"/>
-                    </a:solidFill>
-                  </a:tcPr>
-                </a:tc>
-                <a:extLst>
-                  <a:ext uri="{0D108BD9-81ED-4DB2-BD59-A6C34878D82A}">
-                    <a16:rowId xmlns:a16="http://schemas.microsoft.com/office/drawing/2014/main" val="10000"/>
-                  </a:ext>
-                </a:extLst>
-              </a:tr>
-              <a:tr h="447748">
-                <a:tc>
-                  <a:txBody>
-                    <a:bodyPr/>
-                    <a:lstStyle/>
-                    <a:p>
-                      <a:pPr algn="l"/>
-                      <a:r>
-                        <a:rPr sz="1800" b="0" i="0" dirty="0" err="1">
-                          <a:solidFill>
-                            <a:srgbClr val="222222"/>
-                          </a:solidFill>
-                          <a:latin typeface="+mn-lt"/>
-                          <a:ea typeface="NanumGothic"/>
-                        </a:rPr>
-                        <a:t>Flirds</a:t>
-                      </a:r>
-                      <a:endParaRPr sz="1800" b="0" i="0" dirty="0">
-                        <a:solidFill>
-                          <a:srgbClr val="222222"/>
-                        </a:solidFill>
-                        <a:latin typeface="+mn-lt"/>
-                        <a:ea typeface="NanumGothic"/>
-                      </a:endParaRPr>
-                    </a:p>
-                  </a:txBody>
-                  <a:tcPr marL="38100" marR="38100" marT="0" marB="0" anchor="ctr">
-                    <a:solidFill>
-                      <a:srgbClr val="FFFFFF"/>
-                    </a:solidFill>
-                  </a:tcPr>
-                </a:tc>
-                <a:tc>
-                  <a:txBody>
-                    <a:bodyPr/>
-                    <a:lstStyle/>
-                    <a:p>
-                      <a:pPr algn="ctr"/>
-                      <a:r>
-                        <a:rPr sz="1800" b="1" i="0">
-                          <a:solidFill>
-                            <a:srgbClr val="222222"/>
-                          </a:solidFill>
-                          <a:latin typeface="+mn-lt"/>
-                          <a:ea typeface="NanumGothic"/>
-                        </a:rPr>
-                        <a:t>1.000</a:t>
-                      </a:r>
-                    </a:p>
-                  </a:txBody>
-                  <a:tcPr marL="38100" marR="38100" marT="0" marB="0" anchor="ctr">
-                    <a:solidFill>
-                      <a:srgbClr val="FFFFFF"/>
-                    </a:solidFill>
-                  </a:tcPr>
-                </a:tc>
-                <a:tc>
-                  <a:txBody>
-                    <a:bodyPr/>
-                    <a:lstStyle/>
-                    <a:p>
-                      <a:pPr algn="ctr"/>
-                      <a:r>
-                        <a:rPr sz="1800" b="1" i="0">
-                          <a:solidFill>
-                            <a:srgbClr val="222222"/>
-                          </a:solidFill>
-                          <a:latin typeface="+mn-lt"/>
-                          <a:ea typeface="NanumGothic"/>
-                        </a:rPr>
-                        <a:t>1.000</a:t>
-                      </a:r>
-                    </a:p>
-                  </a:txBody>
-                  <a:tcPr marL="38100" marR="38100" marT="0" marB="0" anchor="ctr">
-                    <a:solidFill>
-                      <a:srgbClr val="FFFFFF"/>
-                    </a:solidFill>
-                  </a:tcPr>
-                </a:tc>
-                <a:tc>
-                  <a:txBody>
-                    <a:bodyPr/>
-                    <a:lstStyle/>
-                    <a:p>
-                      <a:pPr algn="ctr"/>
-                      <a:r>
-                        <a:rPr sz="1800" b="1" i="0" dirty="0">
-                          <a:solidFill>
-                            <a:srgbClr val="222222"/>
-                          </a:solidFill>
-                          <a:latin typeface="+mn-lt"/>
-                          <a:ea typeface="NanumGothic"/>
-                        </a:rPr>
-                        <a:t>0.999</a:t>
-                      </a:r>
-                    </a:p>
-                  </a:txBody>
-                  <a:tcPr marL="38100" marR="38100" marT="0" marB="0" anchor="ctr">
-                    <a:solidFill>
-                      <a:srgbClr val="FFFFFF"/>
-                    </a:solidFill>
-                  </a:tcPr>
-                </a:tc>
-                <a:tc>
-                  <a:txBody>
-                    <a:bodyPr/>
-                    <a:lstStyle/>
-                    <a:p>
-                      <a:pPr algn="ctr"/>
-                      <a:r>
-                        <a:rPr sz="1800" b="1" i="0">
-                          <a:solidFill>
-                            <a:srgbClr val="222222"/>
-                          </a:solidFill>
-                          <a:latin typeface="+mn-lt"/>
-                          <a:ea typeface="NanumGothic"/>
-                        </a:rPr>
-                        <a:t>1.000</a:t>
-                      </a:r>
-                    </a:p>
-                  </a:txBody>
-                  <a:tcPr marL="38100" marR="38100" marT="0" marB="0" anchor="ctr">
-                    <a:solidFill>
-                      <a:srgbClr val="FFFFFF"/>
-                    </a:solidFill>
-                  </a:tcPr>
-                </a:tc>
-                <a:tc>
-                  <a:txBody>
-                    <a:bodyPr/>
-                    <a:lstStyle/>
-                    <a:p>
-                      <a:pPr algn="ctr"/>
-                      <a:r>
-                        <a:rPr sz="1800" b="0" i="0" dirty="0">
-                          <a:solidFill>
-                            <a:srgbClr val="222222"/>
-                          </a:solidFill>
-                          <a:latin typeface="+mn-lt"/>
-                          <a:ea typeface="NanumGothic"/>
-                        </a:rPr>
-                        <a:t>0.967</a:t>
-                      </a:r>
-                    </a:p>
-                  </a:txBody>
-                  <a:tcPr marL="38100" marR="38100" marT="0" marB="0" anchor="ctr">
-                    <a:solidFill>
-                      <a:srgbClr val="FFFFFF"/>
-                    </a:solidFill>
-                  </a:tcPr>
-                </a:tc>
-                <a:tc>
-                  <a:txBody>
-                    <a:bodyPr/>
-                    <a:lstStyle/>
-                    <a:p>
-                      <a:pPr algn="ctr"/>
-                      <a:r>
-                        <a:rPr sz="1800" b="1" i="0">
-                          <a:solidFill>
-                            <a:srgbClr val="222222"/>
-                          </a:solidFill>
-                          <a:latin typeface="+mn-lt"/>
-                          <a:ea typeface="NanumGothic"/>
-                        </a:rPr>
-                        <a:t>1.000</a:t>
-                      </a:r>
-                    </a:p>
-                  </a:txBody>
-                  <a:tcPr marL="38100" marR="38100" marT="0" marB="0" anchor="ctr">
-                    <a:solidFill>
-                      <a:srgbClr val="FFFFFF"/>
-                    </a:solidFill>
-                  </a:tcPr>
-                </a:tc>
-                <a:extLst>
-                  <a:ext uri="{0D108BD9-81ED-4DB2-BD59-A6C34878D82A}">
-                    <a16:rowId xmlns:a16="http://schemas.microsoft.com/office/drawing/2014/main" val="10001"/>
-                  </a:ext>
-                </a:extLst>
-              </a:tr>
-              <a:tr h="447748">
-                <a:tc>
-                  <a:txBody>
-                    <a:bodyPr/>
-                    <a:lstStyle/>
-                    <a:p>
-                      <a:pPr algn="l"/>
-                      <a:r>
-                        <a:rPr sz="1800" b="0" i="0">
-                          <a:solidFill>
-                            <a:srgbClr val="222222"/>
-                          </a:solidFill>
-                          <a:latin typeface="+mn-lt"/>
-                          <a:ea typeface="NanumGothic"/>
-                        </a:rPr>
-                        <a:t>Flirds-1st</a:t>
-                      </a:r>
-                    </a:p>
-                  </a:txBody>
-                  <a:tcPr marL="38100" marR="38100" marT="0" marB="0" anchor="ctr">
-                    <a:solidFill>
-                      <a:srgbClr val="F2F4F7"/>
-                    </a:solidFill>
-                  </a:tcPr>
-                </a:tc>
-                <a:tc>
-                  <a:txBody>
-                    <a:bodyPr/>
-                    <a:lstStyle/>
-                    <a:p>
-                      <a:pPr algn="ctr"/>
-                      <a:r>
-                        <a:rPr sz="1800" b="0" i="0">
-                          <a:solidFill>
-                            <a:srgbClr val="222222"/>
-                          </a:solidFill>
-                          <a:latin typeface="+mn-lt"/>
-                          <a:ea typeface="NanumGothic"/>
-                        </a:rPr>
-                        <a:t>0.999</a:t>
-                      </a:r>
-                    </a:p>
-                  </a:txBody>
-                  <a:tcPr marL="38100" marR="38100" marT="0" marB="0" anchor="ctr">
-                    <a:solidFill>
-                      <a:srgbClr val="F2F4F7"/>
-                    </a:solidFill>
-                  </a:tcPr>
-                </a:tc>
-                <a:tc>
-                  <a:txBody>
-                    <a:bodyPr/>
-                    <a:lstStyle/>
-                    <a:p>
-                      <a:pPr algn="ctr"/>
-                      <a:r>
-                        <a:rPr sz="1800" b="1" i="0" dirty="0">
-                          <a:solidFill>
-                            <a:srgbClr val="222222"/>
-                          </a:solidFill>
-                          <a:latin typeface="+mn-lt"/>
-                          <a:ea typeface="NanumGothic"/>
-                        </a:rPr>
-                        <a:t>1.000</a:t>
-                      </a:r>
-                    </a:p>
-                  </a:txBody>
-                  <a:tcPr marL="38100" marR="38100" marT="0" marB="0" anchor="ctr">
-                    <a:solidFill>
-                      <a:srgbClr val="F2F4F7"/>
-                    </a:solidFill>
-                  </a:tcPr>
-                </a:tc>
-                <a:tc>
-                  <a:txBody>
-                    <a:bodyPr/>
-                    <a:lstStyle/>
-                    <a:p>
-                      <a:pPr algn="ctr"/>
-                      <a:r>
-                        <a:rPr sz="1800" b="0" i="0">
-                          <a:solidFill>
-                            <a:srgbClr val="222222"/>
-                          </a:solidFill>
-                          <a:latin typeface="+mn-lt"/>
-                          <a:ea typeface="NanumGothic"/>
-                        </a:rPr>
-                        <a:t>0.998</a:t>
-                      </a:r>
-                    </a:p>
-                  </a:txBody>
-                  <a:tcPr marL="38100" marR="38100" marT="0" marB="0" anchor="ctr">
-                    <a:solidFill>
-                      <a:srgbClr val="F2F4F7"/>
-                    </a:solidFill>
-                  </a:tcPr>
-                </a:tc>
-                <a:tc>
-                  <a:txBody>
-                    <a:bodyPr/>
-                    <a:lstStyle/>
-                    <a:p>
-                      <a:pPr algn="ctr"/>
-                      <a:r>
-                        <a:rPr sz="1800" b="1" i="0" dirty="0">
-                          <a:solidFill>
-                            <a:srgbClr val="222222"/>
-                          </a:solidFill>
-                          <a:latin typeface="+mn-lt"/>
-                          <a:ea typeface="NanumGothic"/>
-                        </a:rPr>
-                        <a:t>1.000</a:t>
-                      </a:r>
-                    </a:p>
-                  </a:txBody>
-                  <a:tcPr marL="38100" marR="38100" marT="0" marB="0" anchor="ctr">
-                    <a:solidFill>
-                      <a:srgbClr val="F2F4F7"/>
-                    </a:solidFill>
-                  </a:tcPr>
-                </a:tc>
-                <a:tc>
-                  <a:txBody>
-                    <a:bodyPr/>
-                    <a:lstStyle/>
-                    <a:p>
-                      <a:pPr algn="ctr"/>
-                      <a:r>
-                        <a:rPr sz="1800" b="1" i="0">
-                          <a:solidFill>
-                            <a:srgbClr val="222222"/>
-                          </a:solidFill>
-                          <a:latin typeface="+mn-lt"/>
-                          <a:ea typeface="NanumGothic"/>
-                        </a:rPr>
-                        <a:t>1.000</a:t>
-                      </a:r>
-                    </a:p>
-                  </a:txBody>
-                  <a:tcPr marL="38100" marR="38100" marT="0" marB="0" anchor="ctr">
-                    <a:solidFill>
-                      <a:srgbClr val="F2F4F7"/>
-                    </a:solidFill>
-                  </a:tcPr>
-                </a:tc>
-                <a:tc>
-                  <a:txBody>
-                    <a:bodyPr/>
-                    <a:lstStyle/>
-                    <a:p>
-                      <a:pPr algn="ctr"/>
-                      <a:r>
-                        <a:rPr sz="1800" b="1" i="0" dirty="0">
-                          <a:solidFill>
-                            <a:srgbClr val="222222"/>
-                          </a:solidFill>
-                          <a:latin typeface="+mn-lt"/>
-                          <a:ea typeface="NanumGothic"/>
-                        </a:rPr>
-                        <a:t>1.000</a:t>
-                      </a:r>
-                    </a:p>
-                  </a:txBody>
-                  <a:tcPr marL="38100" marR="38100" marT="0" marB="0" anchor="ctr">
-                    <a:solidFill>
-                      <a:srgbClr val="F2F4F7"/>
-                    </a:solidFill>
-                  </a:tcPr>
-                </a:tc>
-                <a:extLst>
-                  <a:ext uri="{0D108BD9-81ED-4DB2-BD59-A6C34878D82A}">
-                    <a16:rowId xmlns:a16="http://schemas.microsoft.com/office/drawing/2014/main" val="10002"/>
-                  </a:ext>
-                </a:extLst>
-              </a:tr>
-              <a:tr h="447748">
-                <a:tc>
-                  <a:txBody>
-                    <a:bodyPr/>
-                    <a:lstStyle/>
-                    <a:p>
-                      <a:pPr algn="l"/>
-                      <a:r>
-                        <a:rPr sz="1800" b="0" i="0">
-                          <a:solidFill>
-                            <a:srgbClr val="222222"/>
-                          </a:solidFill>
-                          <a:latin typeface="+mn-lt"/>
-                          <a:ea typeface="NanumGothic"/>
-                        </a:rPr>
-                        <a:t>loss-heur</a:t>
-                      </a:r>
-                    </a:p>
-                  </a:txBody>
-                  <a:tcPr marL="38100" marR="38100" marT="0" marB="0" anchor="ctr">
-                    <a:solidFill>
-                      <a:srgbClr val="FFFFFF"/>
-                    </a:solidFill>
-                  </a:tcPr>
-                </a:tc>
-                <a:tc>
-                  <a:txBody>
-                    <a:bodyPr/>
-                    <a:lstStyle/>
-                    <a:p>
-                      <a:pPr algn="ctr"/>
-                      <a:r>
-                        <a:rPr sz="1800" b="1" i="0">
-                          <a:solidFill>
-                            <a:srgbClr val="222222"/>
-                          </a:solidFill>
-                          <a:latin typeface="+mn-lt"/>
-                          <a:ea typeface="NanumGothic"/>
-                        </a:rPr>
-                        <a:t>1.000</a:t>
-                      </a:r>
-                    </a:p>
-                  </a:txBody>
-                  <a:tcPr marL="38100" marR="38100" marT="0" marB="0" anchor="ctr">
-                    <a:solidFill>
-                      <a:srgbClr val="FFFFFF"/>
-                    </a:solidFill>
-                  </a:tcPr>
-                </a:tc>
-                <a:tc>
-                  <a:txBody>
-                    <a:bodyPr/>
-                    <a:lstStyle/>
-                    <a:p>
-                      <a:pPr algn="ctr"/>
-                      <a:r>
-                        <a:rPr sz="1800" b="0" i="0">
-                          <a:solidFill>
-                            <a:srgbClr val="222222"/>
-                          </a:solidFill>
-                          <a:latin typeface="+mn-lt"/>
-                          <a:ea typeface="NanumGothic"/>
-                        </a:rPr>
-                        <a:t>0.999</a:t>
-                      </a:r>
-                    </a:p>
-                  </a:txBody>
-                  <a:tcPr marL="38100" marR="38100" marT="0" marB="0" anchor="ctr">
-                    <a:solidFill>
-                      <a:srgbClr val="FFFFFF"/>
-                    </a:solidFill>
-                  </a:tcPr>
-                </a:tc>
-                <a:tc>
-                  <a:txBody>
-                    <a:bodyPr/>
-                    <a:lstStyle/>
-                    <a:p>
-                      <a:pPr algn="ctr"/>
-                      <a:r>
-                        <a:rPr sz="1800" b="1" i="0" dirty="0">
-                          <a:solidFill>
-                            <a:srgbClr val="222222"/>
-                          </a:solidFill>
-                          <a:latin typeface="+mn-lt"/>
-                          <a:ea typeface="NanumGothic"/>
-                        </a:rPr>
-                        <a:t>0.999</a:t>
-                      </a:r>
-                    </a:p>
-                  </a:txBody>
-                  <a:tcPr marL="38100" marR="38100" marT="0" marB="0" anchor="ctr">
-                    <a:solidFill>
-                      <a:srgbClr val="FFFFFF"/>
-                    </a:solidFill>
-                  </a:tcPr>
-                </a:tc>
-                <a:tc>
-                  <a:txBody>
-                    <a:bodyPr/>
-                    <a:lstStyle/>
-                    <a:p>
-                      <a:pPr algn="ctr"/>
-                      <a:r>
-                        <a:rPr sz="1800" b="1" i="0" dirty="0">
-                          <a:solidFill>
-                            <a:srgbClr val="222222"/>
-                          </a:solidFill>
-                          <a:latin typeface="+mn-lt"/>
-                          <a:ea typeface="NanumGothic"/>
-                        </a:rPr>
-                        <a:t>1.000</a:t>
-                      </a:r>
-                    </a:p>
-                  </a:txBody>
-                  <a:tcPr marL="38100" marR="38100" marT="0" marB="0" anchor="ctr">
-                    <a:solidFill>
-                      <a:srgbClr val="FFFFFF"/>
-                    </a:solidFill>
-                  </a:tcPr>
-                </a:tc>
-                <a:tc>
-                  <a:txBody>
-                    <a:bodyPr/>
-                    <a:lstStyle/>
-                    <a:p>
-                      <a:pPr algn="ctr"/>
-                      <a:r>
-                        <a:rPr sz="1800" b="1" i="0" dirty="0">
-                          <a:solidFill>
-                            <a:srgbClr val="222222"/>
-                          </a:solidFill>
-                          <a:latin typeface="+mn-lt"/>
-                          <a:ea typeface="NanumGothic"/>
-                        </a:rPr>
-                        <a:t>1.000</a:t>
-                      </a:r>
-                    </a:p>
-                  </a:txBody>
-                  <a:tcPr marL="38100" marR="38100" marT="0" marB="0" anchor="ctr">
-                    <a:solidFill>
-                      <a:srgbClr val="FFFFFF"/>
-                    </a:solidFill>
-                  </a:tcPr>
-                </a:tc>
-                <a:tc>
-                  <a:txBody>
-                    <a:bodyPr/>
-                    <a:lstStyle/>
-                    <a:p>
-                      <a:pPr algn="ctr"/>
-                      <a:r>
-                        <a:rPr sz="1800" b="1" i="0" dirty="0">
-                          <a:solidFill>
-                            <a:srgbClr val="222222"/>
-                          </a:solidFill>
-                          <a:latin typeface="+mn-lt"/>
-                          <a:ea typeface="NanumGothic"/>
-                        </a:rPr>
-                        <a:t>1.000</a:t>
-                      </a:r>
-                    </a:p>
-                  </a:txBody>
-                  <a:tcPr marL="38100" marR="38100" marT="0" marB="0" anchor="ctr">
-                    <a:solidFill>
-                      <a:srgbClr val="FFFFFF"/>
-                    </a:solidFill>
-                  </a:tcPr>
-                </a:tc>
-                <a:extLst>
-                  <a:ext uri="{0D108BD9-81ED-4DB2-BD59-A6C34878D82A}">
-                    <a16:rowId xmlns:a16="http://schemas.microsoft.com/office/drawing/2014/main" val="10003"/>
-                  </a:ext>
-                </a:extLst>
-              </a:tr>
-              <a:tr h="447748">
-                <a:tc>
-                  <a:txBody>
-                    <a:bodyPr/>
-                    <a:lstStyle/>
-                    <a:p>
-                      <a:pPr algn="l"/>
-                      <a:r>
-                        <a:rPr sz="1800" b="0" i="0">
-                          <a:solidFill>
-                            <a:srgbClr val="222222"/>
-                          </a:solidFill>
-                          <a:latin typeface="+mn-lt"/>
-                          <a:ea typeface="NanumGothic"/>
-                        </a:rPr>
-                        <a:t>GTG</a:t>
-                      </a:r>
-                    </a:p>
-                  </a:txBody>
-                  <a:tcPr marL="38100" marR="38100" marT="0" marB="0" anchor="ctr">
-                    <a:solidFill>
-                      <a:srgbClr val="F2F4F7"/>
-                    </a:solidFill>
-                  </a:tcPr>
-                </a:tc>
-                <a:tc>
-                  <a:txBody>
-                    <a:bodyPr/>
-                    <a:lstStyle/>
-                    <a:p>
-                      <a:pPr algn="ctr"/>
-                      <a:r>
-                        <a:rPr sz="1800" b="0" i="0">
-                          <a:solidFill>
-                            <a:srgbClr val="222222"/>
-                          </a:solidFill>
-                          <a:latin typeface="+mn-lt"/>
-                          <a:ea typeface="NanumGothic"/>
-                        </a:rPr>
-                        <a:t>0.975</a:t>
-                      </a:r>
-                    </a:p>
-                  </a:txBody>
-                  <a:tcPr marL="38100" marR="38100" marT="0" marB="0" anchor="ctr">
-                    <a:solidFill>
-                      <a:srgbClr val="F2F4F7"/>
-                    </a:solidFill>
-                  </a:tcPr>
-                </a:tc>
-                <a:tc>
-                  <a:txBody>
-                    <a:bodyPr/>
-                    <a:lstStyle/>
-                    <a:p>
-                      <a:pPr algn="ctr"/>
-                      <a:r>
-                        <a:rPr sz="1800" b="0" i="0">
-                          <a:solidFill>
-                            <a:srgbClr val="222222"/>
-                          </a:solidFill>
-                          <a:latin typeface="+mn-lt"/>
-                          <a:ea typeface="NanumGothic"/>
-                        </a:rPr>
-                        <a:t>0.988</a:t>
-                      </a:r>
-                    </a:p>
-                  </a:txBody>
-                  <a:tcPr marL="38100" marR="38100" marT="0" marB="0" anchor="ctr">
-                    <a:solidFill>
-                      <a:srgbClr val="F2F4F7"/>
-                    </a:solidFill>
-                  </a:tcPr>
-                </a:tc>
-                <a:tc>
-                  <a:txBody>
-                    <a:bodyPr/>
-                    <a:lstStyle/>
-                    <a:p>
-                      <a:pPr algn="ctr"/>
-                      <a:r>
-                        <a:rPr sz="1800" b="0" i="0">
-                          <a:solidFill>
-                            <a:srgbClr val="222222"/>
-                          </a:solidFill>
-                          <a:latin typeface="+mn-lt"/>
-                          <a:ea typeface="NanumGothic"/>
-                        </a:rPr>
-                        <a:t>0.977</a:t>
-                      </a:r>
-                    </a:p>
-                  </a:txBody>
-                  <a:tcPr marL="38100" marR="38100" marT="0" marB="0" anchor="ctr">
-                    <a:solidFill>
-                      <a:srgbClr val="F2F4F7"/>
-                    </a:solidFill>
-                  </a:tcPr>
-                </a:tc>
-                <a:tc>
-                  <a:txBody>
-                    <a:bodyPr/>
-                    <a:lstStyle/>
-                    <a:p>
-                      <a:pPr algn="ctr"/>
-                      <a:r>
-                        <a:rPr sz="1800" b="1" i="0" dirty="0">
-                          <a:solidFill>
-                            <a:srgbClr val="222222"/>
-                          </a:solidFill>
-                          <a:latin typeface="+mn-lt"/>
-                          <a:ea typeface="NanumGothic"/>
-                        </a:rPr>
-                        <a:t>1.000</a:t>
-                      </a:r>
-                    </a:p>
-                  </a:txBody>
-                  <a:tcPr marL="38100" marR="38100" marT="0" marB="0" anchor="ctr">
-                    <a:solidFill>
-                      <a:srgbClr val="F2F4F7"/>
-                    </a:solidFill>
-                  </a:tcPr>
-                </a:tc>
-                <a:tc>
-                  <a:txBody>
-                    <a:bodyPr/>
-                    <a:lstStyle/>
-                    <a:p>
-                      <a:pPr algn="ctr"/>
-                      <a:r>
-                        <a:rPr sz="1800" b="1" i="0" dirty="0">
-                          <a:solidFill>
-                            <a:srgbClr val="222222"/>
-                          </a:solidFill>
-                          <a:latin typeface="+mn-lt"/>
-                          <a:ea typeface="NanumGothic"/>
-                        </a:rPr>
-                        <a:t>1.000</a:t>
-                      </a:r>
-                    </a:p>
-                  </a:txBody>
-                  <a:tcPr marL="38100" marR="38100" marT="0" marB="0" anchor="ctr">
-                    <a:solidFill>
-                      <a:srgbClr val="F2F4F7"/>
-                    </a:solidFill>
-                  </a:tcPr>
-                </a:tc>
-                <a:tc>
-                  <a:txBody>
-                    <a:bodyPr/>
-                    <a:lstStyle/>
-                    <a:p>
-                      <a:pPr algn="ctr"/>
-                      <a:r>
-                        <a:rPr sz="1800" b="1" i="0" dirty="0">
-                          <a:solidFill>
-                            <a:srgbClr val="222222"/>
-                          </a:solidFill>
-                          <a:latin typeface="+mn-lt"/>
-                          <a:ea typeface="NanumGothic"/>
-                        </a:rPr>
-                        <a:t>1.000</a:t>
-                      </a:r>
-                    </a:p>
-                  </a:txBody>
-                  <a:tcPr marL="38100" marR="38100" marT="0" marB="0" anchor="ctr">
-                    <a:solidFill>
-                      <a:srgbClr val="F2F4F7"/>
-                    </a:solidFill>
-                  </a:tcPr>
-                </a:tc>
-                <a:extLst>
-                  <a:ext uri="{0D108BD9-81ED-4DB2-BD59-A6C34878D82A}">
-                    <a16:rowId xmlns:a16="http://schemas.microsoft.com/office/drawing/2014/main" val="10004"/>
-                  </a:ext>
-                </a:extLst>
-              </a:tr>
-              <a:tr h="447748">
-                <a:tc>
-                  <a:txBody>
-                    <a:bodyPr/>
-                    <a:lstStyle/>
-                    <a:p>
-                      <a:pPr algn="l"/>
-                      <a:r>
-                        <a:rPr sz="1800" b="0" i="0">
-                          <a:solidFill>
-                            <a:srgbClr val="222222"/>
-                          </a:solidFill>
-                          <a:latin typeface="+mn-lt"/>
-                          <a:ea typeface="NanumGothic"/>
-                        </a:rPr>
-                        <a:t>FedSV</a:t>
-                      </a:r>
-                    </a:p>
-                  </a:txBody>
-                  <a:tcPr marL="38100" marR="38100" marT="0" marB="0" anchor="ctr">
-                    <a:solidFill>
-                      <a:srgbClr val="FFFFFF"/>
-                    </a:solidFill>
-                  </a:tcPr>
-                </a:tc>
-                <a:tc>
-                  <a:txBody>
-                    <a:bodyPr/>
-                    <a:lstStyle/>
-                    <a:p>
-                      <a:pPr algn="ctr"/>
-                      <a:r>
-                        <a:rPr sz="1800" b="0" i="0">
-                          <a:solidFill>
-                            <a:srgbClr val="222222"/>
-                          </a:solidFill>
-                          <a:latin typeface="+mn-lt"/>
-                          <a:ea typeface="NanumGothic"/>
-                        </a:rPr>
-                        <a:t>0.910</a:t>
-                      </a:r>
-                    </a:p>
-                  </a:txBody>
-                  <a:tcPr marL="38100" marR="38100" marT="0" marB="0" anchor="ctr">
-                    <a:solidFill>
-                      <a:srgbClr val="FFFFFF"/>
-                    </a:solidFill>
-                  </a:tcPr>
-                </a:tc>
-                <a:tc>
-                  <a:txBody>
-                    <a:bodyPr/>
-                    <a:lstStyle/>
-                    <a:p>
-                      <a:pPr algn="ctr"/>
-                      <a:r>
-                        <a:rPr sz="1800" b="0" i="0">
-                          <a:solidFill>
-                            <a:srgbClr val="222222"/>
-                          </a:solidFill>
-                          <a:latin typeface="+mn-lt"/>
-                          <a:ea typeface="NanumGothic"/>
-                        </a:rPr>
-                        <a:t>0.952</a:t>
-                      </a:r>
-                    </a:p>
-                  </a:txBody>
-                  <a:tcPr marL="38100" marR="38100" marT="0" marB="0" anchor="ctr">
-                    <a:solidFill>
-                      <a:srgbClr val="FFFFFF"/>
-                    </a:solidFill>
-                  </a:tcPr>
-                </a:tc>
-                <a:tc>
-                  <a:txBody>
-                    <a:bodyPr/>
-                    <a:lstStyle/>
-                    <a:p>
-                      <a:pPr algn="ctr"/>
-                      <a:r>
-                        <a:rPr sz="1800" b="0" i="0">
-                          <a:solidFill>
-                            <a:srgbClr val="222222"/>
-                          </a:solidFill>
-                          <a:latin typeface="+mn-lt"/>
-                          <a:ea typeface="NanumGothic"/>
-                        </a:rPr>
-                        <a:t>0.968</a:t>
-                      </a:r>
-                    </a:p>
-                  </a:txBody>
-                  <a:tcPr marL="38100" marR="38100" marT="0" marB="0" anchor="ctr">
-                    <a:solidFill>
-                      <a:srgbClr val="FFFFFF"/>
-                    </a:solidFill>
-                  </a:tcPr>
-                </a:tc>
-                <a:tc>
-                  <a:txBody>
-                    <a:bodyPr/>
-                    <a:lstStyle/>
-                    <a:p>
-                      <a:pPr algn="ctr"/>
-                      <a:r>
-                        <a:rPr sz="1800" b="0" i="0">
-                          <a:solidFill>
-                            <a:srgbClr val="222222"/>
-                          </a:solidFill>
-                          <a:latin typeface="+mn-lt"/>
-                          <a:ea typeface="NanumGothic"/>
-                        </a:rPr>
-                        <a:t>0.700</a:t>
-                      </a:r>
-                    </a:p>
-                  </a:txBody>
-                  <a:tcPr marL="38100" marR="38100" marT="0" marB="0" anchor="ctr">
-                    <a:solidFill>
-                      <a:srgbClr val="FFFFFF"/>
-                    </a:solidFill>
-                  </a:tcPr>
-                </a:tc>
-                <a:tc>
-                  <a:txBody>
-                    <a:bodyPr/>
-                    <a:lstStyle/>
-                    <a:p>
-                      <a:pPr algn="ctr"/>
-                      <a:r>
-                        <a:rPr sz="1800" b="0" i="0" dirty="0">
-                          <a:solidFill>
-                            <a:srgbClr val="222222"/>
-                          </a:solidFill>
-                          <a:latin typeface="+mn-lt"/>
-                          <a:ea typeface="NanumGothic"/>
-                        </a:rPr>
-                        <a:t>0.700</a:t>
-                      </a:r>
-                    </a:p>
-                  </a:txBody>
-                  <a:tcPr marL="38100" marR="38100" marT="0" marB="0" anchor="ctr">
-                    <a:solidFill>
-                      <a:srgbClr val="FFFFFF"/>
-                    </a:solidFill>
-                  </a:tcPr>
-                </a:tc>
-                <a:tc>
-                  <a:txBody>
-                    <a:bodyPr/>
-                    <a:lstStyle/>
-                    <a:p>
-                      <a:pPr algn="ctr"/>
-                      <a:r>
-                        <a:rPr sz="1800" b="0" i="0">
-                          <a:solidFill>
-                            <a:srgbClr val="222222"/>
-                          </a:solidFill>
-                          <a:latin typeface="+mn-lt"/>
-                          <a:ea typeface="NanumGothic"/>
-                        </a:rPr>
-                        <a:t>0.933</a:t>
-                      </a:r>
-                    </a:p>
-                  </a:txBody>
-                  <a:tcPr marL="38100" marR="38100" marT="0" marB="0" anchor="ctr">
-                    <a:solidFill>
-                      <a:srgbClr val="FFFFFF"/>
-                    </a:solidFill>
-                  </a:tcPr>
-                </a:tc>
-                <a:extLst>
-                  <a:ext uri="{0D108BD9-81ED-4DB2-BD59-A6C34878D82A}">
-                    <a16:rowId xmlns:a16="http://schemas.microsoft.com/office/drawing/2014/main" val="10005"/>
-                  </a:ext>
-                </a:extLst>
-              </a:tr>
-              <a:tr h="447748">
-                <a:tc>
-                  <a:txBody>
-                    <a:bodyPr/>
-                    <a:lstStyle/>
-                    <a:p>
-                      <a:pPr algn="l"/>
-                      <a:r>
-                        <a:rPr sz="1800" b="0" i="0">
-                          <a:solidFill>
-                            <a:srgbClr val="222222"/>
-                          </a:solidFill>
-                          <a:latin typeface="+mn-lt"/>
-                          <a:ea typeface="NanumGothic"/>
-                        </a:rPr>
-                        <a:t>ShapleyFL</a:t>
-                      </a:r>
-                    </a:p>
-                  </a:txBody>
-                  <a:tcPr marL="38100" marR="38100" marT="0" marB="0" anchor="ctr">
-                    <a:solidFill>
-                      <a:srgbClr val="F2F4F7"/>
-                    </a:solidFill>
-                  </a:tcPr>
-                </a:tc>
-                <a:tc>
-                  <a:txBody>
-                    <a:bodyPr/>
-                    <a:lstStyle/>
-                    <a:p>
-                      <a:pPr algn="ctr"/>
-                      <a:r>
-                        <a:rPr sz="1800" b="0" i="0">
-                          <a:solidFill>
-                            <a:srgbClr val="222222"/>
-                          </a:solidFill>
-                          <a:latin typeface="+mn-lt"/>
-                          <a:ea typeface="NanumGothic"/>
-                        </a:rPr>
-                        <a:t>0.194</a:t>
-                      </a:r>
-                    </a:p>
-                  </a:txBody>
-                  <a:tcPr marL="38100" marR="38100" marT="0" marB="0" anchor="ctr">
-                    <a:solidFill>
-                      <a:srgbClr val="F2F4F7"/>
-                    </a:solidFill>
-                  </a:tcPr>
-                </a:tc>
-                <a:tc>
-                  <a:txBody>
-                    <a:bodyPr/>
-                    <a:lstStyle/>
-                    <a:p>
-                      <a:pPr algn="ctr"/>
-                      <a:r>
-                        <a:rPr sz="1800" b="0" i="0">
-                          <a:solidFill>
-                            <a:srgbClr val="222222"/>
-                          </a:solidFill>
-                          <a:latin typeface="+mn-lt"/>
-                          <a:ea typeface="NanumGothic"/>
-                        </a:rPr>
-                        <a:t>0.227</a:t>
-                      </a:r>
-                    </a:p>
-                  </a:txBody>
-                  <a:tcPr marL="38100" marR="38100" marT="0" marB="0" anchor="ctr">
-                    <a:solidFill>
-                      <a:srgbClr val="F2F4F7"/>
-                    </a:solidFill>
-                  </a:tcPr>
-                </a:tc>
-                <a:tc>
-                  <a:txBody>
-                    <a:bodyPr/>
-                    <a:lstStyle/>
-                    <a:p>
-                      <a:pPr algn="ctr"/>
-                      <a:r>
-                        <a:rPr sz="1800" b="0" i="0">
-                          <a:solidFill>
-                            <a:srgbClr val="222222"/>
-                          </a:solidFill>
-                          <a:latin typeface="+mn-lt"/>
-                          <a:ea typeface="NanumGothic"/>
-                        </a:rPr>
-                        <a:t>0.406</a:t>
-                      </a:r>
-                    </a:p>
-                  </a:txBody>
-                  <a:tcPr marL="38100" marR="38100" marT="0" marB="0" anchor="ctr">
-                    <a:solidFill>
-                      <a:srgbClr val="F2F4F7"/>
-                    </a:solidFill>
-                  </a:tcPr>
-                </a:tc>
-                <a:tc>
-                  <a:txBody>
-                    <a:bodyPr/>
-                    <a:lstStyle/>
-                    <a:p>
-                      <a:pPr algn="ctr"/>
-                      <a:r>
-                        <a:rPr sz="1800" b="0" i="0" dirty="0">
-                          <a:solidFill>
-                            <a:srgbClr val="222222"/>
-                          </a:solidFill>
-                          <a:latin typeface="+mn-lt"/>
-                          <a:ea typeface="NanumGothic"/>
-                        </a:rPr>
-                        <a:t>0.700</a:t>
-                      </a:r>
-                    </a:p>
-                  </a:txBody>
-                  <a:tcPr marL="38100" marR="38100" marT="0" marB="0" anchor="ctr">
-                    <a:solidFill>
-                      <a:srgbClr val="F2F4F7"/>
-                    </a:solidFill>
-                  </a:tcPr>
-                </a:tc>
-                <a:tc>
-                  <a:txBody>
-                    <a:bodyPr/>
-                    <a:lstStyle/>
-                    <a:p>
-                      <a:pPr algn="ctr"/>
-                      <a:r>
-                        <a:rPr sz="1800" b="0" i="0" dirty="0">
-                          <a:solidFill>
-                            <a:srgbClr val="222222"/>
-                          </a:solidFill>
-                          <a:latin typeface="+mn-lt"/>
-                          <a:ea typeface="NanumGothic"/>
-                        </a:rPr>
-                        <a:t>0.100</a:t>
-                      </a:r>
-                    </a:p>
-                  </a:txBody>
-                  <a:tcPr marL="38100" marR="38100" marT="0" marB="0" anchor="ctr">
-                    <a:solidFill>
-                      <a:srgbClr val="F2F4F7"/>
-                    </a:solidFill>
-                  </a:tcPr>
-                </a:tc>
-                <a:tc>
-                  <a:txBody>
-                    <a:bodyPr/>
-                    <a:lstStyle/>
-                    <a:p>
-                      <a:pPr algn="ctr"/>
-                      <a:r>
-                        <a:rPr sz="1800" b="0" i="0" dirty="0">
-                          <a:solidFill>
-                            <a:srgbClr val="222222"/>
-                          </a:solidFill>
-                          <a:latin typeface="+mn-lt"/>
-                          <a:ea typeface="NanumGothic"/>
-                        </a:rPr>
-                        <a:t>0.833</a:t>
-                      </a:r>
-                    </a:p>
-                  </a:txBody>
-                  <a:tcPr marL="38100" marR="38100" marT="0" marB="0" anchor="ctr">
-                    <a:solidFill>
-                      <a:srgbClr val="F2F4F7"/>
-                    </a:solidFill>
-                  </a:tcPr>
-                </a:tc>
-                <a:extLst>
-                  <a:ext uri="{0D108BD9-81ED-4DB2-BD59-A6C34878D82A}">
-                    <a16:rowId xmlns:a16="http://schemas.microsoft.com/office/drawing/2014/main" val="10006"/>
-                  </a:ext>
-                </a:extLst>
-              </a:tr>
-              <a:tr h="447748">
-                <a:tc>
-                  <a:txBody>
-                    <a:bodyPr/>
-                    <a:lstStyle/>
-                    <a:p>
-                      <a:pPr algn="l"/>
-                      <a:r>
-                        <a:rPr sz="1800" b="0" i="0">
-                          <a:solidFill>
-                            <a:srgbClr val="222222"/>
-                          </a:solidFill>
-                          <a:latin typeface="+mn-lt"/>
-                          <a:ea typeface="NanumGothic"/>
-                        </a:rPr>
-                        <a:t>FedIF</a:t>
-                      </a:r>
-                    </a:p>
-                  </a:txBody>
-                  <a:tcPr marL="38100" marR="38100" marT="0" marB="0" anchor="ctr">
-                    <a:solidFill>
-                      <a:srgbClr val="FFFFFF"/>
-                    </a:solidFill>
-                  </a:tcPr>
-                </a:tc>
-                <a:tc>
-                  <a:txBody>
-                    <a:bodyPr/>
-                    <a:lstStyle/>
-                    <a:p>
-                      <a:pPr algn="ctr"/>
-                      <a:r>
-                        <a:rPr sz="1800" b="0" i="0">
-                          <a:solidFill>
-                            <a:srgbClr val="222222"/>
-                          </a:solidFill>
-                          <a:latin typeface="+mn-lt"/>
-                          <a:ea typeface="NanumGothic"/>
-                        </a:rPr>
-                        <a:t>0.157</a:t>
-                      </a:r>
-                    </a:p>
-                  </a:txBody>
-                  <a:tcPr marL="38100" marR="38100" marT="0" marB="0" anchor="ctr">
-                    <a:solidFill>
-                      <a:srgbClr val="FFFFFF"/>
-                    </a:solidFill>
-                  </a:tcPr>
-                </a:tc>
-                <a:tc>
-                  <a:txBody>
-                    <a:bodyPr/>
-                    <a:lstStyle/>
-                    <a:p>
-                      <a:pPr algn="ctr"/>
-                      <a:r>
-                        <a:rPr sz="1800" b="0" i="0">
-                          <a:solidFill>
-                            <a:srgbClr val="222222"/>
-                          </a:solidFill>
-                          <a:latin typeface="+mn-lt"/>
-                          <a:ea typeface="NanumGothic"/>
-                        </a:rPr>
-                        <a:t>0.211</a:t>
-                      </a:r>
-                    </a:p>
-                  </a:txBody>
-                  <a:tcPr marL="38100" marR="38100" marT="0" marB="0" anchor="ctr">
-                    <a:solidFill>
-                      <a:srgbClr val="FFFFFF"/>
-                    </a:solidFill>
-                  </a:tcPr>
-                </a:tc>
-                <a:tc>
-                  <a:txBody>
-                    <a:bodyPr/>
-                    <a:lstStyle/>
-                    <a:p>
-                      <a:pPr algn="ctr"/>
-                      <a:r>
-                        <a:rPr sz="1800" b="0" i="0">
-                          <a:solidFill>
-                            <a:srgbClr val="222222"/>
-                          </a:solidFill>
-                          <a:latin typeface="+mn-lt"/>
-                          <a:ea typeface="NanumGothic"/>
-                        </a:rPr>
-                        <a:t>0.480</a:t>
-                      </a:r>
-                    </a:p>
-                  </a:txBody>
-                  <a:tcPr marL="38100" marR="38100" marT="0" marB="0" anchor="ctr">
-                    <a:solidFill>
-                      <a:srgbClr val="FFFFFF"/>
-                    </a:solidFill>
-                  </a:tcPr>
-                </a:tc>
-                <a:tc>
-                  <a:txBody>
-                    <a:bodyPr/>
-                    <a:lstStyle/>
-                    <a:p>
-                      <a:pPr algn="ctr"/>
-                      <a:r>
-                        <a:rPr sz="1800" b="0" i="0">
-                          <a:solidFill>
-                            <a:srgbClr val="222222"/>
-                          </a:solidFill>
-                          <a:latin typeface="+mn-lt"/>
-                          <a:ea typeface="NanumGothic"/>
-                        </a:rPr>
-                        <a:t>0.067</a:t>
-                      </a:r>
-                    </a:p>
-                  </a:txBody>
-                  <a:tcPr marL="38100" marR="38100" marT="0" marB="0" anchor="ctr">
-                    <a:solidFill>
-                      <a:srgbClr val="FFFFFF"/>
-                    </a:solidFill>
-                  </a:tcPr>
-                </a:tc>
-                <a:tc>
-                  <a:txBody>
-                    <a:bodyPr/>
-                    <a:lstStyle/>
-                    <a:p>
-                      <a:pPr algn="ctr"/>
-                      <a:r>
-                        <a:rPr sz="1800" b="0" i="0">
-                          <a:solidFill>
-                            <a:srgbClr val="222222"/>
-                          </a:solidFill>
-                          <a:latin typeface="+mn-lt"/>
-                          <a:ea typeface="NanumGothic"/>
-                        </a:rPr>
-                        <a:t>0.067</a:t>
-                      </a:r>
-                    </a:p>
-                  </a:txBody>
-                  <a:tcPr marL="38100" marR="38100" marT="0" marB="0" anchor="ctr">
-                    <a:solidFill>
-                      <a:srgbClr val="FFFFFF"/>
-                    </a:solidFill>
-                  </a:tcPr>
-                </a:tc>
-                <a:tc>
-                  <a:txBody>
-                    <a:bodyPr/>
-                    <a:lstStyle/>
-                    <a:p>
-                      <a:pPr algn="ctr"/>
-                      <a:r>
-                        <a:rPr sz="1800" b="0" i="0" dirty="0">
-                          <a:solidFill>
-                            <a:srgbClr val="222222"/>
-                          </a:solidFill>
-                          <a:latin typeface="+mn-lt"/>
-                          <a:ea typeface="NanumGothic"/>
-                        </a:rPr>
-                        <a:t>0.200</a:t>
-                      </a:r>
-                    </a:p>
-                  </a:txBody>
-                  <a:tcPr marL="38100" marR="38100" marT="0" marB="0" anchor="ctr">
-                    <a:solidFill>
-                      <a:srgbClr val="FFFFFF"/>
-                    </a:solidFill>
-                  </a:tcPr>
-                </a:tc>
-                <a:extLst>
-                  <a:ext uri="{0D108BD9-81ED-4DB2-BD59-A6C34878D82A}">
-                    <a16:rowId xmlns:a16="http://schemas.microsoft.com/office/drawing/2014/main" val="10007"/>
-                  </a:ext>
-                </a:extLst>
-              </a:tr>
-            </a:tbl>
-          </a:graphicData>
-        </a:graphic>
-      </p:graphicFrame>
-    </p:spTree>
-  </p:cSld>
-  <p:clrMapOvr>
-    <a:masterClrMapping/>
-  </p:clrMapOvr>
-</p:sld>
-</file>
-
-<file path=ppt/slides/slide9.xml><?xml version="1.0" encoding="utf-8"?>
-<p:sld xmlns:a="http://schemas.openxmlformats.org/drawingml/2006/main" xmlns:r="http://schemas.openxmlformats.org/officeDocument/2006/relationships" xmlns:p="http://schemas.openxmlformats.org/presentationml/2006/main">
-  <p:cSld>
-    <p:spTree>
-      <p:nvGrpSpPr>
-        <p:cNvPr id="1" name=""/>
-        <p:cNvGrpSpPr/>
-        <p:nvPr/>
-      </p:nvGrpSpPr>
-      <p:grpSpPr>
-        <a:xfrm>
-          <a:off x="0" y="0"/>
-          <a:ext cx="0" cy="0"/>
-          <a:chOff x="0" y="0"/>
-          <a:chExt cx="0" cy="0"/>
-        </a:xfrm>
-      </p:grpSpPr>
-      <p:sp>
-        <p:nvSpPr>
-          <p:cNvPr id="2" name="TextBox 1"/>
-          <p:cNvSpPr txBox="1"/>
-          <p:nvPr/>
-        </p:nvSpPr>
-        <p:spPr>
-          <a:xfrm>
-            <a:off x="411480" y="292608"/>
-            <a:ext cx="11338560" cy="641201"/>
-          </a:xfrm>
-          <a:prstGeom prst="rect">
-            <a:avLst/>
-          </a:prstGeom>
-          <a:noFill/>
-        </p:spPr>
-        <p:txBody>
-          <a:bodyPr wrap="square" lIns="25400" tIns="12700" rIns="25400" bIns="12700" anchor="t">
-            <a:spAutoFit/>
-          </a:bodyPr>
-          <a:lstStyle/>
-          <a:p>
-            <a:pPr algn="l">
-              <a:lnSpc>
-                <a:spcPct val="100000"/>
-              </a:lnSpc>
-            </a:pPr>
-            <a:r>
-              <a:rPr sz="4000" b="1" i="0" dirty="0">
-                <a:solidFill>
-                  <a:srgbClr val="1F2A37"/>
-                </a:solidFill>
-                <a:latin typeface="+mj-lt"/>
-                <a:ea typeface="NanumGothic"/>
-              </a:rPr>
-              <a:t>Fidelity (CNN)</a:t>
-            </a:r>
-          </a:p>
-        </p:txBody>
-      </p:sp>
-      <p:sp>
-        <p:nvSpPr>
-          <p:cNvPr id="3" name="TextBox 2"/>
-          <p:cNvSpPr txBox="1"/>
-          <p:nvPr/>
-        </p:nvSpPr>
-        <p:spPr>
-          <a:xfrm>
-            <a:off x="411480" y="1078992"/>
-            <a:ext cx="11338560" cy="589777"/>
-          </a:xfrm>
-          <a:prstGeom prst="rect">
-            <a:avLst/>
-          </a:prstGeom>
-          <a:noFill/>
-        </p:spPr>
-        <p:txBody>
-          <a:bodyPr wrap="square" lIns="25400" tIns="12700" rIns="25400" bIns="12700" anchor="t">
-            <a:spAutoFit/>
-          </a:bodyPr>
-          <a:lstStyle/>
-          <a:p>
-            <a:pPr>
-              <a:lnSpc>
-                <a:spcPct val="105000"/>
-              </a:lnSpc>
-            </a:pPr>
-            <a:r>
-              <a:rPr lang="en-US" altLang="ko-KR" dirty="0">
-                <a:solidFill>
-                  <a:srgbClr val="3C4654"/>
-                </a:solidFill>
-                <a:ea typeface="NanumGothic"/>
-              </a:rPr>
-              <a:t>Exact</a:t>
-            </a:r>
-            <a:r>
-              <a:rPr b="0" i="0" dirty="0">
-                <a:solidFill>
-                  <a:srgbClr val="3C4654"/>
-                </a:solidFill>
-                <a:ea typeface="NanumGothic"/>
-              </a:rPr>
-              <a:t> in-run </a:t>
-            </a:r>
-            <a:r>
-              <a:rPr lang="en-US" altLang="ko-KR" dirty="0" err="1">
-                <a:solidFill>
-                  <a:srgbClr val="3C4654"/>
-                </a:solidFill>
-                <a:ea typeface="NanumGothic"/>
-              </a:rPr>
-              <a:t>shapley</a:t>
-            </a:r>
-            <a:r>
-              <a:rPr lang="en-US" altLang="ko-KR" dirty="0">
-                <a:solidFill>
-                  <a:srgbClr val="3C4654"/>
-                </a:solidFill>
-                <a:ea typeface="NanumGothic"/>
-              </a:rPr>
-              <a:t> value </a:t>
-            </a:r>
-            <a:r>
-              <a:rPr b="0" i="0" dirty="0" err="1">
-                <a:solidFill>
-                  <a:srgbClr val="3C4654"/>
-                </a:solidFill>
-                <a:ea typeface="NanumGothic"/>
-              </a:rPr>
-              <a:t>대비</a:t>
-            </a:r>
-            <a:r>
-              <a:rPr b="0" i="0" dirty="0">
-                <a:solidFill>
-                  <a:srgbClr val="3C4654"/>
-                </a:solidFill>
-                <a:ea typeface="NanumGothic"/>
-              </a:rPr>
-              <a:t> </a:t>
-            </a:r>
-            <a:r>
-              <a:rPr lang="en-US" b="0" i="0" dirty="0">
-                <a:solidFill>
-                  <a:srgbClr val="3C4654"/>
-                </a:solidFill>
-                <a:ea typeface="NanumGothic"/>
-              </a:rPr>
-              <a:t>Spearman, Pearson </a:t>
-            </a:r>
-            <a:r>
-              <a:rPr lang="en-US" altLang="ko-KR" dirty="0">
-                <a:solidFill>
-                  <a:srgbClr val="3C4654"/>
-                </a:solidFill>
-                <a:ea typeface="NanumGothic"/>
-              </a:rPr>
-              <a:t>(↑)</a:t>
-            </a:r>
-            <a:endParaRPr lang="en-US" b="0" i="0" dirty="0">
-              <a:solidFill>
-                <a:srgbClr val="3C4654"/>
-              </a:solidFill>
-              <a:ea typeface="NanumGothic"/>
-            </a:endParaRPr>
-          </a:p>
-          <a:p>
-            <a:pPr>
-              <a:lnSpc>
-                <a:spcPct val="105000"/>
-              </a:lnSpc>
-            </a:pPr>
-            <a:r>
-              <a:rPr lang="en-US" b="0" i="0" dirty="0">
-                <a:solidFill>
-                  <a:srgbClr val="3C4654"/>
-                </a:solidFill>
-                <a:ea typeface="NanumGothic"/>
-              </a:rPr>
-              <a:t>C</a:t>
-            </a:r>
-            <a:r>
-              <a:rPr b="0" i="0" dirty="0">
-                <a:solidFill>
-                  <a:srgbClr val="3C4654"/>
-                </a:solidFill>
-                <a:ea typeface="NanumGothic"/>
-              </a:rPr>
-              <a:t>ross-silo N=10 × 3</a:t>
-            </a:r>
-            <a:r>
-              <a:rPr lang="ko-KR" altLang="en-US" b="0" i="0" dirty="0">
-                <a:solidFill>
-                  <a:srgbClr val="3C4654"/>
-                </a:solidFill>
-                <a:ea typeface="NanumGothic"/>
-              </a:rPr>
-              <a:t> </a:t>
-            </a:r>
-            <a:r>
-              <a:rPr b="0" i="0" dirty="0">
-                <a:solidFill>
-                  <a:srgbClr val="3C4654"/>
-                </a:solidFill>
-                <a:ea typeface="NanumGothic"/>
-              </a:rPr>
-              <a:t>seed.</a:t>
-            </a:r>
-          </a:p>
-        </p:txBody>
-      </p:sp>
-      <p:graphicFrame>
-        <p:nvGraphicFramePr>
-          <p:cNvPr id="4" name="Table 3"/>
-          <p:cNvGraphicFramePr>
-            <a:graphicFrameLocks noGrp="1"/>
-          </p:cNvGraphicFramePr>
-          <p:nvPr>
-            <p:extLst>
-              <p:ext uri="{D42A27DB-BD31-4B8C-83A1-F6EECF244321}">
-                <p14:modId xmlns:p14="http://schemas.microsoft.com/office/powerpoint/2010/main" val="1432130568"/>
-              </p:ext>
-            </p:extLst>
-          </p:nvPr>
-        </p:nvGraphicFramePr>
-        <p:xfrm>
-          <a:off x="411480" y="1930790"/>
-          <a:ext cx="9312812" cy="4302958"/>
-        </p:xfrm>
-        <a:graphic>
-          <a:graphicData uri="http://schemas.openxmlformats.org/drawingml/2006/table">
-            <a:tbl>
-              <a:tblPr>
-                <a:tableStyleId>{5C22544A-7EE6-4342-B048-85BDC9FD1C3A}</a:tableStyleId>
-              </a:tblPr>
-              <a:tblGrid>
-                <a:gridCol w="2739062">
-                  <a:extLst>
-                    <a:ext uri="{9D8B030D-6E8A-4147-A177-3AD203B41FA5}">
-                      <a16:colId xmlns:a16="http://schemas.microsoft.com/office/drawing/2014/main" val="20000"/>
-                    </a:ext>
-                  </a:extLst>
-                </a:gridCol>
-                <a:gridCol w="3286875">
-                  <a:extLst>
-                    <a:ext uri="{9D8B030D-6E8A-4147-A177-3AD203B41FA5}">
-                      <a16:colId xmlns:a16="http://schemas.microsoft.com/office/drawing/2014/main" val="20002"/>
-                    </a:ext>
-                  </a:extLst>
-                </a:gridCol>
-                <a:gridCol w="3286875">
-                  <a:extLst>
-                    <a:ext uri="{9D8B030D-6E8A-4147-A177-3AD203B41FA5}">
-                      <a16:colId xmlns:a16="http://schemas.microsoft.com/office/drawing/2014/main" val="20003"/>
-                    </a:ext>
-                  </a:extLst>
-                </a:gridCol>
-              </a:tblGrid>
-              <a:tr h="391178">
-                <a:tc>
-                  <a:txBody>
-                    <a:bodyPr/>
-                    <a:lstStyle/>
-                    <a:p>
-                      <a:pPr algn="l"/>
-                      <a:r>
-                        <a:rPr sz="1800" b="1" i="0" dirty="0">
-                          <a:solidFill>
-                            <a:srgbClr val="FFFFFF"/>
-                          </a:solidFill>
-                          <a:latin typeface="+mn-lt"/>
-                          <a:ea typeface="NanumGothic"/>
-                        </a:rPr>
-                        <a:t>method</a:t>
-                      </a:r>
-                    </a:p>
-                  </a:txBody>
-                  <a:tcPr marL="38100" marR="38100" marT="12700" marB="12700" anchor="ctr">
-                    <a:solidFill>
-                      <a:srgbClr val="33475B"/>
-                    </a:solidFill>
-                  </a:tcPr>
-                </a:tc>
-                <a:tc>
-                  <a:txBody>
-                    <a:bodyPr/>
-                    <a:lstStyle/>
-                    <a:p>
-                      <a:pPr algn="ctr"/>
-                      <a:r>
-                        <a:rPr sz="1800" b="1" i="0" dirty="0">
-                          <a:solidFill>
-                            <a:srgbClr val="FFFFFF"/>
-                          </a:solidFill>
-                          <a:latin typeface="+mn-lt"/>
-                          <a:ea typeface="NanumGothic"/>
-                        </a:rPr>
-                        <a:t>vs (b) Spearman ↑</a:t>
-                      </a:r>
-                    </a:p>
-                  </a:txBody>
-                  <a:tcPr marL="38100" marR="38100" marT="12700" marB="12700" anchor="ctr">
-                    <a:solidFill>
-                      <a:srgbClr val="33475B"/>
-                    </a:solidFill>
-                  </a:tcPr>
-                </a:tc>
-                <a:tc>
-                  <a:txBody>
-                    <a:bodyPr/>
-                    <a:lstStyle/>
-                    <a:p>
-                      <a:pPr algn="ctr"/>
-                      <a:r>
-                        <a:rPr sz="1800" b="1" i="0" dirty="0">
-                          <a:solidFill>
-                            <a:srgbClr val="FFFFFF"/>
-                          </a:solidFill>
-                          <a:latin typeface="+mn-lt"/>
-                          <a:ea typeface="NanumGothic"/>
-                        </a:rPr>
-                        <a:t>vs (b) Pearson ↑</a:t>
-                      </a:r>
-                    </a:p>
-                  </a:txBody>
-                  <a:tcPr marL="38100" marR="38100" marT="12700" marB="12700" anchor="ctr">
-                    <a:solidFill>
-                      <a:srgbClr val="33475B"/>
-                    </a:solidFill>
-                  </a:tcPr>
-                </a:tc>
-                <a:extLst>
-                  <a:ext uri="{0D108BD9-81ED-4DB2-BD59-A6C34878D82A}">
-                    <a16:rowId xmlns:a16="http://schemas.microsoft.com/office/drawing/2014/main" val="10000"/>
-                  </a:ext>
-                </a:extLst>
-              </a:tr>
-              <a:tr h="391178">
-                <a:tc>
-                  <a:txBody>
-                    <a:bodyPr/>
-                    <a:lstStyle/>
-                    <a:p>
-                      <a:pPr algn="l"/>
-                      <a:r>
-                        <a:rPr sz="1800" b="0" i="0" dirty="0" err="1">
-                          <a:solidFill>
-                            <a:srgbClr val="222222"/>
-                          </a:solidFill>
-                          <a:latin typeface="+mn-lt"/>
-                          <a:ea typeface="NanumGothic"/>
-                        </a:rPr>
-                        <a:t>Flirds</a:t>
-                      </a:r>
-                      <a:endParaRPr sz="1800" b="0" i="0" dirty="0">
-                        <a:solidFill>
-                          <a:srgbClr val="222222"/>
-                        </a:solidFill>
-                        <a:latin typeface="+mn-lt"/>
-                        <a:ea typeface="NanumGothic"/>
-                      </a:endParaRPr>
-                    </a:p>
-                  </a:txBody>
-                  <a:tcPr marL="38100" marR="38100" marT="0" marB="0" anchor="ctr">
-                    <a:solidFill>
-                      <a:srgbClr val="FFFFFF"/>
-                    </a:solidFill>
-                  </a:tcPr>
-                </a:tc>
-                <a:tc>
-                  <a:txBody>
-                    <a:bodyPr/>
-                    <a:lstStyle/>
-                    <a:p>
-                      <a:pPr algn="ctr"/>
-                      <a:r>
-                        <a:rPr sz="1800" b="0" i="0" u="sng" dirty="0">
-                          <a:solidFill>
-                            <a:srgbClr val="222222"/>
-                          </a:solidFill>
-                          <a:latin typeface="+mn-lt"/>
-                          <a:ea typeface="NanumGothic"/>
-                        </a:rPr>
-                        <a:t>0.919</a:t>
-                      </a:r>
-                    </a:p>
-                  </a:txBody>
-                  <a:tcPr marL="38100" marR="38100" marT="0" marB="0" anchor="ctr">
-                    <a:solidFill>
-                      <a:srgbClr val="FFFFFF"/>
-                    </a:solidFill>
-                  </a:tcPr>
-                </a:tc>
-                <a:tc>
-                  <a:txBody>
-                    <a:bodyPr/>
-                    <a:lstStyle/>
-                    <a:p>
-                      <a:pPr algn="ctr"/>
-                      <a:r>
-                        <a:rPr sz="1800" b="0" i="0" u="sng" dirty="0">
-                          <a:solidFill>
-                            <a:srgbClr val="222222"/>
-                          </a:solidFill>
-                          <a:latin typeface="+mn-lt"/>
-                          <a:ea typeface="NanumGothic"/>
-                        </a:rPr>
-                        <a:t>0.934</a:t>
-                      </a:r>
-                    </a:p>
-                  </a:txBody>
-                  <a:tcPr marL="38100" marR="38100" marT="0" marB="0" anchor="ctr">
-                    <a:solidFill>
-                      <a:srgbClr val="FFFFFF"/>
-                    </a:solidFill>
-                  </a:tcPr>
-                </a:tc>
-                <a:extLst>
-                  <a:ext uri="{0D108BD9-81ED-4DB2-BD59-A6C34878D82A}">
-                    <a16:rowId xmlns:a16="http://schemas.microsoft.com/office/drawing/2014/main" val="10001"/>
-                  </a:ext>
-                </a:extLst>
-              </a:tr>
-              <a:tr h="391178">
-                <a:tc>
-                  <a:txBody>
-                    <a:bodyPr/>
-                    <a:lstStyle/>
-                    <a:p>
-                      <a:pPr algn="l"/>
-                      <a:r>
-                        <a:rPr sz="1800" b="0" i="0" dirty="0">
-                          <a:solidFill>
-                            <a:srgbClr val="222222"/>
-                          </a:solidFill>
-                          <a:latin typeface="+mn-lt"/>
-                          <a:ea typeface="NanumGothic"/>
-                        </a:rPr>
-                        <a:t>Flirds-1st</a:t>
-                      </a:r>
-                    </a:p>
-                  </a:txBody>
-                  <a:tcPr marL="38100" marR="38100" marT="0" marB="0" anchor="ctr">
-                    <a:solidFill>
-                      <a:srgbClr val="F2F4F7"/>
-                    </a:solidFill>
-                  </a:tcPr>
-                </a:tc>
-                <a:tc>
-                  <a:txBody>
-                    <a:bodyPr/>
-                    <a:lstStyle/>
-                    <a:p>
-                      <a:pPr algn="ctr"/>
-                      <a:r>
-                        <a:rPr sz="1800" b="0" i="0">
-                          <a:solidFill>
-                            <a:srgbClr val="222222"/>
-                          </a:solidFill>
-                          <a:latin typeface="+mn-lt"/>
-                          <a:ea typeface="NanumGothic"/>
-                        </a:rPr>
-                        <a:t>0.832</a:t>
-                      </a:r>
-                    </a:p>
-                  </a:txBody>
-                  <a:tcPr marL="38100" marR="38100" marT="0" marB="0" anchor="ctr">
-                    <a:solidFill>
-                      <a:srgbClr val="F2F4F7"/>
-                    </a:solidFill>
-                  </a:tcPr>
-                </a:tc>
-                <a:tc>
-                  <a:txBody>
-                    <a:bodyPr/>
-                    <a:lstStyle/>
-                    <a:p>
-                      <a:pPr algn="ctr"/>
-                      <a:r>
-                        <a:rPr sz="1800" b="0" i="0">
-                          <a:solidFill>
-                            <a:srgbClr val="222222"/>
-                          </a:solidFill>
-                          <a:latin typeface="+mn-lt"/>
-                          <a:ea typeface="NanumGothic"/>
-                        </a:rPr>
-                        <a:t>0.853</a:t>
-                      </a:r>
-                    </a:p>
-                  </a:txBody>
-                  <a:tcPr marL="38100" marR="38100" marT="0" marB="0" anchor="ctr">
-                    <a:solidFill>
-                      <a:srgbClr val="F2F4F7"/>
-                    </a:solidFill>
-                  </a:tcPr>
-                </a:tc>
-                <a:extLst>
-                  <a:ext uri="{0D108BD9-81ED-4DB2-BD59-A6C34878D82A}">
-                    <a16:rowId xmlns:a16="http://schemas.microsoft.com/office/drawing/2014/main" val="10002"/>
-                  </a:ext>
-                </a:extLst>
-              </a:tr>
-              <a:tr h="391178">
-                <a:tc>
-                  <a:txBody>
-                    <a:bodyPr/>
-                    <a:lstStyle/>
-                    <a:p>
-                      <a:pPr algn="l"/>
-                      <a:r>
-                        <a:rPr sz="1800" b="0" i="0">
-                          <a:solidFill>
-                            <a:srgbClr val="222222"/>
-                          </a:solidFill>
-                          <a:latin typeface="+mn-lt"/>
-                          <a:ea typeface="NanumGothic"/>
-                        </a:rPr>
-                        <a:t>loss-heur</a:t>
-                      </a:r>
-                    </a:p>
-                  </a:txBody>
-                  <a:tcPr marL="38100" marR="38100" marT="0" marB="0" anchor="ctr">
-                    <a:solidFill>
-                      <a:srgbClr val="FFFFFF"/>
-                    </a:solidFill>
-                  </a:tcPr>
-                </a:tc>
-                <a:tc>
-                  <a:txBody>
-                    <a:bodyPr/>
-                    <a:lstStyle/>
-                    <a:p>
-                      <a:pPr algn="ctr"/>
-                      <a:r>
-                        <a:rPr sz="1800" b="0" i="0">
-                          <a:solidFill>
-                            <a:srgbClr val="222222"/>
-                          </a:solidFill>
-                          <a:latin typeface="+mn-lt"/>
-                          <a:ea typeface="NanumGothic"/>
-                        </a:rPr>
-                        <a:t>0.860</a:t>
-                      </a:r>
-                    </a:p>
-                  </a:txBody>
-                  <a:tcPr marL="38100" marR="38100" marT="0" marB="0" anchor="ctr">
-                    <a:solidFill>
-                      <a:srgbClr val="FFFFFF"/>
-                    </a:solidFill>
-                  </a:tcPr>
-                </a:tc>
-                <a:tc>
-                  <a:txBody>
-                    <a:bodyPr/>
-                    <a:lstStyle/>
-                    <a:p>
-                      <a:pPr algn="ctr"/>
-                      <a:r>
-                        <a:rPr sz="1800" b="0" i="0">
-                          <a:solidFill>
-                            <a:srgbClr val="222222"/>
-                          </a:solidFill>
-                          <a:latin typeface="+mn-lt"/>
-                          <a:ea typeface="NanumGothic"/>
-                        </a:rPr>
-                        <a:t>0.885</a:t>
-                      </a:r>
-                    </a:p>
-                  </a:txBody>
-                  <a:tcPr marL="38100" marR="38100" marT="0" marB="0" anchor="ctr">
-                    <a:solidFill>
-                      <a:srgbClr val="FFFFFF"/>
-                    </a:solidFill>
-                  </a:tcPr>
-                </a:tc>
-                <a:extLst>
-                  <a:ext uri="{0D108BD9-81ED-4DB2-BD59-A6C34878D82A}">
-                    <a16:rowId xmlns:a16="http://schemas.microsoft.com/office/drawing/2014/main" val="10003"/>
-                  </a:ext>
-                </a:extLst>
-              </a:tr>
-              <a:tr h="391178">
-                <a:tc>
-                  <a:txBody>
-                    <a:bodyPr/>
-                    <a:lstStyle/>
-                    <a:p>
-                      <a:pPr algn="l"/>
-                      <a:r>
-                        <a:rPr sz="1800" b="0" i="0">
-                          <a:solidFill>
-                            <a:srgbClr val="222222"/>
-                          </a:solidFill>
-                          <a:latin typeface="+mn-lt"/>
-                          <a:ea typeface="NanumGothic"/>
-                        </a:rPr>
-                        <a:t>Banzhaf</a:t>
-                      </a:r>
-                    </a:p>
-                  </a:txBody>
-                  <a:tcPr marL="38100" marR="38100" marT="0" marB="0" anchor="ctr">
-                    <a:solidFill>
-                      <a:srgbClr val="F2F4F7"/>
-                    </a:solidFill>
-                  </a:tcPr>
-                </a:tc>
-                <a:tc>
-                  <a:txBody>
-                    <a:bodyPr/>
-                    <a:lstStyle/>
-                    <a:p>
-                      <a:pPr algn="ctr"/>
-                      <a:r>
-                        <a:rPr sz="1800" b="1" i="0" dirty="0">
-                          <a:solidFill>
-                            <a:srgbClr val="222222"/>
-                          </a:solidFill>
-                          <a:latin typeface="+mn-lt"/>
-                          <a:ea typeface="NanumGothic"/>
-                        </a:rPr>
-                        <a:t>0.989</a:t>
-                      </a:r>
-                    </a:p>
-                  </a:txBody>
-                  <a:tcPr marL="38100" marR="38100" marT="0" marB="0" anchor="ctr">
-                    <a:solidFill>
-                      <a:srgbClr val="F2F4F7"/>
-                    </a:solidFill>
-                  </a:tcPr>
-                </a:tc>
-                <a:tc>
-                  <a:txBody>
-                    <a:bodyPr/>
-                    <a:lstStyle/>
-                    <a:p>
-                      <a:pPr algn="ctr"/>
-                      <a:r>
-                        <a:rPr sz="1800" b="1" i="0" dirty="0">
-                          <a:solidFill>
-                            <a:srgbClr val="222222"/>
-                          </a:solidFill>
-                          <a:latin typeface="+mn-lt"/>
-                          <a:ea typeface="NanumGothic"/>
-                        </a:rPr>
-                        <a:t>0.998</a:t>
-                      </a:r>
-                    </a:p>
-                  </a:txBody>
-                  <a:tcPr marL="38100" marR="38100" marT="0" marB="0" anchor="ctr">
-                    <a:solidFill>
-                      <a:srgbClr val="F2F4F7"/>
-                    </a:solidFill>
-                  </a:tcPr>
-                </a:tc>
-                <a:extLst>
-                  <a:ext uri="{0D108BD9-81ED-4DB2-BD59-A6C34878D82A}">
-                    <a16:rowId xmlns:a16="http://schemas.microsoft.com/office/drawing/2014/main" val="10004"/>
-                  </a:ext>
-                </a:extLst>
-              </a:tr>
-              <a:tr h="391178">
-                <a:tc>
-                  <a:txBody>
-                    <a:bodyPr/>
-                    <a:lstStyle/>
-                    <a:p>
-                      <a:pPr algn="l"/>
-                      <a:r>
-                        <a:rPr sz="1800" b="0" i="0">
-                          <a:solidFill>
-                            <a:srgbClr val="222222"/>
-                          </a:solidFill>
-                          <a:latin typeface="+mn-lt"/>
-                          <a:ea typeface="NanumGothic"/>
-                        </a:rPr>
-                        <a:t>GTG</a:t>
-                      </a:r>
-                    </a:p>
-                  </a:txBody>
-                  <a:tcPr marL="38100" marR="38100" marT="0" marB="0" anchor="ctr">
-                    <a:solidFill>
-                      <a:srgbClr val="FFFFFF"/>
-                    </a:solidFill>
-                  </a:tcPr>
-                </a:tc>
-                <a:tc>
-                  <a:txBody>
-                    <a:bodyPr/>
-                    <a:lstStyle/>
-                    <a:p>
-                      <a:pPr algn="ctr"/>
-                      <a:r>
-                        <a:rPr sz="1800" b="0" i="0" dirty="0">
-                          <a:solidFill>
-                            <a:srgbClr val="222222"/>
-                          </a:solidFill>
-                          <a:latin typeface="+mn-lt"/>
-                          <a:ea typeface="NanumGothic"/>
-                        </a:rPr>
-                        <a:t>0.569</a:t>
-                      </a:r>
-                    </a:p>
-                  </a:txBody>
-                  <a:tcPr marL="38100" marR="38100" marT="0" marB="0" anchor="ctr">
-                    <a:solidFill>
-                      <a:srgbClr val="FFFFFF"/>
-                    </a:solidFill>
-                  </a:tcPr>
-                </a:tc>
-                <a:tc>
-                  <a:txBody>
-                    <a:bodyPr/>
-                    <a:lstStyle/>
-                    <a:p>
-                      <a:pPr algn="ctr"/>
-                      <a:r>
-                        <a:rPr sz="1800" b="0" i="0">
-                          <a:solidFill>
-                            <a:srgbClr val="222222"/>
-                          </a:solidFill>
-                          <a:latin typeface="+mn-lt"/>
-                          <a:ea typeface="NanumGothic"/>
-                        </a:rPr>
-                        <a:t>0.612</a:t>
-                      </a:r>
-                    </a:p>
-                  </a:txBody>
-                  <a:tcPr marL="38100" marR="38100" marT="0" marB="0" anchor="ctr">
-                    <a:solidFill>
-                      <a:srgbClr val="FFFFFF"/>
-                    </a:solidFill>
-                  </a:tcPr>
-                </a:tc>
-                <a:extLst>
-                  <a:ext uri="{0D108BD9-81ED-4DB2-BD59-A6C34878D82A}">
-                    <a16:rowId xmlns:a16="http://schemas.microsoft.com/office/drawing/2014/main" val="10005"/>
-                  </a:ext>
-                </a:extLst>
-              </a:tr>
-              <a:tr h="391178">
-                <a:tc>
-                  <a:txBody>
-                    <a:bodyPr/>
-                    <a:lstStyle/>
-                    <a:p>
-                      <a:pPr algn="l"/>
-                      <a:r>
-                        <a:rPr sz="1800" b="0" i="0">
-                          <a:solidFill>
-                            <a:srgbClr val="222222"/>
-                          </a:solidFill>
-                          <a:latin typeface="+mn-lt"/>
-                          <a:ea typeface="NanumGothic"/>
-                        </a:rPr>
-                        <a:t>FedSV</a:t>
-                      </a:r>
-                    </a:p>
-                  </a:txBody>
-                  <a:tcPr marL="38100" marR="38100" marT="0" marB="0" anchor="ctr">
-                    <a:solidFill>
-                      <a:srgbClr val="F2F4F7"/>
-                    </a:solidFill>
-                  </a:tcPr>
-                </a:tc>
-                <a:tc>
-                  <a:txBody>
-                    <a:bodyPr/>
-                    <a:lstStyle/>
-                    <a:p>
-                      <a:pPr algn="ctr"/>
-                      <a:r>
-                        <a:rPr sz="1800" b="0" i="0">
-                          <a:solidFill>
-                            <a:srgbClr val="222222"/>
-                          </a:solidFill>
-                          <a:latin typeface="+mn-lt"/>
-                          <a:ea typeface="NanumGothic"/>
-                        </a:rPr>
-                        <a:t>0.401</a:t>
-                      </a:r>
-                    </a:p>
-                  </a:txBody>
-                  <a:tcPr marL="38100" marR="38100" marT="0" marB="0" anchor="ctr">
-                    <a:solidFill>
-                      <a:srgbClr val="F2F4F7"/>
-                    </a:solidFill>
-                  </a:tcPr>
-                </a:tc>
-                <a:tc>
-                  <a:txBody>
-                    <a:bodyPr/>
-                    <a:lstStyle/>
-                    <a:p>
-                      <a:pPr algn="ctr"/>
-                      <a:r>
-                        <a:rPr sz="1800" b="0" i="0" dirty="0">
-                          <a:solidFill>
-                            <a:srgbClr val="222222"/>
-                          </a:solidFill>
-                          <a:latin typeface="+mn-lt"/>
-                          <a:ea typeface="NanumGothic"/>
-                        </a:rPr>
-                        <a:t>0.410</a:t>
-                      </a:r>
-                    </a:p>
-                  </a:txBody>
-                  <a:tcPr marL="38100" marR="38100" marT="0" marB="0" anchor="ctr">
-                    <a:solidFill>
-                      <a:srgbClr val="F2F4F7"/>
-                    </a:solidFill>
-                  </a:tcPr>
-                </a:tc>
-                <a:extLst>
-                  <a:ext uri="{0D108BD9-81ED-4DB2-BD59-A6C34878D82A}">
-                    <a16:rowId xmlns:a16="http://schemas.microsoft.com/office/drawing/2014/main" val="10006"/>
-                  </a:ext>
-                </a:extLst>
-              </a:tr>
-              <a:tr h="391178">
-                <a:tc>
-                  <a:txBody>
-                    <a:bodyPr/>
-                    <a:lstStyle/>
-                    <a:p>
-                      <a:pPr algn="l"/>
-                      <a:r>
-                        <a:rPr sz="1800" b="0" i="0">
-                          <a:solidFill>
-                            <a:srgbClr val="222222"/>
-                          </a:solidFill>
-                          <a:latin typeface="+mn-lt"/>
-                          <a:ea typeface="NanumGothic"/>
-                        </a:rPr>
-                        <a:t>ComFedSV</a:t>
-                      </a:r>
-                    </a:p>
-                  </a:txBody>
-                  <a:tcPr marL="38100" marR="38100" marT="0" marB="0" anchor="ctr">
-                    <a:solidFill>
-                      <a:srgbClr val="FFFFFF"/>
-                    </a:solidFill>
-                  </a:tcPr>
-                </a:tc>
-                <a:tc>
-                  <a:txBody>
-                    <a:bodyPr/>
-                    <a:lstStyle/>
-                    <a:p>
-                      <a:pPr algn="ctr"/>
-                      <a:r>
-                        <a:rPr sz="1800" b="0" i="0">
-                          <a:solidFill>
-                            <a:srgbClr val="222222"/>
-                          </a:solidFill>
-                          <a:latin typeface="+mn-lt"/>
-                          <a:ea typeface="NanumGothic"/>
-                        </a:rPr>
-                        <a:t>0.348</a:t>
-                      </a:r>
-                    </a:p>
-                  </a:txBody>
-                  <a:tcPr marL="38100" marR="38100" marT="0" marB="0" anchor="ctr">
-                    <a:solidFill>
-                      <a:srgbClr val="FFFFFF"/>
-                    </a:solidFill>
-                  </a:tcPr>
-                </a:tc>
-                <a:tc>
-                  <a:txBody>
-                    <a:bodyPr/>
-                    <a:lstStyle/>
-                    <a:p>
-                      <a:pPr algn="ctr"/>
-                      <a:r>
-                        <a:rPr sz="1800" b="0" i="0" dirty="0">
-                          <a:solidFill>
-                            <a:srgbClr val="222222"/>
-                          </a:solidFill>
-                          <a:latin typeface="+mn-lt"/>
-                          <a:ea typeface="NanumGothic"/>
-                        </a:rPr>
-                        <a:t>0.328</a:t>
-                      </a:r>
-                    </a:p>
-                  </a:txBody>
-                  <a:tcPr marL="38100" marR="38100" marT="0" marB="0" anchor="ctr">
-                    <a:solidFill>
-                      <a:srgbClr val="FFFFFF"/>
-                    </a:solidFill>
-                  </a:tcPr>
-                </a:tc>
-                <a:extLst>
-                  <a:ext uri="{0D108BD9-81ED-4DB2-BD59-A6C34878D82A}">
-                    <a16:rowId xmlns:a16="http://schemas.microsoft.com/office/drawing/2014/main" val="10007"/>
-                  </a:ext>
-                </a:extLst>
-              </a:tr>
-              <a:tr h="391178">
-                <a:tc>
-                  <a:txBody>
-                    <a:bodyPr/>
-                    <a:lstStyle/>
-                    <a:p>
-                      <a:pPr algn="l"/>
-                      <a:r>
-                        <a:rPr sz="1800" b="0" i="0">
-                          <a:solidFill>
-                            <a:srgbClr val="222222"/>
-                          </a:solidFill>
-                          <a:latin typeface="+mn-lt"/>
-                          <a:ea typeface="NanumGothic"/>
-                        </a:rPr>
-                        <a:t>ShapleyFL</a:t>
-                      </a:r>
-                    </a:p>
-                  </a:txBody>
-                  <a:tcPr marL="38100" marR="38100" marT="0" marB="0" anchor="ctr">
-                    <a:solidFill>
-                      <a:srgbClr val="F2F4F7"/>
-                    </a:solidFill>
-                  </a:tcPr>
-                </a:tc>
-                <a:tc>
-                  <a:txBody>
-                    <a:bodyPr/>
-                    <a:lstStyle/>
-                    <a:p>
-                      <a:pPr algn="ctr"/>
-                      <a:r>
-                        <a:rPr sz="1800" b="0" i="0">
-                          <a:solidFill>
-                            <a:srgbClr val="222222"/>
-                          </a:solidFill>
-                          <a:latin typeface="+mn-lt"/>
-                          <a:ea typeface="NanumGothic"/>
-                        </a:rPr>
-                        <a:t>0.391</a:t>
-                      </a:r>
-                    </a:p>
-                  </a:txBody>
-                  <a:tcPr marL="38100" marR="38100" marT="0" marB="0" anchor="ctr">
-                    <a:solidFill>
-                      <a:srgbClr val="F2F4F7"/>
-                    </a:solidFill>
-                  </a:tcPr>
-                </a:tc>
-                <a:tc>
-                  <a:txBody>
-                    <a:bodyPr/>
-                    <a:lstStyle/>
-                    <a:p>
-                      <a:pPr algn="ctr"/>
-                      <a:r>
-                        <a:rPr sz="1800" b="0" i="0" dirty="0">
-                          <a:solidFill>
-                            <a:srgbClr val="222222"/>
-                          </a:solidFill>
-                          <a:latin typeface="+mn-lt"/>
-                          <a:ea typeface="NanumGothic"/>
-                        </a:rPr>
-                        <a:t>0.392</a:t>
-                      </a:r>
-                    </a:p>
-                  </a:txBody>
-                  <a:tcPr marL="38100" marR="38100" marT="0" marB="0" anchor="ctr">
-                    <a:solidFill>
-                      <a:srgbClr val="F2F4F7"/>
-                    </a:solidFill>
-                  </a:tcPr>
-                </a:tc>
-                <a:extLst>
-                  <a:ext uri="{0D108BD9-81ED-4DB2-BD59-A6C34878D82A}">
-                    <a16:rowId xmlns:a16="http://schemas.microsoft.com/office/drawing/2014/main" val="10008"/>
-                  </a:ext>
-                </a:extLst>
-              </a:tr>
-              <a:tr h="391178">
-                <a:tc>
-                  <a:txBody>
-                    <a:bodyPr/>
-                    <a:lstStyle/>
-                    <a:p>
-                      <a:pPr algn="l"/>
-                      <a:r>
-                        <a:rPr sz="1800" b="0" i="0">
-                          <a:solidFill>
-                            <a:srgbClr val="222222"/>
-                          </a:solidFill>
-                          <a:latin typeface="+mn-lt"/>
-                          <a:ea typeface="NanumGothic"/>
-                        </a:rPr>
-                        <a:t>FedIF</a:t>
-                      </a:r>
-                    </a:p>
-                  </a:txBody>
-                  <a:tcPr marL="38100" marR="38100" marT="0" marB="0" anchor="ctr">
-                    <a:solidFill>
-                      <a:srgbClr val="FFFFFF"/>
-                    </a:solidFill>
-                  </a:tcPr>
-                </a:tc>
-                <a:tc>
-                  <a:txBody>
-                    <a:bodyPr/>
-                    <a:lstStyle/>
-                    <a:p>
-                      <a:pPr algn="ctr"/>
-                      <a:r>
-                        <a:rPr sz="1800" b="0" i="0">
-                          <a:solidFill>
-                            <a:srgbClr val="222222"/>
-                          </a:solidFill>
-                          <a:latin typeface="+mn-lt"/>
-                          <a:ea typeface="NanumGothic"/>
-                        </a:rPr>
-                        <a:t>0.491</a:t>
-                      </a:r>
-                    </a:p>
-                  </a:txBody>
-                  <a:tcPr marL="38100" marR="38100" marT="0" marB="0" anchor="ctr">
-                    <a:solidFill>
-                      <a:srgbClr val="FFFFFF"/>
-                    </a:solidFill>
-                  </a:tcPr>
-                </a:tc>
-                <a:tc>
-                  <a:txBody>
-                    <a:bodyPr/>
-                    <a:lstStyle/>
-                    <a:p>
-                      <a:pPr algn="ctr"/>
-                      <a:r>
-                        <a:rPr sz="1800" b="0" i="0" dirty="0">
-                          <a:solidFill>
-                            <a:srgbClr val="222222"/>
-                          </a:solidFill>
-                          <a:latin typeface="+mn-lt"/>
-                          <a:ea typeface="NanumGothic"/>
-                        </a:rPr>
-                        <a:t>0.506</a:t>
-                      </a:r>
-                    </a:p>
-                  </a:txBody>
-                  <a:tcPr marL="38100" marR="38100" marT="0" marB="0" anchor="ctr">
-                    <a:solidFill>
-                      <a:srgbClr val="FFFFFF"/>
-                    </a:solidFill>
-                  </a:tcPr>
-                </a:tc>
-                <a:extLst>
-                  <a:ext uri="{0D108BD9-81ED-4DB2-BD59-A6C34878D82A}">
-                    <a16:rowId xmlns:a16="http://schemas.microsoft.com/office/drawing/2014/main" val="10009"/>
-                  </a:ext>
-                </a:extLst>
-              </a:tr>
-              <a:tr h="391178">
-                <a:tc>
-                  <a:txBody>
-                    <a:bodyPr/>
-                    <a:lstStyle/>
-                    <a:p>
-                      <a:pPr algn="l"/>
-                      <a:r>
-                        <a:rPr sz="1800" b="0" i="0">
-                          <a:solidFill>
-                            <a:srgbClr val="222222"/>
-                          </a:solidFill>
-                          <a:latin typeface="+mn-lt"/>
-                          <a:ea typeface="NanumGothic"/>
-                        </a:rPr>
-                        <a:t>Ripple</a:t>
-                      </a:r>
-                    </a:p>
-                  </a:txBody>
-                  <a:tcPr marL="38100" marR="38100" marT="0" marB="0" anchor="ctr">
-                    <a:solidFill>
-                      <a:srgbClr val="F2F4F7"/>
-                    </a:solidFill>
-                  </a:tcPr>
-                </a:tc>
-                <a:tc>
-                  <a:txBody>
-                    <a:bodyPr/>
-                    <a:lstStyle/>
-                    <a:p>
-                      <a:pPr algn="ctr"/>
-                      <a:r>
-                        <a:rPr sz="1800" b="0" i="0" dirty="0">
-                          <a:solidFill>
-                            <a:srgbClr val="222222"/>
-                          </a:solidFill>
-                          <a:latin typeface="+mn-lt"/>
-                          <a:ea typeface="NanumGothic"/>
-                        </a:rPr>
-                        <a:t>0.373</a:t>
-                      </a:r>
-                    </a:p>
-                  </a:txBody>
-                  <a:tcPr marL="38100" marR="38100" marT="0" marB="0" anchor="ctr">
-                    <a:solidFill>
-                      <a:srgbClr val="F2F4F7"/>
-                    </a:solidFill>
-                  </a:tcPr>
-                </a:tc>
-                <a:tc>
-                  <a:txBody>
-                    <a:bodyPr/>
-                    <a:lstStyle/>
-                    <a:p>
-                      <a:pPr algn="ctr"/>
-                      <a:r>
-                        <a:rPr sz="1800" b="0" i="0" dirty="0">
-                          <a:solidFill>
-                            <a:srgbClr val="222222"/>
-                          </a:solidFill>
-                          <a:latin typeface="+mn-lt"/>
-                          <a:ea typeface="NanumGothic"/>
-                        </a:rPr>
-                        <a:t>0.404</a:t>
-                      </a:r>
-                    </a:p>
-                  </a:txBody>
-                  <a:tcPr marL="38100" marR="38100" marT="0" marB="0" anchor="ctr">
-                    <a:solidFill>
-                      <a:srgbClr val="F2F4F7"/>
-                    </a:solidFill>
-                  </a:tcPr>
-                </a:tc>
-                <a:extLst>
-                  <a:ext uri="{0D108BD9-81ED-4DB2-BD59-A6C34878D82A}">
-                    <a16:rowId xmlns:a16="http://schemas.microsoft.com/office/drawing/2014/main" val="10010"/>
-                  </a:ext>
-                </a:extLst>
-              </a:tr>
-            </a:tbl>
-          </a:graphicData>
-        </a:graphic>
-      </p:graphicFrame>
-      <p:sp>
-        <p:nvSpPr>
-          <p:cNvPr id="6" name="TextBox 5"/>
-          <p:cNvSpPr txBox="1"/>
-          <p:nvPr/>
-        </p:nvSpPr>
-        <p:spPr>
-          <a:xfrm>
-            <a:off x="11551920" y="6510528"/>
-            <a:ext cx="457200" cy="274320"/>
-          </a:xfrm>
-          <a:prstGeom prst="rect">
-            <a:avLst/>
-          </a:prstGeom>
-          <a:noFill/>
-        </p:spPr>
-        <p:txBody>
-          <a:bodyPr wrap="none">
-            <a:spAutoFit/>
-          </a:bodyPr>
-          <a:lstStyle/>
-          <a:p>
-            <a:pPr algn="r"/>
-            <a:r>
-              <a:rPr sz="900" b="0" i="0">
-                <a:solidFill>
-                  <a:srgbClr val="7A7A7A"/>
-                </a:solidFill>
-                <a:latin typeface="NanumGothic"/>
-                <a:ea typeface="NanumGothic"/>
-              </a:rPr>
-              <a:t>9</a:t>
-            </a:r>
           </a:p>
         </p:txBody>
       </p:sp>
